--- a/Lecture08_HealthEquity/L8Slides_HealthEquity.pptx
+++ b/Lecture08_HealthEquity/L8Slides_HealthEquity.pptx
@@ -245,7 +245,7 @@
           <a:p>
             <a:fld id="{EF911157-0FC2-4F06-8D61-FD647FE4E19D}" type="datetimeFigureOut">
               <a:rPr lang="en-US" smtClean="0"/>
-              <a:t>3/13/2024</a:t>
+              <a:t>2/2/2026</a:t>
             </a:fld>
             <a:endParaRPr lang="en-US"/>
           </a:p>
@@ -593,6 +593,52 @@
               <a:t>Contracts for primary and secondary care physicians and equity-efficiency trade-offs”</a:t>
             </a:r>
           </a:p>
+          <a:p>
+            <a:pPr marL="0" marR="0" lvl="0" indent="0" algn="l" defTabSz="914400" rtl="0" eaLnBrk="1" fontAlgn="auto" latinLnBrk="0" hangingPunct="1">
+              <a:lnSpc>
+                <a:spcPct val="100000"/>
+              </a:lnSpc>
+              <a:spcBef>
+                <a:spcPts val="0"/>
+              </a:spcBef>
+              <a:spcAft>
+                <a:spcPts val="0"/>
+              </a:spcAft>
+              <a:buClrTx/>
+              <a:buSzTx/>
+              <a:buFont typeface="Arial" panose="020B0604020202020204" pitchFamily="34" charset="0"/>
+              <a:buNone/>
+              <a:tabLst/>
+              <a:defRPr/>
+            </a:pPr>
+            <a:r>
+              <a:rPr lang="en-US" b="0" i="0" dirty="0">
+                <a:solidFill>
+                  <a:srgbClr val="1F1F1F"/>
+                </a:solidFill>
+                <a:effectLst/>
+                <a:latin typeface="ElsevierGulliver"/>
+              </a:rPr>
+              <a:t>- Add Heather Sarsons JMP to the setup here – what </a:t>
+            </a:r>
+            <a:r>
+              <a:rPr lang="en-US" b="0" i="0">
+                <a:solidFill>
+                  <a:srgbClr val="1F1F1F"/>
+                </a:solidFill>
+                <a:effectLst/>
+                <a:latin typeface="ElsevierGulliver"/>
+              </a:rPr>
+              <a:t>other questions are there? </a:t>
+            </a:r>
+            <a:endParaRPr lang="en-US" b="0" i="0" dirty="0">
+              <a:solidFill>
+                <a:srgbClr val="1F1F1F"/>
+              </a:solidFill>
+              <a:effectLst/>
+              <a:latin typeface="ElsevierGulliver"/>
+            </a:endParaRPr>
+          </a:p>
         </p:txBody>
       </p:sp>
       <p:sp>
@@ -3741,7 +3787,7 @@
             <a:fld id="{0972D05C-DCFB-4BB6-B49C-AC126BF3ED2C}" type="datetimeFigureOut">
               <a:rPr lang="en-US" smtClean="0"/>
               <a:pPr/>
-              <a:t>3/13/2024</a:t>
+              <a:t>2/2/2026</a:t>
             </a:fld>
             <a:endParaRPr lang="en-US"/>
           </a:p>
@@ -3847,6 +3893,13 @@
             <a:schemeClr val="lt1"/>
           </a:fontRef>
         </p:style>
+        <p:txBody>
+          <a:bodyPr/>
+          <a:lstStyle/>
+          <a:p>
+            <a:endParaRPr lang="en-CA"/>
+          </a:p>
+        </p:txBody>
       </p:sp>
     </p:spTree>
     <p:extLst>
@@ -3971,7 +4024,7 @@
             <a:fld id="{0972D05C-DCFB-4BB6-B49C-AC126BF3ED2C}" type="datetimeFigureOut">
               <a:rPr lang="en-US" smtClean="0"/>
               <a:pPr/>
-              <a:t>3/13/2024</a:t>
+              <a:t>2/2/2026</a:t>
             </a:fld>
             <a:endParaRPr lang="en-US"/>
           </a:p>
@@ -4153,7 +4206,7 @@
             <a:fld id="{0972D05C-DCFB-4BB6-B49C-AC126BF3ED2C}" type="datetimeFigureOut">
               <a:rPr lang="en-US" smtClean="0"/>
               <a:pPr/>
-              <a:t>3/13/2024</a:t>
+              <a:t>2/2/2026</a:t>
             </a:fld>
             <a:endParaRPr lang="en-US"/>
           </a:p>
@@ -4395,7 +4448,7 @@
             <a:fld id="{1D8BD707-D9CF-40AE-B4C6-C98DA3205C09}" type="datetimeFigureOut">
               <a:rPr lang="en-US" smtClean="0"/>
               <a:pPr/>
-              <a:t>3/13/2024</a:t>
+              <a:t>2/2/2026</a:t>
             </a:fld>
             <a:endParaRPr lang="en-US"/>
           </a:p>
@@ -4565,7 +4618,7 @@
             <a:fld id="{1D8BD707-D9CF-40AE-B4C6-C98DA3205C09}" type="datetimeFigureOut">
               <a:rPr lang="en-US" smtClean="0"/>
               <a:pPr/>
-              <a:t>3/13/2024</a:t>
+              <a:t>2/2/2026</a:t>
             </a:fld>
             <a:endParaRPr lang="en-US"/>
           </a:p>
@@ -4812,7 +4865,7 @@
             <a:fld id="{1D8BD707-D9CF-40AE-B4C6-C98DA3205C09}" type="datetimeFigureOut">
               <a:rPr lang="en-US" smtClean="0"/>
               <a:pPr/>
-              <a:t>3/13/2024</a:t>
+              <a:t>2/2/2026</a:t>
             </a:fld>
             <a:endParaRPr lang="en-US"/>
           </a:p>
@@ -5099,7 +5152,7 @@
             <a:fld id="{1D8BD707-D9CF-40AE-B4C6-C98DA3205C09}" type="datetimeFigureOut">
               <a:rPr lang="en-US" smtClean="0"/>
               <a:pPr/>
-              <a:t>3/13/2024</a:t>
+              <a:t>2/2/2026</a:t>
             </a:fld>
             <a:endParaRPr lang="en-US"/>
           </a:p>
@@ -5520,7 +5573,7 @@
             <a:fld id="{1D8BD707-D9CF-40AE-B4C6-C98DA3205C09}" type="datetimeFigureOut">
               <a:rPr lang="en-US" smtClean="0"/>
               <a:pPr/>
-              <a:t>3/13/2024</a:t>
+              <a:t>2/2/2026</a:t>
             </a:fld>
             <a:endParaRPr lang="en-US"/>
           </a:p>
@@ -5639,7 +5692,7 @@
             <a:fld id="{1D8BD707-D9CF-40AE-B4C6-C98DA3205C09}" type="datetimeFigureOut">
               <a:rPr lang="en-US" smtClean="0"/>
               <a:pPr/>
-              <a:t>3/13/2024</a:t>
+              <a:t>2/2/2026</a:t>
             </a:fld>
             <a:endParaRPr lang="en-US"/>
           </a:p>
@@ -5736,7 +5789,7 @@
             <a:fld id="{1D8BD707-D9CF-40AE-B4C6-C98DA3205C09}" type="datetimeFigureOut">
               <a:rPr lang="en-US" smtClean="0"/>
               <a:pPr/>
-              <a:t>3/13/2024</a:t>
+              <a:t>2/2/2026</a:t>
             </a:fld>
             <a:endParaRPr lang="en-US"/>
           </a:p>
@@ -6013,7 +6066,7 @@
             <a:fld id="{1D8BD707-D9CF-40AE-B4C6-C98DA3205C09}" type="datetimeFigureOut">
               <a:rPr lang="en-US" smtClean="0"/>
               <a:pPr/>
-              <a:t>3/13/2024</a:t>
+              <a:t>2/2/2026</a:t>
             </a:fld>
             <a:endParaRPr lang="en-US"/>
           </a:p>
@@ -6185,7 +6238,7 @@
             <a:fld id="{0972D05C-DCFB-4BB6-B49C-AC126BF3ED2C}" type="datetimeFigureOut">
               <a:rPr lang="en-US" smtClean="0"/>
               <a:pPr/>
-              <a:t>3/13/2024</a:t>
+              <a:t>2/2/2026</a:t>
             </a:fld>
             <a:endParaRPr lang="en-US"/>
           </a:p>
@@ -6439,7 +6492,7 @@
             <a:fld id="{1D8BD707-D9CF-40AE-B4C6-C98DA3205C09}" type="datetimeFigureOut">
               <a:rPr lang="en-US" smtClean="0"/>
               <a:pPr/>
-              <a:t>3/13/2024</a:t>
+              <a:t>2/2/2026</a:t>
             </a:fld>
             <a:endParaRPr lang="en-US"/>
           </a:p>
@@ -6609,7 +6662,7 @@
             <a:fld id="{1D8BD707-D9CF-40AE-B4C6-C98DA3205C09}" type="datetimeFigureOut">
               <a:rPr lang="en-US" smtClean="0"/>
               <a:pPr/>
-              <a:t>3/13/2024</a:t>
+              <a:t>2/2/2026</a:t>
             </a:fld>
             <a:endParaRPr lang="en-US"/>
           </a:p>
@@ -6789,7 +6842,7 @@
             <a:fld id="{1D8BD707-D9CF-40AE-B4C6-C98DA3205C09}" type="datetimeFigureOut">
               <a:rPr lang="en-US" smtClean="0"/>
               <a:pPr/>
-              <a:t>3/13/2024</a:t>
+              <a:t>2/2/2026</a:t>
             </a:fld>
             <a:endParaRPr lang="en-US"/>
           </a:p>
@@ -7045,7 +7098,7 @@
             <a:fld id="{0972D05C-DCFB-4BB6-B49C-AC126BF3ED2C}" type="datetimeFigureOut">
               <a:rPr lang="en-US" smtClean="0"/>
               <a:pPr/>
-              <a:t>3/13/2024</a:t>
+              <a:t>2/2/2026</a:t>
             </a:fld>
             <a:endParaRPr lang="en-US"/>
           </a:p>
@@ -7373,7 +7426,7 @@
             <a:fld id="{0972D05C-DCFB-4BB6-B49C-AC126BF3ED2C}" type="datetimeFigureOut">
               <a:rPr lang="en-US" smtClean="0"/>
               <a:pPr/>
-              <a:t>3/13/2024</a:t>
+              <a:t>2/2/2026</a:t>
             </a:fld>
             <a:endParaRPr lang="en-US"/>
           </a:p>
@@ -7826,7 +7879,7 @@
             <a:fld id="{0972D05C-DCFB-4BB6-B49C-AC126BF3ED2C}" type="datetimeFigureOut">
               <a:rPr lang="en-US" smtClean="0"/>
               <a:pPr/>
-              <a:t>3/13/2024</a:t>
+              <a:t>2/2/2026</a:t>
             </a:fld>
             <a:endParaRPr lang="en-US"/>
           </a:p>
@@ -7946,7 +7999,7 @@
             <a:fld id="{0972D05C-DCFB-4BB6-B49C-AC126BF3ED2C}" type="datetimeFigureOut">
               <a:rPr lang="en-US" smtClean="0"/>
               <a:pPr/>
-              <a:t>3/13/2024</a:t>
+              <a:t>2/2/2026</a:t>
             </a:fld>
             <a:endParaRPr lang="en-US"/>
           </a:p>
@@ -8043,7 +8096,7 @@
             <a:fld id="{0972D05C-DCFB-4BB6-B49C-AC126BF3ED2C}" type="datetimeFigureOut">
               <a:rPr lang="en-US" smtClean="0"/>
               <a:pPr/>
-              <a:t>3/13/2024</a:t>
+              <a:t>2/2/2026</a:t>
             </a:fld>
             <a:endParaRPr lang="en-US"/>
           </a:p>
@@ -8332,7 +8385,7 @@
             <a:fld id="{0972D05C-DCFB-4BB6-B49C-AC126BF3ED2C}" type="datetimeFigureOut">
               <a:rPr lang="en-US" smtClean="0"/>
               <a:pPr/>
-              <a:t>3/13/2024</a:t>
+              <a:t>2/2/2026</a:t>
             </a:fld>
             <a:endParaRPr lang="en-US"/>
           </a:p>
@@ -8656,7 +8709,7 @@
             <a:fld id="{0972D05C-DCFB-4BB6-B49C-AC126BF3ED2C}" type="datetimeFigureOut">
               <a:rPr lang="en-US" smtClean="0"/>
               <a:pPr/>
-              <a:t>3/13/2024</a:t>
+              <a:t>2/2/2026</a:t>
             </a:fld>
             <a:endParaRPr lang="en-US"/>
           </a:p>
@@ -8779,6 +8832,13 @@
             <a:schemeClr val="lt1"/>
           </a:fontRef>
         </p:style>
+        <p:txBody>
+          <a:bodyPr/>
+          <a:lstStyle/>
+          <a:p>
+            <a:endParaRPr lang="en-CA"/>
+          </a:p>
+        </p:txBody>
       </p:sp>
       <p:sp>
         <p:nvSpPr>
@@ -8911,7 +8971,7 @@
             <a:fld id="{0972D05C-DCFB-4BB6-B49C-AC126BF3ED2C}" type="datetimeFigureOut">
               <a:rPr lang="en-US" smtClean="0"/>
               <a:pPr/>
-              <a:t>3/13/2024</a:t>
+              <a:t>2/2/2026</a:t>
             </a:fld>
             <a:endParaRPr lang="en-US" dirty="0"/>
           </a:p>
@@ -9536,7 +9596,7 @@
             <a:fld id="{1D8BD707-D9CF-40AE-B4C6-C98DA3205C09}" type="datetimeFigureOut">
               <a:rPr lang="en-US" smtClean="0"/>
               <a:pPr/>
-              <a:t>3/13/2024</a:t>
+              <a:t>2/2/2026</a:t>
             </a:fld>
             <a:endParaRPr lang="en-US"/>
           </a:p>
@@ -13936,8 +13996,8 @@
           </a:p>
         </p:txBody>
       </p:sp>
-      <mc:AlternateContent xmlns:mc="http://schemas.openxmlformats.org/markup-compatibility/2006">
-        <mc:Choice xmlns:a14="http://schemas.microsoft.com/office/drawing/2010/main" Requires="a14">
+      <mc:AlternateContent xmlns:mc="http://schemas.openxmlformats.org/markup-compatibility/2006" xmlns:a14="http://schemas.microsoft.com/office/drawing/2010/main">
+        <mc:Choice Requires="a14">
           <p:sp>
             <p:nvSpPr>
               <p:cNvPr id="3" name="Content Placeholder 2"/>
@@ -14272,7 +14332,7 @@
             </p:txBody>
           </p:sp>
         </mc:Choice>
-        <mc:Fallback>
+        <mc:Fallback xmlns="">
           <p:sp>
             <p:nvSpPr>
               <p:cNvPr id="3" name="Content Placeholder 2"/>
@@ -15529,8 +15589,8 @@
           </a:p>
         </p:txBody>
       </p:sp>
-      <mc:AlternateContent xmlns:mc="http://schemas.openxmlformats.org/markup-compatibility/2006">
-        <mc:Choice xmlns:a14="http://schemas.microsoft.com/office/drawing/2010/main" Requires="a14">
+      <mc:AlternateContent xmlns:mc="http://schemas.openxmlformats.org/markup-compatibility/2006" xmlns:a14="http://schemas.microsoft.com/office/drawing/2010/main">
+        <mc:Choice Requires="a14">
           <p:sp>
             <p:nvSpPr>
               <p:cNvPr id="3" name="Content Placeholder 2"/>
@@ -15982,7 +16042,7 @@
             </p:txBody>
           </p:sp>
         </mc:Choice>
-        <mc:Fallback>
+        <mc:Fallback xmlns="">
           <p:sp>
             <p:nvSpPr>
               <p:cNvPr id="3" name="Content Placeholder 2"/>

--- a/Lecture08_HealthEquity/L8Slides_HealthEquity.pptx
+++ b/Lecture08_HealthEquity/L8Slides_HealthEquity.pptx
@@ -6,7 +6,7 @@
     <p:sldMasterId id="2147483750" r:id="rId2"/>
   </p:sldMasterIdLst>
   <p:notesMasterIdLst>
-    <p:notesMasterId r:id="rId40"/>
+    <p:notesMasterId r:id="rId43"/>
   </p:notesMasterIdLst>
   <p:sldIdLst>
     <p:sldId id="256" r:id="rId3"/>
@@ -18,34 +18,37 @@
     <p:sldId id="506" r:id="rId9"/>
     <p:sldId id="504" r:id="rId10"/>
     <p:sldId id="505" r:id="rId11"/>
-    <p:sldId id="502" r:id="rId12"/>
-    <p:sldId id="341" r:id="rId13"/>
-    <p:sldId id="485" r:id="rId14"/>
-    <p:sldId id="486" r:id="rId15"/>
-    <p:sldId id="487" r:id="rId16"/>
-    <p:sldId id="488" r:id="rId17"/>
-    <p:sldId id="489" r:id="rId18"/>
-    <p:sldId id="490" r:id="rId19"/>
-    <p:sldId id="479" r:id="rId20"/>
-    <p:sldId id="491" r:id="rId21"/>
-    <p:sldId id="492" r:id="rId22"/>
-    <p:sldId id="493" r:id="rId23"/>
-    <p:sldId id="494" r:id="rId24"/>
-    <p:sldId id="495" r:id="rId25"/>
-    <p:sldId id="496" r:id="rId26"/>
-    <p:sldId id="497" r:id="rId27"/>
-    <p:sldId id="498" r:id="rId28"/>
-    <p:sldId id="499" r:id="rId29"/>
-    <p:sldId id="507" r:id="rId30"/>
-    <p:sldId id="508" r:id="rId31"/>
-    <p:sldId id="501" r:id="rId32"/>
-    <p:sldId id="500" r:id="rId33"/>
-    <p:sldId id="513" r:id="rId34"/>
-    <p:sldId id="514" r:id="rId35"/>
-    <p:sldId id="484" r:id="rId36"/>
-    <p:sldId id="510" r:id="rId37"/>
-    <p:sldId id="511" r:id="rId38"/>
-    <p:sldId id="414" r:id="rId39"/>
+    <p:sldId id="515" r:id="rId12"/>
+    <p:sldId id="516" r:id="rId13"/>
+    <p:sldId id="517" r:id="rId14"/>
+    <p:sldId id="502" r:id="rId15"/>
+    <p:sldId id="341" r:id="rId16"/>
+    <p:sldId id="485" r:id="rId17"/>
+    <p:sldId id="486" r:id="rId18"/>
+    <p:sldId id="487" r:id="rId19"/>
+    <p:sldId id="488" r:id="rId20"/>
+    <p:sldId id="489" r:id="rId21"/>
+    <p:sldId id="490" r:id="rId22"/>
+    <p:sldId id="479" r:id="rId23"/>
+    <p:sldId id="491" r:id="rId24"/>
+    <p:sldId id="492" r:id="rId25"/>
+    <p:sldId id="493" r:id="rId26"/>
+    <p:sldId id="494" r:id="rId27"/>
+    <p:sldId id="495" r:id="rId28"/>
+    <p:sldId id="496" r:id="rId29"/>
+    <p:sldId id="497" r:id="rId30"/>
+    <p:sldId id="498" r:id="rId31"/>
+    <p:sldId id="499" r:id="rId32"/>
+    <p:sldId id="507" r:id="rId33"/>
+    <p:sldId id="508" r:id="rId34"/>
+    <p:sldId id="501" r:id="rId35"/>
+    <p:sldId id="500" r:id="rId36"/>
+    <p:sldId id="513" r:id="rId37"/>
+    <p:sldId id="514" r:id="rId38"/>
+    <p:sldId id="484" r:id="rId39"/>
+    <p:sldId id="510" r:id="rId40"/>
+    <p:sldId id="511" r:id="rId41"/>
+    <p:sldId id="414" r:id="rId42"/>
   </p:sldIdLst>
   <p:sldSz cx="12192000" cy="6858000"/>
   <p:notesSz cx="7010400" cy="9296400"/>
@@ -245,7 +248,7 @@
           <a:p>
             <a:fld id="{EF911157-0FC2-4F06-8D61-FD647FE4E19D}" type="datetimeFigureOut">
               <a:rPr lang="en-US" smtClean="0"/>
-              <a:t>2/2/2026</a:t>
+              <a:t>3/2/2026</a:t>
             </a:fld>
             <a:endParaRPr lang="en-US"/>
           </a:p>
@@ -580,56 +583,7 @@
             </a:pPr>
             <a:r>
               <a:rPr lang="en-US" dirty="0"/>
-              <a:t>Empirical paper to add: https://www.nber.org/papers/w30767. Theoretical paper to add: https://www.sciencedirect.com/science/article/pii/S0167629622001291. “</a:t>
-            </a:r>
-            <a:r>
-              <a:rPr lang="en-US" b="0" i="0" dirty="0">
-                <a:solidFill>
-                  <a:srgbClr val="1F1F1F"/>
-                </a:solidFill>
-                <a:effectLst/>
-                <a:latin typeface="ElsevierGulliver"/>
-              </a:rPr>
-              <a:t>Contracts for primary and secondary care physicians and equity-efficiency trade-offs”</a:t>
-            </a:r>
-          </a:p>
-          <a:p>
-            <a:pPr marL="0" marR="0" lvl="0" indent="0" algn="l" defTabSz="914400" rtl="0" eaLnBrk="1" fontAlgn="auto" latinLnBrk="0" hangingPunct="1">
-              <a:lnSpc>
-                <a:spcPct val="100000"/>
-              </a:lnSpc>
-              <a:spcBef>
-                <a:spcPts val="0"/>
-              </a:spcBef>
-              <a:spcAft>
-                <a:spcPts val="0"/>
-              </a:spcAft>
-              <a:buClrTx/>
-              <a:buSzTx/>
-              <a:buFont typeface="Arial" panose="020B0604020202020204" pitchFamily="34" charset="0"/>
-              <a:buNone/>
-              <a:tabLst/>
-              <a:defRPr/>
-            </a:pPr>
-            <a:r>
-              <a:rPr lang="en-US" b="0" i="0" dirty="0">
-                <a:solidFill>
-                  <a:srgbClr val="1F1F1F"/>
-                </a:solidFill>
-                <a:effectLst/>
-                <a:latin typeface="ElsevierGulliver"/>
-              </a:rPr>
-              <a:t>- Add Heather Sarsons JMP to the setup here – what </a:t>
-            </a:r>
-            <a:r>
-              <a:rPr lang="en-US" b="0" i="0">
-                <a:solidFill>
-                  <a:srgbClr val="1F1F1F"/>
-                </a:solidFill>
-                <a:effectLst/>
-                <a:latin typeface="ElsevierGulliver"/>
-              </a:rPr>
-              <a:t>other questions are there? </a:t>
+              <a:t>- Empirical paper to add: https://www.nber.org/papers/w30767. </a:t>
             </a:r>
             <a:endParaRPr lang="en-US" b="0" i="0" dirty="0">
               <a:solidFill>
@@ -722,24 +676,16 @@
           <a:lstStyle/>
           <a:p>
             <a:r>
-              <a:rPr lang="en-US" dirty="0"/>
-              <a:t>Where </a:t>
-            </a:r>
-            <a:r>
-              <a:rPr lang="en-US" dirty="0" err="1"/>
-              <a:t>d_e</a:t>
-            </a:r>
-            <a:r>
-              <a:rPr lang="en-US" dirty="0"/>
-              <a:t> is an employer specific “distaste” term . So if the distribution of </a:t>
-            </a:r>
-            <a:r>
-              <a:rPr lang="en-US" dirty="0" err="1"/>
-              <a:t>d_e</a:t>
-            </a:r>
-            <a:r>
-              <a:rPr lang="en-US" dirty="0"/>
-              <a:t> is smooth in society (no mass points), then there will be no wage differential so firms are totally segregated </a:t>
+              <a:rPr lang="en-CA" dirty="0"/>
+              <a:t>Classic taste-based discrimination model : </a:t>
+            </a:r>
+            <a:r>
+              <a:rPr lang="en-CA" dirty="0" err="1"/>
+              <a:t>becker</a:t>
+            </a:r>
+            <a:r>
+              <a:rPr lang="en-CA" dirty="0"/>
+              <a:t>. Can use Williams slides or Lang/Lehman to present this model. Then present how Lang-Leman search model discussion could apply to health? (Ask people to read this before hand and think about a model here?)</a:t>
             </a:r>
           </a:p>
         </p:txBody>
@@ -761,7 +707,7 @@
           <a:p>
             <a:fld id="{4AF79E1B-2C51-4B9B-8EA4-26DE9E345AFF}" type="slidenum">
               <a:rPr lang="en-US" smtClean="0"/>
-              <a:t>15</a:t>
+              <a:t>14</a:t>
             </a:fld>
             <a:endParaRPr lang="en-US"/>
           </a:p>
@@ -770,7 +716,7 @@
     </p:spTree>
     <p:extLst>
       <p:ext uri="{BB962C8B-B14F-4D97-AF65-F5344CB8AC3E}">
-        <p14:creationId xmlns:p14="http://schemas.microsoft.com/office/powerpoint/2010/main" val="1632356188"/>
+        <p14:creationId xmlns:p14="http://schemas.microsoft.com/office/powerpoint/2010/main" val="1527946518"/>
       </p:ext>
     </p:extLst>
   </p:cSld>
@@ -826,23 +772,7 @@
           <a:p>
             <a:r>
               <a:rPr lang="en-US" dirty="0"/>
-              <a:t>Where </a:t>
-            </a:r>
-            <a:r>
-              <a:rPr lang="en-US" dirty="0" err="1"/>
-              <a:t>d_e</a:t>
-            </a:r>
-            <a:r>
-              <a:rPr lang="en-US" dirty="0"/>
-              <a:t> is an employer specific “distaste” term . So if the distribution of </a:t>
-            </a:r>
-            <a:r>
-              <a:rPr lang="en-US" dirty="0" err="1"/>
-              <a:t>d_e</a:t>
-            </a:r>
-            <a:r>
-              <a:rPr lang="en-US" dirty="0"/>
-              <a:t> is smooth in society (no mass points), then there will be no wage differential so firms are totally segregated </a:t>
+              <a:t>In the Becker model, this was black/white – here I’ll use URM to be a little more general. </a:t>
             </a:r>
           </a:p>
         </p:txBody>
@@ -864,7 +794,7 @@
           <a:p>
             <a:fld id="{4AF79E1B-2C51-4B9B-8EA4-26DE9E345AFF}" type="slidenum">
               <a:rPr lang="en-US" smtClean="0"/>
-              <a:t>16</a:t>
+              <a:t>15</a:t>
             </a:fld>
             <a:endParaRPr lang="en-US"/>
           </a:p>
@@ -873,7 +803,7 @@
     </p:spTree>
     <p:extLst>
       <p:ext uri="{BB962C8B-B14F-4D97-AF65-F5344CB8AC3E}">
-        <p14:creationId xmlns:p14="http://schemas.microsoft.com/office/powerpoint/2010/main" val="65455977"/>
+        <p14:creationId xmlns:p14="http://schemas.microsoft.com/office/powerpoint/2010/main" val="2397338648"/>
       </p:ext>
     </p:extLst>
   </p:cSld>
@@ -929,23 +859,7 @@
           <a:p>
             <a:r>
               <a:rPr lang="en-US" dirty="0"/>
-              <a:t>Where </a:t>
-            </a:r>
-            <a:r>
-              <a:rPr lang="en-US" dirty="0" err="1"/>
-              <a:t>d_e</a:t>
-            </a:r>
-            <a:r>
-              <a:rPr lang="en-US" dirty="0"/>
-              <a:t> is an employer specific “distaste” term . So if the distribution of </a:t>
-            </a:r>
-            <a:r>
-              <a:rPr lang="en-US" dirty="0" err="1"/>
-              <a:t>d_e</a:t>
-            </a:r>
-            <a:r>
-              <a:rPr lang="en-US" dirty="0"/>
-              <a:t> is smooth in society (no mass points), then there will be no wage differential so firms are totally segregated </a:t>
+              <a:t>In the Becker model, this was black/white – here I’ll use URM to be a little more general. </a:t>
             </a:r>
           </a:p>
         </p:txBody>
@@ -967,7 +881,7 @@
           <a:p>
             <a:fld id="{4AF79E1B-2C51-4B9B-8EA4-26DE9E345AFF}" type="slidenum">
               <a:rPr lang="en-US" smtClean="0"/>
-              <a:t>17</a:t>
+              <a:t>16</a:t>
             </a:fld>
             <a:endParaRPr lang="en-US"/>
           </a:p>
@@ -976,7 +890,7 @@
     </p:spTree>
     <p:extLst>
       <p:ext uri="{BB962C8B-B14F-4D97-AF65-F5344CB8AC3E}">
-        <p14:creationId xmlns:p14="http://schemas.microsoft.com/office/powerpoint/2010/main" val="1809170513"/>
+        <p14:creationId xmlns:p14="http://schemas.microsoft.com/office/powerpoint/2010/main" val="3213247169"/>
       </p:ext>
     </p:extLst>
   </p:cSld>
@@ -1030,7 +944,18 @@
           <a:bodyPr/>
           <a:lstStyle/>
           <a:p>
-            <a:endParaRPr lang="en-CA" dirty="0"/>
+            <a:r>
+              <a:rPr lang="en-US" dirty="0"/>
+              <a:t>Where </a:t>
+            </a:r>
+            <a:r>
+              <a:rPr lang="en-US" dirty="0" err="1"/>
+              <a:t>d_e</a:t>
+            </a:r>
+            <a:r>
+              <a:rPr lang="en-US" dirty="0"/>
+              <a:t> is an employer specific “distaste” term </a:t>
+            </a:r>
           </a:p>
         </p:txBody>
       </p:sp>
@@ -1051,7 +976,7 @@
           <a:p>
             <a:fld id="{4AF79E1B-2C51-4B9B-8EA4-26DE9E345AFF}" type="slidenum">
               <a:rPr lang="en-US" smtClean="0"/>
-              <a:t>18</a:t>
+              <a:t>17</a:t>
             </a:fld>
             <a:endParaRPr lang="en-US"/>
           </a:p>
@@ -1060,7 +985,7 @@
     </p:spTree>
     <p:extLst>
       <p:ext uri="{BB962C8B-B14F-4D97-AF65-F5344CB8AC3E}">
-        <p14:creationId xmlns:p14="http://schemas.microsoft.com/office/powerpoint/2010/main" val="3178040630"/>
+        <p14:creationId xmlns:p14="http://schemas.microsoft.com/office/powerpoint/2010/main" val="185549830"/>
       </p:ext>
     </p:extLst>
   </p:cSld>
@@ -1116,7 +1041,23 @@
           <a:p>
             <a:r>
               <a:rPr lang="en-US" dirty="0"/>
-              <a:t>S is also normal with mean mu and variance sigma^2_Z+sigma^2_eps.</a:t>
+              <a:t>Where </a:t>
+            </a:r>
+            <a:r>
+              <a:rPr lang="en-US" dirty="0" err="1"/>
+              <a:t>d_e</a:t>
+            </a:r>
+            <a:r>
+              <a:rPr lang="en-US" dirty="0"/>
+              <a:t> is an employer specific “distaste” term . So if the distribution of </a:t>
+            </a:r>
+            <a:r>
+              <a:rPr lang="en-US" dirty="0" err="1"/>
+              <a:t>d_e</a:t>
+            </a:r>
+            <a:r>
+              <a:rPr lang="en-US" dirty="0"/>
+              <a:t> is smooth in society (no mass points), then there will be no wage differential so firms are totally segregated </a:t>
             </a:r>
           </a:p>
         </p:txBody>
@@ -1138,7 +1079,7 @@
           <a:p>
             <a:fld id="{4AF79E1B-2C51-4B9B-8EA4-26DE9E345AFF}" type="slidenum">
               <a:rPr lang="en-US" smtClean="0"/>
-              <a:t>19</a:t>
+              <a:t>18</a:t>
             </a:fld>
             <a:endParaRPr lang="en-US"/>
           </a:p>
@@ -1147,7 +1088,7 @@
     </p:spTree>
     <p:extLst>
       <p:ext uri="{BB962C8B-B14F-4D97-AF65-F5344CB8AC3E}">
-        <p14:creationId xmlns:p14="http://schemas.microsoft.com/office/powerpoint/2010/main" val="4181859595"/>
+        <p14:creationId xmlns:p14="http://schemas.microsoft.com/office/powerpoint/2010/main" val="1632356188"/>
       </p:ext>
     </p:extLst>
   </p:cSld>
@@ -1203,7 +1144,23 @@
           <a:p>
             <a:r>
               <a:rPr lang="en-US" dirty="0"/>
-              <a:t>S is also normal with mean mu and variance sigma^2_Z+sigma^2_eps.</a:t>
+              <a:t>Where </a:t>
+            </a:r>
+            <a:r>
+              <a:rPr lang="en-US" dirty="0" err="1"/>
+              <a:t>d_e</a:t>
+            </a:r>
+            <a:r>
+              <a:rPr lang="en-US" dirty="0"/>
+              <a:t> is an employer specific “distaste” term . So if the distribution of </a:t>
+            </a:r>
+            <a:r>
+              <a:rPr lang="en-US" dirty="0" err="1"/>
+              <a:t>d_e</a:t>
+            </a:r>
+            <a:r>
+              <a:rPr lang="en-US" dirty="0"/>
+              <a:t> is smooth in society (no mass points), then there will be no wage differential so firms are totally segregated </a:t>
             </a:r>
           </a:p>
         </p:txBody>
@@ -1225,7 +1182,7 @@
           <a:p>
             <a:fld id="{4AF79E1B-2C51-4B9B-8EA4-26DE9E345AFF}" type="slidenum">
               <a:rPr lang="en-US" smtClean="0"/>
-              <a:t>20</a:t>
+              <a:t>19</a:t>
             </a:fld>
             <a:endParaRPr lang="en-US"/>
           </a:p>
@@ -1234,7 +1191,7 @@
     </p:spTree>
     <p:extLst>
       <p:ext uri="{BB962C8B-B14F-4D97-AF65-F5344CB8AC3E}">
-        <p14:creationId xmlns:p14="http://schemas.microsoft.com/office/powerpoint/2010/main" val="970437916"/>
+        <p14:creationId xmlns:p14="http://schemas.microsoft.com/office/powerpoint/2010/main" val="65455977"/>
       </p:ext>
     </p:extLst>
   </p:cSld>
@@ -1288,7 +1245,26 @@
           <a:bodyPr/>
           <a:lstStyle/>
           <a:p>
-            <a:endParaRPr lang="en-US" dirty="0"/>
+            <a:r>
+              <a:rPr lang="en-US" dirty="0"/>
+              <a:t>Where </a:t>
+            </a:r>
+            <a:r>
+              <a:rPr lang="en-US" dirty="0" err="1"/>
+              <a:t>d_e</a:t>
+            </a:r>
+            <a:r>
+              <a:rPr lang="en-US" dirty="0"/>
+              <a:t> is an employer specific “distaste” term . So if the distribution of </a:t>
+            </a:r>
+            <a:r>
+              <a:rPr lang="en-US" dirty="0" err="1"/>
+              <a:t>d_e</a:t>
+            </a:r>
+            <a:r>
+              <a:rPr lang="en-US" dirty="0"/>
+              <a:t> is smooth in society (no mass points), then there will be no wage differential so firms are totally segregated </a:t>
+            </a:r>
           </a:p>
         </p:txBody>
       </p:sp>
@@ -1309,7 +1285,7 @@
           <a:p>
             <a:fld id="{4AF79E1B-2C51-4B9B-8EA4-26DE9E345AFF}" type="slidenum">
               <a:rPr lang="en-US" smtClean="0"/>
-              <a:t>21</a:t>
+              <a:t>20</a:t>
             </a:fld>
             <a:endParaRPr lang="en-US"/>
           </a:p>
@@ -1318,7 +1294,7 @@
     </p:spTree>
     <p:extLst>
       <p:ext uri="{BB962C8B-B14F-4D97-AF65-F5344CB8AC3E}">
-        <p14:creationId xmlns:p14="http://schemas.microsoft.com/office/powerpoint/2010/main" val="1105100688"/>
+        <p14:creationId xmlns:p14="http://schemas.microsoft.com/office/powerpoint/2010/main" val="1809170513"/>
       </p:ext>
     </p:extLst>
   </p:cSld>
@@ -1372,10 +1348,7 @@
           <a:bodyPr/>
           <a:lstStyle/>
           <a:p>
-            <a:r>
-              <a:rPr lang="en-US" dirty="0"/>
-              <a:t>Recommend treatment when S&gt;S^* for URM. For majority, beta = 1, so recommend treatment when Z&gt; Z^* </a:t>
-            </a:r>
+            <a:endParaRPr lang="en-CA" dirty="0"/>
           </a:p>
         </p:txBody>
       </p:sp>
@@ -1396,7 +1369,7 @@
           <a:p>
             <a:fld id="{4AF79E1B-2C51-4B9B-8EA4-26DE9E345AFF}" type="slidenum">
               <a:rPr lang="en-US" smtClean="0"/>
-              <a:t>22</a:t>
+              <a:t>21</a:t>
             </a:fld>
             <a:endParaRPr lang="en-US"/>
           </a:p>
@@ -1405,7 +1378,7 @@
     </p:spTree>
     <p:extLst>
       <p:ext uri="{BB962C8B-B14F-4D97-AF65-F5344CB8AC3E}">
-        <p14:creationId xmlns:p14="http://schemas.microsoft.com/office/powerpoint/2010/main" val="494929886"/>
+        <p14:creationId xmlns:p14="http://schemas.microsoft.com/office/powerpoint/2010/main" val="3178040630"/>
       </p:ext>
     </p:extLst>
   </p:cSld>
@@ -1461,7 +1434,7 @@
           <a:p>
             <a:r>
               <a:rPr lang="en-US" dirty="0"/>
-              <a:t>Top curve is whites, flatter curve is blacks (where signal matters). Also take the time to do some comparative statics – what about a more capable physician (where noise variance is lower)? How would that change the curve here? </a:t>
+              <a:t>S is also normal with mean mu and variance sigma^2_Z+sigma^2_eps.</a:t>
             </a:r>
           </a:p>
         </p:txBody>
@@ -1483,7 +1456,7 @@
           <a:p>
             <a:fld id="{4AF79E1B-2C51-4B9B-8EA4-26DE9E345AFF}" type="slidenum">
               <a:rPr lang="en-US" smtClean="0"/>
-              <a:t>23</a:t>
+              <a:t>22</a:t>
             </a:fld>
             <a:endParaRPr lang="en-US"/>
           </a:p>
@@ -1492,7 +1465,7 @@
     </p:spTree>
     <p:extLst>
       <p:ext uri="{BB962C8B-B14F-4D97-AF65-F5344CB8AC3E}">
-        <p14:creationId xmlns:p14="http://schemas.microsoft.com/office/powerpoint/2010/main" val="1322628032"/>
+        <p14:creationId xmlns:p14="http://schemas.microsoft.com/office/powerpoint/2010/main" val="4181859595"/>
       </p:ext>
     </p:extLst>
   </p:cSld>
@@ -1548,7 +1521,7 @@
           <a:p>
             <a:r>
               <a:rPr lang="en-US" dirty="0"/>
-              <a:t>Take the second equation as given.  Do the derivative by hand, show that benefit is increasing in beta (so worse for URM)</a:t>
+              <a:t>S is also normal with mean mu and variance sigma^2_Z+sigma^2_eps.</a:t>
             </a:r>
           </a:p>
         </p:txBody>
@@ -1570,7 +1543,7 @@
           <a:p>
             <a:fld id="{4AF79E1B-2C51-4B9B-8EA4-26DE9E345AFF}" type="slidenum">
               <a:rPr lang="en-US" smtClean="0"/>
-              <a:t>24</a:t>
+              <a:t>23</a:t>
             </a:fld>
             <a:endParaRPr lang="en-US"/>
           </a:p>
@@ -1579,7 +1552,7 @@
     </p:spTree>
     <p:extLst>
       <p:ext uri="{BB962C8B-B14F-4D97-AF65-F5344CB8AC3E}">
-        <p14:creationId xmlns:p14="http://schemas.microsoft.com/office/powerpoint/2010/main" val="3365971787"/>
+        <p14:creationId xmlns:p14="http://schemas.microsoft.com/office/powerpoint/2010/main" val="970437916"/>
       </p:ext>
     </p:extLst>
   </p:cSld>
@@ -1635,7 +1608,7 @@
           <a:p>
             <a:r>
               <a:rPr lang="en-US" dirty="0"/>
-              <a:t>Quick note! </a:t>
+              <a:t>Quick note! This is a big deal, you should be submitting your stuff to it! Deadline is March 16 (work can be ongoing and doesn’t have to be related to the theme). Submit here: https://ihpme.utoronto.ca/event/research-impact-day-2026/</a:t>
             </a:r>
           </a:p>
         </p:txBody>
@@ -1720,10 +1693,7 @@
           <a:bodyPr/>
           <a:lstStyle/>
           <a:p>
-            <a:r>
-              <a:rPr lang="en-US" dirty="0"/>
-              <a:t>So empirical trends across groups can be explained by just this assumption! Miscommunication leads to lower-quality matches between doctors and patients (e.g., mental health). We will save other extensions of this model for later, and instead fit the unified framework of the 2003 paper. </a:t>
-            </a:r>
+            <a:endParaRPr lang="en-US" dirty="0"/>
           </a:p>
         </p:txBody>
       </p:sp>
@@ -1744,7 +1714,7 @@
           <a:p>
             <a:fld id="{4AF79E1B-2C51-4B9B-8EA4-26DE9E345AFF}" type="slidenum">
               <a:rPr lang="en-US" smtClean="0"/>
-              <a:t>25</a:t>
+              <a:t>24</a:t>
             </a:fld>
             <a:endParaRPr lang="en-US"/>
           </a:p>
@@ -1753,7 +1723,7 @@
     </p:spTree>
     <p:extLst>
       <p:ext uri="{BB962C8B-B14F-4D97-AF65-F5344CB8AC3E}">
-        <p14:creationId xmlns:p14="http://schemas.microsoft.com/office/powerpoint/2010/main" val="2613797850"/>
+        <p14:creationId xmlns:p14="http://schemas.microsoft.com/office/powerpoint/2010/main" val="1105100688"/>
       </p:ext>
     </p:extLst>
   </p:cSld>
@@ -1809,7 +1779,7 @@
           <a:p>
             <a:r>
               <a:rPr lang="en-US" dirty="0"/>
-              <a:t>Here, we simplify so that a = 1. Hence, if we want to explain observed disparities using perfectly benevolent MDs, we only have one lever at our disposal: differences in  severity across groups (in particular, the distance between whites and blacks). Can we rationalize observed data using only this gap? It might have to be very large! </a:t>
+              <a:t>Recommend treatment when S&gt;S^* for URM. For majority, beta = 1, so recommend treatment when Z&gt; Z^* </a:t>
             </a:r>
           </a:p>
         </p:txBody>
@@ -1831,7 +1801,7 @@
           <a:p>
             <a:fld id="{4AF79E1B-2C51-4B9B-8EA4-26DE9E345AFF}" type="slidenum">
               <a:rPr lang="en-US" smtClean="0"/>
-              <a:t>26</a:t>
+              <a:t>25</a:t>
             </a:fld>
             <a:endParaRPr lang="en-US"/>
           </a:p>
@@ -1840,7 +1810,7 @@
     </p:spTree>
     <p:extLst>
       <p:ext uri="{BB962C8B-B14F-4D97-AF65-F5344CB8AC3E}">
-        <p14:creationId xmlns:p14="http://schemas.microsoft.com/office/powerpoint/2010/main" val="11187014"/>
+        <p14:creationId xmlns:p14="http://schemas.microsoft.com/office/powerpoint/2010/main" val="494929886"/>
       </p:ext>
     </p:extLst>
   </p:cSld>
@@ -1894,7 +1864,10 @@
           <a:bodyPr/>
           <a:lstStyle/>
           <a:p>
-            <a:endParaRPr lang="en-US" dirty="0"/>
+            <a:r>
+              <a:rPr lang="en-US" dirty="0"/>
+              <a:t>Top curve is whites, flatter curve is blacks (where signal matters). Also take the time to do some comparative statics – what about a more capable physician (where noise variance is lower)? How would that change the curve here? </a:t>
+            </a:r>
           </a:p>
         </p:txBody>
       </p:sp>
@@ -1915,7 +1888,7 @@
           <a:p>
             <a:fld id="{4AF79E1B-2C51-4B9B-8EA4-26DE9E345AFF}" type="slidenum">
               <a:rPr lang="en-US" smtClean="0"/>
-              <a:t>27</a:t>
+              <a:t>26</a:t>
             </a:fld>
             <a:endParaRPr lang="en-US"/>
           </a:p>
@@ -1924,7 +1897,7 @@
     </p:spTree>
     <p:extLst>
       <p:ext uri="{BB962C8B-B14F-4D97-AF65-F5344CB8AC3E}">
-        <p14:creationId xmlns:p14="http://schemas.microsoft.com/office/powerpoint/2010/main" val="1026274556"/>
+        <p14:creationId xmlns:p14="http://schemas.microsoft.com/office/powerpoint/2010/main" val="1322628032"/>
       </p:ext>
     </p:extLst>
   </p:cSld>
@@ -1978,7 +1951,10 @@
           <a:bodyPr/>
           <a:lstStyle/>
           <a:p>
-            <a:endParaRPr lang="en-US" dirty="0"/>
+            <a:r>
+              <a:rPr lang="en-US" dirty="0"/>
+              <a:t>Take the second equation as given.  Do the derivative by hand, show that benefit is increasing in beta (so worse for URM)</a:t>
+            </a:r>
           </a:p>
         </p:txBody>
       </p:sp>
@@ -1999,7 +1975,7 @@
           <a:p>
             <a:fld id="{4AF79E1B-2C51-4B9B-8EA4-26DE9E345AFF}" type="slidenum">
               <a:rPr lang="en-US" smtClean="0"/>
-              <a:t>28</a:t>
+              <a:t>27</a:t>
             </a:fld>
             <a:endParaRPr lang="en-US"/>
           </a:p>
@@ -2008,7 +1984,7 @@
     </p:spTree>
     <p:extLst>
       <p:ext uri="{BB962C8B-B14F-4D97-AF65-F5344CB8AC3E}">
-        <p14:creationId xmlns:p14="http://schemas.microsoft.com/office/powerpoint/2010/main" val="3466136524"/>
+        <p14:creationId xmlns:p14="http://schemas.microsoft.com/office/powerpoint/2010/main" val="3365971787"/>
       </p:ext>
     </p:extLst>
   </p:cSld>
@@ -2062,7 +2038,10 @@
           <a:bodyPr/>
           <a:lstStyle/>
           <a:p>
-            <a:endParaRPr lang="en-US" dirty="0"/>
+            <a:r>
+              <a:rPr lang="en-US" dirty="0"/>
+              <a:t>So empirical trends across groups can be explained by just this assumption! Miscommunication leads to lower-quality matches between doctors and patients (e.g., mental health). We will save other extensions of this model for later, and instead fit the unified framework of the 2003 paper. </a:t>
+            </a:r>
           </a:p>
         </p:txBody>
       </p:sp>
@@ -2083,7 +2062,7 @@
           <a:p>
             <a:fld id="{4AF79E1B-2C51-4B9B-8EA4-26DE9E345AFF}" type="slidenum">
               <a:rPr lang="en-US" smtClean="0"/>
-              <a:t>29</a:t>
+              <a:t>28</a:t>
             </a:fld>
             <a:endParaRPr lang="en-US"/>
           </a:p>
@@ -2092,7 +2071,7 @@
     </p:spTree>
     <p:extLst>
       <p:ext uri="{BB962C8B-B14F-4D97-AF65-F5344CB8AC3E}">
-        <p14:creationId xmlns:p14="http://schemas.microsoft.com/office/powerpoint/2010/main" val="796437946"/>
+        <p14:creationId xmlns:p14="http://schemas.microsoft.com/office/powerpoint/2010/main" val="2613797850"/>
       </p:ext>
     </p:extLst>
   </p:cSld>
@@ -2148,7 +2127,7 @@
           <a:p>
             <a:r>
               <a:rPr lang="en-US" dirty="0"/>
-              <a:t>How would stereotypes affect this? Not directly addressed!</a:t>
+              <a:t>Here, we simplify so that a = 1. Hence, if we want to explain observed disparities using perfectly benevolent MDs, we only have one lever at our disposal: differences in  severity across groups (in particular, the distance between whites and blacks). Can we rationalize observed data using only this gap? It might have to be very large! </a:t>
             </a:r>
           </a:p>
         </p:txBody>
@@ -2170,7 +2149,7 @@
           <a:p>
             <a:fld id="{4AF79E1B-2C51-4B9B-8EA4-26DE9E345AFF}" type="slidenum">
               <a:rPr lang="en-US" smtClean="0"/>
-              <a:t>30</a:t>
+              <a:t>29</a:t>
             </a:fld>
             <a:endParaRPr lang="en-US"/>
           </a:p>
@@ -2179,7 +2158,7 @@
     </p:spTree>
     <p:extLst>
       <p:ext uri="{BB962C8B-B14F-4D97-AF65-F5344CB8AC3E}">
-        <p14:creationId xmlns:p14="http://schemas.microsoft.com/office/powerpoint/2010/main" val="2060209078"/>
+        <p14:creationId xmlns:p14="http://schemas.microsoft.com/office/powerpoint/2010/main" val="11187014"/>
       </p:ext>
     </p:extLst>
   </p:cSld>
@@ -2254,7 +2233,7 @@
           <a:p>
             <a:fld id="{4AF79E1B-2C51-4B9B-8EA4-26DE9E345AFF}" type="slidenum">
               <a:rPr lang="en-US" smtClean="0"/>
-              <a:t>31</a:t>
+              <a:t>30</a:t>
             </a:fld>
             <a:endParaRPr lang="en-US"/>
           </a:p>
@@ -2263,7 +2242,7 @@
     </p:spTree>
     <p:extLst>
       <p:ext uri="{BB962C8B-B14F-4D97-AF65-F5344CB8AC3E}">
-        <p14:creationId xmlns:p14="http://schemas.microsoft.com/office/powerpoint/2010/main" val="1826110855"/>
+        <p14:creationId xmlns:p14="http://schemas.microsoft.com/office/powerpoint/2010/main" val="1026274556"/>
       </p:ext>
     </p:extLst>
   </p:cSld>
@@ -2317,7 +2296,7 @@
           <a:bodyPr/>
           <a:lstStyle/>
           <a:p>
-            <a:endParaRPr lang="en-CA" dirty="0"/>
+            <a:endParaRPr lang="en-US" dirty="0"/>
           </a:p>
         </p:txBody>
       </p:sp>
@@ -2338,7 +2317,7 @@
           <a:p>
             <a:fld id="{4AF79E1B-2C51-4B9B-8EA4-26DE9E345AFF}" type="slidenum">
               <a:rPr lang="en-US" smtClean="0"/>
-              <a:t>32</a:t>
+              <a:t>31</a:t>
             </a:fld>
             <a:endParaRPr lang="en-US"/>
           </a:p>
@@ -2347,7 +2326,7 @@
     </p:spTree>
     <p:extLst>
       <p:ext uri="{BB962C8B-B14F-4D97-AF65-F5344CB8AC3E}">
-        <p14:creationId xmlns:p14="http://schemas.microsoft.com/office/powerpoint/2010/main" val="1977783555"/>
+        <p14:creationId xmlns:p14="http://schemas.microsoft.com/office/powerpoint/2010/main" val="3466136524"/>
       </p:ext>
     </p:extLst>
   </p:cSld>
@@ -2401,55 +2380,7 @@
           <a:bodyPr/>
           <a:lstStyle/>
           <a:p>
-            <a:r>
-              <a:rPr lang="en-US" dirty="0"/>
-              <a:t>Four scenarios (take them column </a:t>
-            </a:r>
-            <a:r>
-              <a:rPr lang="en-US"/>
-              <a:t>by column): </a:t>
-            </a:r>
             <a:endParaRPr lang="en-US" dirty="0"/>
-          </a:p>
-          <a:p>
-            <a:pPr marL="171450" indent="-171450">
-              <a:buFont typeface="Arial" panose="020B0604020202020204" pitchFamily="34" charset="0"/>
-              <a:buChar char="•"/>
-            </a:pPr>
-            <a:r>
-              <a:rPr lang="en-US" dirty="0"/>
-              <a:t>The GP refers only high-severity patients and treats low-severity patients, and the specialist treats high-severity patients and refers low-severity patients back to the GP (scenario 1); </a:t>
-            </a:r>
-          </a:p>
-          <a:p>
-            <a:pPr marL="171450" indent="-171450">
-              <a:buFont typeface="Arial" panose="020B0604020202020204" pitchFamily="34" charset="0"/>
-              <a:buChar char="•"/>
-            </a:pPr>
-            <a:r>
-              <a:rPr lang="en-US" dirty="0"/>
-              <a:t>The GP refers both high- and low-severity patients, and the specialist treats high-severity patients and refers low-severity patients back to the GP (scenario 2)</a:t>
-            </a:r>
-          </a:p>
-          <a:p>
-            <a:pPr marL="171450" indent="-171450">
-              <a:buFont typeface="Arial" panose="020B0604020202020204" pitchFamily="34" charset="0"/>
-              <a:buChar char="•"/>
-            </a:pPr>
-            <a:r>
-              <a:rPr lang="en-US" dirty="0"/>
-              <a:t>The GP refers only high-severity patients and treats low-severity patients, and the specialist treats patients with high- and low-severity (scenario 3)</a:t>
-            </a:r>
-          </a:p>
-          <a:p>
-            <a:pPr marL="171450" indent="-171450">
-              <a:buFont typeface="Arial" panose="020B0604020202020204" pitchFamily="34" charset="0"/>
-              <a:buChar char="•"/>
-            </a:pPr>
-            <a:r>
-              <a:rPr lang="en-US" dirty="0"/>
-              <a:t>The GP refers both high- and low-severity patients, and the specialist treats patients with high- and low-severity (scenario 4).</a:t>
-            </a:r>
           </a:p>
         </p:txBody>
       </p:sp>
@@ -2470,7 +2401,7 @@
           <a:p>
             <a:fld id="{4AF79E1B-2C51-4B9B-8EA4-26DE9E345AFF}" type="slidenum">
               <a:rPr lang="en-US" smtClean="0"/>
-              <a:t>33</a:t>
+              <a:t>32</a:t>
             </a:fld>
             <a:endParaRPr lang="en-US"/>
           </a:p>
@@ -2479,7 +2410,7 @@
     </p:spTree>
     <p:extLst>
       <p:ext uri="{BB962C8B-B14F-4D97-AF65-F5344CB8AC3E}">
-        <p14:creationId xmlns:p14="http://schemas.microsoft.com/office/powerpoint/2010/main" val="548107487"/>
+        <p14:creationId xmlns:p14="http://schemas.microsoft.com/office/powerpoint/2010/main" val="796437946"/>
       </p:ext>
     </p:extLst>
   </p:cSld>
@@ -2534,24 +2465,8 @@
           <a:lstStyle/>
           <a:p>
             <a:r>
-              <a:rPr lang="en-CA" dirty="0"/>
-              <a:t>Meant to give an idea of how to take a model off the shelf and </a:t>
-            </a:r>
-            <a:r>
-              <a:rPr lang="en-CA"/>
-              <a:t>apply it. Cover </a:t>
-            </a:r>
-            <a:r>
-              <a:rPr lang="en-CA" dirty="0"/>
-              <a:t>Chandra et al as an empirical </a:t>
-            </a:r>
-            <a:r>
-              <a:rPr lang="en-CA" dirty="0" err="1"/>
-              <a:t>followup</a:t>
-            </a:r>
-            <a:r>
-              <a:rPr lang="en-CA" dirty="0"/>
-              <a:t> if there’s time. </a:t>
+              <a:rPr lang="en-US" dirty="0"/>
+              <a:t>How would stereotypes affect this? Not directly addressed!</a:t>
             </a:r>
           </a:p>
         </p:txBody>
@@ -2573,7 +2488,7 @@
           <a:p>
             <a:fld id="{4AF79E1B-2C51-4B9B-8EA4-26DE9E345AFF}" type="slidenum">
               <a:rPr lang="en-US" smtClean="0"/>
-              <a:t>34</a:t>
+              <a:t>33</a:t>
             </a:fld>
             <a:endParaRPr lang="en-US"/>
           </a:p>
@@ -2582,7 +2497,7 @@
     </p:spTree>
     <p:extLst>
       <p:ext uri="{BB962C8B-B14F-4D97-AF65-F5344CB8AC3E}">
-        <p14:creationId xmlns:p14="http://schemas.microsoft.com/office/powerpoint/2010/main" val="792425891"/>
+        <p14:creationId xmlns:p14="http://schemas.microsoft.com/office/powerpoint/2010/main" val="2060209078"/>
       </p:ext>
     </p:extLst>
   </p:cSld>
@@ -2847,7 +2762,7 @@
           <a:p>
             <a:fld id="{4AF79E1B-2C51-4B9B-8EA4-26DE9E345AFF}" type="slidenum">
               <a:rPr lang="en-US" smtClean="0"/>
-              <a:t>35</a:t>
+              <a:t>34</a:t>
             </a:fld>
             <a:endParaRPr lang="en-US"/>
           </a:p>
@@ -2856,7 +2771,7 @@
     </p:spTree>
     <p:extLst>
       <p:ext uri="{BB962C8B-B14F-4D97-AF65-F5344CB8AC3E}">
-        <p14:creationId xmlns:p14="http://schemas.microsoft.com/office/powerpoint/2010/main" val="3809569117"/>
+        <p14:creationId xmlns:p14="http://schemas.microsoft.com/office/powerpoint/2010/main" val="1826110855"/>
       </p:ext>
     </p:extLst>
   </p:cSld>
@@ -2910,11 +2825,7 @@
           <a:bodyPr/>
           <a:lstStyle/>
           <a:p>
-            <a:r>
-              <a:rPr lang="en-US"/>
-              <a:t>https://alex-hoagland.github.io/files/Hoagland_InnovationsInequities_TAVR.pdf</a:t>
-            </a:r>
-            <a:endParaRPr lang="en-US" dirty="0"/>
+            <a:endParaRPr lang="en-CA" dirty="0"/>
           </a:p>
         </p:txBody>
       </p:sp>
@@ -2935,7 +2846,7 @@
           <a:p>
             <a:fld id="{4AF79E1B-2C51-4B9B-8EA4-26DE9E345AFF}" type="slidenum">
               <a:rPr lang="en-US" smtClean="0"/>
-              <a:t>36</a:t>
+              <a:t>35</a:t>
             </a:fld>
             <a:endParaRPr lang="en-US"/>
           </a:p>
@@ -2944,7 +2855,7 @@
     </p:spTree>
     <p:extLst>
       <p:ext uri="{BB962C8B-B14F-4D97-AF65-F5344CB8AC3E}">
-        <p14:creationId xmlns:p14="http://schemas.microsoft.com/office/powerpoint/2010/main" val="2466763091"/>
+        <p14:creationId xmlns:p14="http://schemas.microsoft.com/office/powerpoint/2010/main" val="1977783555"/>
       </p:ext>
     </p:extLst>
   </p:cSld>
@@ -2998,7 +2909,158 @@
           <a:bodyPr/>
           <a:lstStyle/>
           <a:p>
-            <a:endParaRPr lang="en-CA" dirty="0"/>
+            <a:r>
+              <a:rPr lang="en-US" dirty="0"/>
+              <a:t>Four scenarios (take them column </a:t>
+            </a:r>
+            <a:r>
+              <a:rPr lang="en-US"/>
+              <a:t>by column): </a:t>
+            </a:r>
+            <a:endParaRPr lang="en-US" dirty="0"/>
+          </a:p>
+          <a:p>
+            <a:pPr marL="171450" indent="-171450">
+              <a:buFont typeface="Arial" panose="020B0604020202020204" pitchFamily="34" charset="0"/>
+              <a:buChar char="•"/>
+            </a:pPr>
+            <a:r>
+              <a:rPr lang="en-US" dirty="0"/>
+              <a:t>The GP refers only high-severity patients and treats low-severity patients, and the specialist treats high-severity patients and refers low-severity patients back to the GP (scenario 1); </a:t>
+            </a:r>
+          </a:p>
+          <a:p>
+            <a:pPr marL="171450" indent="-171450">
+              <a:buFont typeface="Arial" panose="020B0604020202020204" pitchFamily="34" charset="0"/>
+              <a:buChar char="•"/>
+            </a:pPr>
+            <a:r>
+              <a:rPr lang="en-US" dirty="0"/>
+              <a:t>The GP refers both high- and low-severity patients, and the specialist treats high-severity patients and refers low-severity patients back to the GP (scenario 2)</a:t>
+            </a:r>
+          </a:p>
+          <a:p>
+            <a:pPr marL="171450" indent="-171450">
+              <a:buFont typeface="Arial" panose="020B0604020202020204" pitchFamily="34" charset="0"/>
+              <a:buChar char="•"/>
+            </a:pPr>
+            <a:r>
+              <a:rPr lang="en-US" dirty="0"/>
+              <a:t>The GP refers only high-severity patients and treats low-severity patients, and the specialist treats patients with high- and low-severity (scenario 3)</a:t>
+            </a:r>
+          </a:p>
+          <a:p>
+            <a:pPr marL="171450" indent="-171450">
+              <a:buFont typeface="Arial" panose="020B0604020202020204" pitchFamily="34" charset="0"/>
+              <a:buChar char="•"/>
+            </a:pPr>
+            <a:r>
+              <a:rPr lang="en-US" dirty="0"/>
+              <a:t>The GP refers both high- and low-severity patients, and the specialist treats patients with high- and low-severity (scenario 4).</a:t>
+            </a:r>
+          </a:p>
+        </p:txBody>
+      </p:sp>
+      <p:sp>
+        <p:nvSpPr>
+          <p:cNvPr id="4" name="Slide Number Placeholder 3"/>
+          <p:cNvSpPr>
+            <a:spLocks noGrp="1"/>
+          </p:cNvSpPr>
+          <p:nvPr>
+            <p:ph type="sldNum" sz="quarter" idx="5"/>
+          </p:nvPr>
+        </p:nvSpPr>
+        <p:spPr/>
+        <p:txBody>
+          <a:bodyPr/>
+          <a:lstStyle/>
+          <a:p>
+            <a:fld id="{4AF79E1B-2C51-4B9B-8EA4-26DE9E345AFF}" type="slidenum">
+              <a:rPr lang="en-US" smtClean="0"/>
+              <a:t>36</a:t>
+            </a:fld>
+            <a:endParaRPr lang="en-US"/>
+          </a:p>
+        </p:txBody>
+      </p:sp>
+    </p:spTree>
+    <p:extLst>
+      <p:ext uri="{BB962C8B-B14F-4D97-AF65-F5344CB8AC3E}">
+        <p14:creationId xmlns:p14="http://schemas.microsoft.com/office/powerpoint/2010/main" val="548107487"/>
+      </p:ext>
+    </p:extLst>
+  </p:cSld>
+  <p:clrMapOvr>
+    <a:masterClrMapping/>
+  </p:clrMapOvr>
+</p:notes>
+</file>
+
+<file path=ppt/notesSlides/notesSlide33.xml><?xml version="1.0" encoding="utf-8"?>
+<p:notes xmlns:a="http://schemas.openxmlformats.org/drawingml/2006/main" xmlns:r="http://schemas.openxmlformats.org/officeDocument/2006/relationships" xmlns:p="http://schemas.openxmlformats.org/presentationml/2006/main">
+  <p:cSld>
+    <p:spTree>
+      <p:nvGrpSpPr>
+        <p:cNvPr id="1" name=""/>
+        <p:cNvGrpSpPr/>
+        <p:nvPr/>
+      </p:nvGrpSpPr>
+      <p:grpSpPr>
+        <a:xfrm>
+          <a:off x="0" y="0"/>
+          <a:ext cx="0" cy="0"/>
+          <a:chOff x="0" y="0"/>
+          <a:chExt cx="0" cy="0"/>
+        </a:xfrm>
+      </p:grpSpPr>
+      <p:sp>
+        <p:nvSpPr>
+          <p:cNvPr id="2" name="Slide Image Placeholder 1"/>
+          <p:cNvSpPr>
+            <a:spLocks noGrp="1" noRot="1" noChangeAspect="1"/>
+          </p:cNvSpPr>
+          <p:nvPr>
+            <p:ph type="sldImg"/>
+          </p:nvPr>
+        </p:nvSpPr>
+        <p:spPr/>
+      </p:sp>
+      <p:sp>
+        <p:nvSpPr>
+          <p:cNvPr id="3" name="Notes Placeholder 2"/>
+          <p:cNvSpPr>
+            <a:spLocks noGrp="1"/>
+          </p:cNvSpPr>
+          <p:nvPr>
+            <p:ph type="body" idx="1"/>
+          </p:nvPr>
+        </p:nvSpPr>
+        <p:spPr/>
+        <p:txBody>
+          <a:bodyPr/>
+          <a:lstStyle/>
+          <a:p>
+            <a:r>
+              <a:rPr lang="en-CA" dirty="0"/>
+              <a:t>Meant to give an idea of how to take a model off the shelf and </a:t>
+            </a:r>
+            <a:r>
+              <a:rPr lang="en-CA"/>
+              <a:t>apply it. Cover </a:t>
+            </a:r>
+            <a:r>
+              <a:rPr lang="en-CA" dirty="0"/>
+              <a:t>Chandra et al as an empirical </a:t>
+            </a:r>
+            <a:r>
+              <a:rPr lang="en-CA" dirty="0" err="1"/>
+              <a:t>followup</a:t>
+            </a:r>
+            <a:r>
+              <a:rPr lang="en-CA" dirty="0"/>
+              <a:t> if there’s time. </a:t>
+            </a:r>
           </a:p>
         </p:txBody>
       </p:sp>
@@ -3020,6 +3082,262 @@
             <a:fld id="{4AF79E1B-2C51-4B9B-8EA4-26DE9E345AFF}" type="slidenum">
               <a:rPr lang="en-US" smtClean="0"/>
               <a:t>37</a:t>
+            </a:fld>
+            <a:endParaRPr lang="en-US"/>
+          </a:p>
+        </p:txBody>
+      </p:sp>
+    </p:spTree>
+    <p:extLst>
+      <p:ext uri="{BB962C8B-B14F-4D97-AF65-F5344CB8AC3E}">
+        <p14:creationId xmlns:p14="http://schemas.microsoft.com/office/powerpoint/2010/main" val="792425891"/>
+      </p:ext>
+    </p:extLst>
+  </p:cSld>
+  <p:clrMapOvr>
+    <a:masterClrMapping/>
+  </p:clrMapOvr>
+</p:notes>
+</file>
+
+<file path=ppt/notesSlides/notesSlide34.xml><?xml version="1.0" encoding="utf-8"?>
+<p:notes xmlns:a="http://schemas.openxmlformats.org/drawingml/2006/main" xmlns:r="http://schemas.openxmlformats.org/officeDocument/2006/relationships" xmlns:p="http://schemas.openxmlformats.org/presentationml/2006/main">
+  <p:cSld>
+    <p:spTree>
+      <p:nvGrpSpPr>
+        <p:cNvPr id="1" name=""/>
+        <p:cNvGrpSpPr/>
+        <p:nvPr/>
+      </p:nvGrpSpPr>
+      <p:grpSpPr>
+        <a:xfrm>
+          <a:off x="0" y="0"/>
+          <a:ext cx="0" cy="0"/>
+          <a:chOff x="0" y="0"/>
+          <a:chExt cx="0" cy="0"/>
+        </a:xfrm>
+      </p:grpSpPr>
+      <p:sp>
+        <p:nvSpPr>
+          <p:cNvPr id="2" name="Slide Image Placeholder 1"/>
+          <p:cNvSpPr>
+            <a:spLocks noGrp="1" noRot="1" noChangeAspect="1"/>
+          </p:cNvSpPr>
+          <p:nvPr>
+            <p:ph type="sldImg"/>
+          </p:nvPr>
+        </p:nvSpPr>
+        <p:spPr/>
+      </p:sp>
+      <p:sp>
+        <p:nvSpPr>
+          <p:cNvPr id="3" name="Notes Placeholder 2"/>
+          <p:cNvSpPr>
+            <a:spLocks noGrp="1"/>
+          </p:cNvSpPr>
+          <p:nvPr>
+            <p:ph type="body" idx="1"/>
+          </p:nvPr>
+        </p:nvSpPr>
+        <p:spPr/>
+        <p:txBody>
+          <a:bodyPr/>
+          <a:lstStyle/>
+          <a:p>
+            <a:endParaRPr lang="en-US" dirty="0"/>
+          </a:p>
+        </p:txBody>
+      </p:sp>
+      <p:sp>
+        <p:nvSpPr>
+          <p:cNvPr id="4" name="Slide Number Placeholder 3"/>
+          <p:cNvSpPr>
+            <a:spLocks noGrp="1"/>
+          </p:cNvSpPr>
+          <p:nvPr>
+            <p:ph type="sldNum" sz="quarter" idx="5"/>
+          </p:nvPr>
+        </p:nvSpPr>
+        <p:spPr/>
+        <p:txBody>
+          <a:bodyPr/>
+          <a:lstStyle/>
+          <a:p>
+            <a:fld id="{4AF79E1B-2C51-4B9B-8EA4-26DE9E345AFF}" type="slidenum">
+              <a:rPr lang="en-US" smtClean="0"/>
+              <a:t>38</a:t>
+            </a:fld>
+            <a:endParaRPr lang="en-US"/>
+          </a:p>
+        </p:txBody>
+      </p:sp>
+    </p:spTree>
+    <p:extLst>
+      <p:ext uri="{BB962C8B-B14F-4D97-AF65-F5344CB8AC3E}">
+        <p14:creationId xmlns:p14="http://schemas.microsoft.com/office/powerpoint/2010/main" val="3809569117"/>
+      </p:ext>
+    </p:extLst>
+  </p:cSld>
+  <p:clrMapOvr>
+    <a:masterClrMapping/>
+  </p:clrMapOvr>
+</p:notes>
+</file>
+
+<file path=ppt/notesSlides/notesSlide35.xml><?xml version="1.0" encoding="utf-8"?>
+<p:notes xmlns:a="http://schemas.openxmlformats.org/drawingml/2006/main" xmlns:r="http://schemas.openxmlformats.org/officeDocument/2006/relationships" xmlns:p="http://schemas.openxmlformats.org/presentationml/2006/main">
+  <p:cSld>
+    <p:spTree>
+      <p:nvGrpSpPr>
+        <p:cNvPr id="1" name=""/>
+        <p:cNvGrpSpPr/>
+        <p:nvPr/>
+      </p:nvGrpSpPr>
+      <p:grpSpPr>
+        <a:xfrm>
+          <a:off x="0" y="0"/>
+          <a:ext cx="0" cy="0"/>
+          <a:chOff x="0" y="0"/>
+          <a:chExt cx="0" cy="0"/>
+        </a:xfrm>
+      </p:grpSpPr>
+      <p:sp>
+        <p:nvSpPr>
+          <p:cNvPr id="2" name="Slide Image Placeholder 1"/>
+          <p:cNvSpPr>
+            <a:spLocks noGrp="1" noRot="1" noChangeAspect="1"/>
+          </p:cNvSpPr>
+          <p:nvPr>
+            <p:ph type="sldImg"/>
+          </p:nvPr>
+        </p:nvSpPr>
+        <p:spPr/>
+      </p:sp>
+      <p:sp>
+        <p:nvSpPr>
+          <p:cNvPr id="3" name="Notes Placeholder 2"/>
+          <p:cNvSpPr>
+            <a:spLocks noGrp="1"/>
+          </p:cNvSpPr>
+          <p:nvPr>
+            <p:ph type="body" idx="1"/>
+          </p:nvPr>
+        </p:nvSpPr>
+        <p:spPr/>
+        <p:txBody>
+          <a:bodyPr/>
+          <a:lstStyle/>
+          <a:p>
+            <a:r>
+              <a:rPr lang="en-US"/>
+              <a:t>https://alex-hoagland.github.io/files/Hoagland_InnovationsInequities_TAVR.pdf</a:t>
+            </a:r>
+            <a:endParaRPr lang="en-US" dirty="0"/>
+          </a:p>
+        </p:txBody>
+      </p:sp>
+      <p:sp>
+        <p:nvSpPr>
+          <p:cNvPr id="4" name="Slide Number Placeholder 3"/>
+          <p:cNvSpPr>
+            <a:spLocks noGrp="1"/>
+          </p:cNvSpPr>
+          <p:nvPr>
+            <p:ph type="sldNum" sz="quarter" idx="5"/>
+          </p:nvPr>
+        </p:nvSpPr>
+        <p:spPr/>
+        <p:txBody>
+          <a:bodyPr/>
+          <a:lstStyle/>
+          <a:p>
+            <a:fld id="{4AF79E1B-2C51-4B9B-8EA4-26DE9E345AFF}" type="slidenum">
+              <a:rPr lang="en-US" smtClean="0"/>
+              <a:t>39</a:t>
+            </a:fld>
+            <a:endParaRPr lang="en-US"/>
+          </a:p>
+        </p:txBody>
+      </p:sp>
+    </p:spTree>
+    <p:extLst>
+      <p:ext uri="{BB962C8B-B14F-4D97-AF65-F5344CB8AC3E}">
+        <p14:creationId xmlns:p14="http://schemas.microsoft.com/office/powerpoint/2010/main" val="2466763091"/>
+      </p:ext>
+    </p:extLst>
+  </p:cSld>
+  <p:clrMapOvr>
+    <a:masterClrMapping/>
+  </p:clrMapOvr>
+</p:notes>
+</file>
+
+<file path=ppt/notesSlides/notesSlide36.xml><?xml version="1.0" encoding="utf-8"?>
+<p:notes xmlns:a="http://schemas.openxmlformats.org/drawingml/2006/main" xmlns:r="http://schemas.openxmlformats.org/officeDocument/2006/relationships" xmlns:p="http://schemas.openxmlformats.org/presentationml/2006/main">
+  <p:cSld>
+    <p:spTree>
+      <p:nvGrpSpPr>
+        <p:cNvPr id="1" name=""/>
+        <p:cNvGrpSpPr/>
+        <p:nvPr/>
+      </p:nvGrpSpPr>
+      <p:grpSpPr>
+        <a:xfrm>
+          <a:off x="0" y="0"/>
+          <a:ext cx="0" cy="0"/>
+          <a:chOff x="0" y="0"/>
+          <a:chExt cx="0" cy="0"/>
+        </a:xfrm>
+      </p:grpSpPr>
+      <p:sp>
+        <p:nvSpPr>
+          <p:cNvPr id="2" name="Slide Image Placeholder 1"/>
+          <p:cNvSpPr>
+            <a:spLocks noGrp="1" noRot="1" noChangeAspect="1"/>
+          </p:cNvSpPr>
+          <p:nvPr>
+            <p:ph type="sldImg"/>
+          </p:nvPr>
+        </p:nvSpPr>
+        <p:spPr/>
+      </p:sp>
+      <p:sp>
+        <p:nvSpPr>
+          <p:cNvPr id="3" name="Notes Placeholder 2"/>
+          <p:cNvSpPr>
+            <a:spLocks noGrp="1"/>
+          </p:cNvSpPr>
+          <p:nvPr>
+            <p:ph type="body" idx="1"/>
+          </p:nvPr>
+        </p:nvSpPr>
+        <p:spPr/>
+        <p:txBody>
+          <a:bodyPr/>
+          <a:lstStyle/>
+          <a:p>
+            <a:endParaRPr lang="en-CA" dirty="0"/>
+          </a:p>
+        </p:txBody>
+      </p:sp>
+      <p:sp>
+        <p:nvSpPr>
+          <p:cNvPr id="4" name="Slide Number Placeholder 3"/>
+          <p:cNvSpPr>
+            <a:spLocks noGrp="1"/>
+          </p:cNvSpPr>
+          <p:nvPr>
+            <p:ph type="sldNum" sz="quarter" idx="5"/>
+          </p:nvPr>
+        </p:nvSpPr>
+        <p:spPr/>
+        <p:txBody>
+          <a:bodyPr/>
+          <a:lstStyle/>
+          <a:p>
+            <a:fld id="{4AF79E1B-2C51-4B9B-8EA4-26DE9E345AFF}" type="slidenum">
+              <a:rPr lang="en-US" smtClean="0"/>
+              <a:t>40</a:t>
             </a:fld>
             <a:endParaRPr lang="en-US"/>
           </a:p>
@@ -3259,7 +3577,13 @@
   <p:cSld>
     <p:spTree>
       <p:nvGrpSpPr>
-        <p:cNvPr id="1" name=""/>
+        <p:cNvPr id="1" name="">
+          <a:extLst>
+            <a:ext uri="{FF2B5EF4-FFF2-40B4-BE49-F238E27FC236}">
+              <a16:creationId xmlns:a16="http://schemas.microsoft.com/office/drawing/2014/main" id="{7AC1E9D6-2827-5A07-D81C-4F8990F5B977}"/>
+            </a:ext>
+          </a:extLst>
+        </p:cNvPr>
         <p:cNvGrpSpPr/>
         <p:nvPr/>
       </p:nvGrpSpPr>
@@ -3273,7 +3597,13 @@
       </p:grpSpPr>
       <p:sp>
         <p:nvSpPr>
-          <p:cNvPr id="2" name="Slide Image Placeholder 1"/>
+          <p:cNvPr id="2" name="Slide Image Placeholder 1">
+            <a:extLst>
+              <a:ext uri="{FF2B5EF4-FFF2-40B4-BE49-F238E27FC236}">
+                <a16:creationId xmlns:a16="http://schemas.microsoft.com/office/drawing/2014/main" id="{2DE67258-D932-7569-44F1-59CD9BC01917}"/>
+              </a:ext>
+            </a:extLst>
+          </p:cNvPr>
           <p:cNvSpPr>
             <a:spLocks noGrp="1" noRot="1" noChangeAspect="1"/>
           </p:cNvSpPr>
@@ -3285,7 +3615,13 @@
       </p:sp>
       <p:sp>
         <p:nvSpPr>
-          <p:cNvPr id="3" name="Notes Placeholder 2"/>
+          <p:cNvPr id="3" name="Notes Placeholder 2">
+            <a:extLst>
+              <a:ext uri="{FF2B5EF4-FFF2-40B4-BE49-F238E27FC236}">
+                <a16:creationId xmlns:a16="http://schemas.microsoft.com/office/drawing/2014/main" id="{16621BA1-E1E2-A13E-EB31-955487B2B2C4}"/>
+              </a:ext>
+            </a:extLst>
+          </p:cNvPr>
           <p:cNvSpPr>
             <a:spLocks noGrp="1"/>
           </p:cNvSpPr>
@@ -3298,24 +3634,24 @@
           <a:bodyPr/>
           <a:lstStyle/>
           <a:p>
-            <a:r>
-              <a:rPr lang="en-CA" dirty="0"/>
-              <a:t>Classic taste-based discrimination model : </a:t>
-            </a:r>
-            <a:r>
-              <a:rPr lang="en-CA" dirty="0" err="1"/>
-              <a:t>becker</a:t>
-            </a:r>
-            <a:r>
-              <a:rPr lang="en-CA" dirty="0"/>
-              <a:t>. Can use Williams slides or Lang/Lehman to present this model. Then present how Lang-Leman search model discussion could apply to health? (Ask people to read this before hand and think about a model here?)</a:t>
-            </a:r>
-          </a:p>
-        </p:txBody>
-      </p:sp>
-      <p:sp>
-        <p:nvSpPr>
-          <p:cNvPr id="4" name="Slide Number Placeholder 3"/>
+            <a:pPr algn="l"/>
+            <a:r>
+              <a:rPr lang="en-US" dirty="0"/>
+              <a:t>Let’s suggest some questions we can study</a:t>
+            </a:r>
+            <a:endParaRPr lang="en-CA" dirty="0"/>
+          </a:p>
+        </p:txBody>
+      </p:sp>
+      <p:sp>
+        <p:nvSpPr>
+          <p:cNvPr id="4" name="Slide Number Placeholder 3">
+            <a:extLst>
+              <a:ext uri="{FF2B5EF4-FFF2-40B4-BE49-F238E27FC236}">
+                <a16:creationId xmlns:a16="http://schemas.microsoft.com/office/drawing/2014/main" id="{B8A561DB-3ABC-09E4-90B1-EDA6A10E37F5}"/>
+              </a:ext>
+            </a:extLst>
+          </p:cNvPr>
           <p:cNvSpPr>
             <a:spLocks noGrp="1"/>
           </p:cNvSpPr>
@@ -3330,7 +3666,7 @@
           <a:p>
             <a:fld id="{4AF79E1B-2C51-4B9B-8EA4-26DE9E345AFF}" type="slidenum">
               <a:rPr lang="en-US" smtClean="0"/>
-              <a:t>11</a:t>
+              <a:t>10</a:t>
             </a:fld>
             <a:endParaRPr lang="en-US"/>
           </a:p>
@@ -3339,7 +3675,7 @@
     </p:spTree>
     <p:extLst>
       <p:ext uri="{BB962C8B-B14F-4D97-AF65-F5344CB8AC3E}">
-        <p14:creationId xmlns:p14="http://schemas.microsoft.com/office/powerpoint/2010/main" val="1527946518"/>
+        <p14:creationId xmlns:p14="http://schemas.microsoft.com/office/powerpoint/2010/main" val="4067449949"/>
       </p:ext>
     </p:extLst>
   </p:cSld>
@@ -3354,7 +3690,13 @@
   <p:cSld>
     <p:spTree>
       <p:nvGrpSpPr>
-        <p:cNvPr id="1" name=""/>
+        <p:cNvPr id="1" name="">
+          <a:extLst>
+            <a:ext uri="{FF2B5EF4-FFF2-40B4-BE49-F238E27FC236}">
+              <a16:creationId xmlns:a16="http://schemas.microsoft.com/office/drawing/2014/main" id="{880BAC79-7593-8962-11A9-1CD681A86536}"/>
+            </a:ext>
+          </a:extLst>
+        </p:cNvPr>
         <p:cNvGrpSpPr/>
         <p:nvPr/>
       </p:nvGrpSpPr>
@@ -3368,7 +3710,13 @@
       </p:grpSpPr>
       <p:sp>
         <p:nvSpPr>
-          <p:cNvPr id="2" name="Slide Image Placeholder 1"/>
+          <p:cNvPr id="2" name="Slide Image Placeholder 1">
+            <a:extLst>
+              <a:ext uri="{FF2B5EF4-FFF2-40B4-BE49-F238E27FC236}">
+                <a16:creationId xmlns:a16="http://schemas.microsoft.com/office/drawing/2014/main" id="{14A23EA4-E34D-C04C-F83E-58C3B3502613}"/>
+              </a:ext>
+            </a:extLst>
+          </p:cNvPr>
           <p:cNvSpPr>
             <a:spLocks noGrp="1" noRot="1" noChangeAspect="1"/>
           </p:cNvSpPr>
@@ -3380,7 +3728,13 @@
       </p:sp>
       <p:sp>
         <p:nvSpPr>
-          <p:cNvPr id="3" name="Notes Placeholder 2"/>
+          <p:cNvPr id="3" name="Notes Placeholder 2">
+            <a:extLst>
+              <a:ext uri="{FF2B5EF4-FFF2-40B4-BE49-F238E27FC236}">
+                <a16:creationId xmlns:a16="http://schemas.microsoft.com/office/drawing/2014/main" id="{766893B1-5950-AFB9-CB4A-684DE1FF5F71}"/>
+              </a:ext>
+            </a:extLst>
+          </p:cNvPr>
           <p:cNvSpPr>
             <a:spLocks noGrp="1"/>
           </p:cNvSpPr>
@@ -3393,16 +3747,24 @@
           <a:bodyPr/>
           <a:lstStyle/>
           <a:p>
+            <a:pPr algn="l"/>
             <a:r>
               <a:rPr lang="en-US" dirty="0"/>
-              <a:t>In the Becker model, this was black/white – here I’ll use URM to be a little more general. </a:t>
-            </a:r>
-          </a:p>
-        </p:txBody>
-      </p:sp>
-      <p:sp>
-        <p:nvSpPr>
-          <p:cNvPr id="4" name="Slide Number Placeholder 3"/>
+              <a:t>Example: Heather Sarsons JMP</a:t>
+            </a:r>
+            <a:endParaRPr lang="en-CA" dirty="0"/>
+          </a:p>
+        </p:txBody>
+      </p:sp>
+      <p:sp>
+        <p:nvSpPr>
+          <p:cNvPr id="4" name="Slide Number Placeholder 3">
+            <a:extLst>
+              <a:ext uri="{FF2B5EF4-FFF2-40B4-BE49-F238E27FC236}">
+                <a16:creationId xmlns:a16="http://schemas.microsoft.com/office/drawing/2014/main" id="{48CF8A0E-BBA6-4DEC-A255-6443F9198527}"/>
+              </a:ext>
+            </a:extLst>
+          </p:cNvPr>
           <p:cNvSpPr>
             <a:spLocks noGrp="1"/>
           </p:cNvSpPr>
@@ -3417,7 +3779,7 @@
           <a:p>
             <a:fld id="{4AF79E1B-2C51-4B9B-8EA4-26DE9E345AFF}" type="slidenum">
               <a:rPr lang="en-US" smtClean="0"/>
-              <a:t>12</a:t>
+              <a:t>11</a:t>
             </a:fld>
             <a:endParaRPr lang="en-US"/>
           </a:p>
@@ -3426,7 +3788,7 @@
     </p:spTree>
     <p:extLst>
       <p:ext uri="{BB962C8B-B14F-4D97-AF65-F5344CB8AC3E}">
-        <p14:creationId xmlns:p14="http://schemas.microsoft.com/office/powerpoint/2010/main" val="2397338648"/>
+        <p14:creationId xmlns:p14="http://schemas.microsoft.com/office/powerpoint/2010/main" val="4177588656"/>
       </p:ext>
     </p:extLst>
   </p:cSld>
@@ -3441,7 +3803,13 @@
   <p:cSld>
     <p:spTree>
       <p:nvGrpSpPr>
-        <p:cNvPr id="1" name=""/>
+        <p:cNvPr id="1" name="">
+          <a:extLst>
+            <a:ext uri="{FF2B5EF4-FFF2-40B4-BE49-F238E27FC236}">
+              <a16:creationId xmlns:a16="http://schemas.microsoft.com/office/drawing/2014/main" id="{D9E4D385-2B6A-2BE5-7C38-C11A2E69CD5C}"/>
+            </a:ext>
+          </a:extLst>
+        </p:cNvPr>
         <p:cNvGrpSpPr/>
         <p:nvPr/>
       </p:nvGrpSpPr>
@@ -3455,7 +3823,13 @@
       </p:grpSpPr>
       <p:sp>
         <p:nvSpPr>
-          <p:cNvPr id="2" name="Slide Image Placeholder 1"/>
+          <p:cNvPr id="2" name="Slide Image Placeholder 1">
+            <a:extLst>
+              <a:ext uri="{FF2B5EF4-FFF2-40B4-BE49-F238E27FC236}">
+                <a16:creationId xmlns:a16="http://schemas.microsoft.com/office/drawing/2014/main" id="{5C302B27-9CFB-6C13-F924-1C8769309A3D}"/>
+              </a:ext>
+            </a:extLst>
+          </p:cNvPr>
           <p:cNvSpPr>
             <a:spLocks noGrp="1" noRot="1" noChangeAspect="1"/>
           </p:cNvSpPr>
@@ -3467,7 +3841,13 @@
       </p:sp>
       <p:sp>
         <p:nvSpPr>
-          <p:cNvPr id="3" name="Notes Placeholder 2"/>
+          <p:cNvPr id="3" name="Notes Placeholder 2">
+            <a:extLst>
+              <a:ext uri="{FF2B5EF4-FFF2-40B4-BE49-F238E27FC236}">
+                <a16:creationId xmlns:a16="http://schemas.microsoft.com/office/drawing/2014/main" id="{59790627-A191-60AD-73DE-F5A39E1450AA}"/>
+              </a:ext>
+            </a:extLst>
+          </p:cNvPr>
           <p:cNvSpPr>
             <a:spLocks noGrp="1"/>
           </p:cNvSpPr>
@@ -3480,16 +3860,24 @@
           <a:bodyPr/>
           <a:lstStyle/>
           <a:p>
+            <a:pPr algn="l"/>
             <a:r>
               <a:rPr lang="en-US" dirty="0"/>
-              <a:t>In the Becker model, this was black/white – here I’ll use URM to be a little more general. </a:t>
-            </a:r>
-          </a:p>
-        </p:txBody>
-      </p:sp>
-      <p:sp>
-        <p:nvSpPr>
-          <p:cNvPr id="4" name="Slide Number Placeholder 3"/>
+              <a:t>Another example: racial concordance (another interesting paper by Vini Singh looks at power and rank using the same data). Uses a mover’s design. </a:t>
+            </a:r>
+            <a:endParaRPr lang="en-CA" dirty="0"/>
+          </a:p>
+        </p:txBody>
+      </p:sp>
+      <p:sp>
+        <p:nvSpPr>
+          <p:cNvPr id="4" name="Slide Number Placeholder 3">
+            <a:extLst>
+              <a:ext uri="{FF2B5EF4-FFF2-40B4-BE49-F238E27FC236}">
+                <a16:creationId xmlns:a16="http://schemas.microsoft.com/office/drawing/2014/main" id="{42C60FBF-ABFF-546A-7BFA-8C828D6F9815}"/>
+              </a:ext>
+            </a:extLst>
+          </p:cNvPr>
           <p:cNvSpPr>
             <a:spLocks noGrp="1"/>
           </p:cNvSpPr>
@@ -3504,7 +3892,7 @@
           <a:p>
             <a:fld id="{4AF79E1B-2C51-4B9B-8EA4-26DE9E345AFF}" type="slidenum">
               <a:rPr lang="en-US" smtClean="0"/>
-              <a:t>13</a:t>
+              <a:t>12</a:t>
             </a:fld>
             <a:endParaRPr lang="en-US"/>
           </a:p>
@@ -3513,7 +3901,7 @@
     </p:spTree>
     <p:extLst>
       <p:ext uri="{BB962C8B-B14F-4D97-AF65-F5344CB8AC3E}">
-        <p14:creationId xmlns:p14="http://schemas.microsoft.com/office/powerpoint/2010/main" val="3213247169"/>
+        <p14:creationId xmlns:p14="http://schemas.microsoft.com/office/powerpoint/2010/main" val="64809856"/>
       </p:ext>
     </p:extLst>
   </p:cSld>
@@ -3569,15 +3957,7 @@
           <a:p>
             <a:r>
               <a:rPr lang="en-US" dirty="0"/>
-              <a:t>Where </a:t>
-            </a:r>
-            <a:r>
-              <a:rPr lang="en-US" dirty="0" err="1"/>
-              <a:t>d_e</a:t>
-            </a:r>
-            <a:r>
-              <a:rPr lang="en-US" dirty="0"/>
-              <a:t> is an employer specific “distaste” term </a:t>
+              <a:t>Outline for today – go through some “bad” modeling and think about how we might improve it. Lots of discussion about model value and design, less about mechanics. </a:t>
             </a:r>
           </a:p>
         </p:txBody>
@@ -3599,7 +3979,7 @@
           <a:p>
             <a:fld id="{4AF79E1B-2C51-4B9B-8EA4-26DE9E345AFF}" type="slidenum">
               <a:rPr lang="en-US" smtClean="0"/>
-              <a:t>14</a:t>
+              <a:t>13</a:t>
             </a:fld>
             <a:endParaRPr lang="en-US"/>
           </a:p>
@@ -3608,7 +3988,7 @@
     </p:spTree>
     <p:extLst>
       <p:ext uri="{BB962C8B-B14F-4D97-AF65-F5344CB8AC3E}">
-        <p14:creationId xmlns:p14="http://schemas.microsoft.com/office/powerpoint/2010/main" val="185549830"/>
+        <p14:creationId xmlns:p14="http://schemas.microsoft.com/office/powerpoint/2010/main" val="1693395488"/>
       </p:ext>
     </p:extLst>
   </p:cSld>
@@ -3787,7 +4167,7 @@
             <a:fld id="{0972D05C-DCFB-4BB6-B49C-AC126BF3ED2C}" type="datetimeFigureOut">
               <a:rPr lang="en-US" smtClean="0"/>
               <a:pPr/>
-              <a:t>2/2/2026</a:t>
+              <a:t>3/2/2026</a:t>
             </a:fld>
             <a:endParaRPr lang="en-US"/>
           </a:p>
@@ -4024,7 +4404,7 @@
             <a:fld id="{0972D05C-DCFB-4BB6-B49C-AC126BF3ED2C}" type="datetimeFigureOut">
               <a:rPr lang="en-US" smtClean="0"/>
               <a:pPr/>
-              <a:t>2/2/2026</a:t>
+              <a:t>3/2/2026</a:t>
             </a:fld>
             <a:endParaRPr lang="en-US"/>
           </a:p>
@@ -4206,7 +4586,7 @@
             <a:fld id="{0972D05C-DCFB-4BB6-B49C-AC126BF3ED2C}" type="datetimeFigureOut">
               <a:rPr lang="en-US" smtClean="0"/>
               <a:pPr/>
-              <a:t>2/2/2026</a:t>
+              <a:t>3/2/2026</a:t>
             </a:fld>
             <a:endParaRPr lang="en-US"/>
           </a:p>
@@ -4448,7 +4828,7 @@
             <a:fld id="{1D8BD707-D9CF-40AE-B4C6-C98DA3205C09}" type="datetimeFigureOut">
               <a:rPr lang="en-US" smtClean="0"/>
               <a:pPr/>
-              <a:t>2/2/2026</a:t>
+              <a:t>3/2/2026</a:t>
             </a:fld>
             <a:endParaRPr lang="en-US"/>
           </a:p>
@@ -4618,7 +4998,7 @@
             <a:fld id="{1D8BD707-D9CF-40AE-B4C6-C98DA3205C09}" type="datetimeFigureOut">
               <a:rPr lang="en-US" smtClean="0"/>
               <a:pPr/>
-              <a:t>2/2/2026</a:t>
+              <a:t>3/2/2026</a:t>
             </a:fld>
             <a:endParaRPr lang="en-US"/>
           </a:p>
@@ -4865,7 +5245,7 @@
             <a:fld id="{1D8BD707-D9CF-40AE-B4C6-C98DA3205C09}" type="datetimeFigureOut">
               <a:rPr lang="en-US" smtClean="0"/>
               <a:pPr/>
-              <a:t>2/2/2026</a:t>
+              <a:t>3/2/2026</a:t>
             </a:fld>
             <a:endParaRPr lang="en-US"/>
           </a:p>
@@ -5152,7 +5532,7 @@
             <a:fld id="{1D8BD707-D9CF-40AE-B4C6-C98DA3205C09}" type="datetimeFigureOut">
               <a:rPr lang="en-US" smtClean="0"/>
               <a:pPr/>
-              <a:t>2/2/2026</a:t>
+              <a:t>3/2/2026</a:t>
             </a:fld>
             <a:endParaRPr lang="en-US"/>
           </a:p>
@@ -5573,7 +5953,7 @@
             <a:fld id="{1D8BD707-D9CF-40AE-B4C6-C98DA3205C09}" type="datetimeFigureOut">
               <a:rPr lang="en-US" smtClean="0"/>
               <a:pPr/>
-              <a:t>2/2/2026</a:t>
+              <a:t>3/2/2026</a:t>
             </a:fld>
             <a:endParaRPr lang="en-US"/>
           </a:p>
@@ -5692,7 +6072,7 @@
             <a:fld id="{1D8BD707-D9CF-40AE-B4C6-C98DA3205C09}" type="datetimeFigureOut">
               <a:rPr lang="en-US" smtClean="0"/>
               <a:pPr/>
-              <a:t>2/2/2026</a:t>
+              <a:t>3/2/2026</a:t>
             </a:fld>
             <a:endParaRPr lang="en-US"/>
           </a:p>
@@ -5789,7 +6169,7 @@
             <a:fld id="{1D8BD707-D9CF-40AE-B4C6-C98DA3205C09}" type="datetimeFigureOut">
               <a:rPr lang="en-US" smtClean="0"/>
               <a:pPr/>
-              <a:t>2/2/2026</a:t>
+              <a:t>3/2/2026</a:t>
             </a:fld>
             <a:endParaRPr lang="en-US"/>
           </a:p>
@@ -6066,7 +6446,7 @@
             <a:fld id="{1D8BD707-D9CF-40AE-B4C6-C98DA3205C09}" type="datetimeFigureOut">
               <a:rPr lang="en-US" smtClean="0"/>
               <a:pPr/>
-              <a:t>2/2/2026</a:t>
+              <a:t>3/2/2026</a:t>
             </a:fld>
             <a:endParaRPr lang="en-US"/>
           </a:p>
@@ -6238,7 +6618,7 @@
             <a:fld id="{0972D05C-DCFB-4BB6-B49C-AC126BF3ED2C}" type="datetimeFigureOut">
               <a:rPr lang="en-US" smtClean="0"/>
               <a:pPr/>
-              <a:t>2/2/2026</a:t>
+              <a:t>3/2/2026</a:t>
             </a:fld>
             <a:endParaRPr lang="en-US"/>
           </a:p>
@@ -6492,7 +6872,7 @@
             <a:fld id="{1D8BD707-D9CF-40AE-B4C6-C98DA3205C09}" type="datetimeFigureOut">
               <a:rPr lang="en-US" smtClean="0"/>
               <a:pPr/>
-              <a:t>2/2/2026</a:t>
+              <a:t>3/2/2026</a:t>
             </a:fld>
             <a:endParaRPr lang="en-US"/>
           </a:p>
@@ -6662,7 +7042,7 @@
             <a:fld id="{1D8BD707-D9CF-40AE-B4C6-C98DA3205C09}" type="datetimeFigureOut">
               <a:rPr lang="en-US" smtClean="0"/>
               <a:pPr/>
-              <a:t>2/2/2026</a:t>
+              <a:t>3/2/2026</a:t>
             </a:fld>
             <a:endParaRPr lang="en-US"/>
           </a:p>
@@ -6842,7 +7222,7 @@
             <a:fld id="{1D8BD707-D9CF-40AE-B4C6-C98DA3205C09}" type="datetimeFigureOut">
               <a:rPr lang="en-US" smtClean="0"/>
               <a:pPr/>
-              <a:t>2/2/2026</a:t>
+              <a:t>3/2/2026</a:t>
             </a:fld>
             <a:endParaRPr lang="en-US"/>
           </a:p>
@@ -7098,7 +7478,7 @@
             <a:fld id="{0972D05C-DCFB-4BB6-B49C-AC126BF3ED2C}" type="datetimeFigureOut">
               <a:rPr lang="en-US" smtClean="0"/>
               <a:pPr/>
-              <a:t>2/2/2026</a:t>
+              <a:t>3/2/2026</a:t>
             </a:fld>
             <a:endParaRPr lang="en-US"/>
           </a:p>
@@ -7426,7 +7806,7 @@
             <a:fld id="{0972D05C-DCFB-4BB6-B49C-AC126BF3ED2C}" type="datetimeFigureOut">
               <a:rPr lang="en-US" smtClean="0"/>
               <a:pPr/>
-              <a:t>2/2/2026</a:t>
+              <a:t>3/2/2026</a:t>
             </a:fld>
             <a:endParaRPr lang="en-US"/>
           </a:p>
@@ -7879,7 +8259,7 @@
             <a:fld id="{0972D05C-DCFB-4BB6-B49C-AC126BF3ED2C}" type="datetimeFigureOut">
               <a:rPr lang="en-US" smtClean="0"/>
               <a:pPr/>
-              <a:t>2/2/2026</a:t>
+              <a:t>3/2/2026</a:t>
             </a:fld>
             <a:endParaRPr lang="en-US"/>
           </a:p>
@@ -7999,7 +8379,7 @@
             <a:fld id="{0972D05C-DCFB-4BB6-B49C-AC126BF3ED2C}" type="datetimeFigureOut">
               <a:rPr lang="en-US" smtClean="0"/>
               <a:pPr/>
-              <a:t>2/2/2026</a:t>
+              <a:t>3/2/2026</a:t>
             </a:fld>
             <a:endParaRPr lang="en-US"/>
           </a:p>
@@ -8096,7 +8476,7 @@
             <a:fld id="{0972D05C-DCFB-4BB6-B49C-AC126BF3ED2C}" type="datetimeFigureOut">
               <a:rPr lang="en-US" smtClean="0"/>
               <a:pPr/>
-              <a:t>2/2/2026</a:t>
+              <a:t>3/2/2026</a:t>
             </a:fld>
             <a:endParaRPr lang="en-US"/>
           </a:p>
@@ -8385,7 +8765,7 @@
             <a:fld id="{0972D05C-DCFB-4BB6-B49C-AC126BF3ED2C}" type="datetimeFigureOut">
               <a:rPr lang="en-US" smtClean="0"/>
               <a:pPr/>
-              <a:t>2/2/2026</a:t>
+              <a:t>3/2/2026</a:t>
             </a:fld>
             <a:endParaRPr lang="en-US"/>
           </a:p>
@@ -8709,7 +9089,7 @@
             <a:fld id="{0972D05C-DCFB-4BB6-B49C-AC126BF3ED2C}" type="datetimeFigureOut">
               <a:rPr lang="en-US" smtClean="0"/>
               <a:pPr/>
-              <a:t>2/2/2026</a:t>
+              <a:t>3/2/2026</a:t>
             </a:fld>
             <a:endParaRPr lang="en-US"/>
           </a:p>
@@ -8971,7 +9351,7 @@
             <a:fld id="{0972D05C-DCFB-4BB6-B49C-AC126BF3ED2C}" type="datetimeFigureOut">
               <a:rPr lang="en-US" smtClean="0"/>
               <a:pPr/>
-              <a:t>2/2/2026</a:t>
+              <a:t>3/2/2026</a:t>
             </a:fld>
             <a:endParaRPr lang="en-US" dirty="0"/>
           </a:p>
@@ -9596,7 +9976,7 @@
             <a:fld id="{1D8BD707-D9CF-40AE-B4C6-C98DA3205C09}" type="datetimeFigureOut">
               <a:rPr lang="en-US" smtClean="0"/>
               <a:pPr/>
-              <a:t>2/2/2026</a:t>
+              <a:t>3/2/2026</a:t>
             </a:fld>
             <a:endParaRPr lang="en-US"/>
           </a:p>
@@ -10031,7 +10411,7 @@
           <a:p>
             <a:r>
               <a:rPr lang="en-US" sz="2400" dirty="0"/>
-              <a:t>March 8, 2023</a:t>
+              <a:t>March 2, 2026</a:t>
             </a:r>
           </a:p>
           <a:p>
@@ -10064,6 +10444,668 @@
 </file>
 
 <file path=ppt/slides/slide10.xml><?xml version="1.0" encoding="utf-8"?>
+<p:sld xmlns:a="http://schemas.openxmlformats.org/drawingml/2006/main" xmlns:r="http://schemas.openxmlformats.org/officeDocument/2006/relationships" xmlns:p="http://schemas.openxmlformats.org/presentationml/2006/main">
+  <p:cSld>
+    <p:spTree>
+      <p:nvGrpSpPr>
+        <p:cNvPr id="1" name="">
+          <a:extLst>
+            <a:ext uri="{FF2B5EF4-FFF2-40B4-BE49-F238E27FC236}">
+              <a16:creationId xmlns:a16="http://schemas.microsoft.com/office/drawing/2014/main" id="{AF83282B-CDD0-8BB9-EE70-A1CB9E416EB9}"/>
+            </a:ext>
+          </a:extLst>
+        </p:cNvPr>
+        <p:cNvGrpSpPr/>
+        <p:nvPr/>
+      </p:nvGrpSpPr>
+      <p:grpSpPr>
+        <a:xfrm>
+          <a:off x="0" y="0"/>
+          <a:ext cx="0" cy="0"/>
+          <a:chOff x="0" y="0"/>
+          <a:chExt cx="0" cy="0"/>
+        </a:xfrm>
+      </p:grpSpPr>
+      <p:sp>
+        <p:nvSpPr>
+          <p:cNvPr id="2" name="Title 1">
+            <a:extLst>
+              <a:ext uri="{FF2B5EF4-FFF2-40B4-BE49-F238E27FC236}">
+                <a16:creationId xmlns:a16="http://schemas.microsoft.com/office/drawing/2014/main" id="{A94857AA-BDC4-7D81-CE12-72CEDA3BB51F}"/>
+              </a:ext>
+            </a:extLst>
+          </p:cNvPr>
+          <p:cNvSpPr>
+            <a:spLocks noGrp="1"/>
+          </p:cNvSpPr>
+          <p:nvPr>
+            <p:ph type="title"/>
+          </p:nvPr>
+        </p:nvSpPr>
+        <p:spPr>
+          <a:xfrm>
+            <a:off x="609600" y="272077"/>
+            <a:ext cx="10439400" cy="624840"/>
+          </a:xfrm>
+        </p:spPr>
+        <p:txBody>
+          <a:bodyPr>
+            <a:noAutofit/>
+          </a:bodyPr>
+          <a:lstStyle/>
+          <a:p>
+            <a:r>
+              <a:rPr lang="en-US" sz="3600" dirty="0">
+                <a:cs typeface="Times New Roman" panose="02020603050405020304" pitchFamily="18" charset="0"/>
+              </a:rPr>
+              <a:t>What other kinds of equity modeling can we do? </a:t>
+            </a:r>
+            <a:endParaRPr lang="en-US" sz="3600" dirty="0">
+              <a:latin typeface="Times New Roman" panose="02020603050405020304" pitchFamily="18" charset="0"/>
+              <a:cs typeface="Times New Roman" panose="02020603050405020304" pitchFamily="18" charset="0"/>
+            </a:endParaRPr>
+          </a:p>
+        </p:txBody>
+      </p:sp>
+      <p:sp>
+        <p:nvSpPr>
+          <p:cNvPr id="6" name="Content Placeholder 5">
+            <a:extLst>
+              <a:ext uri="{FF2B5EF4-FFF2-40B4-BE49-F238E27FC236}">
+                <a16:creationId xmlns:a16="http://schemas.microsoft.com/office/drawing/2014/main" id="{DC27F23B-4135-2092-2E2F-F88D854E2C88}"/>
+              </a:ext>
+            </a:extLst>
+          </p:cNvPr>
+          <p:cNvSpPr>
+            <a:spLocks noGrp="1"/>
+          </p:cNvSpPr>
+          <p:nvPr>
+            <p:ph idx="1"/>
+          </p:nvPr>
+        </p:nvSpPr>
+        <p:spPr>
+          <a:xfrm>
+            <a:off x="762000" y="1066800"/>
+            <a:ext cx="10439400" cy="5638800"/>
+          </a:xfrm>
+        </p:spPr>
+        <p:txBody>
+          <a:bodyPr>
+            <a:normAutofit/>
+          </a:bodyPr>
+          <a:lstStyle/>
+          <a:p>
+            <a:pPr marL="0" indent="0">
+              <a:buNone/>
+            </a:pPr>
+            <a:r>
+              <a:rPr lang="en-CA" sz="2200" dirty="0"/>
+              <a:t>Lots!</a:t>
+            </a:r>
+          </a:p>
+          <a:p>
+            <a:r>
+              <a:rPr lang="en-CA" sz="2200" dirty="0"/>
+              <a:t>Patients and access to care</a:t>
+            </a:r>
+          </a:p>
+          <a:p>
+            <a:r>
+              <a:rPr lang="en-CA" sz="2200" dirty="0"/>
+              <a:t>Physicians and equity</a:t>
+            </a:r>
+          </a:p>
+          <a:p>
+            <a:r>
+              <a:rPr lang="en-CA" sz="2200" dirty="0"/>
+              <a:t>Innovations</a:t>
+            </a:r>
+          </a:p>
+          <a:p>
+            <a:r>
+              <a:rPr lang="en-CA" sz="2200" dirty="0"/>
+              <a:t>Others?</a:t>
+            </a:r>
+          </a:p>
+        </p:txBody>
+      </p:sp>
+    </p:spTree>
+    <p:extLst>
+      <p:ext uri="{BB962C8B-B14F-4D97-AF65-F5344CB8AC3E}">
+        <p14:creationId xmlns:p14="http://schemas.microsoft.com/office/powerpoint/2010/main" val="2456552446"/>
+      </p:ext>
+    </p:extLst>
+  </p:cSld>
+  <p:clrMapOvr>
+    <a:masterClrMapping/>
+  </p:clrMapOvr>
+</p:sld>
+</file>
+
+<file path=ppt/slides/slide11.xml><?xml version="1.0" encoding="utf-8"?>
+<p:sld xmlns:a="http://schemas.openxmlformats.org/drawingml/2006/main" xmlns:r="http://schemas.openxmlformats.org/officeDocument/2006/relationships" xmlns:p="http://schemas.openxmlformats.org/presentationml/2006/main">
+  <p:cSld>
+    <p:spTree>
+      <p:nvGrpSpPr>
+        <p:cNvPr id="1" name="">
+          <a:extLst>
+            <a:ext uri="{FF2B5EF4-FFF2-40B4-BE49-F238E27FC236}">
+              <a16:creationId xmlns:a16="http://schemas.microsoft.com/office/drawing/2014/main" id="{9C87D162-9B1E-21DB-741B-14E666F598FC}"/>
+            </a:ext>
+          </a:extLst>
+        </p:cNvPr>
+        <p:cNvGrpSpPr/>
+        <p:nvPr/>
+      </p:nvGrpSpPr>
+      <p:grpSpPr>
+        <a:xfrm>
+          <a:off x="0" y="0"/>
+          <a:ext cx="0" cy="0"/>
+          <a:chOff x="0" y="0"/>
+          <a:chExt cx="0" cy="0"/>
+        </a:xfrm>
+      </p:grpSpPr>
+      <p:sp>
+        <p:nvSpPr>
+          <p:cNvPr id="2" name="Title 1">
+            <a:extLst>
+              <a:ext uri="{FF2B5EF4-FFF2-40B4-BE49-F238E27FC236}">
+                <a16:creationId xmlns:a16="http://schemas.microsoft.com/office/drawing/2014/main" id="{2FC3A935-457C-B221-A3E7-DD80776D8599}"/>
+              </a:ext>
+            </a:extLst>
+          </p:cNvPr>
+          <p:cNvSpPr>
+            <a:spLocks noGrp="1"/>
+          </p:cNvSpPr>
+          <p:nvPr>
+            <p:ph type="title"/>
+          </p:nvPr>
+        </p:nvSpPr>
+        <p:spPr>
+          <a:xfrm>
+            <a:off x="609600" y="272077"/>
+            <a:ext cx="10439400" cy="624840"/>
+          </a:xfrm>
+        </p:spPr>
+        <p:txBody>
+          <a:bodyPr>
+            <a:noAutofit/>
+          </a:bodyPr>
+          <a:lstStyle/>
+          <a:p>
+            <a:r>
+              <a:rPr lang="en-US" sz="3600" dirty="0">
+                <a:cs typeface="Times New Roman" panose="02020603050405020304" pitchFamily="18" charset="0"/>
+              </a:rPr>
+              <a:t>What other kinds of equity modeling can we do? </a:t>
+            </a:r>
+            <a:endParaRPr lang="en-US" sz="3600" dirty="0">
+              <a:latin typeface="Times New Roman" panose="02020603050405020304" pitchFamily="18" charset="0"/>
+              <a:cs typeface="Times New Roman" panose="02020603050405020304" pitchFamily="18" charset="0"/>
+            </a:endParaRPr>
+          </a:p>
+        </p:txBody>
+      </p:sp>
+      <p:sp>
+        <p:nvSpPr>
+          <p:cNvPr id="6" name="Content Placeholder 5">
+            <a:extLst>
+              <a:ext uri="{FF2B5EF4-FFF2-40B4-BE49-F238E27FC236}">
+                <a16:creationId xmlns:a16="http://schemas.microsoft.com/office/drawing/2014/main" id="{142A61BB-BA3E-9A9F-43F9-DB19DCE8CC93}"/>
+              </a:ext>
+            </a:extLst>
+          </p:cNvPr>
+          <p:cNvSpPr>
+            <a:spLocks noGrp="1"/>
+          </p:cNvSpPr>
+          <p:nvPr>
+            <p:ph idx="1"/>
+          </p:nvPr>
+        </p:nvSpPr>
+        <p:spPr>
+          <a:xfrm>
+            <a:off x="762000" y="1066800"/>
+            <a:ext cx="10439400" cy="5638800"/>
+          </a:xfrm>
+        </p:spPr>
+        <p:txBody>
+          <a:bodyPr>
+            <a:normAutofit/>
+          </a:bodyPr>
+          <a:lstStyle/>
+          <a:p>
+            <a:pPr marL="0" indent="0">
+              <a:buNone/>
+            </a:pPr>
+            <a:r>
+              <a:rPr lang="en-CA" sz="2200" dirty="0"/>
+              <a:t>Lots!</a:t>
+            </a:r>
+          </a:p>
+          <a:p>
+            <a:r>
+              <a:rPr lang="en-CA" sz="2200" dirty="0"/>
+              <a:t>Patients and access to care</a:t>
+            </a:r>
+          </a:p>
+          <a:p>
+            <a:r>
+              <a:rPr lang="en-CA" sz="2200" dirty="0"/>
+              <a:t>Physicians and equity</a:t>
+            </a:r>
+          </a:p>
+          <a:p>
+            <a:r>
+              <a:rPr lang="en-CA" sz="2200" dirty="0"/>
+              <a:t>Innovations</a:t>
+            </a:r>
+          </a:p>
+          <a:p>
+            <a:r>
+              <a:rPr lang="en-CA" sz="2200" dirty="0"/>
+              <a:t>Others?</a:t>
+            </a:r>
+          </a:p>
+        </p:txBody>
+      </p:sp>
+      <p:pic>
+        <p:nvPicPr>
+          <p:cNvPr id="4" name="Picture 3">
+            <a:extLst>
+              <a:ext uri="{FF2B5EF4-FFF2-40B4-BE49-F238E27FC236}">
+                <a16:creationId xmlns:a16="http://schemas.microsoft.com/office/drawing/2014/main" id="{8021E3A7-DDE9-9399-1D44-DA78D558B64B}"/>
+              </a:ext>
+            </a:extLst>
+          </p:cNvPr>
+          <p:cNvPicPr>
+            <a:picLocks noChangeAspect="1"/>
+          </p:cNvPicPr>
+          <p:nvPr/>
+        </p:nvPicPr>
+        <p:blipFill>
+          <a:blip r:embed="rId3"/>
+          <a:stretch>
+            <a:fillRect/>
+          </a:stretch>
+        </p:blipFill>
+        <p:spPr>
+          <a:xfrm>
+            <a:off x="5747090" y="994775"/>
+            <a:ext cx="5033762" cy="1967155"/>
+          </a:xfrm>
+          <a:prstGeom prst="rect">
+            <a:avLst/>
+          </a:prstGeom>
+        </p:spPr>
+      </p:pic>
+      <p:pic>
+        <p:nvPicPr>
+          <p:cNvPr id="7" name="Picture 6">
+            <a:extLst>
+              <a:ext uri="{FF2B5EF4-FFF2-40B4-BE49-F238E27FC236}">
+                <a16:creationId xmlns:a16="http://schemas.microsoft.com/office/drawing/2014/main" id="{BF5554DF-FBC9-4E28-BA30-721FED9D397C}"/>
+              </a:ext>
+            </a:extLst>
+          </p:cNvPr>
+          <p:cNvPicPr>
+            <a:picLocks noChangeAspect="1"/>
+          </p:cNvPicPr>
+          <p:nvPr/>
+        </p:nvPicPr>
+        <p:blipFill>
+          <a:blip r:embed="rId4"/>
+          <a:stretch>
+            <a:fillRect/>
+          </a:stretch>
+        </p:blipFill>
+        <p:spPr>
+          <a:xfrm>
+            <a:off x="224038" y="994775"/>
+            <a:ext cx="5515745" cy="5506218"/>
+          </a:xfrm>
+          <a:prstGeom prst="rect">
+            <a:avLst/>
+          </a:prstGeom>
+        </p:spPr>
+      </p:pic>
+      <p:pic>
+        <p:nvPicPr>
+          <p:cNvPr id="9" name="Picture 8">
+            <a:extLst>
+              <a:ext uri="{FF2B5EF4-FFF2-40B4-BE49-F238E27FC236}">
+                <a16:creationId xmlns:a16="http://schemas.microsoft.com/office/drawing/2014/main" id="{50A97FA1-A451-0D46-D70E-836FA4DD142D}"/>
+              </a:ext>
+            </a:extLst>
+          </p:cNvPr>
+          <p:cNvPicPr>
+            <a:picLocks noChangeAspect="1"/>
+          </p:cNvPicPr>
+          <p:nvPr/>
+        </p:nvPicPr>
+        <p:blipFill>
+          <a:blip r:embed="rId5"/>
+          <a:stretch>
+            <a:fillRect/>
+          </a:stretch>
+        </p:blipFill>
+        <p:spPr>
+          <a:xfrm>
+            <a:off x="7171241" y="2612003"/>
+            <a:ext cx="4824905" cy="4069589"/>
+          </a:xfrm>
+          <a:prstGeom prst="rect">
+            <a:avLst/>
+          </a:prstGeom>
+        </p:spPr>
+      </p:pic>
+    </p:spTree>
+    <p:extLst>
+      <p:ext uri="{BB962C8B-B14F-4D97-AF65-F5344CB8AC3E}">
+        <p14:creationId xmlns:p14="http://schemas.microsoft.com/office/powerpoint/2010/main" val="1036854942"/>
+      </p:ext>
+    </p:extLst>
+  </p:cSld>
+  <p:clrMapOvr>
+    <a:masterClrMapping/>
+  </p:clrMapOvr>
+</p:sld>
+</file>
+
+<file path=ppt/slides/slide12.xml><?xml version="1.0" encoding="utf-8"?>
+<p:sld xmlns:a="http://schemas.openxmlformats.org/drawingml/2006/main" xmlns:r="http://schemas.openxmlformats.org/officeDocument/2006/relationships" xmlns:p="http://schemas.openxmlformats.org/presentationml/2006/main">
+  <p:cSld>
+    <p:bg>
+      <p:bgPr>
+        <a:solidFill>
+          <a:schemeClr val="bg1"/>
+        </a:solidFill>
+        <a:effectLst/>
+      </p:bgPr>
+    </p:bg>
+    <p:spTree>
+      <p:nvGrpSpPr>
+        <p:cNvPr id="1" name="">
+          <a:extLst>
+            <a:ext uri="{FF2B5EF4-FFF2-40B4-BE49-F238E27FC236}">
+              <a16:creationId xmlns:a16="http://schemas.microsoft.com/office/drawing/2014/main" id="{EE363C6C-1866-2E6A-250D-36BDF407060B}"/>
+            </a:ext>
+          </a:extLst>
+        </p:cNvPr>
+        <p:cNvGrpSpPr/>
+        <p:nvPr/>
+      </p:nvGrpSpPr>
+      <p:grpSpPr>
+        <a:xfrm>
+          <a:off x="0" y="0"/>
+          <a:ext cx="0" cy="0"/>
+          <a:chOff x="0" y="0"/>
+          <a:chExt cx="0" cy="0"/>
+        </a:xfrm>
+      </p:grpSpPr>
+      <p:sp>
+        <p:nvSpPr>
+          <p:cNvPr id="15" name="Rectangle 14">
+            <a:extLst>
+              <a:ext uri="{FF2B5EF4-FFF2-40B4-BE49-F238E27FC236}">
+                <a16:creationId xmlns:a16="http://schemas.microsoft.com/office/drawing/2014/main" id="{489AE6DA-A080-475C-BE02-EF343FBA6E55}"/>
+              </a:ext>
+              <a:ext uri="{C183D7F6-B498-43B3-948B-1728B52AA6E4}">
+                <adec:decorative xmlns:adec="http://schemas.microsoft.com/office/drawing/2017/decorative" val="1"/>
+              </a:ext>
+            </a:extLst>
+          </p:cNvPr>
+          <p:cNvSpPr>
+            <a:spLocks noGrp="1" noRot="1" noChangeAspect="1" noMove="1" noResize="1" noEditPoints="1" noAdjustHandles="1" noChangeArrowheads="1" noChangeShapeType="1" noTextEdit="1"/>
+          </p:cNvSpPr>
+          <p:nvPr>
+            <p:extLst>
+              <p:ext uri="{386F3935-93C4-4BCD-93E2-E3B085C9AB24}">
+                <p16:designElem xmlns:p16="http://schemas.microsoft.com/office/powerpoint/2015/main" val="1"/>
+              </p:ext>
+            </p:extLst>
+          </p:nvPr>
+        </p:nvSpPr>
+        <p:spPr>
+          <a:xfrm>
+            <a:off x="11292840" y="0"/>
+            <a:ext cx="914400" cy="6858000"/>
+          </a:xfrm>
+          <a:prstGeom prst="rect">
+            <a:avLst/>
+          </a:prstGeom>
+          <a:solidFill>
+            <a:schemeClr val="tx2">
+              <a:lumMod val="75000"/>
+            </a:schemeClr>
+          </a:solidFill>
+          <a:ln>
+            <a:noFill/>
+          </a:ln>
+        </p:spPr>
+        <p:style>
+          <a:lnRef idx="2">
+            <a:schemeClr val="accent1">
+              <a:shade val="50000"/>
+            </a:schemeClr>
+          </a:lnRef>
+          <a:fillRef idx="1">
+            <a:schemeClr val="accent1"/>
+          </a:fillRef>
+          <a:effectRef idx="0">
+            <a:schemeClr val="accent1"/>
+          </a:effectRef>
+          <a:fontRef idx="minor">
+            <a:schemeClr val="lt1"/>
+          </a:fontRef>
+        </p:style>
+        <p:txBody>
+          <a:bodyPr/>
+          <a:lstStyle/>
+          <a:p>
+            <a:endParaRPr lang="en-US"/>
+          </a:p>
+        </p:txBody>
+      </p:sp>
+      <p:sp>
+        <p:nvSpPr>
+          <p:cNvPr id="17" name="Rectangle 16">
+            <a:extLst>
+              <a:ext uri="{FF2B5EF4-FFF2-40B4-BE49-F238E27FC236}">
+                <a16:creationId xmlns:a16="http://schemas.microsoft.com/office/drawing/2014/main" id="{AB33EF95-E91B-40C4-A692-E9106529168C}"/>
+              </a:ext>
+              <a:ext uri="{C183D7F6-B498-43B3-948B-1728B52AA6E4}">
+                <adec:decorative xmlns:adec="http://schemas.microsoft.com/office/drawing/2017/decorative" val="1"/>
+              </a:ext>
+            </a:extLst>
+          </p:cNvPr>
+          <p:cNvSpPr>
+            <a:spLocks noGrp="1" noRot="1" noChangeAspect="1" noMove="1" noResize="1" noEditPoints="1" noAdjustHandles="1" noChangeArrowheads="1" noChangeShapeType="1" noTextEdit="1"/>
+          </p:cNvSpPr>
+          <p:nvPr>
+            <p:extLst>
+              <p:ext uri="{386F3935-93C4-4BCD-93E2-E3B085C9AB24}">
+                <p16:designElem xmlns:p16="http://schemas.microsoft.com/office/powerpoint/2015/main" val="1"/>
+              </p:ext>
+            </p:extLst>
+          </p:nvPr>
+        </p:nvSpPr>
+        <p:spPr>
+          <a:xfrm>
+            <a:off x="0" y="0"/>
+            <a:ext cx="12192000" cy="6858000"/>
+          </a:xfrm>
+          <a:prstGeom prst="rect">
+            <a:avLst/>
+          </a:prstGeom>
+          <a:solidFill>
+            <a:schemeClr val="tx1">
+              <a:lumMod val="65000"/>
+              <a:lumOff val="35000"/>
+            </a:schemeClr>
+          </a:solidFill>
+          <a:ln>
+            <a:noFill/>
+          </a:ln>
+        </p:spPr>
+        <p:style>
+          <a:lnRef idx="2">
+            <a:schemeClr val="accent1">
+              <a:shade val="50000"/>
+            </a:schemeClr>
+          </a:lnRef>
+          <a:fillRef idx="1">
+            <a:schemeClr val="accent1"/>
+          </a:fillRef>
+          <a:effectRef idx="0">
+            <a:schemeClr val="accent1"/>
+          </a:effectRef>
+          <a:fontRef idx="minor">
+            <a:schemeClr val="lt1"/>
+          </a:fontRef>
+        </p:style>
+        <p:txBody>
+          <a:bodyPr rtlCol="0" anchor="ctr"/>
+          <a:lstStyle/>
+          <a:p>
+            <a:pPr algn="ctr"/>
+            <a:endParaRPr lang="en-US"/>
+          </a:p>
+        </p:txBody>
+      </p:sp>
+      <p:sp useBgFill="1">
+        <p:nvSpPr>
+          <p:cNvPr id="19" name="Rectangle 18">
+            <a:extLst>
+              <a:ext uri="{FF2B5EF4-FFF2-40B4-BE49-F238E27FC236}">
+                <a16:creationId xmlns:a16="http://schemas.microsoft.com/office/drawing/2014/main" id="{953CAC5D-D424-4EE2-A0C2-72ED7A88AA4B}"/>
+              </a:ext>
+              <a:ext uri="{C183D7F6-B498-43B3-948B-1728B52AA6E4}">
+                <adec:decorative xmlns:adec="http://schemas.microsoft.com/office/drawing/2017/decorative" val="1"/>
+              </a:ext>
+            </a:extLst>
+          </p:cNvPr>
+          <p:cNvSpPr>
+            <a:spLocks noGrp="1" noRot="1" noChangeAspect="1" noMove="1" noResize="1" noEditPoints="1" noAdjustHandles="1" noChangeArrowheads="1" noChangeShapeType="1" noTextEdit="1"/>
+          </p:cNvSpPr>
+          <p:nvPr>
+            <p:extLst>
+              <p:ext uri="{386F3935-93C4-4BCD-93E2-E3B085C9AB24}">
+                <p16:designElem xmlns:p16="http://schemas.microsoft.com/office/powerpoint/2015/main" val="1"/>
+              </p:ext>
+            </p:extLst>
+          </p:nvPr>
+        </p:nvSpPr>
+        <p:spPr>
+          <a:xfrm>
+            <a:off x="477012" y="480060"/>
+            <a:ext cx="11236568" cy="5897880"/>
+          </a:xfrm>
+          <a:prstGeom prst="rect">
+            <a:avLst/>
+          </a:prstGeom>
+          <a:ln>
+            <a:noFill/>
+          </a:ln>
+        </p:spPr>
+        <p:style>
+          <a:lnRef idx="2">
+            <a:schemeClr val="accent1">
+              <a:shade val="50000"/>
+            </a:schemeClr>
+          </a:lnRef>
+          <a:fillRef idx="1">
+            <a:schemeClr val="accent1"/>
+          </a:fillRef>
+          <a:effectRef idx="0">
+            <a:schemeClr val="accent1"/>
+          </a:effectRef>
+          <a:fontRef idx="minor">
+            <a:schemeClr val="lt1"/>
+          </a:fontRef>
+        </p:style>
+        <p:txBody>
+          <a:bodyPr rtlCol="0" anchor="ctr"/>
+          <a:lstStyle/>
+          <a:p>
+            <a:pPr algn="ctr"/>
+            <a:endParaRPr lang="en-US"/>
+          </a:p>
+        </p:txBody>
+      </p:sp>
+      <p:pic>
+        <p:nvPicPr>
+          <p:cNvPr id="10" name="Picture 9">
+            <a:extLst>
+              <a:ext uri="{FF2B5EF4-FFF2-40B4-BE49-F238E27FC236}">
+                <a16:creationId xmlns:a16="http://schemas.microsoft.com/office/drawing/2014/main" id="{A4DC9EF1-D172-C80B-4FDB-A7CC55A411E0}"/>
+              </a:ext>
+            </a:extLst>
+          </p:cNvPr>
+          <p:cNvPicPr>
+            <a:picLocks noChangeAspect="1"/>
+          </p:cNvPicPr>
+          <p:nvPr/>
+        </p:nvPicPr>
+        <p:blipFill>
+          <a:blip r:embed="rId3"/>
+          <a:stretch>
+            <a:fillRect/>
+          </a:stretch>
+        </p:blipFill>
+        <p:spPr>
+          <a:xfrm>
+            <a:off x="468226" y="1447801"/>
+            <a:ext cx="4841590" cy="3352800"/>
+          </a:xfrm>
+          <a:prstGeom prst="rect">
+            <a:avLst/>
+          </a:prstGeom>
+        </p:spPr>
+      </p:pic>
+      <p:pic>
+        <p:nvPicPr>
+          <p:cNvPr id="5" name="Picture 4">
+            <a:extLst>
+              <a:ext uri="{FF2B5EF4-FFF2-40B4-BE49-F238E27FC236}">
+                <a16:creationId xmlns:a16="http://schemas.microsoft.com/office/drawing/2014/main" id="{5F33056E-9666-CFA5-DDB7-F1BD97A0B3B5}"/>
+              </a:ext>
+            </a:extLst>
+          </p:cNvPr>
+          <p:cNvPicPr>
+            <a:picLocks noChangeAspect="1"/>
+          </p:cNvPicPr>
+          <p:nvPr/>
+        </p:nvPicPr>
+        <p:blipFill>
+          <a:blip r:embed="rId4"/>
+          <a:stretch>
+            <a:fillRect/>
+          </a:stretch>
+        </p:blipFill>
+        <p:spPr>
+          <a:xfrm>
+            <a:off x="5228823" y="1734470"/>
+            <a:ext cx="6651214" cy="4190264"/>
+          </a:xfrm>
+          <a:prstGeom prst="rect">
+            <a:avLst/>
+          </a:prstGeom>
+        </p:spPr>
+      </p:pic>
+    </p:spTree>
+    <p:extLst>
+      <p:ext uri="{BB962C8B-B14F-4D97-AF65-F5344CB8AC3E}">
+        <p14:creationId xmlns:p14="http://schemas.microsoft.com/office/powerpoint/2010/main" val="1157885697"/>
+      </p:ext>
+    </p:extLst>
+  </p:cSld>
+  <p:clrMapOvr>
+    <a:masterClrMapping/>
+  </p:clrMapOvr>
+</p:sld>
+</file>
+
+<file path=ppt/slides/slide13.xml><?xml version="1.0" encoding="utf-8"?>
 <p:sld xmlns:a="http://schemas.openxmlformats.org/drawingml/2006/main" xmlns:r="http://schemas.openxmlformats.org/officeDocument/2006/relationships" xmlns:p="http://schemas.openxmlformats.org/presentationml/2006/main">
   <p:cSld>
     <p:spTree>
@@ -10259,7 +11301,7 @@
 </p:sld>
 </file>
 
-<file path=ppt/slides/slide11.xml><?xml version="1.0" encoding="utf-8"?>
+<file path=ppt/slides/slide14.xml><?xml version="1.0" encoding="utf-8"?>
 <p:sld xmlns:a="http://schemas.openxmlformats.org/drawingml/2006/main" xmlns:r="http://schemas.openxmlformats.org/officeDocument/2006/relationships" xmlns:p="http://schemas.openxmlformats.org/presentationml/2006/main">
   <p:cSld>
     <p:spTree>
@@ -10604,7 +11646,7 @@
 </p:sld>
 </file>
 
-<file path=ppt/slides/slide12.xml><?xml version="1.0" encoding="utf-8"?>
+<file path=ppt/slides/slide15.xml><?xml version="1.0" encoding="utf-8"?>
 <p:sld xmlns:a="http://schemas.openxmlformats.org/drawingml/2006/main" xmlns:r="http://schemas.openxmlformats.org/officeDocument/2006/relationships" xmlns:p="http://schemas.openxmlformats.org/presentationml/2006/main">
   <p:cSld>
     <p:spTree>
@@ -10931,7 +11973,7 @@
 </p:sld>
 </file>
 
-<file path=ppt/slides/slide13.xml><?xml version="1.0" encoding="utf-8"?>
+<file path=ppt/slides/slide16.xml><?xml version="1.0" encoding="utf-8"?>
 <p:sld xmlns:a="http://schemas.openxmlformats.org/drawingml/2006/main" xmlns:r="http://schemas.openxmlformats.org/officeDocument/2006/relationships" xmlns:p="http://schemas.openxmlformats.org/presentationml/2006/main">
   <p:cSld>
     <p:spTree>
@@ -11484,7 +12526,7 @@
 </p:sld>
 </file>
 
-<file path=ppt/slides/slide14.xml><?xml version="1.0" encoding="utf-8"?>
+<file path=ppt/slides/slide17.xml><?xml version="1.0" encoding="utf-8"?>
 <p:sld xmlns:a="http://schemas.openxmlformats.org/drawingml/2006/main" xmlns:r="http://schemas.openxmlformats.org/officeDocument/2006/relationships" xmlns:p="http://schemas.openxmlformats.org/presentationml/2006/main">
   <p:cSld>
     <p:spTree>
@@ -12147,7 +13189,7 @@
 </p:sld>
 </file>
 
-<file path=ppt/slides/slide15.xml><?xml version="1.0" encoding="utf-8"?>
+<file path=ppt/slides/slide18.xml><?xml version="1.0" encoding="utf-8"?>
 <p:sld xmlns:a="http://schemas.openxmlformats.org/drawingml/2006/main" xmlns:r="http://schemas.openxmlformats.org/officeDocument/2006/relationships" xmlns:p="http://schemas.openxmlformats.org/presentationml/2006/main">
   <p:cSld>
     <p:spTree>
@@ -12949,1001 +13991,6 @@
 </p:sld>
 </file>
 
-<file path=ppt/slides/slide16.xml><?xml version="1.0" encoding="utf-8"?>
-<p:sld xmlns:a="http://schemas.openxmlformats.org/drawingml/2006/main" xmlns:r="http://schemas.openxmlformats.org/officeDocument/2006/relationships" xmlns:p="http://schemas.openxmlformats.org/presentationml/2006/main">
-  <p:cSld>
-    <p:spTree>
-      <p:nvGrpSpPr>
-        <p:cNvPr id="1" name=""/>
-        <p:cNvGrpSpPr/>
-        <p:nvPr/>
-      </p:nvGrpSpPr>
-      <p:grpSpPr>
-        <a:xfrm>
-          <a:off x="0" y="0"/>
-          <a:ext cx="0" cy="0"/>
-          <a:chOff x="0" y="0"/>
-          <a:chExt cx="0" cy="0"/>
-        </a:xfrm>
-      </p:grpSpPr>
-      <p:sp>
-        <p:nvSpPr>
-          <p:cNvPr id="2" name="Title 1"/>
-          <p:cNvSpPr>
-            <a:spLocks noGrp="1"/>
-          </p:cNvSpPr>
-          <p:nvPr>
-            <p:ph type="title"/>
-          </p:nvPr>
-        </p:nvSpPr>
-        <p:spPr>
-          <a:xfrm>
-            <a:off x="609600" y="272077"/>
-            <a:ext cx="10439400" cy="624840"/>
-          </a:xfrm>
-        </p:spPr>
-        <p:txBody>
-          <a:bodyPr>
-            <a:noAutofit/>
-          </a:bodyPr>
-          <a:lstStyle/>
-          <a:p>
-            <a:r>
-              <a:rPr lang="en-US" sz="3600" dirty="0">
-                <a:cs typeface="Times New Roman" panose="02020603050405020304" pitchFamily="18" charset="0"/>
-              </a:rPr>
-              <a:t>A First Pass at Models of Discrimination</a:t>
-            </a:r>
-            <a:endParaRPr lang="en-US" sz="3600" dirty="0">
-              <a:latin typeface="Times New Roman" panose="02020603050405020304" pitchFamily="18" charset="0"/>
-              <a:cs typeface="Times New Roman" panose="02020603050405020304" pitchFamily="18" charset="0"/>
-            </a:endParaRPr>
-          </a:p>
-        </p:txBody>
-      </p:sp>
-      <p:sp>
-        <p:nvSpPr>
-          <p:cNvPr id="3" name="Content Placeholder 2"/>
-          <p:cNvSpPr>
-            <a:spLocks noGrp="1"/>
-          </p:cNvSpPr>
-          <p:nvPr>
-            <p:ph idx="1"/>
-          </p:nvPr>
-        </p:nvSpPr>
-        <p:spPr>
-          <a:xfrm>
-            <a:off x="609601" y="1066801"/>
-            <a:ext cx="10439400" cy="5141388"/>
-          </a:xfrm>
-        </p:spPr>
-        <p:txBody>
-          <a:bodyPr>
-            <a:noAutofit/>
-          </a:bodyPr>
-          <a:lstStyle/>
-          <a:p>
-            <a:pPr marL="0" indent="0">
-              <a:buNone/>
-            </a:pPr>
-            <a:r>
-              <a:rPr lang="en-US" sz="2400" b="1" dirty="0">
-                <a:cs typeface="Times New Roman" panose="02020603050405020304" pitchFamily="18" charset="0"/>
-              </a:rPr>
-              <a:t>Model takeaways: </a:t>
-            </a:r>
-            <a:endParaRPr lang="en-US" sz="2400" dirty="0">
-              <a:cs typeface="Times New Roman" panose="02020603050405020304" pitchFamily="18" charset="0"/>
-            </a:endParaRPr>
-          </a:p>
-          <a:p>
-            <a:r>
-              <a:rPr lang="en-US" sz="2400" dirty="0">
-                <a:cs typeface="Times New Roman" panose="02020603050405020304" pitchFamily="18" charset="0"/>
-              </a:rPr>
-              <a:t>“Taste-based” discrimination uses preferences to model disparities </a:t>
-            </a:r>
-          </a:p>
-          <a:p>
-            <a:r>
-              <a:rPr lang="en-US" sz="2400" dirty="0">
-                <a:cs typeface="Times New Roman" panose="02020603050405020304" pitchFamily="18" charset="0"/>
-              </a:rPr>
-              <a:t>Discrimination is countered by the market through segregation</a:t>
-            </a:r>
-          </a:p>
-          <a:p>
-            <a:r>
-              <a:rPr lang="en-US" sz="2400" dirty="0">
-                <a:cs typeface="Times New Roman" panose="02020603050405020304" pitchFamily="18" charset="0"/>
-              </a:rPr>
-              <a:t>Basically a “separate but equal” model of the labor force</a:t>
-            </a:r>
-          </a:p>
-          <a:p>
-            <a:r>
-              <a:rPr lang="en-US" sz="2400" dirty="0">
-                <a:cs typeface="Times New Roman" panose="02020603050405020304" pitchFamily="18" charset="0"/>
-              </a:rPr>
-              <a:t>However, this never explained reality – wage differentials exist and are not countered by the market</a:t>
-            </a:r>
-          </a:p>
-        </p:txBody>
-      </p:sp>
-    </p:spTree>
-    <p:extLst>
-      <p:ext uri="{BB962C8B-B14F-4D97-AF65-F5344CB8AC3E}">
-        <p14:creationId xmlns:p14="http://schemas.microsoft.com/office/powerpoint/2010/main" val="1299323366"/>
-      </p:ext>
-    </p:extLst>
-  </p:cSld>
-  <p:clrMapOvr>
-    <a:masterClrMapping/>
-  </p:clrMapOvr>
-</p:sld>
-</file>
-
-<file path=ppt/slides/slide17.xml><?xml version="1.0" encoding="utf-8"?>
-<p:sld xmlns:a="http://schemas.openxmlformats.org/drawingml/2006/main" xmlns:r="http://schemas.openxmlformats.org/officeDocument/2006/relationships" xmlns:p="http://schemas.openxmlformats.org/presentationml/2006/main">
-  <p:cSld>
-    <p:spTree>
-      <p:nvGrpSpPr>
-        <p:cNvPr id="1" name=""/>
-        <p:cNvGrpSpPr/>
-        <p:nvPr/>
-      </p:nvGrpSpPr>
-      <p:grpSpPr>
-        <a:xfrm>
-          <a:off x="0" y="0"/>
-          <a:ext cx="0" cy="0"/>
-          <a:chOff x="0" y="0"/>
-          <a:chExt cx="0" cy="0"/>
-        </a:xfrm>
-      </p:grpSpPr>
-      <p:sp>
-        <p:nvSpPr>
-          <p:cNvPr id="2" name="Title 1"/>
-          <p:cNvSpPr>
-            <a:spLocks noGrp="1"/>
-          </p:cNvSpPr>
-          <p:nvPr>
-            <p:ph type="title"/>
-          </p:nvPr>
-        </p:nvSpPr>
-        <p:spPr>
-          <a:xfrm>
-            <a:off x="609600" y="272077"/>
-            <a:ext cx="10439400" cy="624840"/>
-          </a:xfrm>
-        </p:spPr>
-        <p:txBody>
-          <a:bodyPr>
-            <a:noAutofit/>
-          </a:bodyPr>
-          <a:lstStyle/>
-          <a:p>
-            <a:r>
-              <a:rPr lang="en-US" sz="3600" dirty="0">
-                <a:cs typeface="Times New Roman" panose="02020603050405020304" pitchFamily="18" charset="0"/>
-              </a:rPr>
-              <a:t>A First Pass at Models of Discrimination</a:t>
-            </a:r>
-            <a:endParaRPr lang="en-US" sz="3600" dirty="0">
-              <a:latin typeface="Times New Roman" panose="02020603050405020304" pitchFamily="18" charset="0"/>
-              <a:cs typeface="Times New Roman" panose="02020603050405020304" pitchFamily="18" charset="0"/>
-            </a:endParaRPr>
-          </a:p>
-        </p:txBody>
-      </p:sp>
-      <p:sp>
-        <p:nvSpPr>
-          <p:cNvPr id="3" name="Content Placeholder 2"/>
-          <p:cNvSpPr>
-            <a:spLocks noGrp="1"/>
-          </p:cNvSpPr>
-          <p:nvPr>
-            <p:ph idx="1"/>
-          </p:nvPr>
-        </p:nvSpPr>
-        <p:spPr>
-          <a:xfrm>
-            <a:off x="609601" y="1066801"/>
-            <a:ext cx="10439400" cy="5141388"/>
-          </a:xfrm>
-        </p:spPr>
-        <p:txBody>
-          <a:bodyPr>
-            <a:noAutofit/>
-          </a:bodyPr>
-          <a:lstStyle/>
-          <a:p>
-            <a:pPr marL="0" indent="0">
-              <a:buNone/>
-            </a:pPr>
-            <a:r>
-              <a:rPr lang="en-US" sz="2400" b="1" dirty="0">
-                <a:cs typeface="Times New Roman" panose="02020603050405020304" pitchFamily="18" charset="0"/>
-              </a:rPr>
-              <a:t>Model takeaways: </a:t>
-            </a:r>
-            <a:endParaRPr lang="en-US" sz="2400" dirty="0">
-              <a:cs typeface="Times New Roman" panose="02020603050405020304" pitchFamily="18" charset="0"/>
-            </a:endParaRPr>
-          </a:p>
-          <a:p>
-            <a:r>
-              <a:rPr lang="en-US" sz="2400" dirty="0">
-                <a:cs typeface="Times New Roman" panose="02020603050405020304" pitchFamily="18" charset="0"/>
-              </a:rPr>
-              <a:t>“Taste-based” discrimination uses preferences to model disparities </a:t>
-            </a:r>
-          </a:p>
-          <a:p>
-            <a:r>
-              <a:rPr lang="en-US" sz="2400" dirty="0">
-                <a:cs typeface="Times New Roman" panose="02020603050405020304" pitchFamily="18" charset="0"/>
-              </a:rPr>
-              <a:t>Discrimination is countered by the market through segregation</a:t>
-            </a:r>
-          </a:p>
-          <a:p>
-            <a:r>
-              <a:rPr lang="en-US" sz="2400" dirty="0">
-                <a:cs typeface="Times New Roman" panose="02020603050405020304" pitchFamily="18" charset="0"/>
-              </a:rPr>
-              <a:t>Basically a “separate but equal” model of the labor force</a:t>
-            </a:r>
-          </a:p>
-          <a:p>
-            <a:r>
-              <a:rPr lang="en-US" sz="2400" dirty="0">
-                <a:cs typeface="Times New Roman" panose="02020603050405020304" pitchFamily="18" charset="0"/>
-              </a:rPr>
-              <a:t>However, this never explained reality – wage differentials exist and are not countered by the market</a:t>
-            </a:r>
-          </a:p>
-          <a:p>
-            <a:pPr marL="0" indent="0">
-              <a:buNone/>
-            </a:pPr>
-            <a:r>
-              <a:rPr lang="en-US" sz="2400" b="1" dirty="0">
-                <a:cs typeface="Times New Roman" panose="02020603050405020304" pitchFamily="18" charset="0"/>
-              </a:rPr>
-              <a:t>What other models are there? How do they apply to health?</a:t>
-            </a:r>
-          </a:p>
-          <a:p>
-            <a:r>
-              <a:rPr lang="en-US" sz="2400" b="1" dirty="0">
-                <a:cs typeface="Times New Roman" panose="02020603050405020304" pitchFamily="18" charset="0"/>
-              </a:rPr>
-              <a:t>Statistical discrimination: </a:t>
-            </a:r>
-            <a:r>
-              <a:rPr lang="en-US" sz="2400" dirty="0">
-                <a:cs typeface="Times New Roman" panose="02020603050405020304" pitchFamily="18" charset="0"/>
-              </a:rPr>
-              <a:t>Imperfect information, rather than preferences</a:t>
-            </a:r>
-          </a:p>
-          <a:p>
-            <a:r>
-              <a:rPr lang="en-US" sz="2400" i="1" u="sng" dirty="0">
-                <a:cs typeface="Times New Roman" panose="02020603050405020304" pitchFamily="18" charset="0"/>
-              </a:rPr>
-              <a:t>“Agents (e.g., MDs), without intending to discriminate, might apply an otherwise reasonable decision-making rule (e.g., treat according to need), that in practice leads to unequal treatment of members of two groups”</a:t>
-            </a:r>
-          </a:p>
-        </p:txBody>
-      </p:sp>
-    </p:spTree>
-    <p:extLst>
-      <p:ext uri="{BB962C8B-B14F-4D97-AF65-F5344CB8AC3E}">
-        <p14:creationId xmlns:p14="http://schemas.microsoft.com/office/powerpoint/2010/main" val="3246497370"/>
-      </p:ext>
-    </p:extLst>
-  </p:cSld>
-  <p:clrMapOvr>
-    <a:masterClrMapping/>
-  </p:clrMapOvr>
-</p:sld>
-</file>
-
-<file path=ppt/slides/slide18.xml><?xml version="1.0" encoding="utf-8"?>
-<p:sld xmlns:a="http://schemas.openxmlformats.org/drawingml/2006/main" xmlns:r="http://schemas.openxmlformats.org/officeDocument/2006/relationships" xmlns:p="http://schemas.openxmlformats.org/presentationml/2006/main">
-  <p:cSld>
-    <p:spTree>
-      <p:nvGrpSpPr>
-        <p:cNvPr id="1" name=""/>
-        <p:cNvGrpSpPr/>
-        <p:nvPr/>
-      </p:nvGrpSpPr>
-      <p:grpSpPr>
-        <a:xfrm>
-          <a:off x="0" y="0"/>
-          <a:ext cx="0" cy="0"/>
-          <a:chOff x="0" y="0"/>
-          <a:chExt cx="0" cy="0"/>
-        </a:xfrm>
-      </p:grpSpPr>
-      <p:sp>
-        <p:nvSpPr>
-          <p:cNvPr id="4" name="Title 3">
-            <a:extLst>
-              <a:ext uri="{FF2B5EF4-FFF2-40B4-BE49-F238E27FC236}">
-                <a16:creationId xmlns:a16="http://schemas.microsoft.com/office/drawing/2014/main" id="{3959A64B-5C9A-4A9B-BA45-ADECED2E51D9}"/>
-              </a:ext>
-            </a:extLst>
-          </p:cNvPr>
-          <p:cNvSpPr>
-            <a:spLocks noGrp="1"/>
-          </p:cNvSpPr>
-          <p:nvPr>
-            <p:ph type="ctrTitle"/>
-          </p:nvPr>
-        </p:nvSpPr>
-        <p:spPr>
-          <a:xfrm>
-            <a:off x="1261872" y="3247183"/>
-            <a:ext cx="10625328" cy="1298448"/>
-          </a:xfrm>
-        </p:spPr>
-        <p:txBody>
-          <a:bodyPr>
-            <a:normAutofit/>
-          </a:bodyPr>
-          <a:lstStyle/>
-          <a:p>
-            <a:r>
-              <a:rPr lang="en-US" dirty="0"/>
-              <a:t>Balsa and McGuire (2003)</a:t>
-            </a:r>
-          </a:p>
-        </p:txBody>
-      </p:sp>
-      <p:sp>
-        <p:nvSpPr>
-          <p:cNvPr id="7" name="Subtitle 4">
-            <a:extLst>
-              <a:ext uri="{FF2B5EF4-FFF2-40B4-BE49-F238E27FC236}">
-                <a16:creationId xmlns:a16="http://schemas.microsoft.com/office/drawing/2014/main" id="{592755C3-E09C-4692-E8D4-9A9FB12BD9A6}"/>
-              </a:ext>
-            </a:extLst>
-          </p:cNvPr>
-          <p:cNvSpPr txBox="1">
-            <a:spLocks/>
-          </p:cNvSpPr>
-          <p:nvPr/>
-        </p:nvSpPr>
-        <p:spPr>
-          <a:xfrm>
-            <a:off x="1235290" y="4785360"/>
-            <a:ext cx="9966109" cy="1691640"/>
-          </a:xfrm>
-          <a:prstGeom prst="rect">
-            <a:avLst/>
-          </a:prstGeom>
-        </p:spPr>
-        <p:txBody>
-          <a:bodyPr vert="horz" lIns="91440" tIns="45720" rIns="91440" bIns="45720" rtlCol="0">
-            <a:normAutofit/>
-          </a:bodyPr>
-          <a:lstStyle>
-            <a:lvl1pPr marL="0" indent="0" algn="l" defTabSz="914400" rtl="0" eaLnBrk="1" latinLnBrk="0" hangingPunct="1">
-              <a:lnSpc>
-                <a:spcPct val="95000"/>
-              </a:lnSpc>
-              <a:spcBef>
-                <a:spcPts val="1400"/>
-              </a:spcBef>
-              <a:spcAft>
-                <a:spcPts val="200"/>
-              </a:spcAft>
-              <a:buClr>
-                <a:schemeClr val="accent1"/>
-              </a:buClr>
-              <a:buSzPct val="80000"/>
-              <a:buFont typeface="Arial" pitchFamily="34" charset="0"/>
-              <a:buNone/>
-              <a:defRPr sz="2200" kern="1200" spc="10" baseline="0">
-                <a:solidFill>
-                  <a:schemeClr val="tx1">
-                    <a:lumMod val="75000"/>
-                  </a:schemeClr>
-                </a:solidFill>
-                <a:latin typeface="Times New Roman" panose="02020603050405020304" pitchFamily="18" charset="0"/>
-                <a:ea typeface="+mn-ea"/>
-                <a:cs typeface="+mn-cs"/>
-              </a:defRPr>
-            </a:lvl1pPr>
-            <a:lvl2pPr marL="457200" indent="0" algn="ctr" defTabSz="914400" rtl="0" eaLnBrk="1" latinLnBrk="0" hangingPunct="1">
-              <a:lnSpc>
-                <a:spcPct val="90000"/>
-              </a:lnSpc>
-              <a:spcBef>
-                <a:spcPts val="300"/>
-              </a:spcBef>
-              <a:spcAft>
-                <a:spcPts val="300"/>
-              </a:spcAft>
-              <a:buClr>
-                <a:schemeClr val="accent1"/>
-              </a:buClr>
-              <a:buFont typeface="Wingdings 2" pitchFamily="18" charset="2"/>
-              <a:buNone/>
-              <a:defRPr sz="2200" kern="1200">
-                <a:solidFill>
-                  <a:schemeClr val="tx1">
-                    <a:lumMod val="85000"/>
-                    <a:lumOff val="15000"/>
-                  </a:schemeClr>
-                </a:solidFill>
-                <a:latin typeface="Times New Roman" panose="02020603050405020304" pitchFamily="18" charset="0"/>
-                <a:ea typeface="+mn-ea"/>
-                <a:cs typeface="+mn-cs"/>
-              </a:defRPr>
-            </a:lvl2pPr>
-            <a:lvl3pPr marL="914400" indent="0" algn="ctr" defTabSz="914400" rtl="0" eaLnBrk="1" latinLnBrk="0" hangingPunct="1">
-              <a:lnSpc>
-                <a:spcPct val="90000"/>
-              </a:lnSpc>
-              <a:spcBef>
-                <a:spcPts val="300"/>
-              </a:spcBef>
-              <a:spcAft>
-                <a:spcPts val="300"/>
-              </a:spcAft>
-              <a:buClr>
-                <a:schemeClr val="accent1"/>
-              </a:buClr>
-              <a:buFont typeface="Wingdings 2" pitchFamily="18" charset="2"/>
-              <a:buNone/>
-              <a:defRPr sz="2200" kern="1200">
-                <a:solidFill>
-                  <a:schemeClr val="tx1">
-                    <a:lumMod val="85000"/>
-                    <a:lumOff val="15000"/>
-                  </a:schemeClr>
-                </a:solidFill>
-                <a:latin typeface="Times New Roman" panose="02020603050405020304" pitchFamily="18" charset="0"/>
-                <a:ea typeface="+mn-ea"/>
-                <a:cs typeface="+mn-cs"/>
-              </a:defRPr>
-            </a:lvl3pPr>
-            <a:lvl4pPr marL="1371600" indent="0" algn="ctr" defTabSz="914400" rtl="0" eaLnBrk="1" latinLnBrk="0" hangingPunct="1">
-              <a:lnSpc>
-                <a:spcPct val="90000"/>
-              </a:lnSpc>
-              <a:spcBef>
-                <a:spcPts val="300"/>
-              </a:spcBef>
-              <a:spcAft>
-                <a:spcPts val="300"/>
-              </a:spcAft>
-              <a:buClr>
-                <a:schemeClr val="accent1"/>
-              </a:buClr>
-              <a:buFont typeface="Wingdings 2" pitchFamily="18" charset="2"/>
-              <a:buNone/>
-              <a:defRPr sz="2000" kern="1200">
-                <a:solidFill>
-                  <a:schemeClr val="tx1">
-                    <a:lumMod val="85000"/>
-                    <a:lumOff val="15000"/>
-                  </a:schemeClr>
-                </a:solidFill>
-                <a:latin typeface="Times New Roman" panose="02020603050405020304" pitchFamily="18" charset="0"/>
-                <a:ea typeface="+mn-ea"/>
-                <a:cs typeface="+mn-cs"/>
-              </a:defRPr>
-            </a:lvl4pPr>
-            <a:lvl5pPr marL="1828800" indent="0" algn="ctr" defTabSz="914400" rtl="0" eaLnBrk="1" latinLnBrk="0" hangingPunct="1">
-              <a:lnSpc>
-                <a:spcPct val="90000"/>
-              </a:lnSpc>
-              <a:spcBef>
-                <a:spcPts val="300"/>
-              </a:spcBef>
-              <a:spcAft>
-                <a:spcPts val="300"/>
-              </a:spcAft>
-              <a:buClr>
-                <a:schemeClr val="accent1"/>
-              </a:buClr>
-              <a:buFont typeface="Wingdings 2" pitchFamily="18" charset="2"/>
-              <a:buNone/>
-              <a:defRPr sz="2000" kern="1200">
-                <a:solidFill>
-                  <a:schemeClr val="tx1">
-                    <a:lumMod val="85000"/>
-                    <a:lumOff val="15000"/>
-                  </a:schemeClr>
-                </a:solidFill>
-                <a:latin typeface="Times New Roman" panose="02020603050405020304" pitchFamily="18" charset="0"/>
-                <a:ea typeface="+mn-ea"/>
-                <a:cs typeface="+mn-cs"/>
-              </a:defRPr>
-            </a:lvl5pPr>
-            <a:lvl6pPr marL="2286000" indent="0" algn="ctr" defTabSz="914400" rtl="0" eaLnBrk="1" latinLnBrk="0" hangingPunct="1">
-              <a:lnSpc>
-                <a:spcPct val="90000"/>
-              </a:lnSpc>
-              <a:spcBef>
-                <a:spcPts val="300"/>
-              </a:spcBef>
-              <a:spcAft>
-                <a:spcPts val="300"/>
-              </a:spcAft>
-              <a:buClr>
-                <a:schemeClr val="accent1"/>
-              </a:buClr>
-              <a:buFont typeface="Wingdings 2" pitchFamily="18" charset="2"/>
-              <a:buNone/>
-              <a:defRPr sz="2000" kern="1200">
-                <a:solidFill>
-                  <a:schemeClr val="tx1">
-                    <a:lumMod val="85000"/>
-                    <a:lumOff val="15000"/>
-                  </a:schemeClr>
-                </a:solidFill>
-                <a:latin typeface="+mn-lt"/>
-                <a:ea typeface="+mn-ea"/>
-                <a:cs typeface="+mn-cs"/>
-              </a:defRPr>
-            </a:lvl6pPr>
-            <a:lvl7pPr marL="2743200" indent="0" algn="ctr" defTabSz="914400" rtl="0" eaLnBrk="1" latinLnBrk="0" hangingPunct="1">
-              <a:lnSpc>
-                <a:spcPct val="90000"/>
-              </a:lnSpc>
-              <a:spcBef>
-                <a:spcPts val="300"/>
-              </a:spcBef>
-              <a:spcAft>
-                <a:spcPts val="300"/>
-              </a:spcAft>
-              <a:buClr>
-                <a:schemeClr val="accent1"/>
-              </a:buClr>
-              <a:buFont typeface="Wingdings 2" pitchFamily="18" charset="2"/>
-              <a:buNone/>
-              <a:defRPr sz="2000" kern="1200">
-                <a:solidFill>
-                  <a:schemeClr val="tx1">
-                    <a:lumMod val="85000"/>
-                    <a:lumOff val="15000"/>
-                  </a:schemeClr>
-                </a:solidFill>
-                <a:latin typeface="+mn-lt"/>
-                <a:ea typeface="+mn-ea"/>
-                <a:cs typeface="+mn-cs"/>
-              </a:defRPr>
-            </a:lvl7pPr>
-            <a:lvl8pPr marL="3200400" indent="0" algn="ctr" defTabSz="914400" rtl="0" eaLnBrk="1" latinLnBrk="0" hangingPunct="1">
-              <a:lnSpc>
-                <a:spcPct val="90000"/>
-              </a:lnSpc>
-              <a:spcBef>
-                <a:spcPts val="300"/>
-              </a:spcBef>
-              <a:spcAft>
-                <a:spcPts val="300"/>
-              </a:spcAft>
-              <a:buClr>
-                <a:schemeClr val="accent1"/>
-              </a:buClr>
-              <a:buFont typeface="Wingdings 2" pitchFamily="18" charset="2"/>
-              <a:buNone/>
-              <a:defRPr sz="2000" kern="1200">
-                <a:solidFill>
-                  <a:schemeClr val="tx1">
-                    <a:lumMod val="85000"/>
-                    <a:lumOff val="15000"/>
-                  </a:schemeClr>
-                </a:solidFill>
-                <a:latin typeface="+mn-lt"/>
-                <a:ea typeface="+mn-ea"/>
-                <a:cs typeface="+mn-cs"/>
-              </a:defRPr>
-            </a:lvl8pPr>
-            <a:lvl9pPr marL="3657600" indent="0" algn="ctr" defTabSz="914400" rtl="0" eaLnBrk="1" latinLnBrk="0" hangingPunct="1">
-              <a:lnSpc>
-                <a:spcPct val="90000"/>
-              </a:lnSpc>
-              <a:spcBef>
-                <a:spcPts val="300"/>
-              </a:spcBef>
-              <a:spcAft>
-                <a:spcPts val="300"/>
-              </a:spcAft>
-              <a:buClr>
-                <a:schemeClr val="accent1"/>
-              </a:buClr>
-              <a:buFont typeface="Wingdings 2" pitchFamily="18" charset="2"/>
-              <a:buNone/>
-              <a:defRPr sz="2000" kern="1200">
-                <a:solidFill>
-                  <a:schemeClr val="tx1">
-                    <a:lumMod val="85000"/>
-                    <a:lumOff val="15000"/>
-                  </a:schemeClr>
-                </a:solidFill>
-                <a:latin typeface="+mn-lt"/>
-                <a:ea typeface="+mn-ea"/>
-                <a:cs typeface="+mn-cs"/>
-              </a:defRPr>
-            </a:lvl9pPr>
-          </a:lstStyle>
-          <a:p>
-            <a:r>
-              <a:rPr lang="en-US" sz="2400" dirty="0"/>
-              <a:t>“Prejudice, clinical uncertainty and stereotyping as sources of health disparities”</a:t>
-            </a:r>
-          </a:p>
-          <a:p>
-            <a:r>
-              <a:rPr lang="en-US" sz="2400" i="1" dirty="0"/>
-              <a:t>Journal of Health Economics</a:t>
-            </a:r>
-            <a:endParaRPr lang="en-US" sz="2400" dirty="0"/>
-          </a:p>
-        </p:txBody>
-      </p:sp>
-      <p:sp>
-        <p:nvSpPr>
-          <p:cNvPr id="2" name="Title 3">
-            <a:extLst>
-              <a:ext uri="{FF2B5EF4-FFF2-40B4-BE49-F238E27FC236}">
-                <a16:creationId xmlns:a16="http://schemas.microsoft.com/office/drawing/2014/main" id="{980B3585-3782-52AE-C43B-0F077ACB8896}"/>
-              </a:ext>
-            </a:extLst>
-          </p:cNvPr>
-          <p:cNvSpPr txBox="1">
-            <a:spLocks/>
-          </p:cNvSpPr>
-          <p:nvPr/>
-        </p:nvSpPr>
-        <p:spPr>
-          <a:xfrm>
-            <a:off x="1245782" y="427783"/>
-            <a:ext cx="10625328" cy="1298448"/>
-          </a:xfrm>
-          <a:prstGeom prst="rect">
-            <a:avLst/>
-          </a:prstGeom>
-        </p:spPr>
-        <p:txBody>
-          <a:bodyPr vert="horz" lIns="91440" tIns="45720" rIns="91440" bIns="45720" rtlCol="0" anchor="b">
-            <a:normAutofit/>
-          </a:bodyPr>
-          <a:lstStyle>
-            <a:lvl1pPr algn="l" defTabSz="914400" rtl="0" eaLnBrk="1" latinLnBrk="0" hangingPunct="1">
-              <a:lnSpc>
-                <a:spcPct val="85000"/>
-              </a:lnSpc>
-              <a:spcBef>
-                <a:spcPct val="0"/>
-              </a:spcBef>
-              <a:buNone/>
-              <a:defRPr sz="7200" kern="1200" spc="-50" baseline="0">
-                <a:solidFill>
-                  <a:schemeClr val="tx1"/>
-                </a:solidFill>
-                <a:latin typeface="Times New Roman" panose="02020603050405020304" pitchFamily="18" charset="0"/>
-                <a:ea typeface="+mj-ea"/>
-                <a:cs typeface="+mj-cs"/>
-              </a:defRPr>
-            </a:lvl1pPr>
-          </a:lstStyle>
-          <a:p>
-            <a:r>
-              <a:rPr lang="en-US"/>
-              <a:t>Balsa and McGuire (2001)</a:t>
-            </a:r>
-            <a:endParaRPr lang="en-US" dirty="0"/>
-          </a:p>
-        </p:txBody>
-      </p:sp>
-      <p:sp>
-        <p:nvSpPr>
-          <p:cNvPr id="3" name="Subtitle 4">
-            <a:extLst>
-              <a:ext uri="{FF2B5EF4-FFF2-40B4-BE49-F238E27FC236}">
-                <a16:creationId xmlns:a16="http://schemas.microsoft.com/office/drawing/2014/main" id="{086A32F1-950E-8FBA-1168-47F4B1F3AB7D}"/>
-              </a:ext>
-            </a:extLst>
-          </p:cNvPr>
-          <p:cNvSpPr txBox="1">
-            <a:spLocks/>
-          </p:cNvSpPr>
-          <p:nvPr/>
-        </p:nvSpPr>
-        <p:spPr>
-          <a:xfrm>
-            <a:off x="1219200" y="1965960"/>
-            <a:ext cx="9966109" cy="1691640"/>
-          </a:xfrm>
-          <a:prstGeom prst="rect">
-            <a:avLst/>
-          </a:prstGeom>
-        </p:spPr>
-        <p:txBody>
-          <a:bodyPr vert="horz" lIns="91440" tIns="45720" rIns="91440" bIns="45720" rtlCol="0">
-            <a:normAutofit/>
-          </a:bodyPr>
-          <a:lstStyle>
-            <a:lvl1pPr marL="0" indent="0" algn="l" defTabSz="914400" rtl="0" eaLnBrk="1" latinLnBrk="0" hangingPunct="1">
-              <a:lnSpc>
-                <a:spcPct val="95000"/>
-              </a:lnSpc>
-              <a:spcBef>
-                <a:spcPts val="1400"/>
-              </a:spcBef>
-              <a:spcAft>
-                <a:spcPts val="200"/>
-              </a:spcAft>
-              <a:buClr>
-                <a:schemeClr val="accent1"/>
-              </a:buClr>
-              <a:buSzPct val="80000"/>
-              <a:buFont typeface="Arial" pitchFamily="34" charset="0"/>
-              <a:buNone/>
-              <a:defRPr sz="2200" kern="1200" spc="10" baseline="0">
-                <a:solidFill>
-                  <a:schemeClr val="tx1">
-                    <a:lumMod val="75000"/>
-                  </a:schemeClr>
-                </a:solidFill>
-                <a:latin typeface="Times New Roman" panose="02020603050405020304" pitchFamily="18" charset="0"/>
-                <a:ea typeface="+mn-ea"/>
-                <a:cs typeface="+mn-cs"/>
-              </a:defRPr>
-            </a:lvl1pPr>
-            <a:lvl2pPr marL="457200" indent="0" algn="ctr" defTabSz="914400" rtl="0" eaLnBrk="1" latinLnBrk="0" hangingPunct="1">
-              <a:lnSpc>
-                <a:spcPct val="90000"/>
-              </a:lnSpc>
-              <a:spcBef>
-                <a:spcPts val="300"/>
-              </a:spcBef>
-              <a:spcAft>
-                <a:spcPts val="300"/>
-              </a:spcAft>
-              <a:buClr>
-                <a:schemeClr val="accent1"/>
-              </a:buClr>
-              <a:buFont typeface="Wingdings 2" pitchFamily="18" charset="2"/>
-              <a:buNone/>
-              <a:defRPr sz="2200" kern="1200">
-                <a:solidFill>
-                  <a:schemeClr val="tx1">
-                    <a:lumMod val="85000"/>
-                    <a:lumOff val="15000"/>
-                  </a:schemeClr>
-                </a:solidFill>
-                <a:latin typeface="Times New Roman" panose="02020603050405020304" pitchFamily="18" charset="0"/>
-                <a:ea typeface="+mn-ea"/>
-                <a:cs typeface="+mn-cs"/>
-              </a:defRPr>
-            </a:lvl2pPr>
-            <a:lvl3pPr marL="914400" indent="0" algn="ctr" defTabSz="914400" rtl="0" eaLnBrk="1" latinLnBrk="0" hangingPunct="1">
-              <a:lnSpc>
-                <a:spcPct val="90000"/>
-              </a:lnSpc>
-              <a:spcBef>
-                <a:spcPts val="300"/>
-              </a:spcBef>
-              <a:spcAft>
-                <a:spcPts val="300"/>
-              </a:spcAft>
-              <a:buClr>
-                <a:schemeClr val="accent1"/>
-              </a:buClr>
-              <a:buFont typeface="Wingdings 2" pitchFamily="18" charset="2"/>
-              <a:buNone/>
-              <a:defRPr sz="2200" kern="1200">
-                <a:solidFill>
-                  <a:schemeClr val="tx1">
-                    <a:lumMod val="85000"/>
-                    <a:lumOff val="15000"/>
-                  </a:schemeClr>
-                </a:solidFill>
-                <a:latin typeface="Times New Roman" panose="02020603050405020304" pitchFamily="18" charset="0"/>
-                <a:ea typeface="+mn-ea"/>
-                <a:cs typeface="+mn-cs"/>
-              </a:defRPr>
-            </a:lvl3pPr>
-            <a:lvl4pPr marL="1371600" indent="0" algn="ctr" defTabSz="914400" rtl="0" eaLnBrk="1" latinLnBrk="0" hangingPunct="1">
-              <a:lnSpc>
-                <a:spcPct val="90000"/>
-              </a:lnSpc>
-              <a:spcBef>
-                <a:spcPts val="300"/>
-              </a:spcBef>
-              <a:spcAft>
-                <a:spcPts val="300"/>
-              </a:spcAft>
-              <a:buClr>
-                <a:schemeClr val="accent1"/>
-              </a:buClr>
-              <a:buFont typeface="Wingdings 2" pitchFamily="18" charset="2"/>
-              <a:buNone/>
-              <a:defRPr sz="2000" kern="1200">
-                <a:solidFill>
-                  <a:schemeClr val="tx1">
-                    <a:lumMod val="85000"/>
-                    <a:lumOff val="15000"/>
-                  </a:schemeClr>
-                </a:solidFill>
-                <a:latin typeface="Times New Roman" panose="02020603050405020304" pitchFamily="18" charset="0"/>
-                <a:ea typeface="+mn-ea"/>
-                <a:cs typeface="+mn-cs"/>
-              </a:defRPr>
-            </a:lvl4pPr>
-            <a:lvl5pPr marL="1828800" indent="0" algn="ctr" defTabSz="914400" rtl="0" eaLnBrk="1" latinLnBrk="0" hangingPunct="1">
-              <a:lnSpc>
-                <a:spcPct val="90000"/>
-              </a:lnSpc>
-              <a:spcBef>
-                <a:spcPts val="300"/>
-              </a:spcBef>
-              <a:spcAft>
-                <a:spcPts val="300"/>
-              </a:spcAft>
-              <a:buClr>
-                <a:schemeClr val="accent1"/>
-              </a:buClr>
-              <a:buFont typeface="Wingdings 2" pitchFamily="18" charset="2"/>
-              <a:buNone/>
-              <a:defRPr sz="2000" kern="1200">
-                <a:solidFill>
-                  <a:schemeClr val="tx1">
-                    <a:lumMod val="85000"/>
-                    <a:lumOff val="15000"/>
-                  </a:schemeClr>
-                </a:solidFill>
-                <a:latin typeface="Times New Roman" panose="02020603050405020304" pitchFamily="18" charset="0"/>
-                <a:ea typeface="+mn-ea"/>
-                <a:cs typeface="+mn-cs"/>
-              </a:defRPr>
-            </a:lvl5pPr>
-            <a:lvl6pPr marL="2286000" indent="0" algn="ctr" defTabSz="914400" rtl="0" eaLnBrk="1" latinLnBrk="0" hangingPunct="1">
-              <a:lnSpc>
-                <a:spcPct val="90000"/>
-              </a:lnSpc>
-              <a:spcBef>
-                <a:spcPts val="300"/>
-              </a:spcBef>
-              <a:spcAft>
-                <a:spcPts val="300"/>
-              </a:spcAft>
-              <a:buClr>
-                <a:schemeClr val="accent1"/>
-              </a:buClr>
-              <a:buFont typeface="Wingdings 2" pitchFamily="18" charset="2"/>
-              <a:buNone/>
-              <a:defRPr sz="2000" kern="1200">
-                <a:solidFill>
-                  <a:schemeClr val="tx1">
-                    <a:lumMod val="85000"/>
-                    <a:lumOff val="15000"/>
-                  </a:schemeClr>
-                </a:solidFill>
-                <a:latin typeface="+mn-lt"/>
-                <a:ea typeface="+mn-ea"/>
-                <a:cs typeface="+mn-cs"/>
-              </a:defRPr>
-            </a:lvl6pPr>
-            <a:lvl7pPr marL="2743200" indent="0" algn="ctr" defTabSz="914400" rtl="0" eaLnBrk="1" latinLnBrk="0" hangingPunct="1">
-              <a:lnSpc>
-                <a:spcPct val="90000"/>
-              </a:lnSpc>
-              <a:spcBef>
-                <a:spcPts val="300"/>
-              </a:spcBef>
-              <a:spcAft>
-                <a:spcPts val="300"/>
-              </a:spcAft>
-              <a:buClr>
-                <a:schemeClr val="accent1"/>
-              </a:buClr>
-              <a:buFont typeface="Wingdings 2" pitchFamily="18" charset="2"/>
-              <a:buNone/>
-              <a:defRPr sz="2000" kern="1200">
-                <a:solidFill>
-                  <a:schemeClr val="tx1">
-                    <a:lumMod val="85000"/>
-                    <a:lumOff val="15000"/>
-                  </a:schemeClr>
-                </a:solidFill>
-                <a:latin typeface="+mn-lt"/>
-                <a:ea typeface="+mn-ea"/>
-                <a:cs typeface="+mn-cs"/>
-              </a:defRPr>
-            </a:lvl7pPr>
-            <a:lvl8pPr marL="3200400" indent="0" algn="ctr" defTabSz="914400" rtl="0" eaLnBrk="1" latinLnBrk="0" hangingPunct="1">
-              <a:lnSpc>
-                <a:spcPct val="90000"/>
-              </a:lnSpc>
-              <a:spcBef>
-                <a:spcPts val="300"/>
-              </a:spcBef>
-              <a:spcAft>
-                <a:spcPts val="300"/>
-              </a:spcAft>
-              <a:buClr>
-                <a:schemeClr val="accent1"/>
-              </a:buClr>
-              <a:buFont typeface="Wingdings 2" pitchFamily="18" charset="2"/>
-              <a:buNone/>
-              <a:defRPr sz="2000" kern="1200">
-                <a:solidFill>
-                  <a:schemeClr val="tx1">
-                    <a:lumMod val="85000"/>
-                    <a:lumOff val="15000"/>
-                  </a:schemeClr>
-                </a:solidFill>
-                <a:latin typeface="+mn-lt"/>
-                <a:ea typeface="+mn-ea"/>
-                <a:cs typeface="+mn-cs"/>
-              </a:defRPr>
-            </a:lvl8pPr>
-            <a:lvl9pPr marL="3657600" indent="0" algn="ctr" defTabSz="914400" rtl="0" eaLnBrk="1" latinLnBrk="0" hangingPunct="1">
-              <a:lnSpc>
-                <a:spcPct val="90000"/>
-              </a:lnSpc>
-              <a:spcBef>
-                <a:spcPts val="300"/>
-              </a:spcBef>
-              <a:spcAft>
-                <a:spcPts val="300"/>
-              </a:spcAft>
-              <a:buClr>
-                <a:schemeClr val="accent1"/>
-              </a:buClr>
-              <a:buFont typeface="Wingdings 2" pitchFamily="18" charset="2"/>
-              <a:buNone/>
-              <a:defRPr sz="2000" kern="1200">
-                <a:solidFill>
-                  <a:schemeClr val="tx1">
-                    <a:lumMod val="85000"/>
-                    <a:lumOff val="15000"/>
-                  </a:schemeClr>
-                </a:solidFill>
-                <a:latin typeface="+mn-lt"/>
-                <a:ea typeface="+mn-ea"/>
-                <a:cs typeface="+mn-cs"/>
-              </a:defRPr>
-            </a:lvl9pPr>
-          </a:lstStyle>
-          <a:p>
-            <a:r>
-              <a:rPr lang="en-US" sz="2400" dirty="0"/>
-              <a:t>“Statistical Discrimination in Health Care”</a:t>
-            </a:r>
-          </a:p>
-          <a:p>
-            <a:r>
-              <a:rPr lang="en-US" sz="2400" i="1" dirty="0"/>
-              <a:t>Journal of Health Economics</a:t>
-            </a:r>
-            <a:endParaRPr lang="en-US" sz="2400" dirty="0"/>
-          </a:p>
-        </p:txBody>
-      </p:sp>
-    </p:spTree>
-    <p:extLst>
-      <p:ext uri="{BB962C8B-B14F-4D97-AF65-F5344CB8AC3E}">
-        <p14:creationId xmlns:p14="http://schemas.microsoft.com/office/powerpoint/2010/main" val="4163151692"/>
-      </p:ext>
-    </p:extLst>
-  </p:cSld>
-  <p:clrMapOvr>
-    <a:masterClrMapping/>
-  </p:clrMapOvr>
-</p:sld>
-</file>
-
 <file path=ppt/slides/slide19.xml><?xml version="1.0" encoding="utf-8"?>
 <p:sld xmlns:a="http://schemas.openxmlformats.org/drawingml/2006/main" xmlns:r="http://schemas.openxmlformats.org/officeDocument/2006/relationships" xmlns:p="http://schemas.openxmlformats.org/presentationml/2006/main">
   <p:cSld>
@@ -13987,7 +14034,7 @@
               <a:rPr lang="en-US" sz="3600" dirty="0">
                 <a:cs typeface="Times New Roman" panose="02020603050405020304" pitchFamily="18" charset="0"/>
               </a:rPr>
-              <a:t>Statistical Discrimination and Disparities in Treatment</a:t>
+              <a:t>A First Pass at Models of Discrimination</a:t>
             </a:r>
             <a:endParaRPr lang="en-US" sz="3600" dirty="0">
               <a:latin typeface="Times New Roman" panose="02020603050405020304" pitchFamily="18" charset="0"/>
@@ -13996,384 +14043,79 @@
           </a:p>
         </p:txBody>
       </p:sp>
-      <mc:AlternateContent xmlns:mc="http://schemas.openxmlformats.org/markup-compatibility/2006" xmlns:a14="http://schemas.microsoft.com/office/drawing/2010/main">
-        <mc:Choice Requires="a14">
-          <p:sp>
-            <p:nvSpPr>
-              <p:cNvPr id="3" name="Content Placeholder 2"/>
-              <p:cNvSpPr>
-                <a:spLocks noGrp="1"/>
-              </p:cNvSpPr>
-              <p:nvPr>
-                <p:ph idx="1"/>
-              </p:nvPr>
-            </p:nvSpPr>
-            <p:spPr>
-              <a:xfrm>
-                <a:off x="609601" y="1066801"/>
-                <a:ext cx="10439400" cy="5141388"/>
-              </a:xfrm>
-            </p:spPr>
-            <p:txBody>
-              <a:bodyPr>
-                <a:noAutofit/>
-              </a:bodyPr>
-              <a:lstStyle/>
-              <a:p>
-                <a:r>
-                  <a:rPr lang="en-US" sz="2400" dirty="0">
-                    <a:cs typeface="Times New Roman" panose="02020603050405020304" pitchFamily="18" charset="0"/>
-                  </a:rPr>
-                  <a:t>Consider a simple case: one illness, one treatment, one (majority) physician</a:t>
-                </a:r>
-              </a:p>
-              <a:p>
-                <a:r>
-                  <a:rPr lang="en-US" sz="2400" dirty="0">
-                    <a:cs typeface="Times New Roman" panose="02020603050405020304" pitchFamily="18" charset="0"/>
-                  </a:rPr>
-                  <a:t>Patients have an underlying need to be treated </a:t>
-                </a:r>
-                <a14:m>
-                  <m:oMath xmlns:m="http://schemas.openxmlformats.org/officeDocument/2006/math">
-                    <m:r>
-                      <a:rPr lang="en-US" sz="2400" b="0" i="1" smtClean="0">
-                        <a:latin typeface="Cambria Math" panose="02040503050406030204" pitchFamily="18" charset="0"/>
-                        <a:cs typeface="Times New Roman" panose="02020603050405020304" pitchFamily="18" charset="0"/>
-                      </a:rPr>
-                      <m:t>𝑍</m:t>
-                    </m:r>
-                    <m:r>
-                      <a:rPr lang="en-US" sz="2400" b="0" i="1" smtClean="0">
-                        <a:latin typeface="Cambria Math" panose="02040503050406030204" pitchFamily="18" charset="0"/>
-                        <a:cs typeface="Times New Roman" panose="02020603050405020304" pitchFamily="18" charset="0"/>
-                      </a:rPr>
-                      <m:t>∼</m:t>
-                    </m:r>
-                    <m:r>
-                      <a:rPr lang="en-US" sz="2400" b="0" i="1" smtClean="0">
-                        <a:latin typeface="Cambria Math" panose="02040503050406030204" pitchFamily="18" charset="0"/>
-                        <a:cs typeface="Times New Roman" panose="02020603050405020304" pitchFamily="18" charset="0"/>
-                      </a:rPr>
-                      <m:t>𝑁</m:t>
-                    </m:r>
-                    <m:r>
-                      <a:rPr lang="en-US" sz="2400" b="0" i="1" smtClean="0">
-                        <a:latin typeface="Cambria Math" panose="02040503050406030204" pitchFamily="18" charset="0"/>
-                        <a:cs typeface="Times New Roman" panose="02020603050405020304" pitchFamily="18" charset="0"/>
-                      </a:rPr>
-                      <m:t>(</m:t>
-                    </m:r>
-                    <m:sSub>
-                      <m:sSubPr>
-                        <m:ctrlPr>
-                          <a:rPr lang="en-US" sz="2400" b="0" i="1" smtClean="0">
-                            <a:latin typeface="Cambria Math" panose="02040503050406030204" pitchFamily="18" charset="0"/>
-                            <a:cs typeface="Times New Roman" panose="02020603050405020304" pitchFamily="18" charset="0"/>
-                          </a:rPr>
-                        </m:ctrlPr>
-                      </m:sSubPr>
-                      <m:e>
-                        <m:r>
-                          <a:rPr lang="en-US" sz="2400" b="0" i="1" smtClean="0">
-                            <a:latin typeface="Cambria Math" panose="02040503050406030204" pitchFamily="18" charset="0"/>
-                            <a:cs typeface="Times New Roman" panose="02020603050405020304" pitchFamily="18" charset="0"/>
-                          </a:rPr>
-                          <m:t>𝜇</m:t>
-                        </m:r>
-                      </m:e>
-                      <m:sub>
-                        <m:r>
-                          <a:rPr lang="en-US" sz="2400" b="0" i="1" smtClean="0">
-                            <a:latin typeface="Cambria Math" panose="02040503050406030204" pitchFamily="18" charset="0"/>
-                            <a:cs typeface="Times New Roman" panose="02020603050405020304" pitchFamily="18" charset="0"/>
-                          </a:rPr>
-                          <m:t>𝑍</m:t>
-                        </m:r>
-                      </m:sub>
-                    </m:sSub>
-                    <m:r>
-                      <a:rPr lang="en-US" sz="2400" b="0" i="1" smtClean="0">
-                        <a:latin typeface="Cambria Math" panose="02040503050406030204" pitchFamily="18" charset="0"/>
-                        <a:cs typeface="Times New Roman" panose="02020603050405020304" pitchFamily="18" charset="0"/>
-                      </a:rPr>
-                      <m:t>,</m:t>
-                    </m:r>
-                    <m:sSubSup>
-                      <m:sSubSupPr>
-                        <m:ctrlPr>
-                          <a:rPr lang="en-US" sz="2400" b="0" i="1" smtClean="0">
-                            <a:latin typeface="Cambria Math" panose="02040503050406030204" pitchFamily="18" charset="0"/>
-                            <a:cs typeface="Times New Roman" panose="02020603050405020304" pitchFamily="18" charset="0"/>
-                          </a:rPr>
-                        </m:ctrlPr>
-                      </m:sSubSupPr>
-                      <m:e>
-                        <m:r>
-                          <a:rPr lang="en-US" sz="2400" b="0" i="1" smtClean="0">
-                            <a:latin typeface="Cambria Math" panose="02040503050406030204" pitchFamily="18" charset="0"/>
-                            <a:cs typeface="Times New Roman" panose="02020603050405020304" pitchFamily="18" charset="0"/>
-                          </a:rPr>
-                          <m:t>𝜎</m:t>
-                        </m:r>
-                      </m:e>
-                      <m:sub>
-                        <m:r>
-                          <a:rPr lang="en-US" sz="2400" b="0" i="1" smtClean="0">
-                            <a:latin typeface="Cambria Math" panose="02040503050406030204" pitchFamily="18" charset="0"/>
-                            <a:cs typeface="Times New Roman" panose="02020603050405020304" pitchFamily="18" charset="0"/>
-                          </a:rPr>
-                          <m:t>𝑍</m:t>
-                        </m:r>
-                      </m:sub>
-                      <m:sup>
-                        <m:r>
-                          <a:rPr lang="en-US" sz="2400" b="0" i="1" smtClean="0">
-                            <a:latin typeface="Cambria Math" panose="02040503050406030204" pitchFamily="18" charset="0"/>
-                            <a:cs typeface="Times New Roman" panose="02020603050405020304" pitchFamily="18" charset="0"/>
-                          </a:rPr>
-                          <m:t>2</m:t>
-                        </m:r>
-                      </m:sup>
-                    </m:sSubSup>
-                    <m:r>
-                      <a:rPr lang="en-US" sz="2400" b="0" i="1" smtClean="0">
-                        <a:latin typeface="Cambria Math" panose="02040503050406030204" pitchFamily="18" charset="0"/>
-                        <a:cs typeface="Times New Roman" panose="02020603050405020304" pitchFamily="18" charset="0"/>
-                      </a:rPr>
-                      <m:t>)</m:t>
-                    </m:r>
-                  </m:oMath>
-                </a14:m>
-                <a:r>
-                  <a:rPr lang="en-US" sz="2400" dirty="0">
-                    <a:cs typeface="Times New Roman" panose="02020603050405020304" pitchFamily="18" charset="0"/>
-                  </a:rPr>
-                  <a:t> </a:t>
-                </a:r>
-              </a:p>
-              <a:p>
-                <a:r>
-                  <a:rPr lang="en-US" sz="2400" dirty="0">
-                    <a:cs typeface="Times New Roman" panose="02020603050405020304" pitchFamily="18" charset="0"/>
-                  </a:rPr>
-                  <a:t>However, doctor observes a signal </a:t>
-                </a:r>
-                <a14:m>
-                  <m:oMath xmlns:m="http://schemas.openxmlformats.org/officeDocument/2006/math">
-                    <m:r>
-                      <m:rPr>
-                        <m:sty m:val="p"/>
-                      </m:rPr>
-                      <a:rPr lang="en-US" sz="2400" b="0" i="0" smtClean="0">
-                        <a:latin typeface="Cambria Math" panose="02040503050406030204" pitchFamily="18" charset="0"/>
-                        <a:cs typeface="Times New Roman" panose="02020603050405020304" pitchFamily="18" charset="0"/>
-                      </a:rPr>
-                      <m:t>S</m:t>
-                    </m:r>
-                    <m:r>
-                      <a:rPr lang="en-US" sz="2400" b="0" i="0" smtClean="0">
-                        <a:latin typeface="Cambria Math" panose="02040503050406030204" pitchFamily="18" charset="0"/>
-                        <a:cs typeface="Times New Roman" panose="02020603050405020304" pitchFamily="18" charset="0"/>
-                      </a:rPr>
-                      <m:t>=</m:t>
-                    </m:r>
-                    <m:r>
-                      <a:rPr lang="en-US" sz="2400" b="0" i="1" smtClean="0">
-                        <a:latin typeface="Cambria Math" panose="02040503050406030204" pitchFamily="18" charset="0"/>
-                        <a:cs typeface="Times New Roman" panose="02020603050405020304" pitchFamily="18" charset="0"/>
-                      </a:rPr>
-                      <m:t>𝑍</m:t>
-                    </m:r>
-                    <m:r>
-                      <a:rPr lang="en-US" sz="2400" b="0" i="1" smtClean="0">
-                        <a:latin typeface="Cambria Math" panose="02040503050406030204" pitchFamily="18" charset="0"/>
-                        <a:cs typeface="Times New Roman" panose="02020603050405020304" pitchFamily="18" charset="0"/>
-                      </a:rPr>
-                      <m:t>+</m:t>
-                    </m:r>
-                    <m:r>
-                      <a:rPr lang="en-US" sz="2400" b="0" i="1" smtClean="0">
-                        <a:latin typeface="Cambria Math" panose="02040503050406030204" pitchFamily="18" charset="0"/>
-                        <a:cs typeface="Times New Roman" panose="02020603050405020304" pitchFamily="18" charset="0"/>
-                      </a:rPr>
-                      <m:t>𝜀</m:t>
-                    </m:r>
-                  </m:oMath>
-                </a14:m>
-                <a:r>
-                  <a:rPr lang="en-US" sz="2400" b="0" dirty="0">
-                    <a:cs typeface="Times New Roman" panose="02020603050405020304" pitchFamily="18" charset="0"/>
-                  </a:rPr>
-                  <a:t>, where </a:t>
-                </a:r>
-                <a14:m>
-                  <m:oMath xmlns:m="http://schemas.openxmlformats.org/officeDocument/2006/math">
-                    <m:r>
-                      <a:rPr lang="en-US" sz="2400" b="0" i="1" smtClean="0">
-                        <a:latin typeface="Cambria Math" panose="02040503050406030204" pitchFamily="18" charset="0"/>
-                        <a:cs typeface="Times New Roman" panose="02020603050405020304" pitchFamily="18" charset="0"/>
-                      </a:rPr>
-                      <m:t>𝜀</m:t>
-                    </m:r>
-                    <m:r>
-                      <a:rPr lang="en-US" sz="2400" b="0" i="1" smtClean="0">
-                        <a:latin typeface="Cambria Math" panose="02040503050406030204" pitchFamily="18" charset="0"/>
-                        <a:cs typeface="Times New Roman" panose="02020603050405020304" pitchFamily="18" charset="0"/>
-                      </a:rPr>
-                      <m:t>∼</m:t>
-                    </m:r>
-                    <m:r>
-                      <a:rPr lang="en-US" sz="2400" b="0" i="1" smtClean="0">
-                        <a:latin typeface="Cambria Math" panose="02040503050406030204" pitchFamily="18" charset="0"/>
-                        <a:cs typeface="Times New Roman" panose="02020603050405020304" pitchFamily="18" charset="0"/>
-                      </a:rPr>
-                      <m:t>𝑁</m:t>
-                    </m:r>
-                    <m:r>
-                      <a:rPr lang="en-US" sz="2400" b="0" i="1" smtClean="0">
-                        <a:latin typeface="Cambria Math" panose="02040503050406030204" pitchFamily="18" charset="0"/>
-                        <a:cs typeface="Times New Roman" panose="02020603050405020304" pitchFamily="18" charset="0"/>
-                      </a:rPr>
-                      <m:t>(0,</m:t>
-                    </m:r>
-                    <m:sSubSup>
-                      <m:sSubSupPr>
-                        <m:ctrlPr>
-                          <a:rPr lang="en-US" sz="2400" b="0" i="1" smtClean="0">
-                            <a:latin typeface="Cambria Math" panose="02040503050406030204" pitchFamily="18" charset="0"/>
-                            <a:cs typeface="Times New Roman" panose="02020603050405020304" pitchFamily="18" charset="0"/>
-                          </a:rPr>
-                        </m:ctrlPr>
-                      </m:sSubSupPr>
-                      <m:e>
-                        <m:r>
-                          <a:rPr lang="en-US" sz="2400" b="0" i="1" smtClean="0">
-                            <a:latin typeface="Cambria Math" panose="02040503050406030204" pitchFamily="18" charset="0"/>
-                            <a:cs typeface="Times New Roman" panose="02020603050405020304" pitchFamily="18" charset="0"/>
-                          </a:rPr>
-                          <m:t>𝜎</m:t>
-                        </m:r>
-                      </m:e>
-                      <m:sub>
-                        <m:r>
-                          <a:rPr lang="en-US" sz="2400" b="0" i="1" smtClean="0">
-                            <a:latin typeface="Cambria Math" panose="02040503050406030204" pitchFamily="18" charset="0"/>
-                            <a:cs typeface="Times New Roman" panose="02020603050405020304" pitchFamily="18" charset="0"/>
-                          </a:rPr>
-                          <m:t>𝜀</m:t>
-                        </m:r>
-                      </m:sub>
-                      <m:sup>
-                        <m:r>
-                          <a:rPr lang="en-US" sz="2400" b="0" i="1" smtClean="0">
-                            <a:latin typeface="Cambria Math" panose="02040503050406030204" pitchFamily="18" charset="0"/>
-                            <a:cs typeface="Times New Roman" panose="02020603050405020304" pitchFamily="18" charset="0"/>
-                          </a:rPr>
-                          <m:t>2</m:t>
-                        </m:r>
-                      </m:sup>
-                    </m:sSubSup>
-                    <m:r>
-                      <a:rPr lang="en-US" sz="2400" b="0" i="1" smtClean="0">
-                        <a:latin typeface="Cambria Math" panose="02040503050406030204" pitchFamily="18" charset="0"/>
-                        <a:cs typeface="Times New Roman" panose="02020603050405020304" pitchFamily="18" charset="0"/>
-                      </a:rPr>
-                      <m:t>)</m:t>
-                    </m:r>
-                  </m:oMath>
-                </a14:m>
-                <a:r>
-                  <a:rPr lang="en-US" sz="2400" b="0" dirty="0">
-                    <a:cs typeface="Times New Roman" panose="02020603050405020304" pitchFamily="18" charset="0"/>
-                  </a:rPr>
-                  <a:t> is </a:t>
-                </a:r>
-                <a:r>
-                  <a:rPr lang="en-US" sz="2400" b="0" dirty="0" err="1">
-                    <a:cs typeface="Times New Roman" panose="02020603050405020304" pitchFamily="18" charset="0"/>
-                  </a:rPr>
-                  <a:t>i.i.d.</a:t>
-                </a:r>
-                <a:endParaRPr lang="en-US" sz="2400" b="0" dirty="0">
-                  <a:cs typeface="Times New Roman" panose="02020603050405020304" pitchFamily="18" charset="0"/>
-                </a:endParaRPr>
-              </a:p>
-              <a:p>
-                <a:r>
-                  <a:rPr lang="en-US" sz="2400" dirty="0">
-                    <a:cs typeface="Times New Roman" panose="02020603050405020304" pitchFamily="18" charset="0"/>
-                  </a:rPr>
-                  <a:t>What is the distribution of </a:t>
-                </a:r>
-                <a14:m>
-                  <m:oMath xmlns:m="http://schemas.openxmlformats.org/officeDocument/2006/math">
-                    <m:r>
-                      <a:rPr lang="en-US" sz="2400" b="0" i="1" smtClean="0">
-                        <a:latin typeface="Cambria Math" panose="02040503050406030204" pitchFamily="18" charset="0"/>
-                        <a:cs typeface="Times New Roman" panose="02020603050405020304" pitchFamily="18" charset="0"/>
-                      </a:rPr>
-                      <m:t>𝑆</m:t>
-                    </m:r>
-                  </m:oMath>
-                </a14:m>
-                <a:r>
-                  <a:rPr lang="en-US" sz="2400" b="0" dirty="0">
-                    <a:cs typeface="Times New Roman" panose="02020603050405020304" pitchFamily="18" charset="0"/>
-                  </a:rPr>
-                  <a:t>?</a:t>
-                </a:r>
-              </a:p>
-              <a:p>
-                <a:endParaRPr lang="en-US" sz="2400" dirty="0">
-                  <a:cs typeface="Times New Roman" panose="02020603050405020304" pitchFamily="18" charset="0"/>
-                </a:endParaRPr>
-              </a:p>
-            </p:txBody>
-          </p:sp>
-        </mc:Choice>
-        <mc:Fallback xmlns="">
-          <p:sp>
-            <p:nvSpPr>
-              <p:cNvPr id="3" name="Content Placeholder 2"/>
-              <p:cNvSpPr>
-                <a:spLocks noGrp="1" noRot="1" noChangeAspect="1" noMove="1" noResize="1" noEditPoints="1" noAdjustHandles="1" noChangeArrowheads="1" noChangeShapeType="1" noTextEdit="1"/>
-              </p:cNvSpPr>
-              <p:nvPr>
-                <p:ph idx="1"/>
-              </p:nvPr>
-            </p:nvSpPr>
-            <p:spPr>
-              <a:xfrm>
-                <a:off x="609601" y="1066801"/>
-                <a:ext cx="10439400" cy="5141388"/>
-              </a:xfrm>
-              <a:blipFill>
-                <a:blip r:embed="rId3"/>
-                <a:stretch>
-                  <a:fillRect l="-409" t="-1305"/>
-                </a:stretch>
-              </a:blipFill>
-            </p:spPr>
-            <p:txBody>
-              <a:bodyPr/>
-              <a:lstStyle/>
-              <a:p>
-                <a:r>
-                  <a:rPr lang="en-CA">
-                    <a:noFill/>
-                  </a:rPr>
-                  <a:t> </a:t>
-                </a:r>
-              </a:p>
-            </p:txBody>
-          </p:sp>
-        </mc:Fallback>
-      </mc:AlternateContent>
+      <p:sp>
+        <p:nvSpPr>
+          <p:cNvPr id="3" name="Content Placeholder 2"/>
+          <p:cNvSpPr>
+            <a:spLocks noGrp="1"/>
+          </p:cNvSpPr>
+          <p:nvPr>
+            <p:ph idx="1"/>
+          </p:nvPr>
+        </p:nvSpPr>
+        <p:spPr>
+          <a:xfrm>
+            <a:off x="609601" y="1066801"/>
+            <a:ext cx="10439400" cy="5141388"/>
+          </a:xfrm>
+        </p:spPr>
+        <p:txBody>
+          <a:bodyPr>
+            <a:noAutofit/>
+          </a:bodyPr>
+          <a:lstStyle/>
+          <a:p>
+            <a:pPr marL="0" indent="0">
+              <a:buNone/>
+            </a:pPr>
+            <a:r>
+              <a:rPr lang="en-US" sz="2400" b="1" dirty="0">
+                <a:cs typeface="Times New Roman" panose="02020603050405020304" pitchFamily="18" charset="0"/>
+              </a:rPr>
+              <a:t>Model takeaways: </a:t>
+            </a:r>
+            <a:endParaRPr lang="en-US" sz="2400" dirty="0">
+              <a:cs typeface="Times New Roman" panose="02020603050405020304" pitchFamily="18" charset="0"/>
+            </a:endParaRPr>
+          </a:p>
+          <a:p>
+            <a:r>
+              <a:rPr lang="en-US" sz="2400" dirty="0">
+                <a:cs typeface="Times New Roman" panose="02020603050405020304" pitchFamily="18" charset="0"/>
+              </a:rPr>
+              <a:t>“Taste-based” discrimination uses preferences to model disparities </a:t>
+            </a:r>
+          </a:p>
+          <a:p>
+            <a:r>
+              <a:rPr lang="en-US" sz="2400" dirty="0">
+                <a:cs typeface="Times New Roman" panose="02020603050405020304" pitchFamily="18" charset="0"/>
+              </a:rPr>
+              <a:t>Discrimination is countered by the market through segregation</a:t>
+            </a:r>
+          </a:p>
+          <a:p>
+            <a:r>
+              <a:rPr lang="en-US" sz="2400" dirty="0">
+                <a:cs typeface="Times New Roman" panose="02020603050405020304" pitchFamily="18" charset="0"/>
+              </a:rPr>
+              <a:t>Basically a “separate but equal” model of the labor force</a:t>
+            </a:r>
+          </a:p>
+          <a:p>
+            <a:r>
+              <a:rPr lang="en-US" sz="2400" dirty="0">
+                <a:cs typeface="Times New Roman" panose="02020603050405020304" pitchFamily="18" charset="0"/>
+              </a:rPr>
+              <a:t>However, this never explained reality – wage differentials exist and are not countered by the market</a:t>
+            </a:r>
+          </a:p>
+        </p:txBody>
+      </p:sp>
     </p:spTree>
     <p:extLst>
       <p:ext uri="{BB962C8B-B14F-4D97-AF65-F5344CB8AC3E}">
-        <p14:creationId xmlns:p14="http://schemas.microsoft.com/office/powerpoint/2010/main" val="4252356275"/>
+        <p14:creationId xmlns:p14="http://schemas.microsoft.com/office/powerpoint/2010/main" val="1299323366"/>
       </p:ext>
     </p:extLst>
   </p:cSld>
@@ -15496,32 +15238,49 @@
       </p:pic>
       <p:pic>
         <p:nvPicPr>
-          <p:cNvPr id="39" name="Picture 38">
+          <p:cNvPr id="1026" name="Picture 2">
             <a:extLst>
               <a:ext uri="{FF2B5EF4-FFF2-40B4-BE49-F238E27FC236}">
-                <a16:creationId xmlns:a16="http://schemas.microsoft.com/office/drawing/2014/main" id="{8C940425-CA0C-4D1B-8FE6-1CC0AFD5C301}"/>
+                <a16:creationId xmlns:a16="http://schemas.microsoft.com/office/drawing/2014/main" id="{4BBC7BA8-8F60-CC75-7F1F-608F2B4E63F4}"/>
               </a:ext>
             </a:extLst>
           </p:cNvPr>
           <p:cNvPicPr>
-            <a:picLocks noChangeAspect="1"/>
+            <a:picLocks noChangeAspect="1" noChangeArrowheads="1"/>
           </p:cNvPicPr>
           <p:nvPr/>
         </p:nvPicPr>
         <p:blipFill>
-          <a:blip r:embed="rId15"/>
+          <a:blip r:embed="rId15">
+            <a:extLst>
+              <a:ext uri="{28A0092B-C50C-407E-A947-70E740481C1C}">
+                <a14:useLocalDpi xmlns:a14="http://schemas.microsoft.com/office/drawing/2010/main" val="0"/>
+              </a:ext>
+            </a:extLst>
+          </a:blip>
+          <a:srcRect/>
           <a:stretch>
             <a:fillRect/>
           </a:stretch>
         </p:blipFill>
-        <p:spPr>
+        <p:spPr bwMode="auto">
           <a:xfrm>
-            <a:off x="966107" y="0"/>
-            <a:ext cx="10259786" cy="6858000"/>
+            <a:off x="4763" y="0"/>
+            <a:ext cx="12184062" cy="6858000"/>
           </a:xfrm>
           <a:prstGeom prst="rect">
             <a:avLst/>
           </a:prstGeom>
+          <a:noFill/>
+          <a:extLst>
+            <a:ext uri="{909E8E84-426E-40DD-AFC4-6F175D3DCCD1}">
+              <a14:hiddenFill xmlns:a14="http://schemas.microsoft.com/office/drawing/2010/main">
+                <a:solidFill>
+                  <a:srgbClr val="FFFFFF"/>
+                </a:solidFill>
+              </a14:hiddenFill>
+            </a:ext>
+          </a:extLst>
         </p:spPr>
       </p:pic>
     </p:spTree>
@@ -15538,6 +15297,1306 @@
 </file>
 
 <file path=ppt/slides/slide20.xml><?xml version="1.0" encoding="utf-8"?>
+<p:sld xmlns:a="http://schemas.openxmlformats.org/drawingml/2006/main" xmlns:r="http://schemas.openxmlformats.org/officeDocument/2006/relationships" xmlns:p="http://schemas.openxmlformats.org/presentationml/2006/main">
+  <p:cSld>
+    <p:spTree>
+      <p:nvGrpSpPr>
+        <p:cNvPr id="1" name=""/>
+        <p:cNvGrpSpPr/>
+        <p:nvPr/>
+      </p:nvGrpSpPr>
+      <p:grpSpPr>
+        <a:xfrm>
+          <a:off x="0" y="0"/>
+          <a:ext cx="0" cy="0"/>
+          <a:chOff x="0" y="0"/>
+          <a:chExt cx="0" cy="0"/>
+        </a:xfrm>
+      </p:grpSpPr>
+      <p:sp>
+        <p:nvSpPr>
+          <p:cNvPr id="2" name="Title 1"/>
+          <p:cNvSpPr>
+            <a:spLocks noGrp="1"/>
+          </p:cNvSpPr>
+          <p:nvPr>
+            <p:ph type="title"/>
+          </p:nvPr>
+        </p:nvSpPr>
+        <p:spPr>
+          <a:xfrm>
+            <a:off x="609600" y="272077"/>
+            <a:ext cx="10439400" cy="624840"/>
+          </a:xfrm>
+        </p:spPr>
+        <p:txBody>
+          <a:bodyPr>
+            <a:noAutofit/>
+          </a:bodyPr>
+          <a:lstStyle/>
+          <a:p>
+            <a:r>
+              <a:rPr lang="en-US" sz="3600" dirty="0">
+                <a:cs typeface="Times New Roman" panose="02020603050405020304" pitchFamily="18" charset="0"/>
+              </a:rPr>
+              <a:t>A First Pass at Models of Discrimination</a:t>
+            </a:r>
+            <a:endParaRPr lang="en-US" sz="3600" dirty="0">
+              <a:latin typeface="Times New Roman" panose="02020603050405020304" pitchFamily="18" charset="0"/>
+              <a:cs typeface="Times New Roman" panose="02020603050405020304" pitchFamily="18" charset="0"/>
+            </a:endParaRPr>
+          </a:p>
+        </p:txBody>
+      </p:sp>
+      <p:sp>
+        <p:nvSpPr>
+          <p:cNvPr id="3" name="Content Placeholder 2"/>
+          <p:cNvSpPr>
+            <a:spLocks noGrp="1"/>
+          </p:cNvSpPr>
+          <p:nvPr>
+            <p:ph idx="1"/>
+          </p:nvPr>
+        </p:nvSpPr>
+        <p:spPr>
+          <a:xfrm>
+            <a:off x="609601" y="1066801"/>
+            <a:ext cx="10439400" cy="5141388"/>
+          </a:xfrm>
+        </p:spPr>
+        <p:txBody>
+          <a:bodyPr>
+            <a:noAutofit/>
+          </a:bodyPr>
+          <a:lstStyle/>
+          <a:p>
+            <a:pPr marL="0" indent="0">
+              <a:buNone/>
+            </a:pPr>
+            <a:r>
+              <a:rPr lang="en-US" sz="2400" b="1" dirty="0">
+                <a:cs typeface="Times New Roman" panose="02020603050405020304" pitchFamily="18" charset="0"/>
+              </a:rPr>
+              <a:t>Model takeaways: </a:t>
+            </a:r>
+            <a:endParaRPr lang="en-US" sz="2400" dirty="0">
+              <a:cs typeface="Times New Roman" panose="02020603050405020304" pitchFamily="18" charset="0"/>
+            </a:endParaRPr>
+          </a:p>
+          <a:p>
+            <a:r>
+              <a:rPr lang="en-US" sz="2400" dirty="0">
+                <a:cs typeface="Times New Roman" panose="02020603050405020304" pitchFamily="18" charset="0"/>
+              </a:rPr>
+              <a:t>“Taste-based” discrimination uses preferences to model disparities </a:t>
+            </a:r>
+          </a:p>
+          <a:p>
+            <a:r>
+              <a:rPr lang="en-US" sz="2400" dirty="0">
+                <a:cs typeface="Times New Roman" panose="02020603050405020304" pitchFamily="18" charset="0"/>
+              </a:rPr>
+              <a:t>Discrimination is countered by the market through segregation</a:t>
+            </a:r>
+          </a:p>
+          <a:p>
+            <a:r>
+              <a:rPr lang="en-US" sz="2400" dirty="0">
+                <a:cs typeface="Times New Roman" panose="02020603050405020304" pitchFamily="18" charset="0"/>
+              </a:rPr>
+              <a:t>Basically a “separate but equal” model of the labor force</a:t>
+            </a:r>
+          </a:p>
+          <a:p>
+            <a:r>
+              <a:rPr lang="en-US" sz="2400" dirty="0">
+                <a:cs typeface="Times New Roman" panose="02020603050405020304" pitchFamily="18" charset="0"/>
+              </a:rPr>
+              <a:t>However, this never explained reality – wage differentials exist and are not countered by the market</a:t>
+            </a:r>
+          </a:p>
+          <a:p>
+            <a:pPr marL="0" indent="0">
+              <a:buNone/>
+            </a:pPr>
+            <a:r>
+              <a:rPr lang="en-US" sz="2400" b="1" dirty="0">
+                <a:cs typeface="Times New Roman" panose="02020603050405020304" pitchFamily="18" charset="0"/>
+              </a:rPr>
+              <a:t>What other models are there? How do they apply to health?</a:t>
+            </a:r>
+          </a:p>
+          <a:p>
+            <a:r>
+              <a:rPr lang="en-US" sz="2400" b="1" dirty="0">
+                <a:cs typeface="Times New Roman" panose="02020603050405020304" pitchFamily="18" charset="0"/>
+              </a:rPr>
+              <a:t>Statistical discrimination: </a:t>
+            </a:r>
+            <a:r>
+              <a:rPr lang="en-US" sz="2400" dirty="0">
+                <a:cs typeface="Times New Roman" panose="02020603050405020304" pitchFamily="18" charset="0"/>
+              </a:rPr>
+              <a:t>Imperfect information, rather than preferences</a:t>
+            </a:r>
+          </a:p>
+          <a:p>
+            <a:r>
+              <a:rPr lang="en-US" sz="2400" i="1" u="sng" dirty="0">
+                <a:cs typeface="Times New Roman" panose="02020603050405020304" pitchFamily="18" charset="0"/>
+              </a:rPr>
+              <a:t>“Agents (e.g., MDs), without intending to discriminate, might apply an otherwise reasonable decision-making rule (e.g., treat according to need), that in practice leads to unequal treatment of members of two groups”</a:t>
+            </a:r>
+          </a:p>
+        </p:txBody>
+      </p:sp>
+    </p:spTree>
+    <p:extLst>
+      <p:ext uri="{BB962C8B-B14F-4D97-AF65-F5344CB8AC3E}">
+        <p14:creationId xmlns:p14="http://schemas.microsoft.com/office/powerpoint/2010/main" val="3246497370"/>
+      </p:ext>
+    </p:extLst>
+  </p:cSld>
+  <p:clrMapOvr>
+    <a:masterClrMapping/>
+  </p:clrMapOvr>
+</p:sld>
+</file>
+
+<file path=ppt/slides/slide21.xml><?xml version="1.0" encoding="utf-8"?>
+<p:sld xmlns:a="http://schemas.openxmlformats.org/drawingml/2006/main" xmlns:r="http://schemas.openxmlformats.org/officeDocument/2006/relationships" xmlns:p="http://schemas.openxmlformats.org/presentationml/2006/main">
+  <p:cSld>
+    <p:spTree>
+      <p:nvGrpSpPr>
+        <p:cNvPr id="1" name=""/>
+        <p:cNvGrpSpPr/>
+        <p:nvPr/>
+      </p:nvGrpSpPr>
+      <p:grpSpPr>
+        <a:xfrm>
+          <a:off x="0" y="0"/>
+          <a:ext cx="0" cy="0"/>
+          <a:chOff x="0" y="0"/>
+          <a:chExt cx="0" cy="0"/>
+        </a:xfrm>
+      </p:grpSpPr>
+      <p:sp>
+        <p:nvSpPr>
+          <p:cNvPr id="4" name="Title 3">
+            <a:extLst>
+              <a:ext uri="{FF2B5EF4-FFF2-40B4-BE49-F238E27FC236}">
+                <a16:creationId xmlns:a16="http://schemas.microsoft.com/office/drawing/2014/main" id="{3959A64B-5C9A-4A9B-BA45-ADECED2E51D9}"/>
+              </a:ext>
+            </a:extLst>
+          </p:cNvPr>
+          <p:cNvSpPr>
+            <a:spLocks noGrp="1"/>
+          </p:cNvSpPr>
+          <p:nvPr>
+            <p:ph type="ctrTitle"/>
+          </p:nvPr>
+        </p:nvSpPr>
+        <p:spPr>
+          <a:xfrm>
+            <a:off x="1261872" y="3247183"/>
+            <a:ext cx="10625328" cy="1298448"/>
+          </a:xfrm>
+        </p:spPr>
+        <p:txBody>
+          <a:bodyPr>
+            <a:normAutofit/>
+          </a:bodyPr>
+          <a:lstStyle/>
+          <a:p>
+            <a:r>
+              <a:rPr lang="en-US" dirty="0"/>
+              <a:t>Balsa and McGuire (2003)</a:t>
+            </a:r>
+          </a:p>
+        </p:txBody>
+      </p:sp>
+      <p:sp>
+        <p:nvSpPr>
+          <p:cNvPr id="7" name="Subtitle 4">
+            <a:extLst>
+              <a:ext uri="{FF2B5EF4-FFF2-40B4-BE49-F238E27FC236}">
+                <a16:creationId xmlns:a16="http://schemas.microsoft.com/office/drawing/2014/main" id="{592755C3-E09C-4692-E8D4-9A9FB12BD9A6}"/>
+              </a:ext>
+            </a:extLst>
+          </p:cNvPr>
+          <p:cNvSpPr txBox="1">
+            <a:spLocks/>
+          </p:cNvSpPr>
+          <p:nvPr/>
+        </p:nvSpPr>
+        <p:spPr>
+          <a:xfrm>
+            <a:off x="1235290" y="4785360"/>
+            <a:ext cx="9966109" cy="1691640"/>
+          </a:xfrm>
+          <a:prstGeom prst="rect">
+            <a:avLst/>
+          </a:prstGeom>
+        </p:spPr>
+        <p:txBody>
+          <a:bodyPr vert="horz" lIns="91440" tIns="45720" rIns="91440" bIns="45720" rtlCol="0">
+            <a:normAutofit/>
+          </a:bodyPr>
+          <a:lstStyle>
+            <a:lvl1pPr marL="0" indent="0" algn="l" defTabSz="914400" rtl="0" eaLnBrk="1" latinLnBrk="0" hangingPunct="1">
+              <a:lnSpc>
+                <a:spcPct val="95000"/>
+              </a:lnSpc>
+              <a:spcBef>
+                <a:spcPts val="1400"/>
+              </a:spcBef>
+              <a:spcAft>
+                <a:spcPts val="200"/>
+              </a:spcAft>
+              <a:buClr>
+                <a:schemeClr val="accent1"/>
+              </a:buClr>
+              <a:buSzPct val="80000"/>
+              <a:buFont typeface="Arial" pitchFamily="34" charset="0"/>
+              <a:buNone/>
+              <a:defRPr sz="2200" kern="1200" spc="10" baseline="0">
+                <a:solidFill>
+                  <a:schemeClr val="tx1">
+                    <a:lumMod val="75000"/>
+                  </a:schemeClr>
+                </a:solidFill>
+                <a:latin typeface="Times New Roman" panose="02020603050405020304" pitchFamily="18" charset="0"/>
+                <a:ea typeface="+mn-ea"/>
+                <a:cs typeface="+mn-cs"/>
+              </a:defRPr>
+            </a:lvl1pPr>
+            <a:lvl2pPr marL="457200" indent="0" algn="ctr" defTabSz="914400" rtl="0" eaLnBrk="1" latinLnBrk="0" hangingPunct="1">
+              <a:lnSpc>
+                <a:spcPct val="90000"/>
+              </a:lnSpc>
+              <a:spcBef>
+                <a:spcPts val="300"/>
+              </a:spcBef>
+              <a:spcAft>
+                <a:spcPts val="300"/>
+              </a:spcAft>
+              <a:buClr>
+                <a:schemeClr val="accent1"/>
+              </a:buClr>
+              <a:buFont typeface="Wingdings 2" pitchFamily="18" charset="2"/>
+              <a:buNone/>
+              <a:defRPr sz="2200" kern="1200">
+                <a:solidFill>
+                  <a:schemeClr val="tx1">
+                    <a:lumMod val="85000"/>
+                    <a:lumOff val="15000"/>
+                  </a:schemeClr>
+                </a:solidFill>
+                <a:latin typeface="Times New Roman" panose="02020603050405020304" pitchFamily="18" charset="0"/>
+                <a:ea typeface="+mn-ea"/>
+                <a:cs typeface="+mn-cs"/>
+              </a:defRPr>
+            </a:lvl2pPr>
+            <a:lvl3pPr marL="914400" indent="0" algn="ctr" defTabSz="914400" rtl="0" eaLnBrk="1" latinLnBrk="0" hangingPunct="1">
+              <a:lnSpc>
+                <a:spcPct val="90000"/>
+              </a:lnSpc>
+              <a:spcBef>
+                <a:spcPts val="300"/>
+              </a:spcBef>
+              <a:spcAft>
+                <a:spcPts val="300"/>
+              </a:spcAft>
+              <a:buClr>
+                <a:schemeClr val="accent1"/>
+              </a:buClr>
+              <a:buFont typeface="Wingdings 2" pitchFamily="18" charset="2"/>
+              <a:buNone/>
+              <a:defRPr sz="2200" kern="1200">
+                <a:solidFill>
+                  <a:schemeClr val="tx1">
+                    <a:lumMod val="85000"/>
+                    <a:lumOff val="15000"/>
+                  </a:schemeClr>
+                </a:solidFill>
+                <a:latin typeface="Times New Roman" panose="02020603050405020304" pitchFamily="18" charset="0"/>
+                <a:ea typeface="+mn-ea"/>
+                <a:cs typeface="+mn-cs"/>
+              </a:defRPr>
+            </a:lvl3pPr>
+            <a:lvl4pPr marL="1371600" indent="0" algn="ctr" defTabSz="914400" rtl="0" eaLnBrk="1" latinLnBrk="0" hangingPunct="1">
+              <a:lnSpc>
+                <a:spcPct val="90000"/>
+              </a:lnSpc>
+              <a:spcBef>
+                <a:spcPts val="300"/>
+              </a:spcBef>
+              <a:spcAft>
+                <a:spcPts val="300"/>
+              </a:spcAft>
+              <a:buClr>
+                <a:schemeClr val="accent1"/>
+              </a:buClr>
+              <a:buFont typeface="Wingdings 2" pitchFamily="18" charset="2"/>
+              <a:buNone/>
+              <a:defRPr sz="2000" kern="1200">
+                <a:solidFill>
+                  <a:schemeClr val="tx1">
+                    <a:lumMod val="85000"/>
+                    <a:lumOff val="15000"/>
+                  </a:schemeClr>
+                </a:solidFill>
+                <a:latin typeface="Times New Roman" panose="02020603050405020304" pitchFamily="18" charset="0"/>
+                <a:ea typeface="+mn-ea"/>
+                <a:cs typeface="+mn-cs"/>
+              </a:defRPr>
+            </a:lvl4pPr>
+            <a:lvl5pPr marL="1828800" indent="0" algn="ctr" defTabSz="914400" rtl="0" eaLnBrk="1" latinLnBrk="0" hangingPunct="1">
+              <a:lnSpc>
+                <a:spcPct val="90000"/>
+              </a:lnSpc>
+              <a:spcBef>
+                <a:spcPts val="300"/>
+              </a:spcBef>
+              <a:spcAft>
+                <a:spcPts val="300"/>
+              </a:spcAft>
+              <a:buClr>
+                <a:schemeClr val="accent1"/>
+              </a:buClr>
+              <a:buFont typeface="Wingdings 2" pitchFamily="18" charset="2"/>
+              <a:buNone/>
+              <a:defRPr sz="2000" kern="1200">
+                <a:solidFill>
+                  <a:schemeClr val="tx1">
+                    <a:lumMod val="85000"/>
+                    <a:lumOff val="15000"/>
+                  </a:schemeClr>
+                </a:solidFill>
+                <a:latin typeface="Times New Roman" panose="02020603050405020304" pitchFamily="18" charset="0"/>
+                <a:ea typeface="+mn-ea"/>
+                <a:cs typeface="+mn-cs"/>
+              </a:defRPr>
+            </a:lvl5pPr>
+            <a:lvl6pPr marL="2286000" indent="0" algn="ctr" defTabSz="914400" rtl="0" eaLnBrk="1" latinLnBrk="0" hangingPunct="1">
+              <a:lnSpc>
+                <a:spcPct val="90000"/>
+              </a:lnSpc>
+              <a:spcBef>
+                <a:spcPts val="300"/>
+              </a:spcBef>
+              <a:spcAft>
+                <a:spcPts val="300"/>
+              </a:spcAft>
+              <a:buClr>
+                <a:schemeClr val="accent1"/>
+              </a:buClr>
+              <a:buFont typeface="Wingdings 2" pitchFamily="18" charset="2"/>
+              <a:buNone/>
+              <a:defRPr sz="2000" kern="1200">
+                <a:solidFill>
+                  <a:schemeClr val="tx1">
+                    <a:lumMod val="85000"/>
+                    <a:lumOff val="15000"/>
+                  </a:schemeClr>
+                </a:solidFill>
+                <a:latin typeface="+mn-lt"/>
+                <a:ea typeface="+mn-ea"/>
+                <a:cs typeface="+mn-cs"/>
+              </a:defRPr>
+            </a:lvl6pPr>
+            <a:lvl7pPr marL="2743200" indent="0" algn="ctr" defTabSz="914400" rtl="0" eaLnBrk="1" latinLnBrk="0" hangingPunct="1">
+              <a:lnSpc>
+                <a:spcPct val="90000"/>
+              </a:lnSpc>
+              <a:spcBef>
+                <a:spcPts val="300"/>
+              </a:spcBef>
+              <a:spcAft>
+                <a:spcPts val="300"/>
+              </a:spcAft>
+              <a:buClr>
+                <a:schemeClr val="accent1"/>
+              </a:buClr>
+              <a:buFont typeface="Wingdings 2" pitchFamily="18" charset="2"/>
+              <a:buNone/>
+              <a:defRPr sz="2000" kern="1200">
+                <a:solidFill>
+                  <a:schemeClr val="tx1">
+                    <a:lumMod val="85000"/>
+                    <a:lumOff val="15000"/>
+                  </a:schemeClr>
+                </a:solidFill>
+                <a:latin typeface="+mn-lt"/>
+                <a:ea typeface="+mn-ea"/>
+                <a:cs typeface="+mn-cs"/>
+              </a:defRPr>
+            </a:lvl7pPr>
+            <a:lvl8pPr marL="3200400" indent="0" algn="ctr" defTabSz="914400" rtl="0" eaLnBrk="1" latinLnBrk="0" hangingPunct="1">
+              <a:lnSpc>
+                <a:spcPct val="90000"/>
+              </a:lnSpc>
+              <a:spcBef>
+                <a:spcPts val="300"/>
+              </a:spcBef>
+              <a:spcAft>
+                <a:spcPts val="300"/>
+              </a:spcAft>
+              <a:buClr>
+                <a:schemeClr val="accent1"/>
+              </a:buClr>
+              <a:buFont typeface="Wingdings 2" pitchFamily="18" charset="2"/>
+              <a:buNone/>
+              <a:defRPr sz="2000" kern="1200">
+                <a:solidFill>
+                  <a:schemeClr val="tx1">
+                    <a:lumMod val="85000"/>
+                    <a:lumOff val="15000"/>
+                  </a:schemeClr>
+                </a:solidFill>
+                <a:latin typeface="+mn-lt"/>
+                <a:ea typeface="+mn-ea"/>
+                <a:cs typeface="+mn-cs"/>
+              </a:defRPr>
+            </a:lvl8pPr>
+            <a:lvl9pPr marL="3657600" indent="0" algn="ctr" defTabSz="914400" rtl="0" eaLnBrk="1" latinLnBrk="0" hangingPunct="1">
+              <a:lnSpc>
+                <a:spcPct val="90000"/>
+              </a:lnSpc>
+              <a:spcBef>
+                <a:spcPts val="300"/>
+              </a:spcBef>
+              <a:spcAft>
+                <a:spcPts val="300"/>
+              </a:spcAft>
+              <a:buClr>
+                <a:schemeClr val="accent1"/>
+              </a:buClr>
+              <a:buFont typeface="Wingdings 2" pitchFamily="18" charset="2"/>
+              <a:buNone/>
+              <a:defRPr sz="2000" kern="1200">
+                <a:solidFill>
+                  <a:schemeClr val="tx1">
+                    <a:lumMod val="85000"/>
+                    <a:lumOff val="15000"/>
+                  </a:schemeClr>
+                </a:solidFill>
+                <a:latin typeface="+mn-lt"/>
+                <a:ea typeface="+mn-ea"/>
+                <a:cs typeface="+mn-cs"/>
+              </a:defRPr>
+            </a:lvl9pPr>
+          </a:lstStyle>
+          <a:p>
+            <a:r>
+              <a:rPr lang="en-US" sz="2400" dirty="0"/>
+              <a:t>“Prejudice, clinical uncertainty and stereotyping as sources of health disparities”</a:t>
+            </a:r>
+          </a:p>
+          <a:p>
+            <a:r>
+              <a:rPr lang="en-US" sz="2400" i="1" dirty="0"/>
+              <a:t>Journal of Health Economics</a:t>
+            </a:r>
+            <a:endParaRPr lang="en-US" sz="2400" dirty="0"/>
+          </a:p>
+        </p:txBody>
+      </p:sp>
+      <p:sp>
+        <p:nvSpPr>
+          <p:cNvPr id="2" name="Title 3">
+            <a:extLst>
+              <a:ext uri="{FF2B5EF4-FFF2-40B4-BE49-F238E27FC236}">
+                <a16:creationId xmlns:a16="http://schemas.microsoft.com/office/drawing/2014/main" id="{980B3585-3782-52AE-C43B-0F077ACB8896}"/>
+              </a:ext>
+            </a:extLst>
+          </p:cNvPr>
+          <p:cNvSpPr txBox="1">
+            <a:spLocks/>
+          </p:cNvSpPr>
+          <p:nvPr/>
+        </p:nvSpPr>
+        <p:spPr>
+          <a:xfrm>
+            <a:off x="1245782" y="427783"/>
+            <a:ext cx="10625328" cy="1298448"/>
+          </a:xfrm>
+          <a:prstGeom prst="rect">
+            <a:avLst/>
+          </a:prstGeom>
+        </p:spPr>
+        <p:txBody>
+          <a:bodyPr vert="horz" lIns="91440" tIns="45720" rIns="91440" bIns="45720" rtlCol="0" anchor="b">
+            <a:normAutofit/>
+          </a:bodyPr>
+          <a:lstStyle>
+            <a:lvl1pPr algn="l" defTabSz="914400" rtl="0" eaLnBrk="1" latinLnBrk="0" hangingPunct="1">
+              <a:lnSpc>
+                <a:spcPct val="85000"/>
+              </a:lnSpc>
+              <a:spcBef>
+                <a:spcPct val="0"/>
+              </a:spcBef>
+              <a:buNone/>
+              <a:defRPr sz="7200" kern="1200" spc="-50" baseline="0">
+                <a:solidFill>
+                  <a:schemeClr val="tx1"/>
+                </a:solidFill>
+                <a:latin typeface="Times New Roman" panose="02020603050405020304" pitchFamily="18" charset="0"/>
+                <a:ea typeface="+mj-ea"/>
+                <a:cs typeface="+mj-cs"/>
+              </a:defRPr>
+            </a:lvl1pPr>
+          </a:lstStyle>
+          <a:p>
+            <a:r>
+              <a:rPr lang="en-US"/>
+              <a:t>Balsa and McGuire (2001)</a:t>
+            </a:r>
+            <a:endParaRPr lang="en-US" dirty="0"/>
+          </a:p>
+        </p:txBody>
+      </p:sp>
+      <p:sp>
+        <p:nvSpPr>
+          <p:cNvPr id="3" name="Subtitle 4">
+            <a:extLst>
+              <a:ext uri="{FF2B5EF4-FFF2-40B4-BE49-F238E27FC236}">
+                <a16:creationId xmlns:a16="http://schemas.microsoft.com/office/drawing/2014/main" id="{086A32F1-950E-8FBA-1168-47F4B1F3AB7D}"/>
+              </a:ext>
+            </a:extLst>
+          </p:cNvPr>
+          <p:cNvSpPr txBox="1">
+            <a:spLocks/>
+          </p:cNvSpPr>
+          <p:nvPr/>
+        </p:nvSpPr>
+        <p:spPr>
+          <a:xfrm>
+            <a:off x="1219200" y="1965960"/>
+            <a:ext cx="9966109" cy="1691640"/>
+          </a:xfrm>
+          <a:prstGeom prst="rect">
+            <a:avLst/>
+          </a:prstGeom>
+        </p:spPr>
+        <p:txBody>
+          <a:bodyPr vert="horz" lIns="91440" tIns="45720" rIns="91440" bIns="45720" rtlCol="0">
+            <a:normAutofit/>
+          </a:bodyPr>
+          <a:lstStyle>
+            <a:lvl1pPr marL="0" indent="0" algn="l" defTabSz="914400" rtl="0" eaLnBrk="1" latinLnBrk="0" hangingPunct="1">
+              <a:lnSpc>
+                <a:spcPct val="95000"/>
+              </a:lnSpc>
+              <a:spcBef>
+                <a:spcPts val="1400"/>
+              </a:spcBef>
+              <a:spcAft>
+                <a:spcPts val="200"/>
+              </a:spcAft>
+              <a:buClr>
+                <a:schemeClr val="accent1"/>
+              </a:buClr>
+              <a:buSzPct val="80000"/>
+              <a:buFont typeface="Arial" pitchFamily="34" charset="0"/>
+              <a:buNone/>
+              <a:defRPr sz="2200" kern="1200" spc="10" baseline="0">
+                <a:solidFill>
+                  <a:schemeClr val="tx1">
+                    <a:lumMod val="75000"/>
+                  </a:schemeClr>
+                </a:solidFill>
+                <a:latin typeface="Times New Roman" panose="02020603050405020304" pitchFamily="18" charset="0"/>
+                <a:ea typeface="+mn-ea"/>
+                <a:cs typeface="+mn-cs"/>
+              </a:defRPr>
+            </a:lvl1pPr>
+            <a:lvl2pPr marL="457200" indent="0" algn="ctr" defTabSz="914400" rtl="0" eaLnBrk="1" latinLnBrk="0" hangingPunct="1">
+              <a:lnSpc>
+                <a:spcPct val="90000"/>
+              </a:lnSpc>
+              <a:spcBef>
+                <a:spcPts val="300"/>
+              </a:spcBef>
+              <a:spcAft>
+                <a:spcPts val="300"/>
+              </a:spcAft>
+              <a:buClr>
+                <a:schemeClr val="accent1"/>
+              </a:buClr>
+              <a:buFont typeface="Wingdings 2" pitchFamily="18" charset="2"/>
+              <a:buNone/>
+              <a:defRPr sz="2200" kern="1200">
+                <a:solidFill>
+                  <a:schemeClr val="tx1">
+                    <a:lumMod val="85000"/>
+                    <a:lumOff val="15000"/>
+                  </a:schemeClr>
+                </a:solidFill>
+                <a:latin typeface="Times New Roman" panose="02020603050405020304" pitchFamily="18" charset="0"/>
+                <a:ea typeface="+mn-ea"/>
+                <a:cs typeface="+mn-cs"/>
+              </a:defRPr>
+            </a:lvl2pPr>
+            <a:lvl3pPr marL="914400" indent="0" algn="ctr" defTabSz="914400" rtl="0" eaLnBrk="1" latinLnBrk="0" hangingPunct="1">
+              <a:lnSpc>
+                <a:spcPct val="90000"/>
+              </a:lnSpc>
+              <a:spcBef>
+                <a:spcPts val="300"/>
+              </a:spcBef>
+              <a:spcAft>
+                <a:spcPts val="300"/>
+              </a:spcAft>
+              <a:buClr>
+                <a:schemeClr val="accent1"/>
+              </a:buClr>
+              <a:buFont typeface="Wingdings 2" pitchFamily="18" charset="2"/>
+              <a:buNone/>
+              <a:defRPr sz="2200" kern="1200">
+                <a:solidFill>
+                  <a:schemeClr val="tx1">
+                    <a:lumMod val="85000"/>
+                    <a:lumOff val="15000"/>
+                  </a:schemeClr>
+                </a:solidFill>
+                <a:latin typeface="Times New Roman" panose="02020603050405020304" pitchFamily="18" charset="0"/>
+                <a:ea typeface="+mn-ea"/>
+                <a:cs typeface="+mn-cs"/>
+              </a:defRPr>
+            </a:lvl3pPr>
+            <a:lvl4pPr marL="1371600" indent="0" algn="ctr" defTabSz="914400" rtl="0" eaLnBrk="1" latinLnBrk="0" hangingPunct="1">
+              <a:lnSpc>
+                <a:spcPct val="90000"/>
+              </a:lnSpc>
+              <a:spcBef>
+                <a:spcPts val="300"/>
+              </a:spcBef>
+              <a:spcAft>
+                <a:spcPts val="300"/>
+              </a:spcAft>
+              <a:buClr>
+                <a:schemeClr val="accent1"/>
+              </a:buClr>
+              <a:buFont typeface="Wingdings 2" pitchFamily="18" charset="2"/>
+              <a:buNone/>
+              <a:defRPr sz="2000" kern="1200">
+                <a:solidFill>
+                  <a:schemeClr val="tx1">
+                    <a:lumMod val="85000"/>
+                    <a:lumOff val="15000"/>
+                  </a:schemeClr>
+                </a:solidFill>
+                <a:latin typeface="Times New Roman" panose="02020603050405020304" pitchFamily="18" charset="0"/>
+                <a:ea typeface="+mn-ea"/>
+                <a:cs typeface="+mn-cs"/>
+              </a:defRPr>
+            </a:lvl4pPr>
+            <a:lvl5pPr marL="1828800" indent="0" algn="ctr" defTabSz="914400" rtl="0" eaLnBrk="1" latinLnBrk="0" hangingPunct="1">
+              <a:lnSpc>
+                <a:spcPct val="90000"/>
+              </a:lnSpc>
+              <a:spcBef>
+                <a:spcPts val="300"/>
+              </a:spcBef>
+              <a:spcAft>
+                <a:spcPts val="300"/>
+              </a:spcAft>
+              <a:buClr>
+                <a:schemeClr val="accent1"/>
+              </a:buClr>
+              <a:buFont typeface="Wingdings 2" pitchFamily="18" charset="2"/>
+              <a:buNone/>
+              <a:defRPr sz="2000" kern="1200">
+                <a:solidFill>
+                  <a:schemeClr val="tx1">
+                    <a:lumMod val="85000"/>
+                    <a:lumOff val="15000"/>
+                  </a:schemeClr>
+                </a:solidFill>
+                <a:latin typeface="Times New Roman" panose="02020603050405020304" pitchFamily="18" charset="0"/>
+                <a:ea typeface="+mn-ea"/>
+                <a:cs typeface="+mn-cs"/>
+              </a:defRPr>
+            </a:lvl5pPr>
+            <a:lvl6pPr marL="2286000" indent="0" algn="ctr" defTabSz="914400" rtl="0" eaLnBrk="1" latinLnBrk="0" hangingPunct="1">
+              <a:lnSpc>
+                <a:spcPct val="90000"/>
+              </a:lnSpc>
+              <a:spcBef>
+                <a:spcPts val="300"/>
+              </a:spcBef>
+              <a:spcAft>
+                <a:spcPts val="300"/>
+              </a:spcAft>
+              <a:buClr>
+                <a:schemeClr val="accent1"/>
+              </a:buClr>
+              <a:buFont typeface="Wingdings 2" pitchFamily="18" charset="2"/>
+              <a:buNone/>
+              <a:defRPr sz="2000" kern="1200">
+                <a:solidFill>
+                  <a:schemeClr val="tx1">
+                    <a:lumMod val="85000"/>
+                    <a:lumOff val="15000"/>
+                  </a:schemeClr>
+                </a:solidFill>
+                <a:latin typeface="+mn-lt"/>
+                <a:ea typeface="+mn-ea"/>
+                <a:cs typeface="+mn-cs"/>
+              </a:defRPr>
+            </a:lvl6pPr>
+            <a:lvl7pPr marL="2743200" indent="0" algn="ctr" defTabSz="914400" rtl="0" eaLnBrk="1" latinLnBrk="0" hangingPunct="1">
+              <a:lnSpc>
+                <a:spcPct val="90000"/>
+              </a:lnSpc>
+              <a:spcBef>
+                <a:spcPts val="300"/>
+              </a:spcBef>
+              <a:spcAft>
+                <a:spcPts val="300"/>
+              </a:spcAft>
+              <a:buClr>
+                <a:schemeClr val="accent1"/>
+              </a:buClr>
+              <a:buFont typeface="Wingdings 2" pitchFamily="18" charset="2"/>
+              <a:buNone/>
+              <a:defRPr sz="2000" kern="1200">
+                <a:solidFill>
+                  <a:schemeClr val="tx1">
+                    <a:lumMod val="85000"/>
+                    <a:lumOff val="15000"/>
+                  </a:schemeClr>
+                </a:solidFill>
+                <a:latin typeface="+mn-lt"/>
+                <a:ea typeface="+mn-ea"/>
+                <a:cs typeface="+mn-cs"/>
+              </a:defRPr>
+            </a:lvl7pPr>
+            <a:lvl8pPr marL="3200400" indent="0" algn="ctr" defTabSz="914400" rtl="0" eaLnBrk="1" latinLnBrk="0" hangingPunct="1">
+              <a:lnSpc>
+                <a:spcPct val="90000"/>
+              </a:lnSpc>
+              <a:spcBef>
+                <a:spcPts val="300"/>
+              </a:spcBef>
+              <a:spcAft>
+                <a:spcPts val="300"/>
+              </a:spcAft>
+              <a:buClr>
+                <a:schemeClr val="accent1"/>
+              </a:buClr>
+              <a:buFont typeface="Wingdings 2" pitchFamily="18" charset="2"/>
+              <a:buNone/>
+              <a:defRPr sz="2000" kern="1200">
+                <a:solidFill>
+                  <a:schemeClr val="tx1">
+                    <a:lumMod val="85000"/>
+                    <a:lumOff val="15000"/>
+                  </a:schemeClr>
+                </a:solidFill>
+                <a:latin typeface="+mn-lt"/>
+                <a:ea typeface="+mn-ea"/>
+                <a:cs typeface="+mn-cs"/>
+              </a:defRPr>
+            </a:lvl8pPr>
+            <a:lvl9pPr marL="3657600" indent="0" algn="ctr" defTabSz="914400" rtl="0" eaLnBrk="1" latinLnBrk="0" hangingPunct="1">
+              <a:lnSpc>
+                <a:spcPct val="90000"/>
+              </a:lnSpc>
+              <a:spcBef>
+                <a:spcPts val="300"/>
+              </a:spcBef>
+              <a:spcAft>
+                <a:spcPts val="300"/>
+              </a:spcAft>
+              <a:buClr>
+                <a:schemeClr val="accent1"/>
+              </a:buClr>
+              <a:buFont typeface="Wingdings 2" pitchFamily="18" charset="2"/>
+              <a:buNone/>
+              <a:defRPr sz="2000" kern="1200">
+                <a:solidFill>
+                  <a:schemeClr val="tx1">
+                    <a:lumMod val="85000"/>
+                    <a:lumOff val="15000"/>
+                  </a:schemeClr>
+                </a:solidFill>
+                <a:latin typeface="+mn-lt"/>
+                <a:ea typeface="+mn-ea"/>
+                <a:cs typeface="+mn-cs"/>
+              </a:defRPr>
+            </a:lvl9pPr>
+          </a:lstStyle>
+          <a:p>
+            <a:r>
+              <a:rPr lang="en-US" sz="2400" dirty="0"/>
+              <a:t>“Statistical Discrimination in Health Care”</a:t>
+            </a:r>
+          </a:p>
+          <a:p>
+            <a:r>
+              <a:rPr lang="en-US" sz="2400" i="1" dirty="0"/>
+              <a:t>Journal of Health Economics</a:t>
+            </a:r>
+            <a:endParaRPr lang="en-US" sz="2400" dirty="0"/>
+          </a:p>
+        </p:txBody>
+      </p:sp>
+    </p:spTree>
+    <p:extLst>
+      <p:ext uri="{BB962C8B-B14F-4D97-AF65-F5344CB8AC3E}">
+        <p14:creationId xmlns:p14="http://schemas.microsoft.com/office/powerpoint/2010/main" val="4163151692"/>
+      </p:ext>
+    </p:extLst>
+  </p:cSld>
+  <p:clrMapOvr>
+    <a:masterClrMapping/>
+  </p:clrMapOvr>
+</p:sld>
+</file>
+
+<file path=ppt/slides/slide22.xml><?xml version="1.0" encoding="utf-8"?>
+<p:sld xmlns:a="http://schemas.openxmlformats.org/drawingml/2006/main" xmlns:r="http://schemas.openxmlformats.org/officeDocument/2006/relationships" xmlns:p="http://schemas.openxmlformats.org/presentationml/2006/main">
+  <p:cSld>
+    <p:spTree>
+      <p:nvGrpSpPr>
+        <p:cNvPr id="1" name=""/>
+        <p:cNvGrpSpPr/>
+        <p:nvPr/>
+      </p:nvGrpSpPr>
+      <p:grpSpPr>
+        <a:xfrm>
+          <a:off x="0" y="0"/>
+          <a:ext cx="0" cy="0"/>
+          <a:chOff x="0" y="0"/>
+          <a:chExt cx="0" cy="0"/>
+        </a:xfrm>
+      </p:grpSpPr>
+      <p:sp>
+        <p:nvSpPr>
+          <p:cNvPr id="2" name="Title 1"/>
+          <p:cNvSpPr>
+            <a:spLocks noGrp="1"/>
+          </p:cNvSpPr>
+          <p:nvPr>
+            <p:ph type="title"/>
+          </p:nvPr>
+        </p:nvSpPr>
+        <p:spPr>
+          <a:xfrm>
+            <a:off x="609600" y="272077"/>
+            <a:ext cx="10439400" cy="624840"/>
+          </a:xfrm>
+        </p:spPr>
+        <p:txBody>
+          <a:bodyPr>
+            <a:noAutofit/>
+          </a:bodyPr>
+          <a:lstStyle/>
+          <a:p>
+            <a:r>
+              <a:rPr lang="en-US" sz="3600" dirty="0">
+                <a:cs typeface="Times New Roman" panose="02020603050405020304" pitchFamily="18" charset="0"/>
+              </a:rPr>
+              <a:t>Statistical Discrimination and Disparities in Treatment</a:t>
+            </a:r>
+            <a:endParaRPr lang="en-US" sz="3600" dirty="0">
+              <a:latin typeface="Times New Roman" panose="02020603050405020304" pitchFamily="18" charset="0"/>
+              <a:cs typeface="Times New Roman" panose="02020603050405020304" pitchFamily="18" charset="0"/>
+            </a:endParaRPr>
+          </a:p>
+        </p:txBody>
+      </p:sp>
+      <mc:AlternateContent xmlns:mc="http://schemas.openxmlformats.org/markup-compatibility/2006" xmlns:a14="http://schemas.microsoft.com/office/drawing/2010/main">
+        <mc:Choice Requires="a14">
+          <p:sp>
+            <p:nvSpPr>
+              <p:cNvPr id="3" name="Content Placeholder 2"/>
+              <p:cNvSpPr>
+                <a:spLocks noGrp="1"/>
+              </p:cNvSpPr>
+              <p:nvPr>
+                <p:ph idx="1"/>
+              </p:nvPr>
+            </p:nvSpPr>
+            <p:spPr>
+              <a:xfrm>
+                <a:off x="609601" y="1066801"/>
+                <a:ext cx="10439400" cy="5141388"/>
+              </a:xfrm>
+            </p:spPr>
+            <p:txBody>
+              <a:bodyPr>
+                <a:noAutofit/>
+              </a:bodyPr>
+              <a:lstStyle/>
+              <a:p>
+                <a:r>
+                  <a:rPr lang="en-US" sz="2400" dirty="0">
+                    <a:cs typeface="Times New Roman" panose="02020603050405020304" pitchFamily="18" charset="0"/>
+                  </a:rPr>
+                  <a:t>Consider a simple case: one illness, one treatment, one (majority) physician</a:t>
+                </a:r>
+              </a:p>
+              <a:p>
+                <a:r>
+                  <a:rPr lang="en-US" sz="2400" dirty="0">
+                    <a:cs typeface="Times New Roman" panose="02020603050405020304" pitchFamily="18" charset="0"/>
+                  </a:rPr>
+                  <a:t>Patients have an underlying need to be treated </a:t>
+                </a:r>
+                <a14:m>
+                  <m:oMath xmlns:m="http://schemas.openxmlformats.org/officeDocument/2006/math">
+                    <m:r>
+                      <a:rPr lang="en-US" sz="2400" b="0" i="1" smtClean="0">
+                        <a:latin typeface="Cambria Math" panose="02040503050406030204" pitchFamily="18" charset="0"/>
+                        <a:cs typeface="Times New Roman" panose="02020603050405020304" pitchFamily="18" charset="0"/>
+                      </a:rPr>
+                      <m:t>𝑍</m:t>
+                    </m:r>
+                    <m:r>
+                      <a:rPr lang="en-US" sz="2400" b="0" i="1" smtClean="0">
+                        <a:latin typeface="Cambria Math" panose="02040503050406030204" pitchFamily="18" charset="0"/>
+                        <a:cs typeface="Times New Roman" panose="02020603050405020304" pitchFamily="18" charset="0"/>
+                      </a:rPr>
+                      <m:t>∼</m:t>
+                    </m:r>
+                    <m:r>
+                      <a:rPr lang="en-US" sz="2400" b="0" i="1" smtClean="0">
+                        <a:latin typeface="Cambria Math" panose="02040503050406030204" pitchFamily="18" charset="0"/>
+                        <a:cs typeface="Times New Roman" panose="02020603050405020304" pitchFamily="18" charset="0"/>
+                      </a:rPr>
+                      <m:t>𝑁</m:t>
+                    </m:r>
+                    <m:r>
+                      <a:rPr lang="en-US" sz="2400" b="0" i="1" smtClean="0">
+                        <a:latin typeface="Cambria Math" panose="02040503050406030204" pitchFamily="18" charset="0"/>
+                        <a:cs typeface="Times New Roman" panose="02020603050405020304" pitchFamily="18" charset="0"/>
+                      </a:rPr>
+                      <m:t>(</m:t>
+                    </m:r>
+                    <m:sSub>
+                      <m:sSubPr>
+                        <m:ctrlPr>
+                          <a:rPr lang="en-US" sz="2400" b="0" i="1" smtClean="0">
+                            <a:latin typeface="Cambria Math" panose="02040503050406030204" pitchFamily="18" charset="0"/>
+                            <a:cs typeface="Times New Roman" panose="02020603050405020304" pitchFamily="18" charset="0"/>
+                          </a:rPr>
+                        </m:ctrlPr>
+                      </m:sSubPr>
+                      <m:e>
+                        <m:r>
+                          <a:rPr lang="en-US" sz="2400" b="0" i="1" smtClean="0">
+                            <a:latin typeface="Cambria Math" panose="02040503050406030204" pitchFamily="18" charset="0"/>
+                            <a:cs typeface="Times New Roman" panose="02020603050405020304" pitchFamily="18" charset="0"/>
+                          </a:rPr>
+                          <m:t>𝜇</m:t>
+                        </m:r>
+                      </m:e>
+                      <m:sub>
+                        <m:r>
+                          <a:rPr lang="en-US" sz="2400" b="0" i="1" smtClean="0">
+                            <a:latin typeface="Cambria Math" panose="02040503050406030204" pitchFamily="18" charset="0"/>
+                            <a:cs typeface="Times New Roman" panose="02020603050405020304" pitchFamily="18" charset="0"/>
+                          </a:rPr>
+                          <m:t>𝑍</m:t>
+                        </m:r>
+                      </m:sub>
+                    </m:sSub>
+                    <m:r>
+                      <a:rPr lang="en-US" sz="2400" b="0" i="1" smtClean="0">
+                        <a:latin typeface="Cambria Math" panose="02040503050406030204" pitchFamily="18" charset="0"/>
+                        <a:cs typeface="Times New Roman" panose="02020603050405020304" pitchFamily="18" charset="0"/>
+                      </a:rPr>
+                      <m:t>,</m:t>
+                    </m:r>
+                    <m:sSubSup>
+                      <m:sSubSupPr>
+                        <m:ctrlPr>
+                          <a:rPr lang="en-US" sz="2400" b="0" i="1" smtClean="0">
+                            <a:latin typeface="Cambria Math" panose="02040503050406030204" pitchFamily="18" charset="0"/>
+                            <a:cs typeface="Times New Roman" panose="02020603050405020304" pitchFamily="18" charset="0"/>
+                          </a:rPr>
+                        </m:ctrlPr>
+                      </m:sSubSupPr>
+                      <m:e>
+                        <m:r>
+                          <a:rPr lang="en-US" sz="2400" b="0" i="1" smtClean="0">
+                            <a:latin typeface="Cambria Math" panose="02040503050406030204" pitchFamily="18" charset="0"/>
+                            <a:cs typeface="Times New Roman" panose="02020603050405020304" pitchFamily="18" charset="0"/>
+                          </a:rPr>
+                          <m:t>𝜎</m:t>
+                        </m:r>
+                      </m:e>
+                      <m:sub>
+                        <m:r>
+                          <a:rPr lang="en-US" sz="2400" b="0" i="1" smtClean="0">
+                            <a:latin typeface="Cambria Math" panose="02040503050406030204" pitchFamily="18" charset="0"/>
+                            <a:cs typeface="Times New Roman" panose="02020603050405020304" pitchFamily="18" charset="0"/>
+                          </a:rPr>
+                          <m:t>𝑍</m:t>
+                        </m:r>
+                      </m:sub>
+                      <m:sup>
+                        <m:r>
+                          <a:rPr lang="en-US" sz="2400" b="0" i="1" smtClean="0">
+                            <a:latin typeface="Cambria Math" panose="02040503050406030204" pitchFamily="18" charset="0"/>
+                            <a:cs typeface="Times New Roman" panose="02020603050405020304" pitchFamily="18" charset="0"/>
+                          </a:rPr>
+                          <m:t>2</m:t>
+                        </m:r>
+                      </m:sup>
+                    </m:sSubSup>
+                    <m:r>
+                      <a:rPr lang="en-US" sz="2400" b="0" i="1" smtClean="0">
+                        <a:latin typeface="Cambria Math" panose="02040503050406030204" pitchFamily="18" charset="0"/>
+                        <a:cs typeface="Times New Roman" panose="02020603050405020304" pitchFamily="18" charset="0"/>
+                      </a:rPr>
+                      <m:t>)</m:t>
+                    </m:r>
+                  </m:oMath>
+                </a14:m>
+                <a:r>
+                  <a:rPr lang="en-US" sz="2400" dirty="0">
+                    <a:cs typeface="Times New Roman" panose="02020603050405020304" pitchFamily="18" charset="0"/>
+                  </a:rPr>
+                  <a:t> </a:t>
+                </a:r>
+              </a:p>
+              <a:p>
+                <a:r>
+                  <a:rPr lang="en-US" sz="2400" dirty="0">
+                    <a:cs typeface="Times New Roman" panose="02020603050405020304" pitchFamily="18" charset="0"/>
+                  </a:rPr>
+                  <a:t>However, doctor observes a signal </a:t>
+                </a:r>
+                <a14:m>
+                  <m:oMath xmlns:m="http://schemas.openxmlformats.org/officeDocument/2006/math">
+                    <m:r>
+                      <m:rPr>
+                        <m:sty m:val="p"/>
+                      </m:rPr>
+                      <a:rPr lang="en-US" sz="2400" b="0" i="0" smtClean="0">
+                        <a:latin typeface="Cambria Math" panose="02040503050406030204" pitchFamily="18" charset="0"/>
+                        <a:cs typeface="Times New Roman" panose="02020603050405020304" pitchFamily="18" charset="0"/>
+                      </a:rPr>
+                      <m:t>S</m:t>
+                    </m:r>
+                    <m:r>
+                      <a:rPr lang="en-US" sz="2400" b="0" i="0" smtClean="0">
+                        <a:latin typeface="Cambria Math" panose="02040503050406030204" pitchFamily="18" charset="0"/>
+                        <a:cs typeface="Times New Roman" panose="02020603050405020304" pitchFamily="18" charset="0"/>
+                      </a:rPr>
+                      <m:t>=</m:t>
+                    </m:r>
+                    <m:r>
+                      <a:rPr lang="en-US" sz="2400" b="0" i="1" smtClean="0">
+                        <a:latin typeface="Cambria Math" panose="02040503050406030204" pitchFamily="18" charset="0"/>
+                        <a:cs typeface="Times New Roman" panose="02020603050405020304" pitchFamily="18" charset="0"/>
+                      </a:rPr>
+                      <m:t>𝑍</m:t>
+                    </m:r>
+                    <m:r>
+                      <a:rPr lang="en-US" sz="2400" b="0" i="1" smtClean="0">
+                        <a:latin typeface="Cambria Math" panose="02040503050406030204" pitchFamily="18" charset="0"/>
+                        <a:cs typeface="Times New Roman" panose="02020603050405020304" pitchFamily="18" charset="0"/>
+                      </a:rPr>
+                      <m:t>+</m:t>
+                    </m:r>
+                    <m:r>
+                      <a:rPr lang="en-US" sz="2400" b="0" i="1" smtClean="0">
+                        <a:latin typeface="Cambria Math" panose="02040503050406030204" pitchFamily="18" charset="0"/>
+                        <a:cs typeface="Times New Roman" panose="02020603050405020304" pitchFamily="18" charset="0"/>
+                      </a:rPr>
+                      <m:t>𝜀</m:t>
+                    </m:r>
+                  </m:oMath>
+                </a14:m>
+                <a:r>
+                  <a:rPr lang="en-US" sz="2400" b="0" dirty="0">
+                    <a:cs typeface="Times New Roman" panose="02020603050405020304" pitchFamily="18" charset="0"/>
+                  </a:rPr>
+                  <a:t>, where </a:t>
+                </a:r>
+                <a14:m>
+                  <m:oMath xmlns:m="http://schemas.openxmlformats.org/officeDocument/2006/math">
+                    <m:r>
+                      <a:rPr lang="en-US" sz="2400" b="0" i="1" smtClean="0">
+                        <a:latin typeface="Cambria Math" panose="02040503050406030204" pitchFamily="18" charset="0"/>
+                        <a:cs typeface="Times New Roman" panose="02020603050405020304" pitchFamily="18" charset="0"/>
+                      </a:rPr>
+                      <m:t>𝜀</m:t>
+                    </m:r>
+                    <m:r>
+                      <a:rPr lang="en-US" sz="2400" b="0" i="1" smtClean="0">
+                        <a:latin typeface="Cambria Math" panose="02040503050406030204" pitchFamily="18" charset="0"/>
+                        <a:cs typeface="Times New Roman" panose="02020603050405020304" pitchFamily="18" charset="0"/>
+                      </a:rPr>
+                      <m:t>∼</m:t>
+                    </m:r>
+                    <m:r>
+                      <a:rPr lang="en-US" sz="2400" b="0" i="1" smtClean="0">
+                        <a:latin typeface="Cambria Math" panose="02040503050406030204" pitchFamily="18" charset="0"/>
+                        <a:cs typeface="Times New Roman" panose="02020603050405020304" pitchFamily="18" charset="0"/>
+                      </a:rPr>
+                      <m:t>𝑁</m:t>
+                    </m:r>
+                    <m:r>
+                      <a:rPr lang="en-US" sz="2400" b="0" i="1" smtClean="0">
+                        <a:latin typeface="Cambria Math" panose="02040503050406030204" pitchFamily="18" charset="0"/>
+                        <a:cs typeface="Times New Roman" panose="02020603050405020304" pitchFamily="18" charset="0"/>
+                      </a:rPr>
+                      <m:t>(0,</m:t>
+                    </m:r>
+                    <m:sSubSup>
+                      <m:sSubSupPr>
+                        <m:ctrlPr>
+                          <a:rPr lang="en-US" sz="2400" b="0" i="1" smtClean="0">
+                            <a:latin typeface="Cambria Math" panose="02040503050406030204" pitchFamily="18" charset="0"/>
+                            <a:cs typeface="Times New Roman" panose="02020603050405020304" pitchFamily="18" charset="0"/>
+                          </a:rPr>
+                        </m:ctrlPr>
+                      </m:sSubSupPr>
+                      <m:e>
+                        <m:r>
+                          <a:rPr lang="en-US" sz="2400" b="0" i="1" smtClean="0">
+                            <a:latin typeface="Cambria Math" panose="02040503050406030204" pitchFamily="18" charset="0"/>
+                            <a:cs typeface="Times New Roman" panose="02020603050405020304" pitchFamily="18" charset="0"/>
+                          </a:rPr>
+                          <m:t>𝜎</m:t>
+                        </m:r>
+                      </m:e>
+                      <m:sub>
+                        <m:r>
+                          <a:rPr lang="en-US" sz="2400" b="0" i="1" smtClean="0">
+                            <a:latin typeface="Cambria Math" panose="02040503050406030204" pitchFamily="18" charset="0"/>
+                            <a:cs typeface="Times New Roman" panose="02020603050405020304" pitchFamily="18" charset="0"/>
+                          </a:rPr>
+                          <m:t>𝜀</m:t>
+                        </m:r>
+                      </m:sub>
+                      <m:sup>
+                        <m:r>
+                          <a:rPr lang="en-US" sz="2400" b="0" i="1" smtClean="0">
+                            <a:latin typeface="Cambria Math" panose="02040503050406030204" pitchFamily="18" charset="0"/>
+                            <a:cs typeface="Times New Roman" panose="02020603050405020304" pitchFamily="18" charset="0"/>
+                          </a:rPr>
+                          <m:t>2</m:t>
+                        </m:r>
+                      </m:sup>
+                    </m:sSubSup>
+                    <m:r>
+                      <a:rPr lang="en-US" sz="2400" b="0" i="1" smtClean="0">
+                        <a:latin typeface="Cambria Math" panose="02040503050406030204" pitchFamily="18" charset="0"/>
+                        <a:cs typeface="Times New Roman" panose="02020603050405020304" pitchFamily="18" charset="0"/>
+                      </a:rPr>
+                      <m:t>)</m:t>
+                    </m:r>
+                  </m:oMath>
+                </a14:m>
+                <a:r>
+                  <a:rPr lang="en-US" sz="2400" b="0" dirty="0">
+                    <a:cs typeface="Times New Roman" panose="02020603050405020304" pitchFamily="18" charset="0"/>
+                  </a:rPr>
+                  <a:t> is </a:t>
+                </a:r>
+                <a:r>
+                  <a:rPr lang="en-US" sz="2400" b="0" dirty="0" err="1">
+                    <a:cs typeface="Times New Roman" panose="02020603050405020304" pitchFamily="18" charset="0"/>
+                  </a:rPr>
+                  <a:t>i.i.d.</a:t>
+                </a:r>
+                <a:endParaRPr lang="en-US" sz="2400" b="0" dirty="0">
+                  <a:cs typeface="Times New Roman" panose="02020603050405020304" pitchFamily="18" charset="0"/>
+                </a:endParaRPr>
+              </a:p>
+              <a:p>
+                <a:r>
+                  <a:rPr lang="en-US" sz="2400" dirty="0">
+                    <a:cs typeface="Times New Roman" panose="02020603050405020304" pitchFamily="18" charset="0"/>
+                  </a:rPr>
+                  <a:t>What is the distribution of </a:t>
+                </a:r>
+                <a14:m>
+                  <m:oMath xmlns:m="http://schemas.openxmlformats.org/officeDocument/2006/math">
+                    <m:r>
+                      <a:rPr lang="en-US" sz="2400" b="0" i="1" smtClean="0">
+                        <a:latin typeface="Cambria Math" panose="02040503050406030204" pitchFamily="18" charset="0"/>
+                        <a:cs typeface="Times New Roman" panose="02020603050405020304" pitchFamily="18" charset="0"/>
+                      </a:rPr>
+                      <m:t>𝑆</m:t>
+                    </m:r>
+                  </m:oMath>
+                </a14:m>
+                <a:r>
+                  <a:rPr lang="en-US" sz="2400" b="0" dirty="0">
+                    <a:cs typeface="Times New Roman" panose="02020603050405020304" pitchFamily="18" charset="0"/>
+                  </a:rPr>
+                  <a:t>?</a:t>
+                </a:r>
+              </a:p>
+              <a:p>
+                <a:endParaRPr lang="en-US" sz="2400" dirty="0">
+                  <a:cs typeface="Times New Roman" panose="02020603050405020304" pitchFamily="18" charset="0"/>
+                </a:endParaRPr>
+              </a:p>
+            </p:txBody>
+          </p:sp>
+        </mc:Choice>
+        <mc:Fallback xmlns="">
+          <p:sp>
+            <p:nvSpPr>
+              <p:cNvPr id="3" name="Content Placeholder 2"/>
+              <p:cNvSpPr>
+                <a:spLocks noGrp="1" noRot="1" noChangeAspect="1" noMove="1" noResize="1" noEditPoints="1" noAdjustHandles="1" noChangeArrowheads="1" noChangeShapeType="1" noTextEdit="1"/>
+              </p:cNvSpPr>
+              <p:nvPr>
+                <p:ph idx="1"/>
+              </p:nvPr>
+            </p:nvSpPr>
+            <p:spPr>
+              <a:xfrm>
+                <a:off x="609601" y="1066801"/>
+                <a:ext cx="10439400" cy="5141388"/>
+              </a:xfrm>
+              <a:blipFill>
+                <a:blip r:embed="rId3"/>
+                <a:stretch>
+                  <a:fillRect l="-409" t="-1305"/>
+                </a:stretch>
+              </a:blipFill>
+            </p:spPr>
+            <p:txBody>
+              <a:bodyPr/>
+              <a:lstStyle/>
+              <a:p>
+                <a:r>
+                  <a:rPr lang="en-CA">
+                    <a:noFill/>
+                  </a:rPr>
+                  <a:t> </a:t>
+                </a:r>
+              </a:p>
+            </p:txBody>
+          </p:sp>
+        </mc:Fallback>
+      </mc:AlternateContent>
+    </p:spTree>
+    <p:extLst>
+      <p:ext uri="{BB962C8B-B14F-4D97-AF65-F5344CB8AC3E}">
+        <p14:creationId xmlns:p14="http://schemas.microsoft.com/office/powerpoint/2010/main" val="4252356275"/>
+      </p:ext>
+    </p:extLst>
+  </p:cSld>
+  <p:clrMapOvr>
+    <a:masterClrMapping/>
+  </p:clrMapOvr>
+</p:sld>
+</file>
+
+<file path=ppt/slides/slide23.xml><?xml version="1.0" encoding="utf-8"?>
 <p:sld xmlns:a="http://schemas.openxmlformats.org/drawingml/2006/main" xmlns:r="http://schemas.openxmlformats.org/officeDocument/2006/relationships" xmlns:p="http://schemas.openxmlformats.org/presentationml/2006/main">
   <p:cSld>
     <p:spTree>
@@ -16093,7 +17152,7 @@
 </p:sld>
 </file>
 
-<file path=ppt/slides/slide21.xml><?xml version="1.0" encoding="utf-8"?>
+<file path=ppt/slides/slide24.xml><?xml version="1.0" encoding="utf-8"?>
 <p:sld xmlns:a="http://schemas.openxmlformats.org/drawingml/2006/main" xmlns:r="http://schemas.openxmlformats.org/officeDocument/2006/relationships" xmlns:p="http://schemas.openxmlformats.org/presentationml/2006/main">
   <p:cSld>
     <p:spTree>
@@ -16793,7 +17852,7 @@
 </p:sld>
 </file>
 
-<file path=ppt/slides/slide22.xml><?xml version="1.0" encoding="utf-8"?>
+<file path=ppt/slides/slide25.xml><?xml version="1.0" encoding="utf-8"?>
 <p:sld xmlns:a="http://schemas.openxmlformats.org/drawingml/2006/main" xmlns:r="http://schemas.openxmlformats.org/officeDocument/2006/relationships" xmlns:p="http://schemas.openxmlformats.org/presentationml/2006/main">
   <p:cSld>
     <p:spTree>
@@ -17634,7 +18693,7 @@
 </p:sld>
 </file>
 
-<file path=ppt/slides/slide23.xml><?xml version="1.0" encoding="utf-8"?>
+<file path=ppt/slides/slide26.xml><?xml version="1.0" encoding="utf-8"?>
 <p:sld xmlns:a="http://schemas.openxmlformats.org/drawingml/2006/main" xmlns:r="http://schemas.openxmlformats.org/officeDocument/2006/relationships" xmlns:p="http://schemas.openxmlformats.org/presentationml/2006/main">
   <p:cSld>
     <p:spTree>
@@ -17727,7 +18786,7 @@
 </p:sld>
 </file>
 
-<file path=ppt/slides/slide24.xml><?xml version="1.0" encoding="utf-8"?>
+<file path=ppt/slides/slide27.xml><?xml version="1.0" encoding="utf-8"?>
 <p:sld xmlns:a="http://schemas.openxmlformats.org/drawingml/2006/main" xmlns:r="http://schemas.openxmlformats.org/officeDocument/2006/relationships" xmlns:p="http://schemas.openxmlformats.org/presentationml/2006/main">
   <p:cSld>
     <p:spTree>
@@ -18789,7 +19848,7 @@
 </p:sld>
 </file>
 
-<file path=ppt/slides/slide25.xml><?xml version="1.0" encoding="utf-8"?>
+<file path=ppt/slides/slide28.xml><?xml version="1.0" encoding="utf-8"?>
 <p:sld xmlns:a="http://schemas.openxmlformats.org/drawingml/2006/main" xmlns:r="http://schemas.openxmlformats.org/officeDocument/2006/relationships" xmlns:p="http://schemas.openxmlformats.org/presentationml/2006/main">
   <p:cSld>
     <p:spTree>
@@ -19232,7 +20291,7 @@
 </p:sld>
 </file>
 
-<file path=ppt/slides/slide26.xml><?xml version="1.0" encoding="utf-8"?>
+<file path=ppt/slides/slide29.xml><?xml version="1.0" encoding="utf-8"?>
 <p:sld xmlns:a="http://schemas.openxmlformats.org/drawingml/2006/main" xmlns:r="http://schemas.openxmlformats.org/officeDocument/2006/relationships" xmlns:p="http://schemas.openxmlformats.org/presentationml/2006/main">
   <p:cSld>
     <p:spTree>
@@ -19595,2080 +20654,6 @@
     <p:extLst>
       <p:ext uri="{BB962C8B-B14F-4D97-AF65-F5344CB8AC3E}">
         <p14:creationId xmlns:p14="http://schemas.microsoft.com/office/powerpoint/2010/main" val="2580238704"/>
-      </p:ext>
-    </p:extLst>
-  </p:cSld>
-  <p:clrMapOvr>
-    <a:masterClrMapping/>
-  </p:clrMapOvr>
-</p:sld>
-</file>
-
-<file path=ppt/slides/slide27.xml><?xml version="1.0" encoding="utf-8"?>
-<p:sld xmlns:a="http://schemas.openxmlformats.org/drawingml/2006/main" xmlns:r="http://schemas.openxmlformats.org/officeDocument/2006/relationships" xmlns:p="http://schemas.openxmlformats.org/presentationml/2006/main">
-  <p:cSld>
-    <p:spTree>
-      <p:nvGrpSpPr>
-        <p:cNvPr id="1" name=""/>
-        <p:cNvGrpSpPr/>
-        <p:nvPr/>
-      </p:nvGrpSpPr>
-      <p:grpSpPr>
-        <a:xfrm>
-          <a:off x="0" y="0"/>
-          <a:ext cx="0" cy="0"/>
-          <a:chOff x="0" y="0"/>
-          <a:chExt cx="0" cy="0"/>
-        </a:xfrm>
-      </p:grpSpPr>
-      <p:sp>
-        <p:nvSpPr>
-          <p:cNvPr id="2" name="Title 1"/>
-          <p:cNvSpPr>
-            <a:spLocks noGrp="1"/>
-          </p:cNvSpPr>
-          <p:nvPr>
-            <p:ph type="title"/>
-          </p:nvPr>
-        </p:nvSpPr>
-        <p:spPr>
-          <a:xfrm>
-            <a:off x="609600" y="272077"/>
-            <a:ext cx="10439400" cy="624840"/>
-          </a:xfrm>
-        </p:spPr>
-        <p:txBody>
-          <a:bodyPr>
-            <a:noAutofit/>
-          </a:bodyPr>
-          <a:lstStyle/>
-          <a:p>
-            <a:r>
-              <a:rPr lang="en-US" sz="3600" dirty="0">
-                <a:cs typeface="Times New Roman" panose="02020603050405020304" pitchFamily="18" charset="0"/>
-              </a:rPr>
-              <a:t>Case 1: Prejudice</a:t>
-            </a:r>
-            <a:endParaRPr lang="en-US" sz="3600" dirty="0">
-              <a:latin typeface="Times New Roman" panose="02020603050405020304" pitchFamily="18" charset="0"/>
-              <a:cs typeface="Times New Roman" panose="02020603050405020304" pitchFamily="18" charset="0"/>
-            </a:endParaRPr>
-          </a:p>
-        </p:txBody>
-      </p:sp>
-      <p:sp>
-        <p:nvSpPr>
-          <p:cNvPr id="6" name="Content Placeholder 2">
-            <a:extLst>
-              <a:ext uri="{FF2B5EF4-FFF2-40B4-BE49-F238E27FC236}">
-                <a16:creationId xmlns:a16="http://schemas.microsoft.com/office/drawing/2014/main" id="{1E43DB50-BEDE-CBC2-46F9-A709EB8CD67C}"/>
-              </a:ext>
-            </a:extLst>
-          </p:cNvPr>
-          <p:cNvSpPr txBox="1">
-            <a:spLocks/>
-          </p:cNvSpPr>
-          <p:nvPr/>
-        </p:nvSpPr>
-        <p:spPr>
-          <a:xfrm>
-            <a:off x="609601" y="1066801"/>
-            <a:ext cx="10439400" cy="5141388"/>
-          </a:xfrm>
-          <a:prstGeom prst="rect">
-            <a:avLst/>
-          </a:prstGeom>
-        </p:spPr>
-        <p:txBody>
-          <a:bodyPr vert="horz" lIns="91440" tIns="45720" rIns="91440" bIns="45720" rtlCol="0">
-            <a:noAutofit/>
-          </a:bodyPr>
-          <a:lstStyle>
-            <a:lvl1pPr marL="182880" indent="-182880" algn="l" defTabSz="914400" rtl="0" eaLnBrk="1" latinLnBrk="0" hangingPunct="1">
-              <a:lnSpc>
-                <a:spcPct val="95000"/>
-              </a:lnSpc>
-              <a:spcBef>
-                <a:spcPts val="1400"/>
-              </a:spcBef>
-              <a:spcAft>
-                <a:spcPts val="200"/>
-              </a:spcAft>
-              <a:buClr>
-                <a:schemeClr val="accent1"/>
-              </a:buClr>
-              <a:buSzPct val="80000"/>
-              <a:buFont typeface="Arial" pitchFamily="34" charset="0"/>
-              <a:buChar char="•"/>
-              <a:defRPr sz="1800" kern="1200" spc="10" baseline="0">
-                <a:solidFill>
-                  <a:schemeClr val="tx1"/>
-                </a:solidFill>
-                <a:latin typeface="Times New Roman" panose="02020603050405020304" pitchFamily="18" charset="0"/>
-                <a:ea typeface="+mn-ea"/>
-                <a:cs typeface="+mn-cs"/>
-              </a:defRPr>
-            </a:lvl1pPr>
-            <a:lvl2pPr marL="457200" indent="-182880" algn="l" defTabSz="914400" rtl="0" eaLnBrk="1" latinLnBrk="0" hangingPunct="1">
-              <a:lnSpc>
-                <a:spcPct val="90000"/>
-              </a:lnSpc>
-              <a:spcBef>
-                <a:spcPts val="300"/>
-              </a:spcBef>
-              <a:spcAft>
-                <a:spcPts val="300"/>
-              </a:spcAft>
-              <a:buClr>
-                <a:schemeClr val="accent1"/>
-              </a:buClr>
-              <a:buFont typeface="Wingdings 2" pitchFamily="18" charset="2"/>
-              <a:buChar char=""/>
-              <a:defRPr sz="1600" kern="1200">
-                <a:solidFill>
-                  <a:schemeClr val="tx1">
-                    <a:lumMod val="85000"/>
-                    <a:lumOff val="15000"/>
-                  </a:schemeClr>
-                </a:solidFill>
-                <a:latin typeface="Times New Roman" panose="02020603050405020304" pitchFamily="18" charset="0"/>
-                <a:ea typeface="+mn-ea"/>
-                <a:cs typeface="+mn-cs"/>
-              </a:defRPr>
-            </a:lvl2pPr>
-            <a:lvl3pPr marL="731520" indent="-182880" algn="l" defTabSz="914400" rtl="0" eaLnBrk="1" latinLnBrk="0" hangingPunct="1">
-              <a:lnSpc>
-                <a:spcPct val="90000"/>
-              </a:lnSpc>
-              <a:spcBef>
-                <a:spcPts val="300"/>
-              </a:spcBef>
-              <a:spcAft>
-                <a:spcPts val="300"/>
-              </a:spcAft>
-              <a:buClr>
-                <a:schemeClr val="accent1"/>
-              </a:buClr>
-              <a:buFont typeface="Wingdings 2" pitchFamily="18" charset="2"/>
-              <a:buChar char=""/>
-              <a:defRPr sz="1400" kern="1200">
-                <a:solidFill>
-                  <a:schemeClr val="tx1">
-                    <a:lumMod val="85000"/>
-                    <a:lumOff val="15000"/>
-                  </a:schemeClr>
-                </a:solidFill>
-                <a:latin typeface="Times New Roman" panose="02020603050405020304" pitchFamily="18" charset="0"/>
-                <a:ea typeface="+mn-ea"/>
-                <a:cs typeface="+mn-cs"/>
-              </a:defRPr>
-            </a:lvl3pPr>
-            <a:lvl4pPr marL="1005840" indent="-182880" algn="l" defTabSz="914400" rtl="0" eaLnBrk="1" latinLnBrk="0" hangingPunct="1">
-              <a:lnSpc>
-                <a:spcPct val="90000"/>
-              </a:lnSpc>
-              <a:spcBef>
-                <a:spcPts val="300"/>
-              </a:spcBef>
-              <a:spcAft>
-                <a:spcPts val="300"/>
-              </a:spcAft>
-              <a:buClr>
-                <a:schemeClr val="accent1"/>
-              </a:buClr>
-              <a:buFont typeface="Wingdings 2" pitchFamily="18" charset="2"/>
-              <a:buChar char=""/>
-              <a:defRPr sz="1400" kern="1200">
-                <a:solidFill>
-                  <a:schemeClr val="tx1">
-                    <a:lumMod val="85000"/>
-                    <a:lumOff val="15000"/>
-                  </a:schemeClr>
-                </a:solidFill>
-                <a:latin typeface="Times New Roman" panose="02020603050405020304" pitchFamily="18" charset="0"/>
-                <a:ea typeface="+mn-ea"/>
-                <a:cs typeface="+mn-cs"/>
-              </a:defRPr>
-            </a:lvl4pPr>
-            <a:lvl5pPr marL="1280160" indent="-182880" algn="l" defTabSz="914400" rtl="0" eaLnBrk="1" latinLnBrk="0" hangingPunct="1">
-              <a:lnSpc>
-                <a:spcPct val="90000"/>
-              </a:lnSpc>
-              <a:spcBef>
-                <a:spcPts val="300"/>
-              </a:spcBef>
-              <a:spcAft>
-                <a:spcPts val="300"/>
-              </a:spcAft>
-              <a:buClr>
-                <a:schemeClr val="accent1"/>
-              </a:buClr>
-              <a:buFont typeface="Wingdings 2" pitchFamily="18" charset="2"/>
-              <a:buChar char=""/>
-              <a:defRPr sz="1400" kern="1200">
-                <a:solidFill>
-                  <a:schemeClr val="tx1">
-                    <a:lumMod val="85000"/>
-                    <a:lumOff val="15000"/>
-                  </a:schemeClr>
-                </a:solidFill>
-                <a:latin typeface="Times New Roman" panose="02020603050405020304" pitchFamily="18" charset="0"/>
-                <a:ea typeface="+mn-ea"/>
-                <a:cs typeface="+mn-cs"/>
-              </a:defRPr>
-            </a:lvl5pPr>
-            <a:lvl6pPr marL="1600000" indent="-228600" algn="l" defTabSz="914400" rtl="0" eaLnBrk="1" latinLnBrk="0" hangingPunct="1">
-              <a:lnSpc>
-                <a:spcPct val="90000"/>
-              </a:lnSpc>
-              <a:spcBef>
-                <a:spcPts val="300"/>
-              </a:spcBef>
-              <a:spcAft>
-                <a:spcPts val="300"/>
-              </a:spcAft>
-              <a:buClr>
-                <a:schemeClr val="accent1"/>
-              </a:buClr>
-              <a:buFont typeface="Wingdings 2" pitchFamily="18" charset="2"/>
-              <a:buChar char=""/>
-              <a:defRPr sz="1400" kern="1200">
-                <a:solidFill>
-                  <a:schemeClr val="tx1">
-                    <a:lumMod val="85000"/>
-                    <a:lumOff val="15000"/>
-                  </a:schemeClr>
-                </a:solidFill>
-                <a:latin typeface="+mn-lt"/>
-                <a:ea typeface="+mn-ea"/>
-                <a:cs typeface="+mn-cs"/>
-              </a:defRPr>
-            </a:lvl6pPr>
-            <a:lvl7pPr marL="1900000" indent="-228600" algn="l" defTabSz="914400" rtl="0" eaLnBrk="1" latinLnBrk="0" hangingPunct="1">
-              <a:lnSpc>
-                <a:spcPct val="90000"/>
-              </a:lnSpc>
-              <a:spcBef>
-                <a:spcPts val="300"/>
-              </a:spcBef>
-              <a:spcAft>
-                <a:spcPts val="300"/>
-              </a:spcAft>
-              <a:buClr>
-                <a:schemeClr val="accent1"/>
-              </a:buClr>
-              <a:buFont typeface="Wingdings 2" pitchFamily="18" charset="2"/>
-              <a:buChar char=""/>
-              <a:defRPr sz="1400" kern="1200">
-                <a:solidFill>
-                  <a:schemeClr val="tx1">
-                    <a:lumMod val="85000"/>
-                    <a:lumOff val="15000"/>
-                  </a:schemeClr>
-                </a:solidFill>
-                <a:latin typeface="+mn-lt"/>
-                <a:ea typeface="+mn-ea"/>
-                <a:cs typeface="+mn-cs"/>
-              </a:defRPr>
-            </a:lvl7pPr>
-            <a:lvl8pPr marL="2200000" indent="-228600" algn="l" defTabSz="914400" rtl="0" eaLnBrk="1" latinLnBrk="0" hangingPunct="1">
-              <a:lnSpc>
-                <a:spcPct val="90000"/>
-              </a:lnSpc>
-              <a:spcBef>
-                <a:spcPts val="300"/>
-              </a:spcBef>
-              <a:spcAft>
-                <a:spcPts val="300"/>
-              </a:spcAft>
-              <a:buClr>
-                <a:schemeClr val="accent1"/>
-              </a:buClr>
-              <a:buFont typeface="Wingdings 2" pitchFamily="18" charset="2"/>
-              <a:buChar char=""/>
-              <a:defRPr sz="1400" kern="1200">
-                <a:solidFill>
-                  <a:schemeClr val="tx1">
-                    <a:lumMod val="85000"/>
-                    <a:lumOff val="15000"/>
-                  </a:schemeClr>
-                </a:solidFill>
-                <a:latin typeface="+mn-lt"/>
-                <a:ea typeface="+mn-ea"/>
-                <a:cs typeface="+mn-cs"/>
-              </a:defRPr>
-            </a:lvl8pPr>
-            <a:lvl9pPr marL="2500000" indent="-228600" algn="l" defTabSz="914400" rtl="0" eaLnBrk="1" latinLnBrk="0" hangingPunct="1">
-              <a:lnSpc>
-                <a:spcPct val="90000"/>
-              </a:lnSpc>
-              <a:spcBef>
-                <a:spcPts val="300"/>
-              </a:spcBef>
-              <a:spcAft>
-                <a:spcPts val="300"/>
-              </a:spcAft>
-              <a:buClr>
-                <a:schemeClr val="accent1"/>
-              </a:buClr>
-              <a:buFont typeface="Wingdings 2" pitchFamily="18" charset="2"/>
-              <a:buChar char=""/>
-              <a:defRPr sz="1400" kern="1200">
-                <a:solidFill>
-                  <a:schemeClr val="tx1">
-                    <a:lumMod val="85000"/>
-                    <a:lumOff val="15000"/>
-                  </a:schemeClr>
-                </a:solidFill>
-                <a:latin typeface="+mn-lt"/>
-                <a:ea typeface="+mn-ea"/>
-                <a:cs typeface="+mn-cs"/>
-              </a:defRPr>
-            </a:lvl9pPr>
-          </a:lstStyle>
-          <a:p>
-            <a:endParaRPr lang="en-US" sz="2600" dirty="0">
-              <a:cs typeface="Times New Roman" panose="02020603050405020304" pitchFamily="18" charset="0"/>
-            </a:endParaRPr>
-          </a:p>
-        </p:txBody>
-      </p:sp>
-      <p:sp>
-        <p:nvSpPr>
-          <p:cNvPr id="3" name="Content Placeholder 2">
-            <a:extLst>
-              <a:ext uri="{FF2B5EF4-FFF2-40B4-BE49-F238E27FC236}">
-                <a16:creationId xmlns:a16="http://schemas.microsoft.com/office/drawing/2014/main" id="{07221140-77F4-0A99-AFB2-CC4DB7DB493C}"/>
-              </a:ext>
-            </a:extLst>
-          </p:cNvPr>
-          <p:cNvSpPr txBox="1">
-            <a:spLocks/>
-          </p:cNvSpPr>
-          <p:nvPr/>
-        </p:nvSpPr>
-        <p:spPr>
-          <a:xfrm>
-            <a:off x="762001" y="1219201"/>
-            <a:ext cx="10439400" cy="5141388"/>
-          </a:xfrm>
-          <a:prstGeom prst="rect">
-            <a:avLst/>
-          </a:prstGeom>
-        </p:spPr>
-        <p:txBody>
-          <a:bodyPr vert="horz" lIns="91440" tIns="45720" rIns="91440" bIns="45720" rtlCol="0">
-            <a:noAutofit/>
-          </a:bodyPr>
-          <a:lstStyle>
-            <a:lvl1pPr marL="182880" indent="-182880" algn="l" defTabSz="914400" rtl="0" eaLnBrk="1" latinLnBrk="0" hangingPunct="1">
-              <a:lnSpc>
-                <a:spcPct val="95000"/>
-              </a:lnSpc>
-              <a:spcBef>
-                <a:spcPts val="1400"/>
-              </a:spcBef>
-              <a:spcAft>
-                <a:spcPts val="200"/>
-              </a:spcAft>
-              <a:buClr>
-                <a:schemeClr val="accent1"/>
-              </a:buClr>
-              <a:buSzPct val="80000"/>
-              <a:buFont typeface="Arial" pitchFamily="34" charset="0"/>
-              <a:buChar char="•"/>
-              <a:defRPr sz="1800" kern="1200" spc="10" baseline="0">
-                <a:solidFill>
-                  <a:schemeClr val="tx1"/>
-                </a:solidFill>
-                <a:latin typeface="Times New Roman" panose="02020603050405020304" pitchFamily="18" charset="0"/>
-                <a:ea typeface="+mn-ea"/>
-                <a:cs typeface="+mn-cs"/>
-              </a:defRPr>
-            </a:lvl1pPr>
-            <a:lvl2pPr marL="457200" indent="-182880" algn="l" defTabSz="914400" rtl="0" eaLnBrk="1" latinLnBrk="0" hangingPunct="1">
-              <a:lnSpc>
-                <a:spcPct val="90000"/>
-              </a:lnSpc>
-              <a:spcBef>
-                <a:spcPts val="300"/>
-              </a:spcBef>
-              <a:spcAft>
-                <a:spcPts val="300"/>
-              </a:spcAft>
-              <a:buClr>
-                <a:schemeClr val="accent1"/>
-              </a:buClr>
-              <a:buFont typeface="Wingdings 2" pitchFamily="18" charset="2"/>
-              <a:buChar char=""/>
-              <a:defRPr sz="1600" kern="1200">
-                <a:solidFill>
-                  <a:schemeClr val="tx1">
-                    <a:lumMod val="85000"/>
-                    <a:lumOff val="15000"/>
-                  </a:schemeClr>
-                </a:solidFill>
-                <a:latin typeface="Times New Roman" panose="02020603050405020304" pitchFamily="18" charset="0"/>
-                <a:ea typeface="+mn-ea"/>
-                <a:cs typeface="+mn-cs"/>
-              </a:defRPr>
-            </a:lvl2pPr>
-            <a:lvl3pPr marL="731520" indent="-182880" algn="l" defTabSz="914400" rtl="0" eaLnBrk="1" latinLnBrk="0" hangingPunct="1">
-              <a:lnSpc>
-                <a:spcPct val="90000"/>
-              </a:lnSpc>
-              <a:spcBef>
-                <a:spcPts val="300"/>
-              </a:spcBef>
-              <a:spcAft>
-                <a:spcPts val="300"/>
-              </a:spcAft>
-              <a:buClr>
-                <a:schemeClr val="accent1"/>
-              </a:buClr>
-              <a:buFont typeface="Wingdings 2" pitchFamily="18" charset="2"/>
-              <a:buChar char=""/>
-              <a:defRPr sz="1400" kern="1200">
-                <a:solidFill>
-                  <a:schemeClr val="tx1">
-                    <a:lumMod val="85000"/>
-                    <a:lumOff val="15000"/>
-                  </a:schemeClr>
-                </a:solidFill>
-                <a:latin typeface="Times New Roman" panose="02020603050405020304" pitchFamily="18" charset="0"/>
-                <a:ea typeface="+mn-ea"/>
-                <a:cs typeface="+mn-cs"/>
-              </a:defRPr>
-            </a:lvl3pPr>
-            <a:lvl4pPr marL="1005840" indent="-182880" algn="l" defTabSz="914400" rtl="0" eaLnBrk="1" latinLnBrk="0" hangingPunct="1">
-              <a:lnSpc>
-                <a:spcPct val="90000"/>
-              </a:lnSpc>
-              <a:spcBef>
-                <a:spcPts val="300"/>
-              </a:spcBef>
-              <a:spcAft>
-                <a:spcPts val="300"/>
-              </a:spcAft>
-              <a:buClr>
-                <a:schemeClr val="accent1"/>
-              </a:buClr>
-              <a:buFont typeface="Wingdings 2" pitchFamily="18" charset="2"/>
-              <a:buChar char=""/>
-              <a:defRPr sz="1400" kern="1200">
-                <a:solidFill>
-                  <a:schemeClr val="tx1">
-                    <a:lumMod val="85000"/>
-                    <a:lumOff val="15000"/>
-                  </a:schemeClr>
-                </a:solidFill>
-                <a:latin typeface="Times New Roman" panose="02020603050405020304" pitchFamily="18" charset="0"/>
-                <a:ea typeface="+mn-ea"/>
-                <a:cs typeface="+mn-cs"/>
-              </a:defRPr>
-            </a:lvl4pPr>
-            <a:lvl5pPr marL="1280160" indent="-182880" algn="l" defTabSz="914400" rtl="0" eaLnBrk="1" latinLnBrk="0" hangingPunct="1">
-              <a:lnSpc>
-                <a:spcPct val="90000"/>
-              </a:lnSpc>
-              <a:spcBef>
-                <a:spcPts val="300"/>
-              </a:spcBef>
-              <a:spcAft>
-                <a:spcPts val="300"/>
-              </a:spcAft>
-              <a:buClr>
-                <a:schemeClr val="accent1"/>
-              </a:buClr>
-              <a:buFont typeface="Wingdings 2" pitchFamily="18" charset="2"/>
-              <a:buChar char=""/>
-              <a:defRPr sz="1400" kern="1200">
-                <a:solidFill>
-                  <a:schemeClr val="tx1">
-                    <a:lumMod val="85000"/>
-                    <a:lumOff val="15000"/>
-                  </a:schemeClr>
-                </a:solidFill>
-                <a:latin typeface="Times New Roman" panose="02020603050405020304" pitchFamily="18" charset="0"/>
-                <a:ea typeface="+mn-ea"/>
-                <a:cs typeface="+mn-cs"/>
-              </a:defRPr>
-            </a:lvl5pPr>
-            <a:lvl6pPr marL="1600000" indent="-228600" algn="l" defTabSz="914400" rtl="0" eaLnBrk="1" latinLnBrk="0" hangingPunct="1">
-              <a:lnSpc>
-                <a:spcPct val="90000"/>
-              </a:lnSpc>
-              <a:spcBef>
-                <a:spcPts val="300"/>
-              </a:spcBef>
-              <a:spcAft>
-                <a:spcPts val="300"/>
-              </a:spcAft>
-              <a:buClr>
-                <a:schemeClr val="accent1"/>
-              </a:buClr>
-              <a:buFont typeface="Wingdings 2" pitchFamily="18" charset="2"/>
-              <a:buChar char=""/>
-              <a:defRPr sz="1400" kern="1200">
-                <a:solidFill>
-                  <a:schemeClr val="tx1">
-                    <a:lumMod val="85000"/>
-                    <a:lumOff val="15000"/>
-                  </a:schemeClr>
-                </a:solidFill>
-                <a:latin typeface="+mn-lt"/>
-                <a:ea typeface="+mn-ea"/>
-                <a:cs typeface="+mn-cs"/>
-              </a:defRPr>
-            </a:lvl6pPr>
-            <a:lvl7pPr marL="1900000" indent="-228600" algn="l" defTabSz="914400" rtl="0" eaLnBrk="1" latinLnBrk="0" hangingPunct="1">
-              <a:lnSpc>
-                <a:spcPct val="90000"/>
-              </a:lnSpc>
-              <a:spcBef>
-                <a:spcPts val="300"/>
-              </a:spcBef>
-              <a:spcAft>
-                <a:spcPts val="300"/>
-              </a:spcAft>
-              <a:buClr>
-                <a:schemeClr val="accent1"/>
-              </a:buClr>
-              <a:buFont typeface="Wingdings 2" pitchFamily="18" charset="2"/>
-              <a:buChar char=""/>
-              <a:defRPr sz="1400" kern="1200">
-                <a:solidFill>
-                  <a:schemeClr val="tx1">
-                    <a:lumMod val="85000"/>
-                    <a:lumOff val="15000"/>
-                  </a:schemeClr>
-                </a:solidFill>
-                <a:latin typeface="+mn-lt"/>
-                <a:ea typeface="+mn-ea"/>
-                <a:cs typeface="+mn-cs"/>
-              </a:defRPr>
-            </a:lvl7pPr>
-            <a:lvl8pPr marL="2200000" indent="-228600" algn="l" defTabSz="914400" rtl="0" eaLnBrk="1" latinLnBrk="0" hangingPunct="1">
-              <a:lnSpc>
-                <a:spcPct val="90000"/>
-              </a:lnSpc>
-              <a:spcBef>
-                <a:spcPts val="300"/>
-              </a:spcBef>
-              <a:spcAft>
-                <a:spcPts val="300"/>
-              </a:spcAft>
-              <a:buClr>
-                <a:schemeClr val="accent1"/>
-              </a:buClr>
-              <a:buFont typeface="Wingdings 2" pitchFamily="18" charset="2"/>
-              <a:buChar char=""/>
-              <a:defRPr sz="1400" kern="1200">
-                <a:solidFill>
-                  <a:schemeClr val="tx1">
-                    <a:lumMod val="85000"/>
-                    <a:lumOff val="15000"/>
-                  </a:schemeClr>
-                </a:solidFill>
-                <a:latin typeface="+mn-lt"/>
-                <a:ea typeface="+mn-ea"/>
-                <a:cs typeface="+mn-cs"/>
-              </a:defRPr>
-            </a:lvl8pPr>
-            <a:lvl9pPr marL="2500000" indent="-228600" algn="l" defTabSz="914400" rtl="0" eaLnBrk="1" latinLnBrk="0" hangingPunct="1">
-              <a:lnSpc>
-                <a:spcPct val="90000"/>
-              </a:lnSpc>
-              <a:spcBef>
-                <a:spcPts val="300"/>
-              </a:spcBef>
-              <a:spcAft>
-                <a:spcPts val="300"/>
-              </a:spcAft>
-              <a:buClr>
-                <a:schemeClr val="accent1"/>
-              </a:buClr>
-              <a:buFont typeface="Wingdings 2" pitchFamily="18" charset="2"/>
-              <a:buChar char=""/>
-              <a:defRPr sz="1400" kern="1200">
-                <a:solidFill>
-                  <a:schemeClr val="tx1">
-                    <a:lumMod val="85000"/>
-                    <a:lumOff val="15000"/>
-                  </a:schemeClr>
-                </a:solidFill>
-                <a:latin typeface="+mn-lt"/>
-                <a:ea typeface="+mn-ea"/>
-                <a:cs typeface="+mn-cs"/>
-              </a:defRPr>
-            </a:lvl9pPr>
-          </a:lstStyle>
-          <a:p>
-            <a:r>
-              <a:rPr lang="en-US" sz="2400" dirty="0">
-                <a:cs typeface="Times New Roman" panose="02020603050405020304" pitchFamily="18" charset="0"/>
-              </a:rPr>
-              <a:t>Like the Becker model</a:t>
-            </a:r>
-          </a:p>
-          <a:p>
-            <a:r>
-              <a:rPr lang="en-US" sz="2400" dirty="0">
-                <a:cs typeface="Times New Roman" panose="02020603050405020304" pitchFamily="18" charset="0"/>
-              </a:rPr>
-              <a:t>Taste-based discrimination can result in under-treatment for minorities</a:t>
-            </a:r>
-            <a:endParaRPr lang="en-US" sz="2600" dirty="0">
-              <a:cs typeface="Times New Roman" panose="02020603050405020304" pitchFamily="18" charset="0"/>
-            </a:endParaRPr>
-          </a:p>
-        </p:txBody>
-      </p:sp>
-      <p:pic>
-        <p:nvPicPr>
-          <p:cNvPr id="5" name="Picture 4">
-            <a:extLst>
-              <a:ext uri="{FF2B5EF4-FFF2-40B4-BE49-F238E27FC236}">
-                <a16:creationId xmlns:a16="http://schemas.microsoft.com/office/drawing/2014/main" id="{F6F584E3-FA5B-3B22-43C2-424BC372F1C9}"/>
-              </a:ext>
-            </a:extLst>
-          </p:cNvPr>
-          <p:cNvPicPr>
-            <a:picLocks noChangeAspect="1"/>
-          </p:cNvPicPr>
-          <p:nvPr/>
-        </p:nvPicPr>
-        <p:blipFill>
-          <a:blip r:embed="rId3"/>
-          <a:stretch>
-            <a:fillRect/>
-          </a:stretch>
-        </p:blipFill>
-        <p:spPr>
-          <a:xfrm>
-            <a:off x="2075906" y="2174365"/>
-            <a:ext cx="7811590" cy="4715533"/>
-          </a:xfrm>
-          <a:prstGeom prst="rect">
-            <a:avLst/>
-          </a:prstGeom>
-        </p:spPr>
-      </p:pic>
-    </p:spTree>
-    <p:extLst>
-      <p:ext uri="{BB962C8B-B14F-4D97-AF65-F5344CB8AC3E}">
-        <p14:creationId xmlns:p14="http://schemas.microsoft.com/office/powerpoint/2010/main" val="1282490527"/>
-      </p:ext>
-    </p:extLst>
-  </p:cSld>
-  <p:clrMapOvr>
-    <a:masterClrMapping/>
-  </p:clrMapOvr>
-</p:sld>
-</file>
-
-<file path=ppt/slides/slide28.xml><?xml version="1.0" encoding="utf-8"?>
-<p:sld xmlns:a="http://schemas.openxmlformats.org/drawingml/2006/main" xmlns:r="http://schemas.openxmlformats.org/officeDocument/2006/relationships" xmlns:p="http://schemas.openxmlformats.org/presentationml/2006/main">
-  <p:cSld>
-    <p:spTree>
-      <p:nvGrpSpPr>
-        <p:cNvPr id="1" name=""/>
-        <p:cNvGrpSpPr/>
-        <p:nvPr/>
-      </p:nvGrpSpPr>
-      <p:grpSpPr>
-        <a:xfrm>
-          <a:off x="0" y="0"/>
-          <a:ext cx="0" cy="0"/>
-          <a:chOff x="0" y="0"/>
-          <a:chExt cx="0" cy="0"/>
-        </a:xfrm>
-      </p:grpSpPr>
-      <p:sp>
-        <p:nvSpPr>
-          <p:cNvPr id="2" name="Title 1"/>
-          <p:cNvSpPr>
-            <a:spLocks noGrp="1"/>
-          </p:cNvSpPr>
-          <p:nvPr>
-            <p:ph type="title"/>
-          </p:nvPr>
-        </p:nvSpPr>
-        <p:spPr>
-          <a:xfrm>
-            <a:off x="609600" y="272077"/>
-            <a:ext cx="10439400" cy="624840"/>
-          </a:xfrm>
-        </p:spPr>
-        <p:txBody>
-          <a:bodyPr>
-            <a:noAutofit/>
-          </a:bodyPr>
-          <a:lstStyle/>
-          <a:p>
-            <a:r>
-              <a:rPr lang="en-US" sz="3600" dirty="0">
-                <a:cs typeface="Times New Roman" panose="02020603050405020304" pitchFamily="18" charset="0"/>
-              </a:rPr>
-              <a:t>Case 1: Prejudice</a:t>
-            </a:r>
-            <a:endParaRPr lang="en-US" sz="3600" dirty="0">
-              <a:latin typeface="Times New Roman" panose="02020603050405020304" pitchFamily="18" charset="0"/>
-              <a:cs typeface="Times New Roman" panose="02020603050405020304" pitchFamily="18" charset="0"/>
-            </a:endParaRPr>
-          </a:p>
-        </p:txBody>
-      </p:sp>
-      <p:sp>
-        <p:nvSpPr>
-          <p:cNvPr id="6" name="Content Placeholder 2">
-            <a:extLst>
-              <a:ext uri="{FF2B5EF4-FFF2-40B4-BE49-F238E27FC236}">
-                <a16:creationId xmlns:a16="http://schemas.microsoft.com/office/drawing/2014/main" id="{1E43DB50-BEDE-CBC2-46F9-A709EB8CD67C}"/>
-              </a:ext>
-            </a:extLst>
-          </p:cNvPr>
-          <p:cNvSpPr txBox="1">
-            <a:spLocks/>
-          </p:cNvSpPr>
-          <p:nvPr/>
-        </p:nvSpPr>
-        <p:spPr>
-          <a:xfrm>
-            <a:off x="609601" y="1066801"/>
-            <a:ext cx="10439400" cy="5141388"/>
-          </a:xfrm>
-          <a:prstGeom prst="rect">
-            <a:avLst/>
-          </a:prstGeom>
-        </p:spPr>
-        <p:txBody>
-          <a:bodyPr vert="horz" lIns="91440" tIns="45720" rIns="91440" bIns="45720" rtlCol="0">
-            <a:noAutofit/>
-          </a:bodyPr>
-          <a:lstStyle>
-            <a:lvl1pPr marL="182880" indent="-182880" algn="l" defTabSz="914400" rtl="0" eaLnBrk="1" latinLnBrk="0" hangingPunct="1">
-              <a:lnSpc>
-                <a:spcPct val="95000"/>
-              </a:lnSpc>
-              <a:spcBef>
-                <a:spcPts val="1400"/>
-              </a:spcBef>
-              <a:spcAft>
-                <a:spcPts val="200"/>
-              </a:spcAft>
-              <a:buClr>
-                <a:schemeClr val="accent1"/>
-              </a:buClr>
-              <a:buSzPct val="80000"/>
-              <a:buFont typeface="Arial" pitchFamily="34" charset="0"/>
-              <a:buChar char="•"/>
-              <a:defRPr sz="1800" kern="1200" spc="10" baseline="0">
-                <a:solidFill>
-                  <a:schemeClr val="tx1"/>
-                </a:solidFill>
-                <a:latin typeface="Times New Roman" panose="02020603050405020304" pitchFamily="18" charset="0"/>
-                <a:ea typeface="+mn-ea"/>
-                <a:cs typeface="+mn-cs"/>
-              </a:defRPr>
-            </a:lvl1pPr>
-            <a:lvl2pPr marL="457200" indent="-182880" algn="l" defTabSz="914400" rtl="0" eaLnBrk="1" latinLnBrk="0" hangingPunct="1">
-              <a:lnSpc>
-                <a:spcPct val="90000"/>
-              </a:lnSpc>
-              <a:spcBef>
-                <a:spcPts val="300"/>
-              </a:spcBef>
-              <a:spcAft>
-                <a:spcPts val="300"/>
-              </a:spcAft>
-              <a:buClr>
-                <a:schemeClr val="accent1"/>
-              </a:buClr>
-              <a:buFont typeface="Wingdings 2" pitchFamily="18" charset="2"/>
-              <a:buChar char=""/>
-              <a:defRPr sz="1600" kern="1200">
-                <a:solidFill>
-                  <a:schemeClr val="tx1">
-                    <a:lumMod val="85000"/>
-                    <a:lumOff val="15000"/>
-                  </a:schemeClr>
-                </a:solidFill>
-                <a:latin typeface="Times New Roman" panose="02020603050405020304" pitchFamily="18" charset="0"/>
-                <a:ea typeface="+mn-ea"/>
-                <a:cs typeface="+mn-cs"/>
-              </a:defRPr>
-            </a:lvl2pPr>
-            <a:lvl3pPr marL="731520" indent="-182880" algn="l" defTabSz="914400" rtl="0" eaLnBrk="1" latinLnBrk="0" hangingPunct="1">
-              <a:lnSpc>
-                <a:spcPct val="90000"/>
-              </a:lnSpc>
-              <a:spcBef>
-                <a:spcPts val="300"/>
-              </a:spcBef>
-              <a:spcAft>
-                <a:spcPts val="300"/>
-              </a:spcAft>
-              <a:buClr>
-                <a:schemeClr val="accent1"/>
-              </a:buClr>
-              <a:buFont typeface="Wingdings 2" pitchFamily="18" charset="2"/>
-              <a:buChar char=""/>
-              <a:defRPr sz="1400" kern="1200">
-                <a:solidFill>
-                  <a:schemeClr val="tx1">
-                    <a:lumMod val="85000"/>
-                    <a:lumOff val="15000"/>
-                  </a:schemeClr>
-                </a:solidFill>
-                <a:latin typeface="Times New Roman" panose="02020603050405020304" pitchFamily="18" charset="0"/>
-                <a:ea typeface="+mn-ea"/>
-                <a:cs typeface="+mn-cs"/>
-              </a:defRPr>
-            </a:lvl3pPr>
-            <a:lvl4pPr marL="1005840" indent="-182880" algn="l" defTabSz="914400" rtl="0" eaLnBrk="1" latinLnBrk="0" hangingPunct="1">
-              <a:lnSpc>
-                <a:spcPct val="90000"/>
-              </a:lnSpc>
-              <a:spcBef>
-                <a:spcPts val="300"/>
-              </a:spcBef>
-              <a:spcAft>
-                <a:spcPts val="300"/>
-              </a:spcAft>
-              <a:buClr>
-                <a:schemeClr val="accent1"/>
-              </a:buClr>
-              <a:buFont typeface="Wingdings 2" pitchFamily="18" charset="2"/>
-              <a:buChar char=""/>
-              <a:defRPr sz="1400" kern="1200">
-                <a:solidFill>
-                  <a:schemeClr val="tx1">
-                    <a:lumMod val="85000"/>
-                    <a:lumOff val="15000"/>
-                  </a:schemeClr>
-                </a:solidFill>
-                <a:latin typeface="Times New Roman" panose="02020603050405020304" pitchFamily="18" charset="0"/>
-                <a:ea typeface="+mn-ea"/>
-                <a:cs typeface="+mn-cs"/>
-              </a:defRPr>
-            </a:lvl4pPr>
-            <a:lvl5pPr marL="1280160" indent="-182880" algn="l" defTabSz="914400" rtl="0" eaLnBrk="1" latinLnBrk="0" hangingPunct="1">
-              <a:lnSpc>
-                <a:spcPct val="90000"/>
-              </a:lnSpc>
-              <a:spcBef>
-                <a:spcPts val="300"/>
-              </a:spcBef>
-              <a:spcAft>
-                <a:spcPts val="300"/>
-              </a:spcAft>
-              <a:buClr>
-                <a:schemeClr val="accent1"/>
-              </a:buClr>
-              <a:buFont typeface="Wingdings 2" pitchFamily="18" charset="2"/>
-              <a:buChar char=""/>
-              <a:defRPr sz="1400" kern="1200">
-                <a:solidFill>
-                  <a:schemeClr val="tx1">
-                    <a:lumMod val="85000"/>
-                    <a:lumOff val="15000"/>
-                  </a:schemeClr>
-                </a:solidFill>
-                <a:latin typeface="Times New Roman" panose="02020603050405020304" pitchFamily="18" charset="0"/>
-                <a:ea typeface="+mn-ea"/>
-                <a:cs typeface="+mn-cs"/>
-              </a:defRPr>
-            </a:lvl5pPr>
-            <a:lvl6pPr marL="1600000" indent="-228600" algn="l" defTabSz="914400" rtl="0" eaLnBrk="1" latinLnBrk="0" hangingPunct="1">
-              <a:lnSpc>
-                <a:spcPct val="90000"/>
-              </a:lnSpc>
-              <a:spcBef>
-                <a:spcPts val="300"/>
-              </a:spcBef>
-              <a:spcAft>
-                <a:spcPts val="300"/>
-              </a:spcAft>
-              <a:buClr>
-                <a:schemeClr val="accent1"/>
-              </a:buClr>
-              <a:buFont typeface="Wingdings 2" pitchFamily="18" charset="2"/>
-              <a:buChar char=""/>
-              <a:defRPr sz="1400" kern="1200">
-                <a:solidFill>
-                  <a:schemeClr val="tx1">
-                    <a:lumMod val="85000"/>
-                    <a:lumOff val="15000"/>
-                  </a:schemeClr>
-                </a:solidFill>
-                <a:latin typeface="+mn-lt"/>
-                <a:ea typeface="+mn-ea"/>
-                <a:cs typeface="+mn-cs"/>
-              </a:defRPr>
-            </a:lvl6pPr>
-            <a:lvl7pPr marL="1900000" indent="-228600" algn="l" defTabSz="914400" rtl="0" eaLnBrk="1" latinLnBrk="0" hangingPunct="1">
-              <a:lnSpc>
-                <a:spcPct val="90000"/>
-              </a:lnSpc>
-              <a:spcBef>
-                <a:spcPts val="300"/>
-              </a:spcBef>
-              <a:spcAft>
-                <a:spcPts val="300"/>
-              </a:spcAft>
-              <a:buClr>
-                <a:schemeClr val="accent1"/>
-              </a:buClr>
-              <a:buFont typeface="Wingdings 2" pitchFamily="18" charset="2"/>
-              <a:buChar char=""/>
-              <a:defRPr sz="1400" kern="1200">
-                <a:solidFill>
-                  <a:schemeClr val="tx1">
-                    <a:lumMod val="85000"/>
-                    <a:lumOff val="15000"/>
-                  </a:schemeClr>
-                </a:solidFill>
-                <a:latin typeface="+mn-lt"/>
-                <a:ea typeface="+mn-ea"/>
-                <a:cs typeface="+mn-cs"/>
-              </a:defRPr>
-            </a:lvl7pPr>
-            <a:lvl8pPr marL="2200000" indent="-228600" algn="l" defTabSz="914400" rtl="0" eaLnBrk="1" latinLnBrk="0" hangingPunct="1">
-              <a:lnSpc>
-                <a:spcPct val="90000"/>
-              </a:lnSpc>
-              <a:spcBef>
-                <a:spcPts val="300"/>
-              </a:spcBef>
-              <a:spcAft>
-                <a:spcPts val="300"/>
-              </a:spcAft>
-              <a:buClr>
-                <a:schemeClr val="accent1"/>
-              </a:buClr>
-              <a:buFont typeface="Wingdings 2" pitchFamily="18" charset="2"/>
-              <a:buChar char=""/>
-              <a:defRPr sz="1400" kern="1200">
-                <a:solidFill>
-                  <a:schemeClr val="tx1">
-                    <a:lumMod val="85000"/>
-                    <a:lumOff val="15000"/>
-                  </a:schemeClr>
-                </a:solidFill>
-                <a:latin typeface="+mn-lt"/>
-                <a:ea typeface="+mn-ea"/>
-                <a:cs typeface="+mn-cs"/>
-              </a:defRPr>
-            </a:lvl8pPr>
-            <a:lvl9pPr marL="2500000" indent="-228600" algn="l" defTabSz="914400" rtl="0" eaLnBrk="1" latinLnBrk="0" hangingPunct="1">
-              <a:lnSpc>
-                <a:spcPct val="90000"/>
-              </a:lnSpc>
-              <a:spcBef>
-                <a:spcPts val="300"/>
-              </a:spcBef>
-              <a:spcAft>
-                <a:spcPts val="300"/>
-              </a:spcAft>
-              <a:buClr>
-                <a:schemeClr val="accent1"/>
-              </a:buClr>
-              <a:buFont typeface="Wingdings 2" pitchFamily="18" charset="2"/>
-              <a:buChar char=""/>
-              <a:defRPr sz="1400" kern="1200">
-                <a:solidFill>
-                  <a:schemeClr val="tx1">
-                    <a:lumMod val="85000"/>
-                    <a:lumOff val="15000"/>
-                  </a:schemeClr>
-                </a:solidFill>
-                <a:latin typeface="+mn-lt"/>
-                <a:ea typeface="+mn-ea"/>
-                <a:cs typeface="+mn-cs"/>
-              </a:defRPr>
-            </a:lvl9pPr>
-          </a:lstStyle>
-          <a:p>
-            <a:endParaRPr lang="en-US" sz="2600" dirty="0">
-              <a:cs typeface="Times New Roman" panose="02020603050405020304" pitchFamily="18" charset="0"/>
-            </a:endParaRPr>
-          </a:p>
-        </p:txBody>
-      </p:sp>
-      <p:sp>
-        <p:nvSpPr>
-          <p:cNvPr id="3" name="Content Placeholder 2">
-            <a:extLst>
-              <a:ext uri="{FF2B5EF4-FFF2-40B4-BE49-F238E27FC236}">
-                <a16:creationId xmlns:a16="http://schemas.microsoft.com/office/drawing/2014/main" id="{07221140-77F4-0A99-AFB2-CC4DB7DB493C}"/>
-              </a:ext>
-            </a:extLst>
-          </p:cNvPr>
-          <p:cNvSpPr txBox="1">
-            <a:spLocks/>
-          </p:cNvSpPr>
-          <p:nvPr/>
-        </p:nvSpPr>
-        <p:spPr>
-          <a:xfrm>
-            <a:off x="762001" y="1219201"/>
-            <a:ext cx="10439400" cy="5141388"/>
-          </a:xfrm>
-          <a:prstGeom prst="rect">
-            <a:avLst/>
-          </a:prstGeom>
-        </p:spPr>
-        <p:txBody>
-          <a:bodyPr vert="horz" lIns="91440" tIns="45720" rIns="91440" bIns="45720" rtlCol="0">
-            <a:noAutofit/>
-          </a:bodyPr>
-          <a:lstStyle>
-            <a:lvl1pPr marL="182880" indent="-182880" algn="l" defTabSz="914400" rtl="0" eaLnBrk="1" latinLnBrk="0" hangingPunct="1">
-              <a:lnSpc>
-                <a:spcPct val="95000"/>
-              </a:lnSpc>
-              <a:spcBef>
-                <a:spcPts val="1400"/>
-              </a:spcBef>
-              <a:spcAft>
-                <a:spcPts val="200"/>
-              </a:spcAft>
-              <a:buClr>
-                <a:schemeClr val="accent1"/>
-              </a:buClr>
-              <a:buSzPct val="80000"/>
-              <a:buFont typeface="Arial" pitchFamily="34" charset="0"/>
-              <a:buChar char="•"/>
-              <a:defRPr sz="1800" kern="1200" spc="10" baseline="0">
-                <a:solidFill>
-                  <a:schemeClr val="tx1"/>
-                </a:solidFill>
-                <a:latin typeface="Times New Roman" panose="02020603050405020304" pitchFamily="18" charset="0"/>
-                <a:ea typeface="+mn-ea"/>
-                <a:cs typeface="+mn-cs"/>
-              </a:defRPr>
-            </a:lvl1pPr>
-            <a:lvl2pPr marL="457200" indent="-182880" algn="l" defTabSz="914400" rtl="0" eaLnBrk="1" latinLnBrk="0" hangingPunct="1">
-              <a:lnSpc>
-                <a:spcPct val="90000"/>
-              </a:lnSpc>
-              <a:spcBef>
-                <a:spcPts val="300"/>
-              </a:spcBef>
-              <a:spcAft>
-                <a:spcPts val="300"/>
-              </a:spcAft>
-              <a:buClr>
-                <a:schemeClr val="accent1"/>
-              </a:buClr>
-              <a:buFont typeface="Wingdings 2" pitchFamily="18" charset="2"/>
-              <a:buChar char=""/>
-              <a:defRPr sz="1600" kern="1200">
-                <a:solidFill>
-                  <a:schemeClr val="tx1">
-                    <a:lumMod val="85000"/>
-                    <a:lumOff val="15000"/>
-                  </a:schemeClr>
-                </a:solidFill>
-                <a:latin typeface="Times New Roman" panose="02020603050405020304" pitchFamily="18" charset="0"/>
-                <a:ea typeface="+mn-ea"/>
-                <a:cs typeface="+mn-cs"/>
-              </a:defRPr>
-            </a:lvl2pPr>
-            <a:lvl3pPr marL="731520" indent="-182880" algn="l" defTabSz="914400" rtl="0" eaLnBrk="1" latinLnBrk="0" hangingPunct="1">
-              <a:lnSpc>
-                <a:spcPct val="90000"/>
-              </a:lnSpc>
-              <a:spcBef>
-                <a:spcPts val="300"/>
-              </a:spcBef>
-              <a:spcAft>
-                <a:spcPts val="300"/>
-              </a:spcAft>
-              <a:buClr>
-                <a:schemeClr val="accent1"/>
-              </a:buClr>
-              <a:buFont typeface="Wingdings 2" pitchFamily="18" charset="2"/>
-              <a:buChar char=""/>
-              <a:defRPr sz="1400" kern="1200">
-                <a:solidFill>
-                  <a:schemeClr val="tx1">
-                    <a:lumMod val="85000"/>
-                    <a:lumOff val="15000"/>
-                  </a:schemeClr>
-                </a:solidFill>
-                <a:latin typeface="Times New Roman" panose="02020603050405020304" pitchFamily="18" charset="0"/>
-                <a:ea typeface="+mn-ea"/>
-                <a:cs typeface="+mn-cs"/>
-              </a:defRPr>
-            </a:lvl3pPr>
-            <a:lvl4pPr marL="1005840" indent="-182880" algn="l" defTabSz="914400" rtl="0" eaLnBrk="1" latinLnBrk="0" hangingPunct="1">
-              <a:lnSpc>
-                <a:spcPct val="90000"/>
-              </a:lnSpc>
-              <a:spcBef>
-                <a:spcPts val="300"/>
-              </a:spcBef>
-              <a:spcAft>
-                <a:spcPts val="300"/>
-              </a:spcAft>
-              <a:buClr>
-                <a:schemeClr val="accent1"/>
-              </a:buClr>
-              <a:buFont typeface="Wingdings 2" pitchFamily="18" charset="2"/>
-              <a:buChar char=""/>
-              <a:defRPr sz="1400" kern="1200">
-                <a:solidFill>
-                  <a:schemeClr val="tx1">
-                    <a:lumMod val="85000"/>
-                    <a:lumOff val="15000"/>
-                  </a:schemeClr>
-                </a:solidFill>
-                <a:latin typeface="Times New Roman" panose="02020603050405020304" pitchFamily="18" charset="0"/>
-                <a:ea typeface="+mn-ea"/>
-                <a:cs typeface="+mn-cs"/>
-              </a:defRPr>
-            </a:lvl4pPr>
-            <a:lvl5pPr marL="1280160" indent="-182880" algn="l" defTabSz="914400" rtl="0" eaLnBrk="1" latinLnBrk="0" hangingPunct="1">
-              <a:lnSpc>
-                <a:spcPct val="90000"/>
-              </a:lnSpc>
-              <a:spcBef>
-                <a:spcPts val="300"/>
-              </a:spcBef>
-              <a:spcAft>
-                <a:spcPts val="300"/>
-              </a:spcAft>
-              <a:buClr>
-                <a:schemeClr val="accent1"/>
-              </a:buClr>
-              <a:buFont typeface="Wingdings 2" pitchFamily="18" charset="2"/>
-              <a:buChar char=""/>
-              <a:defRPr sz="1400" kern="1200">
-                <a:solidFill>
-                  <a:schemeClr val="tx1">
-                    <a:lumMod val="85000"/>
-                    <a:lumOff val="15000"/>
-                  </a:schemeClr>
-                </a:solidFill>
-                <a:latin typeface="Times New Roman" panose="02020603050405020304" pitchFamily="18" charset="0"/>
-                <a:ea typeface="+mn-ea"/>
-                <a:cs typeface="+mn-cs"/>
-              </a:defRPr>
-            </a:lvl5pPr>
-            <a:lvl6pPr marL="1600000" indent="-228600" algn="l" defTabSz="914400" rtl="0" eaLnBrk="1" latinLnBrk="0" hangingPunct="1">
-              <a:lnSpc>
-                <a:spcPct val="90000"/>
-              </a:lnSpc>
-              <a:spcBef>
-                <a:spcPts val="300"/>
-              </a:spcBef>
-              <a:spcAft>
-                <a:spcPts val="300"/>
-              </a:spcAft>
-              <a:buClr>
-                <a:schemeClr val="accent1"/>
-              </a:buClr>
-              <a:buFont typeface="Wingdings 2" pitchFamily="18" charset="2"/>
-              <a:buChar char=""/>
-              <a:defRPr sz="1400" kern="1200">
-                <a:solidFill>
-                  <a:schemeClr val="tx1">
-                    <a:lumMod val="85000"/>
-                    <a:lumOff val="15000"/>
-                  </a:schemeClr>
-                </a:solidFill>
-                <a:latin typeface="+mn-lt"/>
-                <a:ea typeface="+mn-ea"/>
-                <a:cs typeface="+mn-cs"/>
-              </a:defRPr>
-            </a:lvl6pPr>
-            <a:lvl7pPr marL="1900000" indent="-228600" algn="l" defTabSz="914400" rtl="0" eaLnBrk="1" latinLnBrk="0" hangingPunct="1">
-              <a:lnSpc>
-                <a:spcPct val="90000"/>
-              </a:lnSpc>
-              <a:spcBef>
-                <a:spcPts val="300"/>
-              </a:spcBef>
-              <a:spcAft>
-                <a:spcPts val="300"/>
-              </a:spcAft>
-              <a:buClr>
-                <a:schemeClr val="accent1"/>
-              </a:buClr>
-              <a:buFont typeface="Wingdings 2" pitchFamily="18" charset="2"/>
-              <a:buChar char=""/>
-              <a:defRPr sz="1400" kern="1200">
-                <a:solidFill>
-                  <a:schemeClr val="tx1">
-                    <a:lumMod val="85000"/>
-                    <a:lumOff val="15000"/>
-                  </a:schemeClr>
-                </a:solidFill>
-                <a:latin typeface="+mn-lt"/>
-                <a:ea typeface="+mn-ea"/>
-                <a:cs typeface="+mn-cs"/>
-              </a:defRPr>
-            </a:lvl7pPr>
-            <a:lvl8pPr marL="2200000" indent="-228600" algn="l" defTabSz="914400" rtl="0" eaLnBrk="1" latinLnBrk="0" hangingPunct="1">
-              <a:lnSpc>
-                <a:spcPct val="90000"/>
-              </a:lnSpc>
-              <a:spcBef>
-                <a:spcPts val="300"/>
-              </a:spcBef>
-              <a:spcAft>
-                <a:spcPts val="300"/>
-              </a:spcAft>
-              <a:buClr>
-                <a:schemeClr val="accent1"/>
-              </a:buClr>
-              <a:buFont typeface="Wingdings 2" pitchFamily="18" charset="2"/>
-              <a:buChar char=""/>
-              <a:defRPr sz="1400" kern="1200">
-                <a:solidFill>
-                  <a:schemeClr val="tx1">
-                    <a:lumMod val="85000"/>
-                    <a:lumOff val="15000"/>
-                  </a:schemeClr>
-                </a:solidFill>
-                <a:latin typeface="+mn-lt"/>
-                <a:ea typeface="+mn-ea"/>
-                <a:cs typeface="+mn-cs"/>
-              </a:defRPr>
-            </a:lvl8pPr>
-            <a:lvl9pPr marL="2500000" indent="-228600" algn="l" defTabSz="914400" rtl="0" eaLnBrk="1" latinLnBrk="0" hangingPunct="1">
-              <a:lnSpc>
-                <a:spcPct val="90000"/>
-              </a:lnSpc>
-              <a:spcBef>
-                <a:spcPts val="300"/>
-              </a:spcBef>
-              <a:spcAft>
-                <a:spcPts val="300"/>
-              </a:spcAft>
-              <a:buClr>
-                <a:schemeClr val="accent1"/>
-              </a:buClr>
-              <a:buFont typeface="Wingdings 2" pitchFamily="18" charset="2"/>
-              <a:buChar char=""/>
-              <a:defRPr sz="1400" kern="1200">
-                <a:solidFill>
-                  <a:schemeClr val="tx1">
-                    <a:lumMod val="85000"/>
-                    <a:lumOff val="15000"/>
-                  </a:schemeClr>
-                </a:solidFill>
-                <a:latin typeface="+mn-lt"/>
-                <a:ea typeface="+mn-ea"/>
-                <a:cs typeface="+mn-cs"/>
-              </a:defRPr>
-            </a:lvl9pPr>
-          </a:lstStyle>
-          <a:p>
-            <a:r>
-              <a:rPr lang="en-US" sz="2400" dirty="0">
-                <a:cs typeface="Times New Roman" panose="02020603050405020304" pitchFamily="18" charset="0"/>
-              </a:rPr>
-              <a:t>Social welfare thoughts: </a:t>
-            </a:r>
-          </a:p>
-          <a:p>
-            <a:endParaRPr lang="en-US" sz="2400" dirty="0">
-              <a:cs typeface="Times New Roman" panose="02020603050405020304" pitchFamily="18" charset="0"/>
-            </a:endParaRPr>
-          </a:p>
-          <a:p>
-            <a:endParaRPr lang="en-US" sz="2400" dirty="0">
-              <a:cs typeface="Times New Roman" panose="02020603050405020304" pitchFamily="18" charset="0"/>
-            </a:endParaRPr>
-          </a:p>
-          <a:p>
-            <a:endParaRPr lang="en-US" sz="2400" dirty="0">
-              <a:cs typeface="Times New Roman" panose="02020603050405020304" pitchFamily="18" charset="0"/>
-            </a:endParaRPr>
-          </a:p>
-          <a:p>
-            <a:endParaRPr lang="en-US" sz="2400" dirty="0">
-              <a:cs typeface="Times New Roman" panose="02020603050405020304" pitchFamily="18" charset="0"/>
-            </a:endParaRPr>
-          </a:p>
-          <a:p>
-            <a:endParaRPr lang="en-US" sz="2400" dirty="0">
-              <a:cs typeface="Times New Roman" panose="02020603050405020304" pitchFamily="18" charset="0"/>
-            </a:endParaRPr>
-          </a:p>
-          <a:p>
-            <a:endParaRPr lang="en-US" sz="2400" dirty="0">
-              <a:cs typeface="Times New Roman" panose="02020603050405020304" pitchFamily="18" charset="0"/>
-            </a:endParaRPr>
-          </a:p>
-          <a:p>
-            <a:endParaRPr lang="en-US" sz="2400" dirty="0">
-              <a:cs typeface="Times New Roman" panose="02020603050405020304" pitchFamily="18" charset="0"/>
-            </a:endParaRPr>
-          </a:p>
-          <a:p>
-            <a:pPr marL="0" indent="0">
-              <a:buNone/>
-            </a:pPr>
-            <a:r>
-              <a:rPr lang="en-US" sz="2400" i="1" dirty="0">
-                <a:cs typeface="Times New Roman" panose="02020603050405020304" pitchFamily="18" charset="0"/>
-              </a:rPr>
-              <a:t>I think we would all agree that these costs are illegitimate today</a:t>
-            </a:r>
-            <a:endParaRPr lang="en-US" sz="2600" i="1" dirty="0">
-              <a:cs typeface="Times New Roman" panose="02020603050405020304" pitchFamily="18" charset="0"/>
-            </a:endParaRPr>
-          </a:p>
-        </p:txBody>
-      </p:sp>
-      <p:pic>
-        <p:nvPicPr>
-          <p:cNvPr id="7" name="Picture 6">
-            <a:extLst>
-              <a:ext uri="{FF2B5EF4-FFF2-40B4-BE49-F238E27FC236}">
-                <a16:creationId xmlns:a16="http://schemas.microsoft.com/office/drawing/2014/main" id="{BF0F8D17-F0B7-5CD5-5053-7A974F7162E0}"/>
-              </a:ext>
-            </a:extLst>
-          </p:cNvPr>
-          <p:cNvPicPr>
-            <a:picLocks noChangeAspect="1"/>
-          </p:cNvPicPr>
-          <p:nvPr/>
-        </p:nvPicPr>
-        <p:blipFill>
-          <a:blip r:embed="rId3"/>
-          <a:stretch>
-            <a:fillRect/>
-          </a:stretch>
-        </p:blipFill>
-        <p:spPr>
-          <a:xfrm>
-            <a:off x="609600" y="2283331"/>
-            <a:ext cx="10126488" cy="2667372"/>
-          </a:xfrm>
-          <a:prstGeom prst="rect">
-            <a:avLst/>
-          </a:prstGeom>
-        </p:spPr>
-      </p:pic>
-    </p:spTree>
-    <p:extLst>
-      <p:ext uri="{BB962C8B-B14F-4D97-AF65-F5344CB8AC3E}">
-        <p14:creationId xmlns:p14="http://schemas.microsoft.com/office/powerpoint/2010/main" val="2220309339"/>
-      </p:ext>
-    </p:extLst>
-  </p:cSld>
-  <p:clrMapOvr>
-    <a:masterClrMapping/>
-  </p:clrMapOvr>
-</p:sld>
-</file>
-
-<file path=ppt/slides/slide29.xml><?xml version="1.0" encoding="utf-8"?>
-<p:sld xmlns:a="http://schemas.openxmlformats.org/drawingml/2006/main" xmlns:r="http://schemas.openxmlformats.org/officeDocument/2006/relationships" xmlns:p="http://schemas.openxmlformats.org/presentationml/2006/main">
-  <p:cSld>
-    <p:spTree>
-      <p:nvGrpSpPr>
-        <p:cNvPr id="1" name=""/>
-        <p:cNvGrpSpPr/>
-        <p:nvPr/>
-      </p:nvGrpSpPr>
-      <p:grpSpPr>
-        <a:xfrm>
-          <a:off x="0" y="0"/>
-          <a:ext cx="0" cy="0"/>
-          <a:chOff x="0" y="0"/>
-          <a:chExt cx="0" cy="0"/>
-        </a:xfrm>
-      </p:grpSpPr>
-      <p:sp>
-        <p:nvSpPr>
-          <p:cNvPr id="2" name="Title 1"/>
-          <p:cNvSpPr>
-            <a:spLocks noGrp="1"/>
-          </p:cNvSpPr>
-          <p:nvPr>
-            <p:ph type="title"/>
-          </p:nvPr>
-        </p:nvSpPr>
-        <p:spPr>
-          <a:xfrm>
-            <a:off x="609600" y="272077"/>
-            <a:ext cx="10439400" cy="624840"/>
-          </a:xfrm>
-        </p:spPr>
-        <p:txBody>
-          <a:bodyPr>
-            <a:noAutofit/>
-          </a:bodyPr>
-          <a:lstStyle/>
-          <a:p>
-            <a:r>
-              <a:rPr lang="en-US" sz="3600" dirty="0">
-                <a:cs typeface="Times New Roman" panose="02020603050405020304" pitchFamily="18" charset="0"/>
-              </a:rPr>
-              <a:t>Case 1: Prejudice</a:t>
-            </a:r>
-            <a:endParaRPr lang="en-US" sz="3600" dirty="0">
-              <a:latin typeface="Times New Roman" panose="02020603050405020304" pitchFamily="18" charset="0"/>
-              <a:cs typeface="Times New Roman" panose="02020603050405020304" pitchFamily="18" charset="0"/>
-            </a:endParaRPr>
-          </a:p>
-        </p:txBody>
-      </p:sp>
-      <p:sp>
-        <p:nvSpPr>
-          <p:cNvPr id="6" name="Content Placeholder 2">
-            <a:extLst>
-              <a:ext uri="{FF2B5EF4-FFF2-40B4-BE49-F238E27FC236}">
-                <a16:creationId xmlns:a16="http://schemas.microsoft.com/office/drawing/2014/main" id="{1E43DB50-BEDE-CBC2-46F9-A709EB8CD67C}"/>
-              </a:ext>
-            </a:extLst>
-          </p:cNvPr>
-          <p:cNvSpPr txBox="1">
-            <a:spLocks/>
-          </p:cNvSpPr>
-          <p:nvPr/>
-        </p:nvSpPr>
-        <p:spPr>
-          <a:xfrm>
-            <a:off x="609601" y="1066801"/>
-            <a:ext cx="10439400" cy="5141388"/>
-          </a:xfrm>
-          <a:prstGeom prst="rect">
-            <a:avLst/>
-          </a:prstGeom>
-        </p:spPr>
-        <p:txBody>
-          <a:bodyPr vert="horz" lIns="91440" tIns="45720" rIns="91440" bIns="45720" rtlCol="0">
-            <a:noAutofit/>
-          </a:bodyPr>
-          <a:lstStyle>
-            <a:lvl1pPr marL="182880" indent="-182880" algn="l" defTabSz="914400" rtl="0" eaLnBrk="1" latinLnBrk="0" hangingPunct="1">
-              <a:lnSpc>
-                <a:spcPct val="95000"/>
-              </a:lnSpc>
-              <a:spcBef>
-                <a:spcPts val="1400"/>
-              </a:spcBef>
-              <a:spcAft>
-                <a:spcPts val="200"/>
-              </a:spcAft>
-              <a:buClr>
-                <a:schemeClr val="accent1"/>
-              </a:buClr>
-              <a:buSzPct val="80000"/>
-              <a:buFont typeface="Arial" pitchFamily="34" charset="0"/>
-              <a:buChar char="•"/>
-              <a:defRPr sz="1800" kern="1200" spc="10" baseline="0">
-                <a:solidFill>
-                  <a:schemeClr val="tx1"/>
-                </a:solidFill>
-                <a:latin typeface="Times New Roman" panose="02020603050405020304" pitchFamily="18" charset="0"/>
-                <a:ea typeface="+mn-ea"/>
-                <a:cs typeface="+mn-cs"/>
-              </a:defRPr>
-            </a:lvl1pPr>
-            <a:lvl2pPr marL="457200" indent="-182880" algn="l" defTabSz="914400" rtl="0" eaLnBrk="1" latinLnBrk="0" hangingPunct="1">
-              <a:lnSpc>
-                <a:spcPct val="90000"/>
-              </a:lnSpc>
-              <a:spcBef>
-                <a:spcPts val="300"/>
-              </a:spcBef>
-              <a:spcAft>
-                <a:spcPts val="300"/>
-              </a:spcAft>
-              <a:buClr>
-                <a:schemeClr val="accent1"/>
-              </a:buClr>
-              <a:buFont typeface="Wingdings 2" pitchFamily="18" charset="2"/>
-              <a:buChar char=""/>
-              <a:defRPr sz="1600" kern="1200">
-                <a:solidFill>
-                  <a:schemeClr val="tx1">
-                    <a:lumMod val="85000"/>
-                    <a:lumOff val="15000"/>
-                  </a:schemeClr>
-                </a:solidFill>
-                <a:latin typeface="Times New Roman" panose="02020603050405020304" pitchFamily="18" charset="0"/>
-                <a:ea typeface="+mn-ea"/>
-                <a:cs typeface="+mn-cs"/>
-              </a:defRPr>
-            </a:lvl2pPr>
-            <a:lvl3pPr marL="731520" indent="-182880" algn="l" defTabSz="914400" rtl="0" eaLnBrk="1" latinLnBrk="0" hangingPunct="1">
-              <a:lnSpc>
-                <a:spcPct val="90000"/>
-              </a:lnSpc>
-              <a:spcBef>
-                <a:spcPts val="300"/>
-              </a:spcBef>
-              <a:spcAft>
-                <a:spcPts val="300"/>
-              </a:spcAft>
-              <a:buClr>
-                <a:schemeClr val="accent1"/>
-              </a:buClr>
-              <a:buFont typeface="Wingdings 2" pitchFamily="18" charset="2"/>
-              <a:buChar char=""/>
-              <a:defRPr sz="1400" kern="1200">
-                <a:solidFill>
-                  <a:schemeClr val="tx1">
-                    <a:lumMod val="85000"/>
-                    <a:lumOff val="15000"/>
-                  </a:schemeClr>
-                </a:solidFill>
-                <a:latin typeface="Times New Roman" panose="02020603050405020304" pitchFamily="18" charset="0"/>
-                <a:ea typeface="+mn-ea"/>
-                <a:cs typeface="+mn-cs"/>
-              </a:defRPr>
-            </a:lvl3pPr>
-            <a:lvl4pPr marL="1005840" indent="-182880" algn="l" defTabSz="914400" rtl="0" eaLnBrk="1" latinLnBrk="0" hangingPunct="1">
-              <a:lnSpc>
-                <a:spcPct val="90000"/>
-              </a:lnSpc>
-              <a:spcBef>
-                <a:spcPts val="300"/>
-              </a:spcBef>
-              <a:spcAft>
-                <a:spcPts val="300"/>
-              </a:spcAft>
-              <a:buClr>
-                <a:schemeClr val="accent1"/>
-              </a:buClr>
-              <a:buFont typeface="Wingdings 2" pitchFamily="18" charset="2"/>
-              <a:buChar char=""/>
-              <a:defRPr sz="1400" kern="1200">
-                <a:solidFill>
-                  <a:schemeClr val="tx1">
-                    <a:lumMod val="85000"/>
-                    <a:lumOff val="15000"/>
-                  </a:schemeClr>
-                </a:solidFill>
-                <a:latin typeface="Times New Roman" panose="02020603050405020304" pitchFamily="18" charset="0"/>
-                <a:ea typeface="+mn-ea"/>
-                <a:cs typeface="+mn-cs"/>
-              </a:defRPr>
-            </a:lvl4pPr>
-            <a:lvl5pPr marL="1280160" indent="-182880" algn="l" defTabSz="914400" rtl="0" eaLnBrk="1" latinLnBrk="0" hangingPunct="1">
-              <a:lnSpc>
-                <a:spcPct val="90000"/>
-              </a:lnSpc>
-              <a:spcBef>
-                <a:spcPts val="300"/>
-              </a:spcBef>
-              <a:spcAft>
-                <a:spcPts val="300"/>
-              </a:spcAft>
-              <a:buClr>
-                <a:schemeClr val="accent1"/>
-              </a:buClr>
-              <a:buFont typeface="Wingdings 2" pitchFamily="18" charset="2"/>
-              <a:buChar char=""/>
-              <a:defRPr sz="1400" kern="1200">
-                <a:solidFill>
-                  <a:schemeClr val="tx1">
-                    <a:lumMod val="85000"/>
-                    <a:lumOff val="15000"/>
-                  </a:schemeClr>
-                </a:solidFill>
-                <a:latin typeface="Times New Roman" panose="02020603050405020304" pitchFamily="18" charset="0"/>
-                <a:ea typeface="+mn-ea"/>
-                <a:cs typeface="+mn-cs"/>
-              </a:defRPr>
-            </a:lvl5pPr>
-            <a:lvl6pPr marL="1600000" indent="-228600" algn="l" defTabSz="914400" rtl="0" eaLnBrk="1" latinLnBrk="0" hangingPunct="1">
-              <a:lnSpc>
-                <a:spcPct val="90000"/>
-              </a:lnSpc>
-              <a:spcBef>
-                <a:spcPts val="300"/>
-              </a:spcBef>
-              <a:spcAft>
-                <a:spcPts val="300"/>
-              </a:spcAft>
-              <a:buClr>
-                <a:schemeClr val="accent1"/>
-              </a:buClr>
-              <a:buFont typeface="Wingdings 2" pitchFamily="18" charset="2"/>
-              <a:buChar char=""/>
-              <a:defRPr sz="1400" kern="1200">
-                <a:solidFill>
-                  <a:schemeClr val="tx1">
-                    <a:lumMod val="85000"/>
-                    <a:lumOff val="15000"/>
-                  </a:schemeClr>
-                </a:solidFill>
-                <a:latin typeface="+mn-lt"/>
-                <a:ea typeface="+mn-ea"/>
-                <a:cs typeface="+mn-cs"/>
-              </a:defRPr>
-            </a:lvl6pPr>
-            <a:lvl7pPr marL="1900000" indent="-228600" algn="l" defTabSz="914400" rtl="0" eaLnBrk="1" latinLnBrk="0" hangingPunct="1">
-              <a:lnSpc>
-                <a:spcPct val="90000"/>
-              </a:lnSpc>
-              <a:spcBef>
-                <a:spcPts val="300"/>
-              </a:spcBef>
-              <a:spcAft>
-                <a:spcPts val="300"/>
-              </a:spcAft>
-              <a:buClr>
-                <a:schemeClr val="accent1"/>
-              </a:buClr>
-              <a:buFont typeface="Wingdings 2" pitchFamily="18" charset="2"/>
-              <a:buChar char=""/>
-              <a:defRPr sz="1400" kern="1200">
-                <a:solidFill>
-                  <a:schemeClr val="tx1">
-                    <a:lumMod val="85000"/>
-                    <a:lumOff val="15000"/>
-                  </a:schemeClr>
-                </a:solidFill>
-                <a:latin typeface="+mn-lt"/>
-                <a:ea typeface="+mn-ea"/>
-                <a:cs typeface="+mn-cs"/>
-              </a:defRPr>
-            </a:lvl7pPr>
-            <a:lvl8pPr marL="2200000" indent="-228600" algn="l" defTabSz="914400" rtl="0" eaLnBrk="1" latinLnBrk="0" hangingPunct="1">
-              <a:lnSpc>
-                <a:spcPct val="90000"/>
-              </a:lnSpc>
-              <a:spcBef>
-                <a:spcPts val="300"/>
-              </a:spcBef>
-              <a:spcAft>
-                <a:spcPts val="300"/>
-              </a:spcAft>
-              <a:buClr>
-                <a:schemeClr val="accent1"/>
-              </a:buClr>
-              <a:buFont typeface="Wingdings 2" pitchFamily="18" charset="2"/>
-              <a:buChar char=""/>
-              <a:defRPr sz="1400" kern="1200">
-                <a:solidFill>
-                  <a:schemeClr val="tx1">
-                    <a:lumMod val="85000"/>
-                    <a:lumOff val="15000"/>
-                  </a:schemeClr>
-                </a:solidFill>
-                <a:latin typeface="+mn-lt"/>
-                <a:ea typeface="+mn-ea"/>
-                <a:cs typeface="+mn-cs"/>
-              </a:defRPr>
-            </a:lvl8pPr>
-            <a:lvl9pPr marL="2500000" indent="-228600" algn="l" defTabSz="914400" rtl="0" eaLnBrk="1" latinLnBrk="0" hangingPunct="1">
-              <a:lnSpc>
-                <a:spcPct val="90000"/>
-              </a:lnSpc>
-              <a:spcBef>
-                <a:spcPts val="300"/>
-              </a:spcBef>
-              <a:spcAft>
-                <a:spcPts val="300"/>
-              </a:spcAft>
-              <a:buClr>
-                <a:schemeClr val="accent1"/>
-              </a:buClr>
-              <a:buFont typeface="Wingdings 2" pitchFamily="18" charset="2"/>
-              <a:buChar char=""/>
-              <a:defRPr sz="1400" kern="1200">
-                <a:solidFill>
-                  <a:schemeClr val="tx1">
-                    <a:lumMod val="85000"/>
-                    <a:lumOff val="15000"/>
-                  </a:schemeClr>
-                </a:solidFill>
-                <a:latin typeface="+mn-lt"/>
-                <a:ea typeface="+mn-ea"/>
-                <a:cs typeface="+mn-cs"/>
-              </a:defRPr>
-            </a:lvl9pPr>
-          </a:lstStyle>
-          <a:p>
-            <a:endParaRPr lang="en-US" sz="2600" dirty="0">
-              <a:cs typeface="Times New Roman" panose="02020603050405020304" pitchFamily="18" charset="0"/>
-            </a:endParaRPr>
-          </a:p>
-        </p:txBody>
-      </p:sp>
-      <p:sp>
-        <p:nvSpPr>
-          <p:cNvPr id="3" name="Content Placeholder 2">
-            <a:extLst>
-              <a:ext uri="{FF2B5EF4-FFF2-40B4-BE49-F238E27FC236}">
-                <a16:creationId xmlns:a16="http://schemas.microsoft.com/office/drawing/2014/main" id="{07221140-77F4-0A99-AFB2-CC4DB7DB493C}"/>
-              </a:ext>
-            </a:extLst>
-          </p:cNvPr>
-          <p:cNvSpPr txBox="1">
-            <a:spLocks/>
-          </p:cNvSpPr>
-          <p:nvPr/>
-        </p:nvSpPr>
-        <p:spPr>
-          <a:xfrm>
-            <a:off x="762001" y="1219201"/>
-            <a:ext cx="10439400" cy="5141388"/>
-          </a:xfrm>
-          <a:prstGeom prst="rect">
-            <a:avLst/>
-          </a:prstGeom>
-        </p:spPr>
-        <p:txBody>
-          <a:bodyPr vert="horz" lIns="91440" tIns="45720" rIns="91440" bIns="45720" rtlCol="0">
-            <a:noAutofit/>
-          </a:bodyPr>
-          <a:lstStyle>
-            <a:lvl1pPr marL="182880" indent="-182880" algn="l" defTabSz="914400" rtl="0" eaLnBrk="1" latinLnBrk="0" hangingPunct="1">
-              <a:lnSpc>
-                <a:spcPct val="95000"/>
-              </a:lnSpc>
-              <a:spcBef>
-                <a:spcPts val="1400"/>
-              </a:spcBef>
-              <a:spcAft>
-                <a:spcPts val="200"/>
-              </a:spcAft>
-              <a:buClr>
-                <a:schemeClr val="accent1"/>
-              </a:buClr>
-              <a:buSzPct val="80000"/>
-              <a:buFont typeface="Arial" pitchFamily="34" charset="0"/>
-              <a:buChar char="•"/>
-              <a:defRPr sz="1800" kern="1200" spc="10" baseline="0">
-                <a:solidFill>
-                  <a:schemeClr val="tx1"/>
-                </a:solidFill>
-                <a:latin typeface="Times New Roman" panose="02020603050405020304" pitchFamily="18" charset="0"/>
-                <a:ea typeface="+mn-ea"/>
-                <a:cs typeface="+mn-cs"/>
-              </a:defRPr>
-            </a:lvl1pPr>
-            <a:lvl2pPr marL="457200" indent="-182880" algn="l" defTabSz="914400" rtl="0" eaLnBrk="1" latinLnBrk="0" hangingPunct="1">
-              <a:lnSpc>
-                <a:spcPct val="90000"/>
-              </a:lnSpc>
-              <a:spcBef>
-                <a:spcPts val="300"/>
-              </a:spcBef>
-              <a:spcAft>
-                <a:spcPts val="300"/>
-              </a:spcAft>
-              <a:buClr>
-                <a:schemeClr val="accent1"/>
-              </a:buClr>
-              <a:buFont typeface="Wingdings 2" pitchFamily="18" charset="2"/>
-              <a:buChar char=""/>
-              <a:defRPr sz="1600" kern="1200">
-                <a:solidFill>
-                  <a:schemeClr val="tx1">
-                    <a:lumMod val="85000"/>
-                    <a:lumOff val="15000"/>
-                  </a:schemeClr>
-                </a:solidFill>
-                <a:latin typeface="Times New Roman" panose="02020603050405020304" pitchFamily="18" charset="0"/>
-                <a:ea typeface="+mn-ea"/>
-                <a:cs typeface="+mn-cs"/>
-              </a:defRPr>
-            </a:lvl2pPr>
-            <a:lvl3pPr marL="731520" indent="-182880" algn="l" defTabSz="914400" rtl="0" eaLnBrk="1" latinLnBrk="0" hangingPunct="1">
-              <a:lnSpc>
-                <a:spcPct val="90000"/>
-              </a:lnSpc>
-              <a:spcBef>
-                <a:spcPts val="300"/>
-              </a:spcBef>
-              <a:spcAft>
-                <a:spcPts val="300"/>
-              </a:spcAft>
-              <a:buClr>
-                <a:schemeClr val="accent1"/>
-              </a:buClr>
-              <a:buFont typeface="Wingdings 2" pitchFamily="18" charset="2"/>
-              <a:buChar char=""/>
-              <a:defRPr sz="1400" kern="1200">
-                <a:solidFill>
-                  <a:schemeClr val="tx1">
-                    <a:lumMod val="85000"/>
-                    <a:lumOff val="15000"/>
-                  </a:schemeClr>
-                </a:solidFill>
-                <a:latin typeface="Times New Roman" panose="02020603050405020304" pitchFamily="18" charset="0"/>
-                <a:ea typeface="+mn-ea"/>
-                <a:cs typeface="+mn-cs"/>
-              </a:defRPr>
-            </a:lvl3pPr>
-            <a:lvl4pPr marL="1005840" indent="-182880" algn="l" defTabSz="914400" rtl="0" eaLnBrk="1" latinLnBrk="0" hangingPunct="1">
-              <a:lnSpc>
-                <a:spcPct val="90000"/>
-              </a:lnSpc>
-              <a:spcBef>
-                <a:spcPts val="300"/>
-              </a:spcBef>
-              <a:spcAft>
-                <a:spcPts val="300"/>
-              </a:spcAft>
-              <a:buClr>
-                <a:schemeClr val="accent1"/>
-              </a:buClr>
-              <a:buFont typeface="Wingdings 2" pitchFamily="18" charset="2"/>
-              <a:buChar char=""/>
-              <a:defRPr sz="1400" kern="1200">
-                <a:solidFill>
-                  <a:schemeClr val="tx1">
-                    <a:lumMod val="85000"/>
-                    <a:lumOff val="15000"/>
-                  </a:schemeClr>
-                </a:solidFill>
-                <a:latin typeface="Times New Roman" panose="02020603050405020304" pitchFamily="18" charset="0"/>
-                <a:ea typeface="+mn-ea"/>
-                <a:cs typeface="+mn-cs"/>
-              </a:defRPr>
-            </a:lvl4pPr>
-            <a:lvl5pPr marL="1280160" indent="-182880" algn="l" defTabSz="914400" rtl="0" eaLnBrk="1" latinLnBrk="0" hangingPunct="1">
-              <a:lnSpc>
-                <a:spcPct val="90000"/>
-              </a:lnSpc>
-              <a:spcBef>
-                <a:spcPts val="300"/>
-              </a:spcBef>
-              <a:spcAft>
-                <a:spcPts val="300"/>
-              </a:spcAft>
-              <a:buClr>
-                <a:schemeClr val="accent1"/>
-              </a:buClr>
-              <a:buFont typeface="Wingdings 2" pitchFamily="18" charset="2"/>
-              <a:buChar char=""/>
-              <a:defRPr sz="1400" kern="1200">
-                <a:solidFill>
-                  <a:schemeClr val="tx1">
-                    <a:lumMod val="85000"/>
-                    <a:lumOff val="15000"/>
-                  </a:schemeClr>
-                </a:solidFill>
-                <a:latin typeface="Times New Roman" panose="02020603050405020304" pitchFamily="18" charset="0"/>
-                <a:ea typeface="+mn-ea"/>
-                <a:cs typeface="+mn-cs"/>
-              </a:defRPr>
-            </a:lvl5pPr>
-            <a:lvl6pPr marL="1600000" indent="-228600" algn="l" defTabSz="914400" rtl="0" eaLnBrk="1" latinLnBrk="0" hangingPunct="1">
-              <a:lnSpc>
-                <a:spcPct val="90000"/>
-              </a:lnSpc>
-              <a:spcBef>
-                <a:spcPts val="300"/>
-              </a:spcBef>
-              <a:spcAft>
-                <a:spcPts val="300"/>
-              </a:spcAft>
-              <a:buClr>
-                <a:schemeClr val="accent1"/>
-              </a:buClr>
-              <a:buFont typeface="Wingdings 2" pitchFamily="18" charset="2"/>
-              <a:buChar char=""/>
-              <a:defRPr sz="1400" kern="1200">
-                <a:solidFill>
-                  <a:schemeClr val="tx1">
-                    <a:lumMod val="85000"/>
-                    <a:lumOff val="15000"/>
-                  </a:schemeClr>
-                </a:solidFill>
-                <a:latin typeface="+mn-lt"/>
-                <a:ea typeface="+mn-ea"/>
-                <a:cs typeface="+mn-cs"/>
-              </a:defRPr>
-            </a:lvl6pPr>
-            <a:lvl7pPr marL="1900000" indent="-228600" algn="l" defTabSz="914400" rtl="0" eaLnBrk="1" latinLnBrk="0" hangingPunct="1">
-              <a:lnSpc>
-                <a:spcPct val="90000"/>
-              </a:lnSpc>
-              <a:spcBef>
-                <a:spcPts val="300"/>
-              </a:spcBef>
-              <a:spcAft>
-                <a:spcPts val="300"/>
-              </a:spcAft>
-              <a:buClr>
-                <a:schemeClr val="accent1"/>
-              </a:buClr>
-              <a:buFont typeface="Wingdings 2" pitchFamily="18" charset="2"/>
-              <a:buChar char=""/>
-              <a:defRPr sz="1400" kern="1200">
-                <a:solidFill>
-                  <a:schemeClr val="tx1">
-                    <a:lumMod val="85000"/>
-                    <a:lumOff val="15000"/>
-                  </a:schemeClr>
-                </a:solidFill>
-                <a:latin typeface="+mn-lt"/>
-                <a:ea typeface="+mn-ea"/>
-                <a:cs typeface="+mn-cs"/>
-              </a:defRPr>
-            </a:lvl7pPr>
-            <a:lvl8pPr marL="2200000" indent="-228600" algn="l" defTabSz="914400" rtl="0" eaLnBrk="1" latinLnBrk="0" hangingPunct="1">
-              <a:lnSpc>
-                <a:spcPct val="90000"/>
-              </a:lnSpc>
-              <a:spcBef>
-                <a:spcPts val="300"/>
-              </a:spcBef>
-              <a:spcAft>
-                <a:spcPts val="300"/>
-              </a:spcAft>
-              <a:buClr>
-                <a:schemeClr val="accent1"/>
-              </a:buClr>
-              <a:buFont typeface="Wingdings 2" pitchFamily="18" charset="2"/>
-              <a:buChar char=""/>
-              <a:defRPr sz="1400" kern="1200">
-                <a:solidFill>
-                  <a:schemeClr val="tx1">
-                    <a:lumMod val="85000"/>
-                    <a:lumOff val="15000"/>
-                  </a:schemeClr>
-                </a:solidFill>
-                <a:latin typeface="+mn-lt"/>
-                <a:ea typeface="+mn-ea"/>
-                <a:cs typeface="+mn-cs"/>
-              </a:defRPr>
-            </a:lvl8pPr>
-            <a:lvl9pPr marL="2500000" indent="-228600" algn="l" defTabSz="914400" rtl="0" eaLnBrk="1" latinLnBrk="0" hangingPunct="1">
-              <a:lnSpc>
-                <a:spcPct val="90000"/>
-              </a:lnSpc>
-              <a:spcBef>
-                <a:spcPts val="300"/>
-              </a:spcBef>
-              <a:spcAft>
-                <a:spcPts val="300"/>
-              </a:spcAft>
-              <a:buClr>
-                <a:schemeClr val="accent1"/>
-              </a:buClr>
-              <a:buFont typeface="Wingdings 2" pitchFamily="18" charset="2"/>
-              <a:buChar char=""/>
-              <a:defRPr sz="1400" kern="1200">
-                <a:solidFill>
-                  <a:schemeClr val="tx1">
-                    <a:lumMod val="85000"/>
-                    <a:lumOff val="15000"/>
-                  </a:schemeClr>
-                </a:solidFill>
-                <a:latin typeface="+mn-lt"/>
-                <a:ea typeface="+mn-ea"/>
-                <a:cs typeface="+mn-cs"/>
-              </a:defRPr>
-            </a:lvl9pPr>
-          </a:lstStyle>
-          <a:p>
-            <a:pPr marL="0" indent="0">
-              <a:buNone/>
-            </a:pPr>
-            <a:r>
-              <a:rPr lang="en-US" sz="2400" dirty="0">
-                <a:cs typeface="Times New Roman" panose="02020603050405020304" pitchFamily="18" charset="0"/>
-              </a:rPr>
-              <a:t>Testing the model: </a:t>
-            </a:r>
-          </a:p>
-          <a:p>
-            <a:r>
-              <a:rPr lang="en-US" sz="2600" dirty="0">
-                <a:cs typeface="Times New Roman" panose="02020603050405020304" pitchFamily="18" charset="0"/>
-              </a:rPr>
-              <a:t>If a model includes both physician costs </a:t>
-            </a:r>
-            <a:r>
-              <a:rPr lang="en-US" sz="2600" i="1" dirty="0">
-                <a:cs typeface="Times New Roman" panose="02020603050405020304" pitchFamily="18" charset="0"/>
-              </a:rPr>
-              <a:t>d </a:t>
-            </a:r>
-            <a:r>
-              <a:rPr lang="en-US" sz="2600" dirty="0">
-                <a:cs typeface="Times New Roman" panose="02020603050405020304" pitchFamily="18" charset="0"/>
-              </a:rPr>
-              <a:t>and heterogeneous elasticity of patient demand, would expect lower levels of discrimination to be observed in services that allow for a better assessment of quality </a:t>
-            </a:r>
-            <a:r>
-              <a:rPr lang="en-US" sz="2600" i="1" dirty="0">
-                <a:cs typeface="Times New Roman" panose="02020603050405020304" pitchFamily="18" charset="0"/>
-              </a:rPr>
-              <a:t>ex-ante</a:t>
-            </a:r>
-          </a:p>
-          <a:p>
-            <a:pPr lvl="1"/>
-            <a:r>
-              <a:rPr lang="en-US" sz="2400" dirty="0">
-                <a:cs typeface="Times New Roman" panose="02020603050405020304" pitchFamily="18" charset="0"/>
-              </a:rPr>
-              <a:t>At the </a:t>
-            </a:r>
-            <a:r>
-              <a:rPr lang="en-US" sz="2400" b="1" dirty="0">
-                <a:cs typeface="Times New Roman" panose="02020603050405020304" pitchFamily="18" charset="0"/>
-              </a:rPr>
-              <a:t>provider level</a:t>
-            </a:r>
-            <a:r>
-              <a:rPr lang="en-US" sz="2400" dirty="0">
-                <a:cs typeface="Times New Roman" panose="02020603050405020304" pitchFamily="18" charset="0"/>
-              </a:rPr>
-              <a:t>: easier to pick an unprejudiced family doc than surgeon? </a:t>
-            </a:r>
-          </a:p>
-          <a:p>
-            <a:pPr lvl="1"/>
-            <a:r>
-              <a:rPr lang="en-US" sz="2400" dirty="0">
-                <a:cs typeface="Times New Roman" panose="02020603050405020304" pitchFamily="18" charset="0"/>
-              </a:rPr>
-              <a:t>At the </a:t>
-            </a:r>
-            <a:r>
-              <a:rPr lang="en-US" sz="2400" b="1" dirty="0">
-                <a:cs typeface="Times New Roman" panose="02020603050405020304" pitchFamily="18" charset="0"/>
-              </a:rPr>
-              <a:t>service level: </a:t>
-            </a:r>
-            <a:r>
-              <a:rPr lang="en-US" sz="2400" dirty="0">
-                <a:cs typeface="Times New Roman" panose="02020603050405020304" pitchFamily="18" charset="0"/>
-              </a:rPr>
-              <a:t>if need for treatment is clearer, less prejudice </a:t>
-            </a:r>
-          </a:p>
-          <a:p>
-            <a:pPr lvl="1"/>
-            <a:r>
-              <a:rPr lang="en-US" sz="2400" dirty="0">
-                <a:cs typeface="Times New Roman" panose="02020603050405020304" pitchFamily="18" charset="0"/>
-              </a:rPr>
-              <a:t>Counterexample (?) to both: Black maternal care</a:t>
-            </a:r>
-          </a:p>
-          <a:p>
-            <a:r>
-              <a:rPr lang="en-US" sz="2600" dirty="0">
-                <a:cs typeface="Times New Roman" panose="02020603050405020304" pitchFamily="18" charset="0"/>
-              </a:rPr>
-              <a:t>Also, what about physician entry and dynamics?</a:t>
-            </a:r>
-          </a:p>
-        </p:txBody>
-      </p:sp>
-    </p:spTree>
-    <p:extLst>
-      <p:ext uri="{BB962C8B-B14F-4D97-AF65-F5344CB8AC3E}">
-        <p14:creationId xmlns:p14="http://schemas.microsoft.com/office/powerpoint/2010/main" val="1255835358"/>
       </p:ext>
     </p:extLst>
   </p:cSld>
@@ -22122,6 +21107,2080 @@
               <a:rPr lang="en-US" sz="3600" dirty="0">
                 <a:cs typeface="Times New Roman" panose="02020603050405020304" pitchFamily="18" charset="0"/>
               </a:rPr>
+              <a:t>Case 1: Prejudice</a:t>
+            </a:r>
+            <a:endParaRPr lang="en-US" sz="3600" dirty="0">
+              <a:latin typeface="Times New Roman" panose="02020603050405020304" pitchFamily="18" charset="0"/>
+              <a:cs typeface="Times New Roman" panose="02020603050405020304" pitchFamily="18" charset="0"/>
+            </a:endParaRPr>
+          </a:p>
+        </p:txBody>
+      </p:sp>
+      <p:sp>
+        <p:nvSpPr>
+          <p:cNvPr id="6" name="Content Placeholder 2">
+            <a:extLst>
+              <a:ext uri="{FF2B5EF4-FFF2-40B4-BE49-F238E27FC236}">
+                <a16:creationId xmlns:a16="http://schemas.microsoft.com/office/drawing/2014/main" id="{1E43DB50-BEDE-CBC2-46F9-A709EB8CD67C}"/>
+              </a:ext>
+            </a:extLst>
+          </p:cNvPr>
+          <p:cNvSpPr txBox="1">
+            <a:spLocks/>
+          </p:cNvSpPr>
+          <p:nvPr/>
+        </p:nvSpPr>
+        <p:spPr>
+          <a:xfrm>
+            <a:off x="609601" y="1066801"/>
+            <a:ext cx="10439400" cy="5141388"/>
+          </a:xfrm>
+          <a:prstGeom prst="rect">
+            <a:avLst/>
+          </a:prstGeom>
+        </p:spPr>
+        <p:txBody>
+          <a:bodyPr vert="horz" lIns="91440" tIns="45720" rIns="91440" bIns="45720" rtlCol="0">
+            <a:noAutofit/>
+          </a:bodyPr>
+          <a:lstStyle>
+            <a:lvl1pPr marL="182880" indent="-182880" algn="l" defTabSz="914400" rtl="0" eaLnBrk="1" latinLnBrk="0" hangingPunct="1">
+              <a:lnSpc>
+                <a:spcPct val="95000"/>
+              </a:lnSpc>
+              <a:spcBef>
+                <a:spcPts val="1400"/>
+              </a:spcBef>
+              <a:spcAft>
+                <a:spcPts val="200"/>
+              </a:spcAft>
+              <a:buClr>
+                <a:schemeClr val="accent1"/>
+              </a:buClr>
+              <a:buSzPct val="80000"/>
+              <a:buFont typeface="Arial" pitchFamily="34" charset="0"/>
+              <a:buChar char="•"/>
+              <a:defRPr sz="1800" kern="1200" spc="10" baseline="0">
+                <a:solidFill>
+                  <a:schemeClr val="tx1"/>
+                </a:solidFill>
+                <a:latin typeface="Times New Roman" panose="02020603050405020304" pitchFamily="18" charset="0"/>
+                <a:ea typeface="+mn-ea"/>
+                <a:cs typeface="+mn-cs"/>
+              </a:defRPr>
+            </a:lvl1pPr>
+            <a:lvl2pPr marL="457200" indent="-182880" algn="l" defTabSz="914400" rtl="0" eaLnBrk="1" latinLnBrk="0" hangingPunct="1">
+              <a:lnSpc>
+                <a:spcPct val="90000"/>
+              </a:lnSpc>
+              <a:spcBef>
+                <a:spcPts val="300"/>
+              </a:spcBef>
+              <a:spcAft>
+                <a:spcPts val="300"/>
+              </a:spcAft>
+              <a:buClr>
+                <a:schemeClr val="accent1"/>
+              </a:buClr>
+              <a:buFont typeface="Wingdings 2" pitchFamily="18" charset="2"/>
+              <a:buChar char=""/>
+              <a:defRPr sz="1600" kern="1200">
+                <a:solidFill>
+                  <a:schemeClr val="tx1">
+                    <a:lumMod val="85000"/>
+                    <a:lumOff val="15000"/>
+                  </a:schemeClr>
+                </a:solidFill>
+                <a:latin typeface="Times New Roman" panose="02020603050405020304" pitchFamily="18" charset="0"/>
+                <a:ea typeface="+mn-ea"/>
+                <a:cs typeface="+mn-cs"/>
+              </a:defRPr>
+            </a:lvl2pPr>
+            <a:lvl3pPr marL="731520" indent="-182880" algn="l" defTabSz="914400" rtl="0" eaLnBrk="1" latinLnBrk="0" hangingPunct="1">
+              <a:lnSpc>
+                <a:spcPct val="90000"/>
+              </a:lnSpc>
+              <a:spcBef>
+                <a:spcPts val="300"/>
+              </a:spcBef>
+              <a:spcAft>
+                <a:spcPts val="300"/>
+              </a:spcAft>
+              <a:buClr>
+                <a:schemeClr val="accent1"/>
+              </a:buClr>
+              <a:buFont typeface="Wingdings 2" pitchFamily="18" charset="2"/>
+              <a:buChar char=""/>
+              <a:defRPr sz="1400" kern="1200">
+                <a:solidFill>
+                  <a:schemeClr val="tx1">
+                    <a:lumMod val="85000"/>
+                    <a:lumOff val="15000"/>
+                  </a:schemeClr>
+                </a:solidFill>
+                <a:latin typeface="Times New Roman" panose="02020603050405020304" pitchFamily="18" charset="0"/>
+                <a:ea typeface="+mn-ea"/>
+                <a:cs typeface="+mn-cs"/>
+              </a:defRPr>
+            </a:lvl3pPr>
+            <a:lvl4pPr marL="1005840" indent="-182880" algn="l" defTabSz="914400" rtl="0" eaLnBrk="1" latinLnBrk="0" hangingPunct="1">
+              <a:lnSpc>
+                <a:spcPct val="90000"/>
+              </a:lnSpc>
+              <a:spcBef>
+                <a:spcPts val="300"/>
+              </a:spcBef>
+              <a:spcAft>
+                <a:spcPts val="300"/>
+              </a:spcAft>
+              <a:buClr>
+                <a:schemeClr val="accent1"/>
+              </a:buClr>
+              <a:buFont typeface="Wingdings 2" pitchFamily="18" charset="2"/>
+              <a:buChar char=""/>
+              <a:defRPr sz="1400" kern="1200">
+                <a:solidFill>
+                  <a:schemeClr val="tx1">
+                    <a:lumMod val="85000"/>
+                    <a:lumOff val="15000"/>
+                  </a:schemeClr>
+                </a:solidFill>
+                <a:latin typeface="Times New Roman" panose="02020603050405020304" pitchFamily="18" charset="0"/>
+                <a:ea typeface="+mn-ea"/>
+                <a:cs typeface="+mn-cs"/>
+              </a:defRPr>
+            </a:lvl4pPr>
+            <a:lvl5pPr marL="1280160" indent="-182880" algn="l" defTabSz="914400" rtl="0" eaLnBrk="1" latinLnBrk="0" hangingPunct="1">
+              <a:lnSpc>
+                <a:spcPct val="90000"/>
+              </a:lnSpc>
+              <a:spcBef>
+                <a:spcPts val="300"/>
+              </a:spcBef>
+              <a:spcAft>
+                <a:spcPts val="300"/>
+              </a:spcAft>
+              <a:buClr>
+                <a:schemeClr val="accent1"/>
+              </a:buClr>
+              <a:buFont typeface="Wingdings 2" pitchFamily="18" charset="2"/>
+              <a:buChar char=""/>
+              <a:defRPr sz="1400" kern="1200">
+                <a:solidFill>
+                  <a:schemeClr val="tx1">
+                    <a:lumMod val="85000"/>
+                    <a:lumOff val="15000"/>
+                  </a:schemeClr>
+                </a:solidFill>
+                <a:latin typeface="Times New Roman" panose="02020603050405020304" pitchFamily="18" charset="0"/>
+                <a:ea typeface="+mn-ea"/>
+                <a:cs typeface="+mn-cs"/>
+              </a:defRPr>
+            </a:lvl5pPr>
+            <a:lvl6pPr marL="1600000" indent="-228600" algn="l" defTabSz="914400" rtl="0" eaLnBrk="1" latinLnBrk="0" hangingPunct="1">
+              <a:lnSpc>
+                <a:spcPct val="90000"/>
+              </a:lnSpc>
+              <a:spcBef>
+                <a:spcPts val="300"/>
+              </a:spcBef>
+              <a:spcAft>
+                <a:spcPts val="300"/>
+              </a:spcAft>
+              <a:buClr>
+                <a:schemeClr val="accent1"/>
+              </a:buClr>
+              <a:buFont typeface="Wingdings 2" pitchFamily="18" charset="2"/>
+              <a:buChar char=""/>
+              <a:defRPr sz="1400" kern="1200">
+                <a:solidFill>
+                  <a:schemeClr val="tx1">
+                    <a:lumMod val="85000"/>
+                    <a:lumOff val="15000"/>
+                  </a:schemeClr>
+                </a:solidFill>
+                <a:latin typeface="+mn-lt"/>
+                <a:ea typeface="+mn-ea"/>
+                <a:cs typeface="+mn-cs"/>
+              </a:defRPr>
+            </a:lvl6pPr>
+            <a:lvl7pPr marL="1900000" indent="-228600" algn="l" defTabSz="914400" rtl="0" eaLnBrk="1" latinLnBrk="0" hangingPunct="1">
+              <a:lnSpc>
+                <a:spcPct val="90000"/>
+              </a:lnSpc>
+              <a:spcBef>
+                <a:spcPts val="300"/>
+              </a:spcBef>
+              <a:spcAft>
+                <a:spcPts val="300"/>
+              </a:spcAft>
+              <a:buClr>
+                <a:schemeClr val="accent1"/>
+              </a:buClr>
+              <a:buFont typeface="Wingdings 2" pitchFamily="18" charset="2"/>
+              <a:buChar char=""/>
+              <a:defRPr sz="1400" kern="1200">
+                <a:solidFill>
+                  <a:schemeClr val="tx1">
+                    <a:lumMod val="85000"/>
+                    <a:lumOff val="15000"/>
+                  </a:schemeClr>
+                </a:solidFill>
+                <a:latin typeface="+mn-lt"/>
+                <a:ea typeface="+mn-ea"/>
+                <a:cs typeface="+mn-cs"/>
+              </a:defRPr>
+            </a:lvl7pPr>
+            <a:lvl8pPr marL="2200000" indent="-228600" algn="l" defTabSz="914400" rtl="0" eaLnBrk="1" latinLnBrk="0" hangingPunct="1">
+              <a:lnSpc>
+                <a:spcPct val="90000"/>
+              </a:lnSpc>
+              <a:spcBef>
+                <a:spcPts val="300"/>
+              </a:spcBef>
+              <a:spcAft>
+                <a:spcPts val="300"/>
+              </a:spcAft>
+              <a:buClr>
+                <a:schemeClr val="accent1"/>
+              </a:buClr>
+              <a:buFont typeface="Wingdings 2" pitchFamily="18" charset="2"/>
+              <a:buChar char=""/>
+              <a:defRPr sz="1400" kern="1200">
+                <a:solidFill>
+                  <a:schemeClr val="tx1">
+                    <a:lumMod val="85000"/>
+                    <a:lumOff val="15000"/>
+                  </a:schemeClr>
+                </a:solidFill>
+                <a:latin typeface="+mn-lt"/>
+                <a:ea typeface="+mn-ea"/>
+                <a:cs typeface="+mn-cs"/>
+              </a:defRPr>
+            </a:lvl8pPr>
+            <a:lvl9pPr marL="2500000" indent="-228600" algn="l" defTabSz="914400" rtl="0" eaLnBrk="1" latinLnBrk="0" hangingPunct="1">
+              <a:lnSpc>
+                <a:spcPct val="90000"/>
+              </a:lnSpc>
+              <a:spcBef>
+                <a:spcPts val="300"/>
+              </a:spcBef>
+              <a:spcAft>
+                <a:spcPts val="300"/>
+              </a:spcAft>
+              <a:buClr>
+                <a:schemeClr val="accent1"/>
+              </a:buClr>
+              <a:buFont typeface="Wingdings 2" pitchFamily="18" charset="2"/>
+              <a:buChar char=""/>
+              <a:defRPr sz="1400" kern="1200">
+                <a:solidFill>
+                  <a:schemeClr val="tx1">
+                    <a:lumMod val="85000"/>
+                    <a:lumOff val="15000"/>
+                  </a:schemeClr>
+                </a:solidFill>
+                <a:latin typeface="+mn-lt"/>
+                <a:ea typeface="+mn-ea"/>
+                <a:cs typeface="+mn-cs"/>
+              </a:defRPr>
+            </a:lvl9pPr>
+          </a:lstStyle>
+          <a:p>
+            <a:endParaRPr lang="en-US" sz="2600" dirty="0">
+              <a:cs typeface="Times New Roman" panose="02020603050405020304" pitchFamily="18" charset="0"/>
+            </a:endParaRPr>
+          </a:p>
+        </p:txBody>
+      </p:sp>
+      <p:sp>
+        <p:nvSpPr>
+          <p:cNvPr id="3" name="Content Placeholder 2">
+            <a:extLst>
+              <a:ext uri="{FF2B5EF4-FFF2-40B4-BE49-F238E27FC236}">
+                <a16:creationId xmlns:a16="http://schemas.microsoft.com/office/drawing/2014/main" id="{07221140-77F4-0A99-AFB2-CC4DB7DB493C}"/>
+              </a:ext>
+            </a:extLst>
+          </p:cNvPr>
+          <p:cNvSpPr txBox="1">
+            <a:spLocks/>
+          </p:cNvSpPr>
+          <p:nvPr/>
+        </p:nvSpPr>
+        <p:spPr>
+          <a:xfrm>
+            <a:off x="762001" y="1219201"/>
+            <a:ext cx="10439400" cy="5141388"/>
+          </a:xfrm>
+          <a:prstGeom prst="rect">
+            <a:avLst/>
+          </a:prstGeom>
+        </p:spPr>
+        <p:txBody>
+          <a:bodyPr vert="horz" lIns="91440" tIns="45720" rIns="91440" bIns="45720" rtlCol="0">
+            <a:noAutofit/>
+          </a:bodyPr>
+          <a:lstStyle>
+            <a:lvl1pPr marL="182880" indent="-182880" algn="l" defTabSz="914400" rtl="0" eaLnBrk="1" latinLnBrk="0" hangingPunct="1">
+              <a:lnSpc>
+                <a:spcPct val="95000"/>
+              </a:lnSpc>
+              <a:spcBef>
+                <a:spcPts val="1400"/>
+              </a:spcBef>
+              <a:spcAft>
+                <a:spcPts val="200"/>
+              </a:spcAft>
+              <a:buClr>
+                <a:schemeClr val="accent1"/>
+              </a:buClr>
+              <a:buSzPct val="80000"/>
+              <a:buFont typeface="Arial" pitchFamily="34" charset="0"/>
+              <a:buChar char="•"/>
+              <a:defRPr sz="1800" kern="1200" spc="10" baseline="0">
+                <a:solidFill>
+                  <a:schemeClr val="tx1"/>
+                </a:solidFill>
+                <a:latin typeface="Times New Roman" panose="02020603050405020304" pitchFamily="18" charset="0"/>
+                <a:ea typeface="+mn-ea"/>
+                <a:cs typeface="+mn-cs"/>
+              </a:defRPr>
+            </a:lvl1pPr>
+            <a:lvl2pPr marL="457200" indent="-182880" algn="l" defTabSz="914400" rtl="0" eaLnBrk="1" latinLnBrk="0" hangingPunct="1">
+              <a:lnSpc>
+                <a:spcPct val="90000"/>
+              </a:lnSpc>
+              <a:spcBef>
+                <a:spcPts val="300"/>
+              </a:spcBef>
+              <a:spcAft>
+                <a:spcPts val="300"/>
+              </a:spcAft>
+              <a:buClr>
+                <a:schemeClr val="accent1"/>
+              </a:buClr>
+              <a:buFont typeface="Wingdings 2" pitchFamily="18" charset="2"/>
+              <a:buChar char=""/>
+              <a:defRPr sz="1600" kern="1200">
+                <a:solidFill>
+                  <a:schemeClr val="tx1">
+                    <a:lumMod val="85000"/>
+                    <a:lumOff val="15000"/>
+                  </a:schemeClr>
+                </a:solidFill>
+                <a:latin typeface="Times New Roman" panose="02020603050405020304" pitchFamily="18" charset="0"/>
+                <a:ea typeface="+mn-ea"/>
+                <a:cs typeface="+mn-cs"/>
+              </a:defRPr>
+            </a:lvl2pPr>
+            <a:lvl3pPr marL="731520" indent="-182880" algn="l" defTabSz="914400" rtl="0" eaLnBrk="1" latinLnBrk="0" hangingPunct="1">
+              <a:lnSpc>
+                <a:spcPct val="90000"/>
+              </a:lnSpc>
+              <a:spcBef>
+                <a:spcPts val="300"/>
+              </a:spcBef>
+              <a:spcAft>
+                <a:spcPts val="300"/>
+              </a:spcAft>
+              <a:buClr>
+                <a:schemeClr val="accent1"/>
+              </a:buClr>
+              <a:buFont typeface="Wingdings 2" pitchFamily="18" charset="2"/>
+              <a:buChar char=""/>
+              <a:defRPr sz="1400" kern="1200">
+                <a:solidFill>
+                  <a:schemeClr val="tx1">
+                    <a:lumMod val="85000"/>
+                    <a:lumOff val="15000"/>
+                  </a:schemeClr>
+                </a:solidFill>
+                <a:latin typeface="Times New Roman" panose="02020603050405020304" pitchFamily="18" charset="0"/>
+                <a:ea typeface="+mn-ea"/>
+                <a:cs typeface="+mn-cs"/>
+              </a:defRPr>
+            </a:lvl3pPr>
+            <a:lvl4pPr marL="1005840" indent="-182880" algn="l" defTabSz="914400" rtl="0" eaLnBrk="1" latinLnBrk="0" hangingPunct="1">
+              <a:lnSpc>
+                <a:spcPct val="90000"/>
+              </a:lnSpc>
+              <a:spcBef>
+                <a:spcPts val="300"/>
+              </a:spcBef>
+              <a:spcAft>
+                <a:spcPts val="300"/>
+              </a:spcAft>
+              <a:buClr>
+                <a:schemeClr val="accent1"/>
+              </a:buClr>
+              <a:buFont typeface="Wingdings 2" pitchFamily="18" charset="2"/>
+              <a:buChar char=""/>
+              <a:defRPr sz="1400" kern="1200">
+                <a:solidFill>
+                  <a:schemeClr val="tx1">
+                    <a:lumMod val="85000"/>
+                    <a:lumOff val="15000"/>
+                  </a:schemeClr>
+                </a:solidFill>
+                <a:latin typeface="Times New Roman" panose="02020603050405020304" pitchFamily="18" charset="0"/>
+                <a:ea typeface="+mn-ea"/>
+                <a:cs typeface="+mn-cs"/>
+              </a:defRPr>
+            </a:lvl4pPr>
+            <a:lvl5pPr marL="1280160" indent="-182880" algn="l" defTabSz="914400" rtl="0" eaLnBrk="1" latinLnBrk="0" hangingPunct="1">
+              <a:lnSpc>
+                <a:spcPct val="90000"/>
+              </a:lnSpc>
+              <a:spcBef>
+                <a:spcPts val="300"/>
+              </a:spcBef>
+              <a:spcAft>
+                <a:spcPts val="300"/>
+              </a:spcAft>
+              <a:buClr>
+                <a:schemeClr val="accent1"/>
+              </a:buClr>
+              <a:buFont typeface="Wingdings 2" pitchFamily="18" charset="2"/>
+              <a:buChar char=""/>
+              <a:defRPr sz="1400" kern="1200">
+                <a:solidFill>
+                  <a:schemeClr val="tx1">
+                    <a:lumMod val="85000"/>
+                    <a:lumOff val="15000"/>
+                  </a:schemeClr>
+                </a:solidFill>
+                <a:latin typeface="Times New Roman" panose="02020603050405020304" pitchFamily="18" charset="0"/>
+                <a:ea typeface="+mn-ea"/>
+                <a:cs typeface="+mn-cs"/>
+              </a:defRPr>
+            </a:lvl5pPr>
+            <a:lvl6pPr marL="1600000" indent="-228600" algn="l" defTabSz="914400" rtl="0" eaLnBrk="1" latinLnBrk="0" hangingPunct="1">
+              <a:lnSpc>
+                <a:spcPct val="90000"/>
+              </a:lnSpc>
+              <a:spcBef>
+                <a:spcPts val="300"/>
+              </a:spcBef>
+              <a:spcAft>
+                <a:spcPts val="300"/>
+              </a:spcAft>
+              <a:buClr>
+                <a:schemeClr val="accent1"/>
+              </a:buClr>
+              <a:buFont typeface="Wingdings 2" pitchFamily="18" charset="2"/>
+              <a:buChar char=""/>
+              <a:defRPr sz="1400" kern="1200">
+                <a:solidFill>
+                  <a:schemeClr val="tx1">
+                    <a:lumMod val="85000"/>
+                    <a:lumOff val="15000"/>
+                  </a:schemeClr>
+                </a:solidFill>
+                <a:latin typeface="+mn-lt"/>
+                <a:ea typeface="+mn-ea"/>
+                <a:cs typeface="+mn-cs"/>
+              </a:defRPr>
+            </a:lvl6pPr>
+            <a:lvl7pPr marL="1900000" indent="-228600" algn="l" defTabSz="914400" rtl="0" eaLnBrk="1" latinLnBrk="0" hangingPunct="1">
+              <a:lnSpc>
+                <a:spcPct val="90000"/>
+              </a:lnSpc>
+              <a:spcBef>
+                <a:spcPts val="300"/>
+              </a:spcBef>
+              <a:spcAft>
+                <a:spcPts val="300"/>
+              </a:spcAft>
+              <a:buClr>
+                <a:schemeClr val="accent1"/>
+              </a:buClr>
+              <a:buFont typeface="Wingdings 2" pitchFamily="18" charset="2"/>
+              <a:buChar char=""/>
+              <a:defRPr sz="1400" kern="1200">
+                <a:solidFill>
+                  <a:schemeClr val="tx1">
+                    <a:lumMod val="85000"/>
+                    <a:lumOff val="15000"/>
+                  </a:schemeClr>
+                </a:solidFill>
+                <a:latin typeface="+mn-lt"/>
+                <a:ea typeface="+mn-ea"/>
+                <a:cs typeface="+mn-cs"/>
+              </a:defRPr>
+            </a:lvl7pPr>
+            <a:lvl8pPr marL="2200000" indent="-228600" algn="l" defTabSz="914400" rtl="0" eaLnBrk="1" latinLnBrk="0" hangingPunct="1">
+              <a:lnSpc>
+                <a:spcPct val="90000"/>
+              </a:lnSpc>
+              <a:spcBef>
+                <a:spcPts val="300"/>
+              </a:spcBef>
+              <a:spcAft>
+                <a:spcPts val="300"/>
+              </a:spcAft>
+              <a:buClr>
+                <a:schemeClr val="accent1"/>
+              </a:buClr>
+              <a:buFont typeface="Wingdings 2" pitchFamily="18" charset="2"/>
+              <a:buChar char=""/>
+              <a:defRPr sz="1400" kern="1200">
+                <a:solidFill>
+                  <a:schemeClr val="tx1">
+                    <a:lumMod val="85000"/>
+                    <a:lumOff val="15000"/>
+                  </a:schemeClr>
+                </a:solidFill>
+                <a:latin typeface="+mn-lt"/>
+                <a:ea typeface="+mn-ea"/>
+                <a:cs typeface="+mn-cs"/>
+              </a:defRPr>
+            </a:lvl8pPr>
+            <a:lvl9pPr marL="2500000" indent="-228600" algn="l" defTabSz="914400" rtl="0" eaLnBrk="1" latinLnBrk="0" hangingPunct="1">
+              <a:lnSpc>
+                <a:spcPct val="90000"/>
+              </a:lnSpc>
+              <a:spcBef>
+                <a:spcPts val="300"/>
+              </a:spcBef>
+              <a:spcAft>
+                <a:spcPts val="300"/>
+              </a:spcAft>
+              <a:buClr>
+                <a:schemeClr val="accent1"/>
+              </a:buClr>
+              <a:buFont typeface="Wingdings 2" pitchFamily="18" charset="2"/>
+              <a:buChar char=""/>
+              <a:defRPr sz="1400" kern="1200">
+                <a:solidFill>
+                  <a:schemeClr val="tx1">
+                    <a:lumMod val="85000"/>
+                    <a:lumOff val="15000"/>
+                  </a:schemeClr>
+                </a:solidFill>
+                <a:latin typeface="+mn-lt"/>
+                <a:ea typeface="+mn-ea"/>
+                <a:cs typeface="+mn-cs"/>
+              </a:defRPr>
+            </a:lvl9pPr>
+          </a:lstStyle>
+          <a:p>
+            <a:r>
+              <a:rPr lang="en-US" sz="2400" dirty="0">
+                <a:cs typeface="Times New Roman" panose="02020603050405020304" pitchFamily="18" charset="0"/>
+              </a:rPr>
+              <a:t>Like the Becker model</a:t>
+            </a:r>
+          </a:p>
+          <a:p>
+            <a:r>
+              <a:rPr lang="en-US" sz="2400" dirty="0">
+                <a:cs typeface="Times New Roman" panose="02020603050405020304" pitchFamily="18" charset="0"/>
+              </a:rPr>
+              <a:t>Taste-based discrimination can result in under-treatment for minorities</a:t>
+            </a:r>
+            <a:endParaRPr lang="en-US" sz="2600" dirty="0">
+              <a:cs typeface="Times New Roman" panose="02020603050405020304" pitchFamily="18" charset="0"/>
+            </a:endParaRPr>
+          </a:p>
+        </p:txBody>
+      </p:sp>
+      <p:pic>
+        <p:nvPicPr>
+          <p:cNvPr id="5" name="Picture 4">
+            <a:extLst>
+              <a:ext uri="{FF2B5EF4-FFF2-40B4-BE49-F238E27FC236}">
+                <a16:creationId xmlns:a16="http://schemas.microsoft.com/office/drawing/2014/main" id="{F6F584E3-FA5B-3B22-43C2-424BC372F1C9}"/>
+              </a:ext>
+            </a:extLst>
+          </p:cNvPr>
+          <p:cNvPicPr>
+            <a:picLocks noChangeAspect="1"/>
+          </p:cNvPicPr>
+          <p:nvPr/>
+        </p:nvPicPr>
+        <p:blipFill>
+          <a:blip r:embed="rId3"/>
+          <a:stretch>
+            <a:fillRect/>
+          </a:stretch>
+        </p:blipFill>
+        <p:spPr>
+          <a:xfrm>
+            <a:off x="2075906" y="2174365"/>
+            <a:ext cx="7811590" cy="4715533"/>
+          </a:xfrm>
+          <a:prstGeom prst="rect">
+            <a:avLst/>
+          </a:prstGeom>
+        </p:spPr>
+      </p:pic>
+    </p:spTree>
+    <p:extLst>
+      <p:ext uri="{BB962C8B-B14F-4D97-AF65-F5344CB8AC3E}">
+        <p14:creationId xmlns:p14="http://schemas.microsoft.com/office/powerpoint/2010/main" val="1282490527"/>
+      </p:ext>
+    </p:extLst>
+  </p:cSld>
+  <p:clrMapOvr>
+    <a:masterClrMapping/>
+  </p:clrMapOvr>
+</p:sld>
+</file>
+
+<file path=ppt/slides/slide31.xml><?xml version="1.0" encoding="utf-8"?>
+<p:sld xmlns:a="http://schemas.openxmlformats.org/drawingml/2006/main" xmlns:r="http://schemas.openxmlformats.org/officeDocument/2006/relationships" xmlns:p="http://schemas.openxmlformats.org/presentationml/2006/main">
+  <p:cSld>
+    <p:spTree>
+      <p:nvGrpSpPr>
+        <p:cNvPr id="1" name=""/>
+        <p:cNvGrpSpPr/>
+        <p:nvPr/>
+      </p:nvGrpSpPr>
+      <p:grpSpPr>
+        <a:xfrm>
+          <a:off x="0" y="0"/>
+          <a:ext cx="0" cy="0"/>
+          <a:chOff x="0" y="0"/>
+          <a:chExt cx="0" cy="0"/>
+        </a:xfrm>
+      </p:grpSpPr>
+      <p:sp>
+        <p:nvSpPr>
+          <p:cNvPr id="2" name="Title 1"/>
+          <p:cNvSpPr>
+            <a:spLocks noGrp="1"/>
+          </p:cNvSpPr>
+          <p:nvPr>
+            <p:ph type="title"/>
+          </p:nvPr>
+        </p:nvSpPr>
+        <p:spPr>
+          <a:xfrm>
+            <a:off x="609600" y="272077"/>
+            <a:ext cx="10439400" cy="624840"/>
+          </a:xfrm>
+        </p:spPr>
+        <p:txBody>
+          <a:bodyPr>
+            <a:noAutofit/>
+          </a:bodyPr>
+          <a:lstStyle/>
+          <a:p>
+            <a:r>
+              <a:rPr lang="en-US" sz="3600" dirty="0">
+                <a:cs typeface="Times New Roman" panose="02020603050405020304" pitchFamily="18" charset="0"/>
+              </a:rPr>
+              <a:t>Case 1: Prejudice</a:t>
+            </a:r>
+            <a:endParaRPr lang="en-US" sz="3600" dirty="0">
+              <a:latin typeface="Times New Roman" panose="02020603050405020304" pitchFamily="18" charset="0"/>
+              <a:cs typeface="Times New Roman" panose="02020603050405020304" pitchFamily="18" charset="0"/>
+            </a:endParaRPr>
+          </a:p>
+        </p:txBody>
+      </p:sp>
+      <p:sp>
+        <p:nvSpPr>
+          <p:cNvPr id="6" name="Content Placeholder 2">
+            <a:extLst>
+              <a:ext uri="{FF2B5EF4-FFF2-40B4-BE49-F238E27FC236}">
+                <a16:creationId xmlns:a16="http://schemas.microsoft.com/office/drawing/2014/main" id="{1E43DB50-BEDE-CBC2-46F9-A709EB8CD67C}"/>
+              </a:ext>
+            </a:extLst>
+          </p:cNvPr>
+          <p:cNvSpPr txBox="1">
+            <a:spLocks/>
+          </p:cNvSpPr>
+          <p:nvPr/>
+        </p:nvSpPr>
+        <p:spPr>
+          <a:xfrm>
+            <a:off x="609601" y="1066801"/>
+            <a:ext cx="10439400" cy="5141388"/>
+          </a:xfrm>
+          <a:prstGeom prst="rect">
+            <a:avLst/>
+          </a:prstGeom>
+        </p:spPr>
+        <p:txBody>
+          <a:bodyPr vert="horz" lIns="91440" tIns="45720" rIns="91440" bIns="45720" rtlCol="0">
+            <a:noAutofit/>
+          </a:bodyPr>
+          <a:lstStyle>
+            <a:lvl1pPr marL="182880" indent="-182880" algn="l" defTabSz="914400" rtl="0" eaLnBrk="1" latinLnBrk="0" hangingPunct="1">
+              <a:lnSpc>
+                <a:spcPct val="95000"/>
+              </a:lnSpc>
+              <a:spcBef>
+                <a:spcPts val="1400"/>
+              </a:spcBef>
+              <a:spcAft>
+                <a:spcPts val="200"/>
+              </a:spcAft>
+              <a:buClr>
+                <a:schemeClr val="accent1"/>
+              </a:buClr>
+              <a:buSzPct val="80000"/>
+              <a:buFont typeface="Arial" pitchFamily="34" charset="0"/>
+              <a:buChar char="•"/>
+              <a:defRPr sz="1800" kern="1200" spc="10" baseline="0">
+                <a:solidFill>
+                  <a:schemeClr val="tx1"/>
+                </a:solidFill>
+                <a:latin typeface="Times New Roman" panose="02020603050405020304" pitchFamily="18" charset="0"/>
+                <a:ea typeface="+mn-ea"/>
+                <a:cs typeface="+mn-cs"/>
+              </a:defRPr>
+            </a:lvl1pPr>
+            <a:lvl2pPr marL="457200" indent="-182880" algn="l" defTabSz="914400" rtl="0" eaLnBrk="1" latinLnBrk="0" hangingPunct="1">
+              <a:lnSpc>
+                <a:spcPct val="90000"/>
+              </a:lnSpc>
+              <a:spcBef>
+                <a:spcPts val="300"/>
+              </a:spcBef>
+              <a:spcAft>
+                <a:spcPts val="300"/>
+              </a:spcAft>
+              <a:buClr>
+                <a:schemeClr val="accent1"/>
+              </a:buClr>
+              <a:buFont typeface="Wingdings 2" pitchFamily="18" charset="2"/>
+              <a:buChar char=""/>
+              <a:defRPr sz="1600" kern="1200">
+                <a:solidFill>
+                  <a:schemeClr val="tx1">
+                    <a:lumMod val="85000"/>
+                    <a:lumOff val="15000"/>
+                  </a:schemeClr>
+                </a:solidFill>
+                <a:latin typeface="Times New Roman" panose="02020603050405020304" pitchFamily="18" charset="0"/>
+                <a:ea typeface="+mn-ea"/>
+                <a:cs typeface="+mn-cs"/>
+              </a:defRPr>
+            </a:lvl2pPr>
+            <a:lvl3pPr marL="731520" indent="-182880" algn="l" defTabSz="914400" rtl="0" eaLnBrk="1" latinLnBrk="0" hangingPunct="1">
+              <a:lnSpc>
+                <a:spcPct val="90000"/>
+              </a:lnSpc>
+              <a:spcBef>
+                <a:spcPts val="300"/>
+              </a:spcBef>
+              <a:spcAft>
+                <a:spcPts val="300"/>
+              </a:spcAft>
+              <a:buClr>
+                <a:schemeClr val="accent1"/>
+              </a:buClr>
+              <a:buFont typeface="Wingdings 2" pitchFamily="18" charset="2"/>
+              <a:buChar char=""/>
+              <a:defRPr sz="1400" kern="1200">
+                <a:solidFill>
+                  <a:schemeClr val="tx1">
+                    <a:lumMod val="85000"/>
+                    <a:lumOff val="15000"/>
+                  </a:schemeClr>
+                </a:solidFill>
+                <a:latin typeface="Times New Roman" panose="02020603050405020304" pitchFamily="18" charset="0"/>
+                <a:ea typeface="+mn-ea"/>
+                <a:cs typeface="+mn-cs"/>
+              </a:defRPr>
+            </a:lvl3pPr>
+            <a:lvl4pPr marL="1005840" indent="-182880" algn="l" defTabSz="914400" rtl="0" eaLnBrk="1" latinLnBrk="0" hangingPunct="1">
+              <a:lnSpc>
+                <a:spcPct val="90000"/>
+              </a:lnSpc>
+              <a:spcBef>
+                <a:spcPts val="300"/>
+              </a:spcBef>
+              <a:spcAft>
+                <a:spcPts val="300"/>
+              </a:spcAft>
+              <a:buClr>
+                <a:schemeClr val="accent1"/>
+              </a:buClr>
+              <a:buFont typeface="Wingdings 2" pitchFamily="18" charset="2"/>
+              <a:buChar char=""/>
+              <a:defRPr sz="1400" kern="1200">
+                <a:solidFill>
+                  <a:schemeClr val="tx1">
+                    <a:lumMod val="85000"/>
+                    <a:lumOff val="15000"/>
+                  </a:schemeClr>
+                </a:solidFill>
+                <a:latin typeface="Times New Roman" panose="02020603050405020304" pitchFamily="18" charset="0"/>
+                <a:ea typeface="+mn-ea"/>
+                <a:cs typeface="+mn-cs"/>
+              </a:defRPr>
+            </a:lvl4pPr>
+            <a:lvl5pPr marL="1280160" indent="-182880" algn="l" defTabSz="914400" rtl="0" eaLnBrk="1" latinLnBrk="0" hangingPunct="1">
+              <a:lnSpc>
+                <a:spcPct val="90000"/>
+              </a:lnSpc>
+              <a:spcBef>
+                <a:spcPts val="300"/>
+              </a:spcBef>
+              <a:spcAft>
+                <a:spcPts val="300"/>
+              </a:spcAft>
+              <a:buClr>
+                <a:schemeClr val="accent1"/>
+              </a:buClr>
+              <a:buFont typeface="Wingdings 2" pitchFamily="18" charset="2"/>
+              <a:buChar char=""/>
+              <a:defRPr sz="1400" kern="1200">
+                <a:solidFill>
+                  <a:schemeClr val="tx1">
+                    <a:lumMod val="85000"/>
+                    <a:lumOff val="15000"/>
+                  </a:schemeClr>
+                </a:solidFill>
+                <a:latin typeface="Times New Roman" panose="02020603050405020304" pitchFamily="18" charset="0"/>
+                <a:ea typeface="+mn-ea"/>
+                <a:cs typeface="+mn-cs"/>
+              </a:defRPr>
+            </a:lvl5pPr>
+            <a:lvl6pPr marL="1600000" indent="-228600" algn="l" defTabSz="914400" rtl="0" eaLnBrk="1" latinLnBrk="0" hangingPunct="1">
+              <a:lnSpc>
+                <a:spcPct val="90000"/>
+              </a:lnSpc>
+              <a:spcBef>
+                <a:spcPts val="300"/>
+              </a:spcBef>
+              <a:spcAft>
+                <a:spcPts val="300"/>
+              </a:spcAft>
+              <a:buClr>
+                <a:schemeClr val="accent1"/>
+              </a:buClr>
+              <a:buFont typeface="Wingdings 2" pitchFamily="18" charset="2"/>
+              <a:buChar char=""/>
+              <a:defRPr sz="1400" kern="1200">
+                <a:solidFill>
+                  <a:schemeClr val="tx1">
+                    <a:lumMod val="85000"/>
+                    <a:lumOff val="15000"/>
+                  </a:schemeClr>
+                </a:solidFill>
+                <a:latin typeface="+mn-lt"/>
+                <a:ea typeface="+mn-ea"/>
+                <a:cs typeface="+mn-cs"/>
+              </a:defRPr>
+            </a:lvl6pPr>
+            <a:lvl7pPr marL="1900000" indent="-228600" algn="l" defTabSz="914400" rtl="0" eaLnBrk="1" latinLnBrk="0" hangingPunct="1">
+              <a:lnSpc>
+                <a:spcPct val="90000"/>
+              </a:lnSpc>
+              <a:spcBef>
+                <a:spcPts val="300"/>
+              </a:spcBef>
+              <a:spcAft>
+                <a:spcPts val="300"/>
+              </a:spcAft>
+              <a:buClr>
+                <a:schemeClr val="accent1"/>
+              </a:buClr>
+              <a:buFont typeface="Wingdings 2" pitchFamily="18" charset="2"/>
+              <a:buChar char=""/>
+              <a:defRPr sz="1400" kern="1200">
+                <a:solidFill>
+                  <a:schemeClr val="tx1">
+                    <a:lumMod val="85000"/>
+                    <a:lumOff val="15000"/>
+                  </a:schemeClr>
+                </a:solidFill>
+                <a:latin typeface="+mn-lt"/>
+                <a:ea typeface="+mn-ea"/>
+                <a:cs typeface="+mn-cs"/>
+              </a:defRPr>
+            </a:lvl7pPr>
+            <a:lvl8pPr marL="2200000" indent="-228600" algn="l" defTabSz="914400" rtl="0" eaLnBrk="1" latinLnBrk="0" hangingPunct="1">
+              <a:lnSpc>
+                <a:spcPct val="90000"/>
+              </a:lnSpc>
+              <a:spcBef>
+                <a:spcPts val="300"/>
+              </a:spcBef>
+              <a:spcAft>
+                <a:spcPts val="300"/>
+              </a:spcAft>
+              <a:buClr>
+                <a:schemeClr val="accent1"/>
+              </a:buClr>
+              <a:buFont typeface="Wingdings 2" pitchFamily="18" charset="2"/>
+              <a:buChar char=""/>
+              <a:defRPr sz="1400" kern="1200">
+                <a:solidFill>
+                  <a:schemeClr val="tx1">
+                    <a:lumMod val="85000"/>
+                    <a:lumOff val="15000"/>
+                  </a:schemeClr>
+                </a:solidFill>
+                <a:latin typeface="+mn-lt"/>
+                <a:ea typeface="+mn-ea"/>
+                <a:cs typeface="+mn-cs"/>
+              </a:defRPr>
+            </a:lvl8pPr>
+            <a:lvl9pPr marL="2500000" indent="-228600" algn="l" defTabSz="914400" rtl="0" eaLnBrk="1" latinLnBrk="0" hangingPunct="1">
+              <a:lnSpc>
+                <a:spcPct val="90000"/>
+              </a:lnSpc>
+              <a:spcBef>
+                <a:spcPts val="300"/>
+              </a:spcBef>
+              <a:spcAft>
+                <a:spcPts val="300"/>
+              </a:spcAft>
+              <a:buClr>
+                <a:schemeClr val="accent1"/>
+              </a:buClr>
+              <a:buFont typeface="Wingdings 2" pitchFamily="18" charset="2"/>
+              <a:buChar char=""/>
+              <a:defRPr sz="1400" kern="1200">
+                <a:solidFill>
+                  <a:schemeClr val="tx1">
+                    <a:lumMod val="85000"/>
+                    <a:lumOff val="15000"/>
+                  </a:schemeClr>
+                </a:solidFill>
+                <a:latin typeface="+mn-lt"/>
+                <a:ea typeface="+mn-ea"/>
+                <a:cs typeface="+mn-cs"/>
+              </a:defRPr>
+            </a:lvl9pPr>
+          </a:lstStyle>
+          <a:p>
+            <a:endParaRPr lang="en-US" sz="2600" dirty="0">
+              <a:cs typeface="Times New Roman" panose="02020603050405020304" pitchFamily="18" charset="0"/>
+            </a:endParaRPr>
+          </a:p>
+        </p:txBody>
+      </p:sp>
+      <p:sp>
+        <p:nvSpPr>
+          <p:cNvPr id="3" name="Content Placeholder 2">
+            <a:extLst>
+              <a:ext uri="{FF2B5EF4-FFF2-40B4-BE49-F238E27FC236}">
+                <a16:creationId xmlns:a16="http://schemas.microsoft.com/office/drawing/2014/main" id="{07221140-77F4-0A99-AFB2-CC4DB7DB493C}"/>
+              </a:ext>
+            </a:extLst>
+          </p:cNvPr>
+          <p:cNvSpPr txBox="1">
+            <a:spLocks/>
+          </p:cNvSpPr>
+          <p:nvPr/>
+        </p:nvSpPr>
+        <p:spPr>
+          <a:xfrm>
+            <a:off x="762001" y="1219201"/>
+            <a:ext cx="10439400" cy="5141388"/>
+          </a:xfrm>
+          <a:prstGeom prst="rect">
+            <a:avLst/>
+          </a:prstGeom>
+        </p:spPr>
+        <p:txBody>
+          <a:bodyPr vert="horz" lIns="91440" tIns="45720" rIns="91440" bIns="45720" rtlCol="0">
+            <a:noAutofit/>
+          </a:bodyPr>
+          <a:lstStyle>
+            <a:lvl1pPr marL="182880" indent="-182880" algn="l" defTabSz="914400" rtl="0" eaLnBrk="1" latinLnBrk="0" hangingPunct="1">
+              <a:lnSpc>
+                <a:spcPct val="95000"/>
+              </a:lnSpc>
+              <a:spcBef>
+                <a:spcPts val="1400"/>
+              </a:spcBef>
+              <a:spcAft>
+                <a:spcPts val="200"/>
+              </a:spcAft>
+              <a:buClr>
+                <a:schemeClr val="accent1"/>
+              </a:buClr>
+              <a:buSzPct val="80000"/>
+              <a:buFont typeface="Arial" pitchFamily="34" charset="0"/>
+              <a:buChar char="•"/>
+              <a:defRPr sz="1800" kern="1200" spc="10" baseline="0">
+                <a:solidFill>
+                  <a:schemeClr val="tx1"/>
+                </a:solidFill>
+                <a:latin typeface="Times New Roman" panose="02020603050405020304" pitchFamily="18" charset="0"/>
+                <a:ea typeface="+mn-ea"/>
+                <a:cs typeface="+mn-cs"/>
+              </a:defRPr>
+            </a:lvl1pPr>
+            <a:lvl2pPr marL="457200" indent="-182880" algn="l" defTabSz="914400" rtl="0" eaLnBrk="1" latinLnBrk="0" hangingPunct="1">
+              <a:lnSpc>
+                <a:spcPct val="90000"/>
+              </a:lnSpc>
+              <a:spcBef>
+                <a:spcPts val="300"/>
+              </a:spcBef>
+              <a:spcAft>
+                <a:spcPts val="300"/>
+              </a:spcAft>
+              <a:buClr>
+                <a:schemeClr val="accent1"/>
+              </a:buClr>
+              <a:buFont typeface="Wingdings 2" pitchFamily="18" charset="2"/>
+              <a:buChar char=""/>
+              <a:defRPr sz="1600" kern="1200">
+                <a:solidFill>
+                  <a:schemeClr val="tx1">
+                    <a:lumMod val="85000"/>
+                    <a:lumOff val="15000"/>
+                  </a:schemeClr>
+                </a:solidFill>
+                <a:latin typeface="Times New Roman" panose="02020603050405020304" pitchFamily="18" charset="0"/>
+                <a:ea typeface="+mn-ea"/>
+                <a:cs typeface="+mn-cs"/>
+              </a:defRPr>
+            </a:lvl2pPr>
+            <a:lvl3pPr marL="731520" indent="-182880" algn="l" defTabSz="914400" rtl="0" eaLnBrk="1" latinLnBrk="0" hangingPunct="1">
+              <a:lnSpc>
+                <a:spcPct val="90000"/>
+              </a:lnSpc>
+              <a:spcBef>
+                <a:spcPts val="300"/>
+              </a:spcBef>
+              <a:spcAft>
+                <a:spcPts val="300"/>
+              </a:spcAft>
+              <a:buClr>
+                <a:schemeClr val="accent1"/>
+              </a:buClr>
+              <a:buFont typeface="Wingdings 2" pitchFamily="18" charset="2"/>
+              <a:buChar char=""/>
+              <a:defRPr sz="1400" kern="1200">
+                <a:solidFill>
+                  <a:schemeClr val="tx1">
+                    <a:lumMod val="85000"/>
+                    <a:lumOff val="15000"/>
+                  </a:schemeClr>
+                </a:solidFill>
+                <a:latin typeface="Times New Roman" panose="02020603050405020304" pitchFamily="18" charset="0"/>
+                <a:ea typeface="+mn-ea"/>
+                <a:cs typeface="+mn-cs"/>
+              </a:defRPr>
+            </a:lvl3pPr>
+            <a:lvl4pPr marL="1005840" indent="-182880" algn="l" defTabSz="914400" rtl="0" eaLnBrk="1" latinLnBrk="0" hangingPunct="1">
+              <a:lnSpc>
+                <a:spcPct val="90000"/>
+              </a:lnSpc>
+              <a:spcBef>
+                <a:spcPts val="300"/>
+              </a:spcBef>
+              <a:spcAft>
+                <a:spcPts val="300"/>
+              </a:spcAft>
+              <a:buClr>
+                <a:schemeClr val="accent1"/>
+              </a:buClr>
+              <a:buFont typeface="Wingdings 2" pitchFamily="18" charset="2"/>
+              <a:buChar char=""/>
+              <a:defRPr sz="1400" kern="1200">
+                <a:solidFill>
+                  <a:schemeClr val="tx1">
+                    <a:lumMod val="85000"/>
+                    <a:lumOff val="15000"/>
+                  </a:schemeClr>
+                </a:solidFill>
+                <a:latin typeface="Times New Roman" panose="02020603050405020304" pitchFamily="18" charset="0"/>
+                <a:ea typeface="+mn-ea"/>
+                <a:cs typeface="+mn-cs"/>
+              </a:defRPr>
+            </a:lvl4pPr>
+            <a:lvl5pPr marL="1280160" indent="-182880" algn="l" defTabSz="914400" rtl="0" eaLnBrk="1" latinLnBrk="0" hangingPunct="1">
+              <a:lnSpc>
+                <a:spcPct val="90000"/>
+              </a:lnSpc>
+              <a:spcBef>
+                <a:spcPts val="300"/>
+              </a:spcBef>
+              <a:spcAft>
+                <a:spcPts val="300"/>
+              </a:spcAft>
+              <a:buClr>
+                <a:schemeClr val="accent1"/>
+              </a:buClr>
+              <a:buFont typeface="Wingdings 2" pitchFamily="18" charset="2"/>
+              <a:buChar char=""/>
+              <a:defRPr sz="1400" kern="1200">
+                <a:solidFill>
+                  <a:schemeClr val="tx1">
+                    <a:lumMod val="85000"/>
+                    <a:lumOff val="15000"/>
+                  </a:schemeClr>
+                </a:solidFill>
+                <a:latin typeface="Times New Roman" panose="02020603050405020304" pitchFamily="18" charset="0"/>
+                <a:ea typeface="+mn-ea"/>
+                <a:cs typeface="+mn-cs"/>
+              </a:defRPr>
+            </a:lvl5pPr>
+            <a:lvl6pPr marL="1600000" indent="-228600" algn="l" defTabSz="914400" rtl="0" eaLnBrk="1" latinLnBrk="0" hangingPunct="1">
+              <a:lnSpc>
+                <a:spcPct val="90000"/>
+              </a:lnSpc>
+              <a:spcBef>
+                <a:spcPts val="300"/>
+              </a:spcBef>
+              <a:spcAft>
+                <a:spcPts val="300"/>
+              </a:spcAft>
+              <a:buClr>
+                <a:schemeClr val="accent1"/>
+              </a:buClr>
+              <a:buFont typeface="Wingdings 2" pitchFamily="18" charset="2"/>
+              <a:buChar char=""/>
+              <a:defRPr sz="1400" kern="1200">
+                <a:solidFill>
+                  <a:schemeClr val="tx1">
+                    <a:lumMod val="85000"/>
+                    <a:lumOff val="15000"/>
+                  </a:schemeClr>
+                </a:solidFill>
+                <a:latin typeface="+mn-lt"/>
+                <a:ea typeface="+mn-ea"/>
+                <a:cs typeface="+mn-cs"/>
+              </a:defRPr>
+            </a:lvl6pPr>
+            <a:lvl7pPr marL="1900000" indent="-228600" algn="l" defTabSz="914400" rtl="0" eaLnBrk="1" latinLnBrk="0" hangingPunct="1">
+              <a:lnSpc>
+                <a:spcPct val="90000"/>
+              </a:lnSpc>
+              <a:spcBef>
+                <a:spcPts val="300"/>
+              </a:spcBef>
+              <a:spcAft>
+                <a:spcPts val="300"/>
+              </a:spcAft>
+              <a:buClr>
+                <a:schemeClr val="accent1"/>
+              </a:buClr>
+              <a:buFont typeface="Wingdings 2" pitchFamily="18" charset="2"/>
+              <a:buChar char=""/>
+              <a:defRPr sz="1400" kern="1200">
+                <a:solidFill>
+                  <a:schemeClr val="tx1">
+                    <a:lumMod val="85000"/>
+                    <a:lumOff val="15000"/>
+                  </a:schemeClr>
+                </a:solidFill>
+                <a:latin typeface="+mn-lt"/>
+                <a:ea typeface="+mn-ea"/>
+                <a:cs typeface="+mn-cs"/>
+              </a:defRPr>
+            </a:lvl7pPr>
+            <a:lvl8pPr marL="2200000" indent="-228600" algn="l" defTabSz="914400" rtl="0" eaLnBrk="1" latinLnBrk="0" hangingPunct="1">
+              <a:lnSpc>
+                <a:spcPct val="90000"/>
+              </a:lnSpc>
+              <a:spcBef>
+                <a:spcPts val="300"/>
+              </a:spcBef>
+              <a:spcAft>
+                <a:spcPts val="300"/>
+              </a:spcAft>
+              <a:buClr>
+                <a:schemeClr val="accent1"/>
+              </a:buClr>
+              <a:buFont typeface="Wingdings 2" pitchFamily="18" charset="2"/>
+              <a:buChar char=""/>
+              <a:defRPr sz="1400" kern="1200">
+                <a:solidFill>
+                  <a:schemeClr val="tx1">
+                    <a:lumMod val="85000"/>
+                    <a:lumOff val="15000"/>
+                  </a:schemeClr>
+                </a:solidFill>
+                <a:latin typeface="+mn-lt"/>
+                <a:ea typeface="+mn-ea"/>
+                <a:cs typeface="+mn-cs"/>
+              </a:defRPr>
+            </a:lvl8pPr>
+            <a:lvl9pPr marL="2500000" indent="-228600" algn="l" defTabSz="914400" rtl="0" eaLnBrk="1" latinLnBrk="0" hangingPunct="1">
+              <a:lnSpc>
+                <a:spcPct val="90000"/>
+              </a:lnSpc>
+              <a:spcBef>
+                <a:spcPts val="300"/>
+              </a:spcBef>
+              <a:spcAft>
+                <a:spcPts val="300"/>
+              </a:spcAft>
+              <a:buClr>
+                <a:schemeClr val="accent1"/>
+              </a:buClr>
+              <a:buFont typeface="Wingdings 2" pitchFamily="18" charset="2"/>
+              <a:buChar char=""/>
+              <a:defRPr sz="1400" kern="1200">
+                <a:solidFill>
+                  <a:schemeClr val="tx1">
+                    <a:lumMod val="85000"/>
+                    <a:lumOff val="15000"/>
+                  </a:schemeClr>
+                </a:solidFill>
+                <a:latin typeface="+mn-lt"/>
+                <a:ea typeface="+mn-ea"/>
+                <a:cs typeface="+mn-cs"/>
+              </a:defRPr>
+            </a:lvl9pPr>
+          </a:lstStyle>
+          <a:p>
+            <a:r>
+              <a:rPr lang="en-US" sz="2400" dirty="0">
+                <a:cs typeface="Times New Roman" panose="02020603050405020304" pitchFamily="18" charset="0"/>
+              </a:rPr>
+              <a:t>Social welfare thoughts: </a:t>
+            </a:r>
+          </a:p>
+          <a:p>
+            <a:endParaRPr lang="en-US" sz="2400" dirty="0">
+              <a:cs typeface="Times New Roman" panose="02020603050405020304" pitchFamily="18" charset="0"/>
+            </a:endParaRPr>
+          </a:p>
+          <a:p>
+            <a:endParaRPr lang="en-US" sz="2400" dirty="0">
+              <a:cs typeface="Times New Roman" panose="02020603050405020304" pitchFamily="18" charset="0"/>
+            </a:endParaRPr>
+          </a:p>
+          <a:p>
+            <a:endParaRPr lang="en-US" sz="2400" dirty="0">
+              <a:cs typeface="Times New Roman" panose="02020603050405020304" pitchFamily="18" charset="0"/>
+            </a:endParaRPr>
+          </a:p>
+          <a:p>
+            <a:endParaRPr lang="en-US" sz="2400" dirty="0">
+              <a:cs typeface="Times New Roman" panose="02020603050405020304" pitchFamily="18" charset="0"/>
+            </a:endParaRPr>
+          </a:p>
+          <a:p>
+            <a:endParaRPr lang="en-US" sz="2400" dirty="0">
+              <a:cs typeface="Times New Roman" panose="02020603050405020304" pitchFamily="18" charset="0"/>
+            </a:endParaRPr>
+          </a:p>
+          <a:p>
+            <a:endParaRPr lang="en-US" sz="2400" dirty="0">
+              <a:cs typeface="Times New Roman" panose="02020603050405020304" pitchFamily="18" charset="0"/>
+            </a:endParaRPr>
+          </a:p>
+          <a:p>
+            <a:endParaRPr lang="en-US" sz="2400" dirty="0">
+              <a:cs typeface="Times New Roman" panose="02020603050405020304" pitchFamily="18" charset="0"/>
+            </a:endParaRPr>
+          </a:p>
+          <a:p>
+            <a:pPr marL="0" indent="0">
+              <a:buNone/>
+            </a:pPr>
+            <a:r>
+              <a:rPr lang="en-US" sz="2400" i="1" dirty="0">
+                <a:cs typeface="Times New Roman" panose="02020603050405020304" pitchFamily="18" charset="0"/>
+              </a:rPr>
+              <a:t>I think we would all agree that these costs are illegitimate today</a:t>
+            </a:r>
+            <a:endParaRPr lang="en-US" sz="2600" i="1" dirty="0">
+              <a:cs typeface="Times New Roman" panose="02020603050405020304" pitchFamily="18" charset="0"/>
+            </a:endParaRPr>
+          </a:p>
+        </p:txBody>
+      </p:sp>
+      <p:pic>
+        <p:nvPicPr>
+          <p:cNvPr id="7" name="Picture 6">
+            <a:extLst>
+              <a:ext uri="{FF2B5EF4-FFF2-40B4-BE49-F238E27FC236}">
+                <a16:creationId xmlns:a16="http://schemas.microsoft.com/office/drawing/2014/main" id="{BF0F8D17-F0B7-5CD5-5053-7A974F7162E0}"/>
+              </a:ext>
+            </a:extLst>
+          </p:cNvPr>
+          <p:cNvPicPr>
+            <a:picLocks noChangeAspect="1"/>
+          </p:cNvPicPr>
+          <p:nvPr/>
+        </p:nvPicPr>
+        <p:blipFill>
+          <a:blip r:embed="rId3"/>
+          <a:stretch>
+            <a:fillRect/>
+          </a:stretch>
+        </p:blipFill>
+        <p:spPr>
+          <a:xfrm>
+            <a:off x="609600" y="2283331"/>
+            <a:ext cx="10126488" cy="2667372"/>
+          </a:xfrm>
+          <a:prstGeom prst="rect">
+            <a:avLst/>
+          </a:prstGeom>
+        </p:spPr>
+      </p:pic>
+    </p:spTree>
+    <p:extLst>
+      <p:ext uri="{BB962C8B-B14F-4D97-AF65-F5344CB8AC3E}">
+        <p14:creationId xmlns:p14="http://schemas.microsoft.com/office/powerpoint/2010/main" val="2220309339"/>
+      </p:ext>
+    </p:extLst>
+  </p:cSld>
+  <p:clrMapOvr>
+    <a:masterClrMapping/>
+  </p:clrMapOvr>
+</p:sld>
+</file>
+
+<file path=ppt/slides/slide32.xml><?xml version="1.0" encoding="utf-8"?>
+<p:sld xmlns:a="http://schemas.openxmlformats.org/drawingml/2006/main" xmlns:r="http://schemas.openxmlformats.org/officeDocument/2006/relationships" xmlns:p="http://schemas.openxmlformats.org/presentationml/2006/main">
+  <p:cSld>
+    <p:spTree>
+      <p:nvGrpSpPr>
+        <p:cNvPr id="1" name=""/>
+        <p:cNvGrpSpPr/>
+        <p:nvPr/>
+      </p:nvGrpSpPr>
+      <p:grpSpPr>
+        <a:xfrm>
+          <a:off x="0" y="0"/>
+          <a:ext cx="0" cy="0"/>
+          <a:chOff x="0" y="0"/>
+          <a:chExt cx="0" cy="0"/>
+        </a:xfrm>
+      </p:grpSpPr>
+      <p:sp>
+        <p:nvSpPr>
+          <p:cNvPr id="2" name="Title 1"/>
+          <p:cNvSpPr>
+            <a:spLocks noGrp="1"/>
+          </p:cNvSpPr>
+          <p:nvPr>
+            <p:ph type="title"/>
+          </p:nvPr>
+        </p:nvSpPr>
+        <p:spPr>
+          <a:xfrm>
+            <a:off x="609600" y="272077"/>
+            <a:ext cx="10439400" cy="624840"/>
+          </a:xfrm>
+        </p:spPr>
+        <p:txBody>
+          <a:bodyPr>
+            <a:noAutofit/>
+          </a:bodyPr>
+          <a:lstStyle/>
+          <a:p>
+            <a:r>
+              <a:rPr lang="en-US" sz="3600" dirty="0">
+                <a:cs typeface="Times New Roman" panose="02020603050405020304" pitchFamily="18" charset="0"/>
+              </a:rPr>
+              <a:t>Case 1: Prejudice</a:t>
+            </a:r>
+            <a:endParaRPr lang="en-US" sz="3600" dirty="0">
+              <a:latin typeface="Times New Roman" panose="02020603050405020304" pitchFamily="18" charset="0"/>
+              <a:cs typeface="Times New Roman" panose="02020603050405020304" pitchFamily="18" charset="0"/>
+            </a:endParaRPr>
+          </a:p>
+        </p:txBody>
+      </p:sp>
+      <p:sp>
+        <p:nvSpPr>
+          <p:cNvPr id="6" name="Content Placeholder 2">
+            <a:extLst>
+              <a:ext uri="{FF2B5EF4-FFF2-40B4-BE49-F238E27FC236}">
+                <a16:creationId xmlns:a16="http://schemas.microsoft.com/office/drawing/2014/main" id="{1E43DB50-BEDE-CBC2-46F9-A709EB8CD67C}"/>
+              </a:ext>
+            </a:extLst>
+          </p:cNvPr>
+          <p:cNvSpPr txBox="1">
+            <a:spLocks/>
+          </p:cNvSpPr>
+          <p:nvPr/>
+        </p:nvSpPr>
+        <p:spPr>
+          <a:xfrm>
+            <a:off x="609601" y="1066801"/>
+            <a:ext cx="10439400" cy="5141388"/>
+          </a:xfrm>
+          <a:prstGeom prst="rect">
+            <a:avLst/>
+          </a:prstGeom>
+        </p:spPr>
+        <p:txBody>
+          <a:bodyPr vert="horz" lIns="91440" tIns="45720" rIns="91440" bIns="45720" rtlCol="0">
+            <a:noAutofit/>
+          </a:bodyPr>
+          <a:lstStyle>
+            <a:lvl1pPr marL="182880" indent="-182880" algn="l" defTabSz="914400" rtl="0" eaLnBrk="1" latinLnBrk="0" hangingPunct="1">
+              <a:lnSpc>
+                <a:spcPct val="95000"/>
+              </a:lnSpc>
+              <a:spcBef>
+                <a:spcPts val="1400"/>
+              </a:spcBef>
+              <a:spcAft>
+                <a:spcPts val="200"/>
+              </a:spcAft>
+              <a:buClr>
+                <a:schemeClr val="accent1"/>
+              </a:buClr>
+              <a:buSzPct val="80000"/>
+              <a:buFont typeface="Arial" pitchFamily="34" charset="0"/>
+              <a:buChar char="•"/>
+              <a:defRPr sz="1800" kern="1200" spc="10" baseline="0">
+                <a:solidFill>
+                  <a:schemeClr val="tx1"/>
+                </a:solidFill>
+                <a:latin typeface="Times New Roman" panose="02020603050405020304" pitchFamily="18" charset="0"/>
+                <a:ea typeface="+mn-ea"/>
+                <a:cs typeface="+mn-cs"/>
+              </a:defRPr>
+            </a:lvl1pPr>
+            <a:lvl2pPr marL="457200" indent="-182880" algn="l" defTabSz="914400" rtl="0" eaLnBrk="1" latinLnBrk="0" hangingPunct="1">
+              <a:lnSpc>
+                <a:spcPct val="90000"/>
+              </a:lnSpc>
+              <a:spcBef>
+                <a:spcPts val="300"/>
+              </a:spcBef>
+              <a:spcAft>
+                <a:spcPts val="300"/>
+              </a:spcAft>
+              <a:buClr>
+                <a:schemeClr val="accent1"/>
+              </a:buClr>
+              <a:buFont typeface="Wingdings 2" pitchFamily="18" charset="2"/>
+              <a:buChar char=""/>
+              <a:defRPr sz="1600" kern="1200">
+                <a:solidFill>
+                  <a:schemeClr val="tx1">
+                    <a:lumMod val="85000"/>
+                    <a:lumOff val="15000"/>
+                  </a:schemeClr>
+                </a:solidFill>
+                <a:latin typeface="Times New Roman" panose="02020603050405020304" pitchFamily="18" charset="0"/>
+                <a:ea typeface="+mn-ea"/>
+                <a:cs typeface="+mn-cs"/>
+              </a:defRPr>
+            </a:lvl2pPr>
+            <a:lvl3pPr marL="731520" indent="-182880" algn="l" defTabSz="914400" rtl="0" eaLnBrk="1" latinLnBrk="0" hangingPunct="1">
+              <a:lnSpc>
+                <a:spcPct val="90000"/>
+              </a:lnSpc>
+              <a:spcBef>
+                <a:spcPts val="300"/>
+              </a:spcBef>
+              <a:spcAft>
+                <a:spcPts val="300"/>
+              </a:spcAft>
+              <a:buClr>
+                <a:schemeClr val="accent1"/>
+              </a:buClr>
+              <a:buFont typeface="Wingdings 2" pitchFamily="18" charset="2"/>
+              <a:buChar char=""/>
+              <a:defRPr sz="1400" kern="1200">
+                <a:solidFill>
+                  <a:schemeClr val="tx1">
+                    <a:lumMod val="85000"/>
+                    <a:lumOff val="15000"/>
+                  </a:schemeClr>
+                </a:solidFill>
+                <a:latin typeface="Times New Roman" panose="02020603050405020304" pitchFamily="18" charset="0"/>
+                <a:ea typeface="+mn-ea"/>
+                <a:cs typeface="+mn-cs"/>
+              </a:defRPr>
+            </a:lvl3pPr>
+            <a:lvl4pPr marL="1005840" indent="-182880" algn="l" defTabSz="914400" rtl="0" eaLnBrk="1" latinLnBrk="0" hangingPunct="1">
+              <a:lnSpc>
+                <a:spcPct val="90000"/>
+              </a:lnSpc>
+              <a:spcBef>
+                <a:spcPts val="300"/>
+              </a:spcBef>
+              <a:spcAft>
+                <a:spcPts val="300"/>
+              </a:spcAft>
+              <a:buClr>
+                <a:schemeClr val="accent1"/>
+              </a:buClr>
+              <a:buFont typeface="Wingdings 2" pitchFamily="18" charset="2"/>
+              <a:buChar char=""/>
+              <a:defRPr sz="1400" kern="1200">
+                <a:solidFill>
+                  <a:schemeClr val="tx1">
+                    <a:lumMod val="85000"/>
+                    <a:lumOff val="15000"/>
+                  </a:schemeClr>
+                </a:solidFill>
+                <a:latin typeface="Times New Roman" panose="02020603050405020304" pitchFamily="18" charset="0"/>
+                <a:ea typeface="+mn-ea"/>
+                <a:cs typeface="+mn-cs"/>
+              </a:defRPr>
+            </a:lvl4pPr>
+            <a:lvl5pPr marL="1280160" indent="-182880" algn="l" defTabSz="914400" rtl="0" eaLnBrk="1" latinLnBrk="0" hangingPunct="1">
+              <a:lnSpc>
+                <a:spcPct val="90000"/>
+              </a:lnSpc>
+              <a:spcBef>
+                <a:spcPts val="300"/>
+              </a:spcBef>
+              <a:spcAft>
+                <a:spcPts val="300"/>
+              </a:spcAft>
+              <a:buClr>
+                <a:schemeClr val="accent1"/>
+              </a:buClr>
+              <a:buFont typeface="Wingdings 2" pitchFamily="18" charset="2"/>
+              <a:buChar char=""/>
+              <a:defRPr sz="1400" kern="1200">
+                <a:solidFill>
+                  <a:schemeClr val="tx1">
+                    <a:lumMod val="85000"/>
+                    <a:lumOff val="15000"/>
+                  </a:schemeClr>
+                </a:solidFill>
+                <a:latin typeface="Times New Roman" panose="02020603050405020304" pitchFamily="18" charset="0"/>
+                <a:ea typeface="+mn-ea"/>
+                <a:cs typeface="+mn-cs"/>
+              </a:defRPr>
+            </a:lvl5pPr>
+            <a:lvl6pPr marL="1600000" indent="-228600" algn="l" defTabSz="914400" rtl="0" eaLnBrk="1" latinLnBrk="0" hangingPunct="1">
+              <a:lnSpc>
+                <a:spcPct val="90000"/>
+              </a:lnSpc>
+              <a:spcBef>
+                <a:spcPts val="300"/>
+              </a:spcBef>
+              <a:spcAft>
+                <a:spcPts val="300"/>
+              </a:spcAft>
+              <a:buClr>
+                <a:schemeClr val="accent1"/>
+              </a:buClr>
+              <a:buFont typeface="Wingdings 2" pitchFamily="18" charset="2"/>
+              <a:buChar char=""/>
+              <a:defRPr sz="1400" kern="1200">
+                <a:solidFill>
+                  <a:schemeClr val="tx1">
+                    <a:lumMod val="85000"/>
+                    <a:lumOff val="15000"/>
+                  </a:schemeClr>
+                </a:solidFill>
+                <a:latin typeface="+mn-lt"/>
+                <a:ea typeface="+mn-ea"/>
+                <a:cs typeface="+mn-cs"/>
+              </a:defRPr>
+            </a:lvl6pPr>
+            <a:lvl7pPr marL="1900000" indent="-228600" algn="l" defTabSz="914400" rtl="0" eaLnBrk="1" latinLnBrk="0" hangingPunct="1">
+              <a:lnSpc>
+                <a:spcPct val="90000"/>
+              </a:lnSpc>
+              <a:spcBef>
+                <a:spcPts val="300"/>
+              </a:spcBef>
+              <a:spcAft>
+                <a:spcPts val="300"/>
+              </a:spcAft>
+              <a:buClr>
+                <a:schemeClr val="accent1"/>
+              </a:buClr>
+              <a:buFont typeface="Wingdings 2" pitchFamily="18" charset="2"/>
+              <a:buChar char=""/>
+              <a:defRPr sz="1400" kern="1200">
+                <a:solidFill>
+                  <a:schemeClr val="tx1">
+                    <a:lumMod val="85000"/>
+                    <a:lumOff val="15000"/>
+                  </a:schemeClr>
+                </a:solidFill>
+                <a:latin typeface="+mn-lt"/>
+                <a:ea typeface="+mn-ea"/>
+                <a:cs typeface="+mn-cs"/>
+              </a:defRPr>
+            </a:lvl7pPr>
+            <a:lvl8pPr marL="2200000" indent="-228600" algn="l" defTabSz="914400" rtl="0" eaLnBrk="1" latinLnBrk="0" hangingPunct="1">
+              <a:lnSpc>
+                <a:spcPct val="90000"/>
+              </a:lnSpc>
+              <a:spcBef>
+                <a:spcPts val="300"/>
+              </a:spcBef>
+              <a:spcAft>
+                <a:spcPts val="300"/>
+              </a:spcAft>
+              <a:buClr>
+                <a:schemeClr val="accent1"/>
+              </a:buClr>
+              <a:buFont typeface="Wingdings 2" pitchFamily="18" charset="2"/>
+              <a:buChar char=""/>
+              <a:defRPr sz="1400" kern="1200">
+                <a:solidFill>
+                  <a:schemeClr val="tx1">
+                    <a:lumMod val="85000"/>
+                    <a:lumOff val="15000"/>
+                  </a:schemeClr>
+                </a:solidFill>
+                <a:latin typeface="+mn-lt"/>
+                <a:ea typeface="+mn-ea"/>
+                <a:cs typeface="+mn-cs"/>
+              </a:defRPr>
+            </a:lvl8pPr>
+            <a:lvl9pPr marL="2500000" indent="-228600" algn="l" defTabSz="914400" rtl="0" eaLnBrk="1" latinLnBrk="0" hangingPunct="1">
+              <a:lnSpc>
+                <a:spcPct val="90000"/>
+              </a:lnSpc>
+              <a:spcBef>
+                <a:spcPts val="300"/>
+              </a:spcBef>
+              <a:spcAft>
+                <a:spcPts val="300"/>
+              </a:spcAft>
+              <a:buClr>
+                <a:schemeClr val="accent1"/>
+              </a:buClr>
+              <a:buFont typeface="Wingdings 2" pitchFamily="18" charset="2"/>
+              <a:buChar char=""/>
+              <a:defRPr sz="1400" kern="1200">
+                <a:solidFill>
+                  <a:schemeClr val="tx1">
+                    <a:lumMod val="85000"/>
+                    <a:lumOff val="15000"/>
+                  </a:schemeClr>
+                </a:solidFill>
+                <a:latin typeface="+mn-lt"/>
+                <a:ea typeface="+mn-ea"/>
+                <a:cs typeface="+mn-cs"/>
+              </a:defRPr>
+            </a:lvl9pPr>
+          </a:lstStyle>
+          <a:p>
+            <a:endParaRPr lang="en-US" sz="2600" dirty="0">
+              <a:cs typeface="Times New Roman" panose="02020603050405020304" pitchFamily="18" charset="0"/>
+            </a:endParaRPr>
+          </a:p>
+        </p:txBody>
+      </p:sp>
+      <p:sp>
+        <p:nvSpPr>
+          <p:cNvPr id="3" name="Content Placeholder 2">
+            <a:extLst>
+              <a:ext uri="{FF2B5EF4-FFF2-40B4-BE49-F238E27FC236}">
+                <a16:creationId xmlns:a16="http://schemas.microsoft.com/office/drawing/2014/main" id="{07221140-77F4-0A99-AFB2-CC4DB7DB493C}"/>
+              </a:ext>
+            </a:extLst>
+          </p:cNvPr>
+          <p:cNvSpPr txBox="1">
+            <a:spLocks/>
+          </p:cNvSpPr>
+          <p:nvPr/>
+        </p:nvSpPr>
+        <p:spPr>
+          <a:xfrm>
+            <a:off x="762001" y="1219201"/>
+            <a:ext cx="10439400" cy="5141388"/>
+          </a:xfrm>
+          <a:prstGeom prst="rect">
+            <a:avLst/>
+          </a:prstGeom>
+        </p:spPr>
+        <p:txBody>
+          <a:bodyPr vert="horz" lIns="91440" tIns="45720" rIns="91440" bIns="45720" rtlCol="0">
+            <a:noAutofit/>
+          </a:bodyPr>
+          <a:lstStyle>
+            <a:lvl1pPr marL="182880" indent="-182880" algn="l" defTabSz="914400" rtl="0" eaLnBrk="1" latinLnBrk="0" hangingPunct="1">
+              <a:lnSpc>
+                <a:spcPct val="95000"/>
+              </a:lnSpc>
+              <a:spcBef>
+                <a:spcPts val="1400"/>
+              </a:spcBef>
+              <a:spcAft>
+                <a:spcPts val="200"/>
+              </a:spcAft>
+              <a:buClr>
+                <a:schemeClr val="accent1"/>
+              </a:buClr>
+              <a:buSzPct val="80000"/>
+              <a:buFont typeface="Arial" pitchFamily="34" charset="0"/>
+              <a:buChar char="•"/>
+              <a:defRPr sz="1800" kern="1200" spc="10" baseline="0">
+                <a:solidFill>
+                  <a:schemeClr val="tx1"/>
+                </a:solidFill>
+                <a:latin typeface="Times New Roman" panose="02020603050405020304" pitchFamily="18" charset="0"/>
+                <a:ea typeface="+mn-ea"/>
+                <a:cs typeface="+mn-cs"/>
+              </a:defRPr>
+            </a:lvl1pPr>
+            <a:lvl2pPr marL="457200" indent="-182880" algn="l" defTabSz="914400" rtl="0" eaLnBrk="1" latinLnBrk="0" hangingPunct="1">
+              <a:lnSpc>
+                <a:spcPct val="90000"/>
+              </a:lnSpc>
+              <a:spcBef>
+                <a:spcPts val="300"/>
+              </a:spcBef>
+              <a:spcAft>
+                <a:spcPts val="300"/>
+              </a:spcAft>
+              <a:buClr>
+                <a:schemeClr val="accent1"/>
+              </a:buClr>
+              <a:buFont typeface="Wingdings 2" pitchFamily="18" charset="2"/>
+              <a:buChar char=""/>
+              <a:defRPr sz="1600" kern="1200">
+                <a:solidFill>
+                  <a:schemeClr val="tx1">
+                    <a:lumMod val="85000"/>
+                    <a:lumOff val="15000"/>
+                  </a:schemeClr>
+                </a:solidFill>
+                <a:latin typeface="Times New Roman" panose="02020603050405020304" pitchFamily="18" charset="0"/>
+                <a:ea typeface="+mn-ea"/>
+                <a:cs typeface="+mn-cs"/>
+              </a:defRPr>
+            </a:lvl2pPr>
+            <a:lvl3pPr marL="731520" indent="-182880" algn="l" defTabSz="914400" rtl="0" eaLnBrk="1" latinLnBrk="0" hangingPunct="1">
+              <a:lnSpc>
+                <a:spcPct val="90000"/>
+              </a:lnSpc>
+              <a:spcBef>
+                <a:spcPts val="300"/>
+              </a:spcBef>
+              <a:spcAft>
+                <a:spcPts val="300"/>
+              </a:spcAft>
+              <a:buClr>
+                <a:schemeClr val="accent1"/>
+              </a:buClr>
+              <a:buFont typeface="Wingdings 2" pitchFamily="18" charset="2"/>
+              <a:buChar char=""/>
+              <a:defRPr sz="1400" kern="1200">
+                <a:solidFill>
+                  <a:schemeClr val="tx1">
+                    <a:lumMod val="85000"/>
+                    <a:lumOff val="15000"/>
+                  </a:schemeClr>
+                </a:solidFill>
+                <a:latin typeface="Times New Roman" panose="02020603050405020304" pitchFamily="18" charset="0"/>
+                <a:ea typeface="+mn-ea"/>
+                <a:cs typeface="+mn-cs"/>
+              </a:defRPr>
+            </a:lvl3pPr>
+            <a:lvl4pPr marL="1005840" indent="-182880" algn="l" defTabSz="914400" rtl="0" eaLnBrk="1" latinLnBrk="0" hangingPunct="1">
+              <a:lnSpc>
+                <a:spcPct val="90000"/>
+              </a:lnSpc>
+              <a:spcBef>
+                <a:spcPts val="300"/>
+              </a:spcBef>
+              <a:spcAft>
+                <a:spcPts val="300"/>
+              </a:spcAft>
+              <a:buClr>
+                <a:schemeClr val="accent1"/>
+              </a:buClr>
+              <a:buFont typeface="Wingdings 2" pitchFamily="18" charset="2"/>
+              <a:buChar char=""/>
+              <a:defRPr sz="1400" kern="1200">
+                <a:solidFill>
+                  <a:schemeClr val="tx1">
+                    <a:lumMod val="85000"/>
+                    <a:lumOff val="15000"/>
+                  </a:schemeClr>
+                </a:solidFill>
+                <a:latin typeface="Times New Roman" panose="02020603050405020304" pitchFamily="18" charset="0"/>
+                <a:ea typeface="+mn-ea"/>
+                <a:cs typeface="+mn-cs"/>
+              </a:defRPr>
+            </a:lvl4pPr>
+            <a:lvl5pPr marL="1280160" indent="-182880" algn="l" defTabSz="914400" rtl="0" eaLnBrk="1" latinLnBrk="0" hangingPunct="1">
+              <a:lnSpc>
+                <a:spcPct val="90000"/>
+              </a:lnSpc>
+              <a:spcBef>
+                <a:spcPts val="300"/>
+              </a:spcBef>
+              <a:spcAft>
+                <a:spcPts val="300"/>
+              </a:spcAft>
+              <a:buClr>
+                <a:schemeClr val="accent1"/>
+              </a:buClr>
+              <a:buFont typeface="Wingdings 2" pitchFamily="18" charset="2"/>
+              <a:buChar char=""/>
+              <a:defRPr sz="1400" kern="1200">
+                <a:solidFill>
+                  <a:schemeClr val="tx1">
+                    <a:lumMod val="85000"/>
+                    <a:lumOff val="15000"/>
+                  </a:schemeClr>
+                </a:solidFill>
+                <a:latin typeface="Times New Roman" panose="02020603050405020304" pitchFamily="18" charset="0"/>
+                <a:ea typeface="+mn-ea"/>
+                <a:cs typeface="+mn-cs"/>
+              </a:defRPr>
+            </a:lvl5pPr>
+            <a:lvl6pPr marL="1600000" indent="-228600" algn="l" defTabSz="914400" rtl="0" eaLnBrk="1" latinLnBrk="0" hangingPunct="1">
+              <a:lnSpc>
+                <a:spcPct val="90000"/>
+              </a:lnSpc>
+              <a:spcBef>
+                <a:spcPts val="300"/>
+              </a:spcBef>
+              <a:spcAft>
+                <a:spcPts val="300"/>
+              </a:spcAft>
+              <a:buClr>
+                <a:schemeClr val="accent1"/>
+              </a:buClr>
+              <a:buFont typeface="Wingdings 2" pitchFamily="18" charset="2"/>
+              <a:buChar char=""/>
+              <a:defRPr sz="1400" kern="1200">
+                <a:solidFill>
+                  <a:schemeClr val="tx1">
+                    <a:lumMod val="85000"/>
+                    <a:lumOff val="15000"/>
+                  </a:schemeClr>
+                </a:solidFill>
+                <a:latin typeface="+mn-lt"/>
+                <a:ea typeface="+mn-ea"/>
+                <a:cs typeface="+mn-cs"/>
+              </a:defRPr>
+            </a:lvl6pPr>
+            <a:lvl7pPr marL="1900000" indent="-228600" algn="l" defTabSz="914400" rtl="0" eaLnBrk="1" latinLnBrk="0" hangingPunct="1">
+              <a:lnSpc>
+                <a:spcPct val="90000"/>
+              </a:lnSpc>
+              <a:spcBef>
+                <a:spcPts val="300"/>
+              </a:spcBef>
+              <a:spcAft>
+                <a:spcPts val="300"/>
+              </a:spcAft>
+              <a:buClr>
+                <a:schemeClr val="accent1"/>
+              </a:buClr>
+              <a:buFont typeface="Wingdings 2" pitchFamily="18" charset="2"/>
+              <a:buChar char=""/>
+              <a:defRPr sz="1400" kern="1200">
+                <a:solidFill>
+                  <a:schemeClr val="tx1">
+                    <a:lumMod val="85000"/>
+                    <a:lumOff val="15000"/>
+                  </a:schemeClr>
+                </a:solidFill>
+                <a:latin typeface="+mn-lt"/>
+                <a:ea typeface="+mn-ea"/>
+                <a:cs typeface="+mn-cs"/>
+              </a:defRPr>
+            </a:lvl7pPr>
+            <a:lvl8pPr marL="2200000" indent="-228600" algn="l" defTabSz="914400" rtl="0" eaLnBrk="1" latinLnBrk="0" hangingPunct="1">
+              <a:lnSpc>
+                <a:spcPct val="90000"/>
+              </a:lnSpc>
+              <a:spcBef>
+                <a:spcPts val="300"/>
+              </a:spcBef>
+              <a:spcAft>
+                <a:spcPts val="300"/>
+              </a:spcAft>
+              <a:buClr>
+                <a:schemeClr val="accent1"/>
+              </a:buClr>
+              <a:buFont typeface="Wingdings 2" pitchFamily="18" charset="2"/>
+              <a:buChar char=""/>
+              <a:defRPr sz="1400" kern="1200">
+                <a:solidFill>
+                  <a:schemeClr val="tx1">
+                    <a:lumMod val="85000"/>
+                    <a:lumOff val="15000"/>
+                  </a:schemeClr>
+                </a:solidFill>
+                <a:latin typeface="+mn-lt"/>
+                <a:ea typeface="+mn-ea"/>
+                <a:cs typeface="+mn-cs"/>
+              </a:defRPr>
+            </a:lvl8pPr>
+            <a:lvl9pPr marL="2500000" indent="-228600" algn="l" defTabSz="914400" rtl="0" eaLnBrk="1" latinLnBrk="0" hangingPunct="1">
+              <a:lnSpc>
+                <a:spcPct val="90000"/>
+              </a:lnSpc>
+              <a:spcBef>
+                <a:spcPts val="300"/>
+              </a:spcBef>
+              <a:spcAft>
+                <a:spcPts val="300"/>
+              </a:spcAft>
+              <a:buClr>
+                <a:schemeClr val="accent1"/>
+              </a:buClr>
+              <a:buFont typeface="Wingdings 2" pitchFamily="18" charset="2"/>
+              <a:buChar char=""/>
+              <a:defRPr sz="1400" kern="1200">
+                <a:solidFill>
+                  <a:schemeClr val="tx1">
+                    <a:lumMod val="85000"/>
+                    <a:lumOff val="15000"/>
+                  </a:schemeClr>
+                </a:solidFill>
+                <a:latin typeface="+mn-lt"/>
+                <a:ea typeface="+mn-ea"/>
+                <a:cs typeface="+mn-cs"/>
+              </a:defRPr>
+            </a:lvl9pPr>
+          </a:lstStyle>
+          <a:p>
+            <a:pPr marL="0" indent="0">
+              <a:buNone/>
+            </a:pPr>
+            <a:r>
+              <a:rPr lang="en-US" sz="2400" dirty="0">
+                <a:cs typeface="Times New Roman" panose="02020603050405020304" pitchFamily="18" charset="0"/>
+              </a:rPr>
+              <a:t>Testing the model: </a:t>
+            </a:r>
+          </a:p>
+          <a:p>
+            <a:r>
+              <a:rPr lang="en-US" sz="2600" dirty="0">
+                <a:cs typeface="Times New Roman" panose="02020603050405020304" pitchFamily="18" charset="0"/>
+              </a:rPr>
+              <a:t>If a model includes both physician costs </a:t>
+            </a:r>
+            <a:r>
+              <a:rPr lang="en-US" sz="2600" i="1" dirty="0">
+                <a:cs typeface="Times New Roman" panose="02020603050405020304" pitchFamily="18" charset="0"/>
+              </a:rPr>
+              <a:t>d </a:t>
+            </a:r>
+            <a:r>
+              <a:rPr lang="en-US" sz="2600" dirty="0">
+                <a:cs typeface="Times New Roman" panose="02020603050405020304" pitchFamily="18" charset="0"/>
+              </a:rPr>
+              <a:t>and heterogeneous elasticity of patient demand, would expect lower levels of discrimination to be observed in services that allow for a better assessment of quality </a:t>
+            </a:r>
+            <a:r>
+              <a:rPr lang="en-US" sz="2600" i="1" dirty="0">
+                <a:cs typeface="Times New Roman" panose="02020603050405020304" pitchFamily="18" charset="0"/>
+              </a:rPr>
+              <a:t>ex-ante</a:t>
+            </a:r>
+          </a:p>
+          <a:p>
+            <a:pPr lvl="1"/>
+            <a:r>
+              <a:rPr lang="en-US" sz="2400" dirty="0">
+                <a:cs typeface="Times New Roman" panose="02020603050405020304" pitchFamily="18" charset="0"/>
+              </a:rPr>
+              <a:t>At the </a:t>
+            </a:r>
+            <a:r>
+              <a:rPr lang="en-US" sz="2400" b="1" dirty="0">
+                <a:cs typeface="Times New Roman" panose="02020603050405020304" pitchFamily="18" charset="0"/>
+              </a:rPr>
+              <a:t>provider level</a:t>
+            </a:r>
+            <a:r>
+              <a:rPr lang="en-US" sz="2400" dirty="0">
+                <a:cs typeface="Times New Roman" panose="02020603050405020304" pitchFamily="18" charset="0"/>
+              </a:rPr>
+              <a:t>: easier to pick an unprejudiced family doc than surgeon? </a:t>
+            </a:r>
+          </a:p>
+          <a:p>
+            <a:pPr lvl="1"/>
+            <a:r>
+              <a:rPr lang="en-US" sz="2400" dirty="0">
+                <a:cs typeface="Times New Roman" panose="02020603050405020304" pitchFamily="18" charset="0"/>
+              </a:rPr>
+              <a:t>At the </a:t>
+            </a:r>
+            <a:r>
+              <a:rPr lang="en-US" sz="2400" b="1" dirty="0">
+                <a:cs typeface="Times New Roman" panose="02020603050405020304" pitchFamily="18" charset="0"/>
+              </a:rPr>
+              <a:t>service level: </a:t>
+            </a:r>
+            <a:r>
+              <a:rPr lang="en-US" sz="2400" dirty="0">
+                <a:cs typeface="Times New Roman" panose="02020603050405020304" pitchFamily="18" charset="0"/>
+              </a:rPr>
+              <a:t>if need for treatment is clearer, less prejudice </a:t>
+            </a:r>
+          </a:p>
+          <a:p>
+            <a:pPr lvl="1"/>
+            <a:r>
+              <a:rPr lang="en-US" sz="2400" dirty="0">
+                <a:cs typeface="Times New Roman" panose="02020603050405020304" pitchFamily="18" charset="0"/>
+              </a:rPr>
+              <a:t>Counterexample (?) to both: Black maternal care</a:t>
+            </a:r>
+          </a:p>
+          <a:p>
+            <a:r>
+              <a:rPr lang="en-US" sz="2600" dirty="0">
+                <a:cs typeface="Times New Roman" panose="02020603050405020304" pitchFamily="18" charset="0"/>
+              </a:rPr>
+              <a:t>Also, what about physician entry and dynamics?</a:t>
+            </a:r>
+          </a:p>
+        </p:txBody>
+      </p:sp>
+    </p:spTree>
+    <p:extLst>
+      <p:ext uri="{BB962C8B-B14F-4D97-AF65-F5344CB8AC3E}">
+        <p14:creationId xmlns:p14="http://schemas.microsoft.com/office/powerpoint/2010/main" val="1255835358"/>
+      </p:ext>
+    </p:extLst>
+  </p:cSld>
+  <p:clrMapOvr>
+    <a:masterClrMapping/>
+  </p:clrMapOvr>
+</p:sld>
+</file>
+
+<file path=ppt/slides/slide33.xml><?xml version="1.0" encoding="utf-8"?>
+<p:sld xmlns:a="http://schemas.openxmlformats.org/drawingml/2006/main" xmlns:r="http://schemas.openxmlformats.org/officeDocument/2006/relationships" xmlns:p="http://schemas.openxmlformats.org/presentationml/2006/main">
+  <p:cSld>
+    <p:spTree>
+      <p:nvGrpSpPr>
+        <p:cNvPr id="1" name=""/>
+        <p:cNvGrpSpPr/>
+        <p:nvPr/>
+      </p:nvGrpSpPr>
+      <p:grpSpPr>
+        <a:xfrm>
+          <a:off x="0" y="0"/>
+          <a:ext cx="0" cy="0"/>
+          <a:chOff x="0" y="0"/>
+          <a:chExt cx="0" cy="0"/>
+        </a:xfrm>
+      </p:grpSpPr>
+      <p:sp>
+        <p:nvSpPr>
+          <p:cNvPr id="2" name="Title 1"/>
+          <p:cNvSpPr>
+            <a:spLocks noGrp="1"/>
+          </p:cNvSpPr>
+          <p:nvPr>
+            <p:ph type="title"/>
+          </p:nvPr>
+        </p:nvSpPr>
+        <p:spPr>
+          <a:xfrm>
+            <a:off x="609600" y="272077"/>
+            <a:ext cx="10439400" cy="624840"/>
+          </a:xfrm>
+        </p:spPr>
+        <p:txBody>
+          <a:bodyPr>
+            <a:noAutofit/>
+          </a:bodyPr>
+          <a:lstStyle/>
+          <a:p>
+            <a:r>
+              <a:rPr lang="en-US" sz="3600" dirty="0">
+                <a:cs typeface="Times New Roman" panose="02020603050405020304" pitchFamily="18" charset="0"/>
+              </a:rPr>
               <a:t>Case 3: Stereotyping</a:t>
             </a:r>
             <a:endParaRPr lang="en-US" sz="3600" dirty="0">
@@ -22756,7 +23815,7 @@
 </p:sld>
 </file>
 
-<file path=ppt/slides/slide31.xml><?xml version="1.0" encoding="utf-8"?>
+<file path=ppt/slides/slide34.xml><?xml version="1.0" encoding="utf-8"?>
 <p:sld xmlns:a="http://schemas.openxmlformats.org/drawingml/2006/main" xmlns:r="http://schemas.openxmlformats.org/officeDocument/2006/relationships" xmlns:p="http://schemas.openxmlformats.org/presentationml/2006/main">
   <p:cSld>
     <p:spTree>
@@ -23134,7 +24193,7 @@
 </p:sld>
 </file>
 
-<file path=ppt/slides/slide32.xml><?xml version="1.0" encoding="utf-8"?>
+<file path=ppt/slides/slide35.xml><?xml version="1.0" encoding="utf-8"?>
 <p:sld xmlns:a="http://schemas.openxmlformats.org/drawingml/2006/main" xmlns:r="http://schemas.openxmlformats.org/officeDocument/2006/relationships" xmlns:p="http://schemas.openxmlformats.org/presentationml/2006/main">
   <p:cSld>
     <p:spTree>
@@ -23498,7 +24557,7 @@
 </p:sld>
 </file>
 
-<file path=ppt/slides/slide33.xml><?xml version="1.0" encoding="utf-8"?>
+<file path=ppt/slides/slide36.xml><?xml version="1.0" encoding="utf-8"?>
 <p:sld xmlns:a="http://schemas.openxmlformats.org/drawingml/2006/main" xmlns:r="http://schemas.openxmlformats.org/officeDocument/2006/relationships" xmlns:p="http://schemas.openxmlformats.org/presentationml/2006/main">
   <p:cSld>
     <p:spTree>
@@ -23870,7 +24929,7 @@
 </p:sld>
 </file>
 
-<file path=ppt/slides/slide34.xml><?xml version="1.0" encoding="utf-8"?>
+<file path=ppt/slides/slide37.xml><?xml version="1.0" encoding="utf-8"?>
 <p:sld xmlns:a="http://schemas.openxmlformats.org/drawingml/2006/main" xmlns:r="http://schemas.openxmlformats.org/officeDocument/2006/relationships" xmlns:p="http://schemas.openxmlformats.org/presentationml/2006/main">
   <p:cSld>
     <p:spTree>
@@ -24221,7 +25280,7 @@
 </p:sld>
 </file>
 
-<file path=ppt/slides/slide35.xml><?xml version="1.0" encoding="utf-8"?>
+<file path=ppt/slides/slide38.xml><?xml version="1.0" encoding="utf-8"?>
 <p:sld xmlns:a="http://schemas.openxmlformats.org/drawingml/2006/main" xmlns:r="http://schemas.openxmlformats.org/officeDocument/2006/relationships" xmlns:p="http://schemas.openxmlformats.org/presentationml/2006/main">
   <p:cSld>
     <p:spTree>
@@ -24862,7 +25921,7 @@
 </p:sld>
 </file>
 
-<file path=ppt/slides/slide36.xml><?xml version="1.0" encoding="utf-8"?>
+<file path=ppt/slides/slide39.xml><?xml version="1.0" encoding="utf-8"?>
 <p:sld xmlns:a="http://schemas.openxmlformats.org/drawingml/2006/main" xmlns:r="http://schemas.openxmlformats.org/officeDocument/2006/relationships" xmlns:p="http://schemas.openxmlformats.org/presentationml/2006/main">
   <p:cSld>
     <p:spTree>
@@ -25558,94 +26617,6 @@
 </p:sld>
 </file>
 
-<file path=ppt/slides/slide37.xml><?xml version="1.0" encoding="utf-8"?>
-<p:sld xmlns:a="http://schemas.openxmlformats.org/drawingml/2006/main" xmlns:r="http://schemas.openxmlformats.org/officeDocument/2006/relationships" xmlns:p="http://schemas.openxmlformats.org/presentationml/2006/main">
-  <p:cSld>
-    <p:spTree>
-      <p:nvGrpSpPr>
-        <p:cNvPr id="1" name=""/>
-        <p:cNvGrpSpPr/>
-        <p:nvPr/>
-      </p:nvGrpSpPr>
-      <p:grpSpPr>
-        <a:xfrm>
-          <a:off x="0" y="0"/>
-          <a:ext cx="0" cy="0"/>
-          <a:chOff x="0" y="0"/>
-          <a:chExt cx="0" cy="0"/>
-        </a:xfrm>
-      </p:grpSpPr>
-      <p:sp>
-        <p:nvSpPr>
-          <p:cNvPr id="4" name="Title 3">
-            <a:extLst>
-              <a:ext uri="{FF2B5EF4-FFF2-40B4-BE49-F238E27FC236}">
-                <a16:creationId xmlns:a16="http://schemas.microsoft.com/office/drawing/2014/main" id="{3959A64B-5C9A-4A9B-BA45-ADECED2E51D9}"/>
-              </a:ext>
-            </a:extLst>
-          </p:cNvPr>
-          <p:cNvSpPr>
-            <a:spLocks noGrp="1"/>
-          </p:cNvSpPr>
-          <p:nvPr>
-            <p:ph type="ctrTitle"/>
-          </p:nvPr>
-        </p:nvSpPr>
-        <p:spPr>
-          <a:xfrm>
-            <a:off x="1261872" y="758952"/>
-            <a:ext cx="10625328" cy="4041648"/>
-          </a:xfrm>
-        </p:spPr>
-        <p:txBody>
-          <a:bodyPr/>
-          <a:lstStyle/>
-          <a:p>
-            <a:r>
-              <a:rPr lang="en-US" dirty="0"/>
-              <a:t>Presentations</a:t>
-            </a:r>
-          </a:p>
-        </p:txBody>
-      </p:sp>
-      <p:sp>
-        <p:nvSpPr>
-          <p:cNvPr id="5" name="Subtitle 4">
-            <a:extLst>
-              <a:ext uri="{FF2B5EF4-FFF2-40B4-BE49-F238E27FC236}">
-                <a16:creationId xmlns:a16="http://schemas.microsoft.com/office/drawing/2014/main" id="{D52D9252-3DD8-4D35-8070-32332FBE25E4}"/>
-              </a:ext>
-            </a:extLst>
-          </p:cNvPr>
-          <p:cNvSpPr>
-            <a:spLocks noGrp="1"/>
-          </p:cNvSpPr>
-          <p:nvPr>
-            <p:ph type="subTitle" idx="1"/>
-          </p:nvPr>
-        </p:nvSpPr>
-        <p:spPr/>
-        <p:txBody>
-          <a:bodyPr/>
-          <a:lstStyle/>
-          <a:p>
-            <a:endParaRPr lang="en-US" dirty="0"/>
-          </a:p>
-        </p:txBody>
-      </p:sp>
-    </p:spTree>
-    <p:extLst>
-      <p:ext uri="{BB962C8B-B14F-4D97-AF65-F5344CB8AC3E}">
-        <p14:creationId xmlns:p14="http://schemas.microsoft.com/office/powerpoint/2010/main" val="1905963770"/>
-      </p:ext>
-    </p:extLst>
-  </p:cSld>
-  <p:clrMapOvr>
-    <a:masterClrMapping/>
-  </p:clrMapOvr>
-</p:sld>
-</file>
-
 <file path=ppt/slides/slide4.xml><?xml version="1.0" encoding="utf-8"?>
 <p:sld xmlns:a="http://schemas.openxmlformats.org/drawingml/2006/main" xmlns:r="http://schemas.openxmlformats.org/officeDocument/2006/relationships" xmlns:p="http://schemas.openxmlformats.org/presentationml/2006/main">
   <p:cSld>
@@ -26365,6 +27336,94 @@
     <p:extLst>
       <p:ext uri="{BB962C8B-B14F-4D97-AF65-F5344CB8AC3E}">
         <p14:creationId xmlns:p14="http://schemas.microsoft.com/office/powerpoint/2010/main" val="565854197"/>
+      </p:ext>
+    </p:extLst>
+  </p:cSld>
+  <p:clrMapOvr>
+    <a:masterClrMapping/>
+  </p:clrMapOvr>
+</p:sld>
+</file>
+
+<file path=ppt/slides/slide40.xml><?xml version="1.0" encoding="utf-8"?>
+<p:sld xmlns:a="http://schemas.openxmlformats.org/drawingml/2006/main" xmlns:r="http://schemas.openxmlformats.org/officeDocument/2006/relationships" xmlns:p="http://schemas.openxmlformats.org/presentationml/2006/main">
+  <p:cSld>
+    <p:spTree>
+      <p:nvGrpSpPr>
+        <p:cNvPr id="1" name=""/>
+        <p:cNvGrpSpPr/>
+        <p:nvPr/>
+      </p:nvGrpSpPr>
+      <p:grpSpPr>
+        <a:xfrm>
+          <a:off x="0" y="0"/>
+          <a:ext cx="0" cy="0"/>
+          <a:chOff x="0" y="0"/>
+          <a:chExt cx="0" cy="0"/>
+        </a:xfrm>
+      </p:grpSpPr>
+      <p:sp>
+        <p:nvSpPr>
+          <p:cNvPr id="4" name="Title 3">
+            <a:extLst>
+              <a:ext uri="{FF2B5EF4-FFF2-40B4-BE49-F238E27FC236}">
+                <a16:creationId xmlns:a16="http://schemas.microsoft.com/office/drawing/2014/main" id="{3959A64B-5C9A-4A9B-BA45-ADECED2E51D9}"/>
+              </a:ext>
+            </a:extLst>
+          </p:cNvPr>
+          <p:cNvSpPr>
+            <a:spLocks noGrp="1"/>
+          </p:cNvSpPr>
+          <p:nvPr>
+            <p:ph type="ctrTitle"/>
+          </p:nvPr>
+        </p:nvSpPr>
+        <p:spPr>
+          <a:xfrm>
+            <a:off x="1261872" y="758952"/>
+            <a:ext cx="10625328" cy="4041648"/>
+          </a:xfrm>
+        </p:spPr>
+        <p:txBody>
+          <a:bodyPr/>
+          <a:lstStyle/>
+          <a:p>
+            <a:r>
+              <a:rPr lang="en-US" dirty="0"/>
+              <a:t>Presentations</a:t>
+            </a:r>
+          </a:p>
+        </p:txBody>
+      </p:sp>
+      <p:sp>
+        <p:nvSpPr>
+          <p:cNvPr id="5" name="Subtitle 4">
+            <a:extLst>
+              <a:ext uri="{FF2B5EF4-FFF2-40B4-BE49-F238E27FC236}">
+                <a16:creationId xmlns:a16="http://schemas.microsoft.com/office/drawing/2014/main" id="{D52D9252-3DD8-4D35-8070-32332FBE25E4}"/>
+              </a:ext>
+            </a:extLst>
+          </p:cNvPr>
+          <p:cNvSpPr>
+            <a:spLocks noGrp="1"/>
+          </p:cNvSpPr>
+          <p:nvPr>
+            <p:ph type="subTitle" idx="1"/>
+          </p:nvPr>
+        </p:nvSpPr>
+        <p:spPr/>
+        <p:txBody>
+          <a:bodyPr/>
+          <a:lstStyle/>
+          <a:p>
+            <a:endParaRPr lang="en-US" dirty="0"/>
+          </a:p>
+        </p:txBody>
+      </p:sp>
+    </p:spTree>
+    <p:extLst>
+      <p:ext uri="{BB962C8B-B14F-4D97-AF65-F5344CB8AC3E}">
+        <p14:creationId xmlns:p14="http://schemas.microsoft.com/office/powerpoint/2010/main" val="1905963770"/>
       </p:ext>
     </p:extLst>
   </p:cSld>
